--- a/pdfs/CS1/CS1_Week8_empty.pptx
+++ b/pdfs/CS1/CS1_Week8_empty.pptx
@@ -5,79 +5,77 @@
     <p:sldMasterId id="2147483662" r:id="rId1"/>
   </p:sldMasterIdLst>
   <p:notesMasterIdLst>
-    <p:notesMasterId r:id="rId30"/>
+    <p:notesMasterId r:id="rId28"/>
   </p:notesMasterIdLst>
   <p:handoutMasterIdLst>
-    <p:handoutMasterId r:id="rId31"/>
+    <p:handoutMasterId r:id="rId29"/>
   </p:handoutMasterIdLst>
   <p:sldIdLst>
     <p:sldId id="256" r:id="rId2"/>
     <p:sldId id="1052" r:id="rId3"/>
     <p:sldId id="1189" r:id="rId4"/>
-    <p:sldId id="1248" r:id="rId5"/>
-    <p:sldId id="1266" r:id="rId6"/>
-    <p:sldId id="1249" r:id="rId7"/>
-    <p:sldId id="1250" r:id="rId8"/>
-    <p:sldId id="1070" r:id="rId9"/>
-    <p:sldId id="257" r:id="rId10"/>
-    <p:sldId id="1097" r:id="rId11"/>
-    <p:sldId id="1251" r:id="rId12"/>
-    <p:sldId id="1252" r:id="rId13"/>
-    <p:sldId id="1253" r:id="rId14"/>
-    <p:sldId id="1254" r:id="rId15"/>
-    <p:sldId id="1255" r:id="rId16"/>
-    <p:sldId id="1258" r:id="rId17"/>
-    <p:sldId id="1259" r:id="rId18"/>
-    <p:sldId id="1261" r:id="rId19"/>
-    <p:sldId id="1260" r:id="rId20"/>
-    <p:sldId id="1263" r:id="rId21"/>
-    <p:sldId id="1257" r:id="rId22"/>
-    <p:sldId id="1262" r:id="rId23"/>
-    <p:sldId id="1256" r:id="rId24"/>
-    <p:sldId id="1264" r:id="rId25"/>
-    <p:sldId id="1265" r:id="rId26"/>
-    <p:sldId id="1171" r:id="rId27"/>
-    <p:sldId id="1118" r:id="rId28"/>
-    <p:sldId id="1067" r:id="rId29"/>
+    <p:sldId id="1266" r:id="rId5"/>
+    <p:sldId id="1249" r:id="rId6"/>
+    <p:sldId id="1070" r:id="rId7"/>
+    <p:sldId id="257" r:id="rId8"/>
+    <p:sldId id="1097" r:id="rId9"/>
+    <p:sldId id="1251" r:id="rId10"/>
+    <p:sldId id="1252" r:id="rId11"/>
+    <p:sldId id="1253" r:id="rId12"/>
+    <p:sldId id="1254" r:id="rId13"/>
+    <p:sldId id="1255" r:id="rId14"/>
+    <p:sldId id="1258" r:id="rId15"/>
+    <p:sldId id="1259" r:id="rId16"/>
+    <p:sldId id="1261" r:id="rId17"/>
+    <p:sldId id="1260" r:id="rId18"/>
+    <p:sldId id="1263" r:id="rId19"/>
+    <p:sldId id="1257" r:id="rId20"/>
+    <p:sldId id="1262" r:id="rId21"/>
+    <p:sldId id="1256" r:id="rId22"/>
+    <p:sldId id="1264" r:id="rId23"/>
+    <p:sldId id="1265" r:id="rId24"/>
+    <p:sldId id="1171" r:id="rId25"/>
+    <p:sldId id="1118" r:id="rId26"/>
+    <p:sldId id="1067" r:id="rId27"/>
   </p:sldIdLst>
   <p:sldSz cx="9144000" cy="5143500" type="screen16x9"/>
   <p:notesSz cx="6858000" cy="9144000"/>
   <p:embeddedFontLst>
     <p:embeddedFont>
       <p:font typeface="Cambria Math" panose="02040503050406030204" pitchFamily="18" charset="0"/>
-      <p:regular r:id="rId32"/>
+      <p:regular r:id="rId30"/>
     </p:embeddedFont>
     <p:embeddedFont>
       <p:font typeface="Quattrocento Sans" panose="020B0502050000020003" pitchFamily="34" charset="0"/>
-      <p:regular r:id="rId33"/>
-      <p:bold r:id="rId34"/>
-      <p:italic r:id="rId35"/>
-      <p:boldItalic r:id="rId36"/>
+      <p:regular r:id="rId31"/>
+      <p:bold r:id="rId32"/>
+      <p:italic r:id="rId33"/>
+      <p:boldItalic r:id="rId34"/>
     </p:embeddedFont>
     <p:embeddedFont>
       <p:font typeface="Segoe UI" panose="020B0502040204020203" pitchFamily="34" charset="0"/>
-      <p:regular r:id="rId37"/>
-      <p:bold r:id="rId38"/>
-      <p:italic r:id="rId39"/>
-      <p:boldItalic r:id="rId40"/>
+      <p:regular r:id="rId35"/>
+      <p:bold r:id="rId36"/>
+      <p:italic r:id="rId37"/>
+      <p:boldItalic r:id="rId38"/>
     </p:embeddedFont>
     <p:embeddedFont>
       <p:font typeface="Segoe UI Black" panose="020B0A02040204020203" pitchFamily="34" charset="0"/>
-      <p:bold r:id="rId41"/>
-      <p:italic r:id="rId42"/>
-      <p:boldItalic r:id="rId43"/>
+      <p:bold r:id="rId39"/>
+      <p:italic r:id="rId40"/>
+      <p:boldItalic r:id="rId41"/>
     </p:embeddedFont>
     <p:embeddedFont>
       <p:font typeface="Segoe UI Light" panose="020B0502040204020203" pitchFamily="34" charset="0"/>
-      <p:regular r:id="rId44"/>
-      <p:italic r:id="rId45"/>
+      <p:regular r:id="rId42"/>
+      <p:italic r:id="rId43"/>
     </p:embeddedFont>
     <p:embeddedFont>
       <p:font typeface="Segoe UI Semibold" panose="020B0702040204020203" pitchFamily="34" charset="0"/>
-      <p:regular r:id="rId46"/>
-      <p:bold r:id="rId47"/>
-      <p:italic r:id="rId48"/>
-      <p:boldItalic r:id="rId49"/>
+      <p:regular r:id="rId44"/>
+      <p:bold r:id="rId45"/>
+      <p:italic r:id="rId46"/>
+      <p:boldItalic r:id="rId47"/>
     </p:embeddedFont>
   </p:embeddedFontLst>
   <p:defaultTextStyle>
@@ -317,10 +315,8 @@
             <p14:sldId id="256"/>
             <p14:sldId id="1052"/>
             <p14:sldId id="1189"/>
-            <p14:sldId id="1248"/>
             <p14:sldId id="1266"/>
             <p14:sldId id="1249"/>
-            <p14:sldId id="1250"/>
             <p14:sldId id="1070"/>
             <p14:sldId id="257"/>
           </p14:sldIdLst>
@@ -385,15 +381,6 @@
     </p:ext>
   </p:extLst>
 </p:presentation>
-</file>
-
-<file path=ppt/revisionInfo.xml><?xml version="1.0" encoding="utf-8"?>
-<p1510:revInfo xmlns:a="http://schemas.openxmlformats.org/drawingml/2006/main" xmlns:r="http://schemas.openxmlformats.org/officeDocument/2006/relationships" xmlns:p1510="http://schemas.microsoft.com/office/powerpoint/2015/10/main">
-  <p1510:revLst>
-    <p1510:client id="{C412339D-2AB0-0D47-A362-0A4EB19EC5A2}" v="1230" dt="2025-11-06T21:52:14.240"/>
-    <p1510:client id="{E465CFB8-87B4-6940-BE0E-2EAC2EC32A7E}" v="16" dt="2025-11-06T20:11:59.459"/>
-  </p1510:revLst>
-</p1510:revInfo>
 </file>
 
 <file path=ppt/handoutMasters/handoutMaster1.xml><?xml version="1.0" encoding="utf-8"?>
@@ -490,7 +477,7 @@
           <a:p>
             <a:fld id="{2DD98D86-3ADD-8640-A1CB-F3A8CF3A4024}" type="datetimeFigureOut">
               <a:rPr lang="en-US" smtClean="0"/>
-              <a:t>11/6/25</a:t>
+              <a:t>11/7/25</a:t>
             </a:fld>
             <a:endParaRPr lang="en-US"/>
           </a:p>
@@ -1854,7 +1841,7 @@
                 <a:ea typeface="+mn-ea"/>
                 <a:cs typeface="+mn-cs"/>
               </a:rPr>
-              <a:t>06.11.25</a:t>
+              <a:t>07.11.25</a:t>
             </a:fld>
             <a:endParaRPr lang="en-CH" sz="1350" kern="1200">
               <a:solidFill>
@@ -2098,7 +2085,7 @@
                 <a:ea typeface="+mn-ea"/>
                 <a:cs typeface="+mn-cs"/>
               </a:rPr>
-              <a:t>06.11.25</a:t>
+              <a:t>07.11.25</a:t>
             </a:fld>
             <a:endParaRPr lang="en-CH" sz="1350" kern="1200">
               <a:solidFill>
@@ -2352,7 +2339,7 @@
                 <a:ea typeface="+mn-ea"/>
                 <a:cs typeface="+mn-cs"/>
               </a:rPr>
-              <a:t>06.11.25</a:t>
+              <a:t>07.11.25</a:t>
             </a:fld>
             <a:endParaRPr lang="en-CH" sz="1350" kern="1200">
               <a:solidFill>
@@ -2619,7 +2606,7 @@
                 <a:ea typeface="+mn-ea"/>
                 <a:cs typeface="+mn-cs"/>
               </a:rPr>
-              <a:t>06.11.25</a:t>
+              <a:t>07.11.25</a:t>
             </a:fld>
             <a:endParaRPr lang="en-CH" sz="1350" kern="1200">
               <a:solidFill>
@@ -2939,7 +2926,7 @@
                 <a:ea typeface="+mn-ea"/>
                 <a:cs typeface="+mn-cs"/>
               </a:rPr>
-              <a:t>06.11.25</a:t>
+              <a:t>07.11.25</a:t>
             </a:fld>
             <a:endParaRPr lang="en-CH" sz="1350" kern="1200">
               <a:solidFill>
@@ -3245,7 +3232,7 @@
                 <a:ea typeface="+mn-ea"/>
                 <a:cs typeface="+mn-cs"/>
               </a:rPr>
-              <a:t>06.11.25</a:t>
+              <a:t>07.11.25</a:t>
             </a:fld>
             <a:endParaRPr lang="en-CH" sz="1350" kern="1200">
               <a:solidFill>
@@ -3686,7 +3673,7 @@
                 <a:ea typeface="+mn-ea"/>
                 <a:cs typeface="+mn-cs"/>
               </a:rPr>
-              <a:t>06.11.25</a:t>
+              <a:t>07.11.25</a:t>
             </a:fld>
             <a:endParaRPr lang="en-CH" sz="1350" kern="1200">
               <a:solidFill>
@@ -3878,7 +3865,7 @@
                 <a:ea typeface="+mn-ea"/>
                 <a:cs typeface="+mn-cs"/>
               </a:rPr>
-              <a:t>06.11.25</a:t>
+              <a:t>07.11.25</a:t>
             </a:fld>
             <a:endParaRPr lang="en-CH" sz="1350" kern="1200">
               <a:solidFill>
@@ -4047,7 +4034,7 @@
                 <a:ea typeface="+mn-ea"/>
                 <a:cs typeface="+mn-cs"/>
               </a:rPr>
-              <a:t>06.11.25</a:t>
+              <a:t>07.11.25</a:t>
             </a:fld>
             <a:endParaRPr lang="en-CH" sz="1350" kern="1200">
               <a:solidFill>
@@ -4398,7 +4385,7 @@
                 <a:ea typeface="+mn-ea"/>
                 <a:cs typeface="+mn-cs"/>
               </a:rPr>
-              <a:t>06.11.25</a:t>
+              <a:t>07.11.25</a:t>
             </a:fld>
             <a:endParaRPr lang="en-CH" sz="1350" kern="1200">
               <a:solidFill>
@@ -4729,7 +4716,7 @@
                 <a:ea typeface="+mn-ea"/>
                 <a:cs typeface="+mn-cs"/>
               </a:rPr>
-              <a:t>06.11.25</a:t>
+              <a:t>07.11.25</a:t>
             </a:fld>
             <a:endParaRPr lang="en-CH" sz="1350" kern="1200">
               <a:solidFill>
@@ -5518,6 +5505,13 @@
               <a:rPr lang="en-US" noProof="0" dirty="0"/>
               <a:t>CS1 Week 8</a:t>
             </a:r>
+            <a:br>
+              <a:rPr lang="en-US" noProof="0" dirty="0"/>
+            </a:br>
+            <a:r>
+              <a:rPr lang="en-US" noProof="0" dirty="0"/>
+              <a:t>Empty</a:t>
+            </a:r>
           </a:p>
         </p:txBody>
       </p:sp>
@@ -5720,2246 +5714,6 @@
 </file>
 
 <file path=ppt/slides/slide10.xml><?xml version="1.0" encoding="utf-8"?>
-<p:sld xmlns:a="http://schemas.openxmlformats.org/drawingml/2006/main" xmlns:r="http://schemas.openxmlformats.org/officeDocument/2006/relationships" xmlns:p="http://schemas.openxmlformats.org/presentationml/2006/main">
-  <p:cSld>
-    <p:spTree>
-      <p:nvGrpSpPr>
-        <p:cNvPr id="1" name=""/>
-        <p:cNvGrpSpPr/>
-        <p:nvPr/>
-      </p:nvGrpSpPr>
-      <p:grpSpPr>
-        <a:xfrm>
-          <a:off x="0" y="0"/>
-          <a:ext cx="0" cy="0"/>
-          <a:chOff x="0" y="0"/>
-          <a:chExt cx="0" cy="0"/>
-        </a:xfrm>
-      </p:grpSpPr>
-      <p:sp>
-        <p:nvSpPr>
-          <p:cNvPr id="2" name="Titel 1">
-            <a:extLst>
-              <a:ext uri="{FF2B5EF4-FFF2-40B4-BE49-F238E27FC236}">
-                <a16:creationId xmlns:a16="http://schemas.microsoft.com/office/drawing/2014/main" id="{B7F4AE5C-3E2F-B68C-A037-64DF367CED68}"/>
-              </a:ext>
-            </a:extLst>
-          </p:cNvPr>
-          <p:cNvSpPr>
-            <a:spLocks noGrp="1"/>
-          </p:cNvSpPr>
-          <p:nvPr>
-            <p:ph type="ctrTitle"/>
-          </p:nvPr>
-        </p:nvSpPr>
-        <p:spPr>
-          <a:xfrm>
-            <a:off x="1143000" y="841772"/>
-            <a:ext cx="6959851" cy="1790700"/>
-          </a:xfrm>
-        </p:spPr>
-        <p:txBody>
-          <a:bodyPr/>
-          <a:lstStyle/>
-          <a:p>
-            <a:r>
-              <a:rPr lang="en-US" noProof="0" dirty="0"/>
-              <a:t>1. System Specifications</a:t>
-            </a:r>
-          </a:p>
-        </p:txBody>
-      </p:sp>
-      <p:sp>
-        <p:nvSpPr>
-          <p:cNvPr id="3" name="Untertitel 2">
-            <a:extLst>
-              <a:ext uri="{FF2B5EF4-FFF2-40B4-BE49-F238E27FC236}">
-                <a16:creationId xmlns:a16="http://schemas.microsoft.com/office/drawing/2014/main" id="{8FEC819A-74B0-7EC8-4337-41DC3E86B626}"/>
-              </a:ext>
-            </a:extLst>
-          </p:cNvPr>
-          <p:cNvSpPr>
-            <a:spLocks noGrp="1"/>
-          </p:cNvSpPr>
-          <p:nvPr>
-            <p:ph type="subTitle" idx="1"/>
-          </p:nvPr>
-        </p:nvSpPr>
-        <p:spPr/>
-        <p:txBody>
-          <a:bodyPr/>
-          <a:lstStyle/>
-          <a:p>
-            <a:endParaRPr lang="en-US" noProof="0" dirty="0"/>
-          </a:p>
-        </p:txBody>
-      </p:sp>
-      <p:sp>
-        <p:nvSpPr>
-          <p:cNvPr id="4" name="Fußzeilenplatzhalter 3">
-            <a:extLst>
-              <a:ext uri="{FF2B5EF4-FFF2-40B4-BE49-F238E27FC236}">
-                <a16:creationId xmlns:a16="http://schemas.microsoft.com/office/drawing/2014/main" id="{E833F9BA-5972-1172-A390-8A7AA1A2068D}"/>
-              </a:ext>
-            </a:extLst>
-          </p:cNvPr>
-          <p:cNvSpPr>
-            <a:spLocks noGrp="1"/>
-          </p:cNvSpPr>
-          <p:nvPr>
-            <p:ph type="ftr" sz="quarter" idx="11"/>
-          </p:nvPr>
-        </p:nvSpPr>
-        <p:spPr/>
-        <p:txBody>
-          <a:bodyPr/>
-          <a:lstStyle/>
-          <a:p>
-            <a:pPr defTabSz="342900">
-              <a:buClrTx/>
-            </a:pPr>
-            <a:r>
-              <a:rPr lang="en-US" kern="1200" noProof="0" dirty="0">
-                <a:solidFill>
-                  <a:srgbClr val="101623">
-                    <a:tint val="75000"/>
-                  </a:srgbClr>
-                </a:solidFill>
-                <a:latin typeface="Calibri" panose="020F0502020204030204"/>
-                <a:ea typeface="+mn-ea"/>
-                <a:cs typeface="+mn-cs"/>
-              </a:rPr>
-              <a:t>Kissan Varatharajan - </a:t>
-            </a:r>
-            <a:r>
-              <a:rPr lang="en-US" kern="1200" noProof="0" dirty="0" err="1">
-                <a:solidFill>
-                  <a:srgbClr val="101623">
-                    <a:tint val="75000"/>
-                  </a:srgbClr>
-                </a:solidFill>
-                <a:latin typeface="Calibri" panose="020F0502020204030204"/>
-                <a:ea typeface="+mn-ea"/>
-                <a:cs typeface="+mn-cs"/>
-              </a:rPr>
-              <a:t>kissanv.github.io</a:t>
-            </a:r>
-            <a:endParaRPr lang="en-US" kern="1200" noProof="0" dirty="0">
-              <a:solidFill>
-                <a:srgbClr val="101623">
-                  <a:tint val="75000"/>
-                </a:srgbClr>
-              </a:solidFill>
-              <a:latin typeface="Calibri" panose="020F0502020204030204"/>
-              <a:ea typeface="+mn-ea"/>
-              <a:cs typeface="+mn-cs"/>
-            </a:endParaRPr>
-          </a:p>
-        </p:txBody>
-      </p:sp>
-      <p:sp>
-        <p:nvSpPr>
-          <p:cNvPr id="5" name="Foliennummernplatzhalter 4">
-            <a:extLst>
-              <a:ext uri="{FF2B5EF4-FFF2-40B4-BE49-F238E27FC236}">
-                <a16:creationId xmlns:a16="http://schemas.microsoft.com/office/drawing/2014/main" id="{E32D4EBF-656E-D2D2-0159-2EA0943B95ED}"/>
-              </a:ext>
-            </a:extLst>
-          </p:cNvPr>
-          <p:cNvSpPr>
-            <a:spLocks noGrp="1"/>
-          </p:cNvSpPr>
-          <p:nvPr>
-            <p:ph type="sldNum" sz="quarter" idx="12"/>
-          </p:nvPr>
-        </p:nvSpPr>
-        <p:spPr/>
-        <p:txBody>
-          <a:bodyPr/>
-          <a:lstStyle/>
-          <a:p>
-            <a:pPr defTabSz="342900">
-              <a:buClrTx/>
-            </a:pPr>
-            <a:fld id="{36EAFFE7-40E2-CA47-82C0-73D0FC591208}" type="slidenum">
-              <a:rPr lang="en-US" kern="1200" noProof="0" smtClean="0">
-                <a:solidFill>
-                  <a:srgbClr val="101623">
-                    <a:tint val="75000"/>
-                  </a:srgbClr>
-                </a:solidFill>
-                <a:latin typeface="Calibri" panose="020F0502020204030204"/>
-                <a:ea typeface="+mn-ea"/>
-                <a:cs typeface="+mn-cs"/>
-              </a:rPr>
-              <a:pPr defTabSz="342900">
-                <a:buClrTx/>
-              </a:pPr>
-              <a:t>10</a:t>
-            </a:fld>
-            <a:endParaRPr lang="en-US" kern="1200" noProof="0" dirty="0">
-              <a:solidFill>
-                <a:srgbClr val="101623">
-                  <a:tint val="75000"/>
-                </a:srgbClr>
-              </a:solidFill>
-              <a:latin typeface="Calibri" panose="020F0502020204030204"/>
-              <a:ea typeface="+mn-ea"/>
-              <a:cs typeface="+mn-cs"/>
-            </a:endParaRPr>
-          </a:p>
-        </p:txBody>
-      </p:sp>
-    </p:spTree>
-    <p:extLst>
-      <p:ext uri="{BB962C8B-B14F-4D97-AF65-F5344CB8AC3E}">
-        <p14:creationId xmlns:p14="http://schemas.microsoft.com/office/powerpoint/2010/main" val="3330333329"/>
-      </p:ext>
-    </p:extLst>
-  </p:cSld>
-  <p:clrMapOvr>
-    <a:masterClrMapping/>
-  </p:clrMapOvr>
-</p:sld>
-</file>
-
-<file path=ppt/slides/slide11.xml><?xml version="1.0" encoding="utf-8"?>
-<p:sld xmlns:a="http://schemas.openxmlformats.org/drawingml/2006/main" xmlns:r="http://schemas.openxmlformats.org/officeDocument/2006/relationships" xmlns:p="http://schemas.openxmlformats.org/presentationml/2006/main">
-  <p:cSld>
-    <p:spTree>
-      <p:nvGrpSpPr>
-        <p:cNvPr id="1" name=""/>
-        <p:cNvGrpSpPr/>
-        <p:nvPr/>
-      </p:nvGrpSpPr>
-      <p:grpSpPr>
-        <a:xfrm>
-          <a:off x="0" y="0"/>
-          <a:ext cx="0" cy="0"/>
-          <a:chOff x="0" y="0"/>
-          <a:chExt cx="0" cy="0"/>
-        </a:xfrm>
-      </p:grpSpPr>
-      <p:sp>
-        <p:nvSpPr>
-          <p:cNvPr id="2" name="Titel 1">
-            <a:extLst>
-              <a:ext uri="{FF2B5EF4-FFF2-40B4-BE49-F238E27FC236}">
-                <a16:creationId xmlns:a16="http://schemas.microsoft.com/office/drawing/2014/main" id="{71098B99-FC75-E348-ED3D-406646E38E97}"/>
-              </a:ext>
-            </a:extLst>
-          </p:cNvPr>
-          <p:cNvSpPr>
-            <a:spLocks noGrp="1"/>
-          </p:cNvSpPr>
-          <p:nvPr>
-            <p:ph type="title"/>
-          </p:nvPr>
-        </p:nvSpPr>
-        <p:spPr/>
-        <p:txBody>
-          <a:bodyPr/>
-          <a:lstStyle/>
-          <a:p>
-            <a:r>
-              <a:rPr lang="en-US" noProof="0" dirty="0"/>
-              <a:t>Introduction</a:t>
-            </a:r>
-          </a:p>
-        </p:txBody>
-      </p:sp>
-      <p:sp>
-        <p:nvSpPr>
-          <p:cNvPr id="3" name="Inhaltsplatzhalter 2">
-            <a:extLst>
-              <a:ext uri="{FF2B5EF4-FFF2-40B4-BE49-F238E27FC236}">
-                <a16:creationId xmlns:a16="http://schemas.microsoft.com/office/drawing/2014/main" id="{3CA35D9A-128F-F5EB-83A0-50412C54953F}"/>
-              </a:ext>
-            </a:extLst>
-          </p:cNvPr>
-          <p:cNvSpPr>
-            <a:spLocks noGrp="1"/>
-          </p:cNvSpPr>
-          <p:nvPr>
-            <p:ph idx="1"/>
-          </p:nvPr>
-        </p:nvSpPr>
-        <p:spPr>
-          <a:xfrm>
-            <a:off x="345523" y="1344669"/>
-            <a:ext cx="3797599" cy="3263504"/>
-          </a:xfrm>
-        </p:spPr>
-        <p:txBody>
-          <a:bodyPr>
-            <a:normAutofit/>
-          </a:bodyPr>
-          <a:lstStyle/>
-          <a:p>
-            <a:pPr marL="0" indent="0">
-              <a:buNone/>
-            </a:pPr>
-            <a:r>
-              <a:rPr lang="en-US" sz="1600" noProof="0" dirty="0"/>
-              <a:t>Week 7: Closed-Loop Stability</a:t>
-            </a:r>
-          </a:p>
-          <a:p>
-            <a:pPr marL="0" indent="0">
-              <a:buNone/>
-            </a:pPr>
-            <a:endParaRPr lang="en-US" sz="1600" noProof="0" dirty="0"/>
-          </a:p>
-          <a:p>
-            <a:pPr marL="0" indent="0">
-              <a:buNone/>
-            </a:pPr>
-            <a:endParaRPr lang="en-US" sz="1600" noProof="0" dirty="0"/>
-          </a:p>
-          <a:p>
-            <a:pPr marL="0" indent="0">
-              <a:buNone/>
-            </a:pPr>
-            <a:endParaRPr lang="en-US" sz="1600" noProof="0" dirty="0"/>
-          </a:p>
-          <a:p>
-            <a:pPr marL="0" indent="0">
-              <a:buNone/>
-            </a:pPr>
-            <a:endParaRPr lang="en-US" sz="1600" noProof="0" dirty="0"/>
-          </a:p>
-          <a:p>
-            <a:pPr marL="0" indent="0">
-              <a:buNone/>
-            </a:pPr>
-            <a:endParaRPr lang="en-US" sz="1600" noProof="0" dirty="0"/>
-          </a:p>
-          <a:p>
-            <a:pPr marL="0" indent="0">
-              <a:buNone/>
-            </a:pPr>
-            <a:endParaRPr lang="en-US" sz="1600" noProof="0" dirty="0"/>
-          </a:p>
-          <a:p>
-            <a:pPr marL="0" indent="0">
-              <a:buNone/>
-            </a:pPr>
-            <a:endParaRPr lang="en-US" sz="1600" noProof="0" dirty="0"/>
-          </a:p>
-          <a:p>
-            <a:pPr marL="0" indent="0">
-              <a:buNone/>
-            </a:pPr>
-            <a:r>
-              <a:rPr lang="en-US" sz="1600" noProof="0" dirty="0"/>
-              <a:t>Job's finished? 🤔</a:t>
-            </a:r>
-          </a:p>
-        </p:txBody>
-      </p:sp>
-      <p:sp>
-        <p:nvSpPr>
-          <p:cNvPr id="4" name="Fußzeilenplatzhalter 3">
-            <a:extLst>
-              <a:ext uri="{FF2B5EF4-FFF2-40B4-BE49-F238E27FC236}">
-                <a16:creationId xmlns:a16="http://schemas.microsoft.com/office/drawing/2014/main" id="{ABE140ED-3C22-4FC7-8641-7DBBE219E8DD}"/>
-              </a:ext>
-            </a:extLst>
-          </p:cNvPr>
-          <p:cNvSpPr>
-            <a:spLocks noGrp="1"/>
-          </p:cNvSpPr>
-          <p:nvPr>
-            <p:ph type="ftr" sz="quarter" idx="11"/>
-          </p:nvPr>
-        </p:nvSpPr>
-        <p:spPr/>
-        <p:txBody>
-          <a:bodyPr/>
-          <a:lstStyle/>
-          <a:p>
-            <a:pPr defTabSz="342900">
-              <a:buClrTx/>
-            </a:pPr>
-            <a:r>
-              <a:rPr lang="en-US" kern="1200" noProof="0" dirty="0">
-                <a:solidFill>
-                  <a:srgbClr val="101623">
-                    <a:tint val="75000"/>
-                  </a:srgbClr>
-                </a:solidFill>
-                <a:latin typeface="Calibri" panose="020F0502020204030204"/>
-                <a:ea typeface="+mn-ea"/>
-                <a:cs typeface="+mn-cs"/>
-              </a:rPr>
-              <a:t>Kissan Varatharajan - </a:t>
-            </a:r>
-            <a:r>
-              <a:rPr lang="en-US" kern="1200" noProof="0" dirty="0" err="1">
-                <a:solidFill>
-                  <a:srgbClr val="101623">
-                    <a:tint val="75000"/>
-                  </a:srgbClr>
-                </a:solidFill>
-                <a:latin typeface="Calibri" panose="020F0502020204030204"/>
-                <a:ea typeface="+mn-ea"/>
-                <a:cs typeface="+mn-cs"/>
-              </a:rPr>
-              <a:t>kissanv.github.io</a:t>
-            </a:r>
-            <a:endParaRPr lang="en-US" kern="1200" noProof="0" dirty="0">
-              <a:solidFill>
-                <a:srgbClr val="101623">
-                  <a:tint val="75000"/>
-                </a:srgbClr>
-              </a:solidFill>
-              <a:latin typeface="Calibri" panose="020F0502020204030204"/>
-              <a:ea typeface="+mn-ea"/>
-              <a:cs typeface="+mn-cs"/>
-            </a:endParaRPr>
-          </a:p>
-        </p:txBody>
-      </p:sp>
-      <p:sp>
-        <p:nvSpPr>
-          <p:cNvPr id="5" name="Foliennummernplatzhalter 4">
-            <a:extLst>
-              <a:ext uri="{FF2B5EF4-FFF2-40B4-BE49-F238E27FC236}">
-                <a16:creationId xmlns:a16="http://schemas.microsoft.com/office/drawing/2014/main" id="{BFE55A7B-920D-0A10-4347-EB3885AAB3AE}"/>
-              </a:ext>
-            </a:extLst>
-          </p:cNvPr>
-          <p:cNvSpPr>
-            <a:spLocks noGrp="1"/>
-          </p:cNvSpPr>
-          <p:nvPr>
-            <p:ph type="sldNum" sz="quarter" idx="12"/>
-          </p:nvPr>
-        </p:nvSpPr>
-        <p:spPr/>
-        <p:txBody>
-          <a:bodyPr/>
-          <a:lstStyle/>
-          <a:p>
-            <a:pPr defTabSz="342900">
-              <a:buClrTx/>
-            </a:pPr>
-            <a:fld id="{36EAFFE7-40E2-CA47-82C0-73D0FC591208}" type="slidenum">
-              <a:rPr lang="en-US" kern="1200" noProof="0" smtClean="0">
-                <a:solidFill>
-                  <a:srgbClr val="101623">
-                    <a:tint val="75000"/>
-                  </a:srgbClr>
-                </a:solidFill>
-                <a:latin typeface="Calibri" panose="020F0502020204030204"/>
-                <a:ea typeface="+mn-ea"/>
-                <a:cs typeface="+mn-cs"/>
-              </a:rPr>
-              <a:pPr defTabSz="342900">
-                <a:buClrTx/>
-              </a:pPr>
-              <a:t>11</a:t>
-            </a:fld>
-            <a:endParaRPr lang="en-US" kern="1200" noProof="0" dirty="0">
-              <a:solidFill>
-                <a:srgbClr val="101623">
-                  <a:tint val="75000"/>
-                </a:srgbClr>
-              </a:solidFill>
-              <a:latin typeface="Calibri" panose="020F0502020204030204"/>
-              <a:ea typeface="+mn-ea"/>
-              <a:cs typeface="+mn-cs"/>
-            </a:endParaRPr>
-          </a:p>
-        </p:txBody>
-      </p:sp>
-      <p:grpSp>
-        <p:nvGrpSpPr>
-          <p:cNvPr id="6" name="Gruppieren 5">
-            <a:extLst>
-              <a:ext uri="{FF2B5EF4-FFF2-40B4-BE49-F238E27FC236}">
-                <a16:creationId xmlns:a16="http://schemas.microsoft.com/office/drawing/2014/main" id="{76EDD45F-0B8A-8FAC-B4B6-AA49E7C9385B}"/>
-              </a:ext>
-            </a:extLst>
-          </p:cNvPr>
-          <p:cNvGrpSpPr/>
-          <p:nvPr/>
-        </p:nvGrpSpPr>
-        <p:grpSpPr>
-          <a:xfrm>
-            <a:off x="4904513" y="172641"/>
-            <a:ext cx="4060935" cy="1029367"/>
-            <a:chOff x="4891261" y="102393"/>
-            <a:chExt cx="4060935" cy="1029367"/>
-          </a:xfrm>
-        </p:grpSpPr>
-        <p:sp>
-          <p:nvSpPr>
-            <p:cNvPr id="7" name="Oval 6">
-              <a:extLst>
-                <a:ext uri="{FF2B5EF4-FFF2-40B4-BE49-F238E27FC236}">
-                  <a16:creationId xmlns:a16="http://schemas.microsoft.com/office/drawing/2014/main" id="{B0DE1CFA-E755-FC56-80C3-5E99D50ADEE1}"/>
-                </a:ext>
-              </a:extLst>
-            </p:cNvPr>
-            <p:cNvSpPr/>
-            <p:nvPr/>
-          </p:nvSpPr>
-          <p:spPr>
-            <a:xfrm>
-              <a:off x="5362418" y="321780"/>
-              <a:ext cx="216000" cy="216000"/>
-            </a:xfrm>
-            <a:prstGeom prst="ellipse">
-              <a:avLst/>
-            </a:prstGeom>
-            <a:noFill/>
-            <a:ln w="19050"/>
-          </p:spPr>
-          <p:style>
-            <a:lnRef idx="2">
-              <a:schemeClr val="accent1">
-                <a:shade val="15000"/>
-              </a:schemeClr>
-            </a:lnRef>
-            <a:fillRef idx="1">
-              <a:schemeClr val="accent1"/>
-            </a:fillRef>
-            <a:effectRef idx="0">
-              <a:schemeClr val="accent1"/>
-            </a:effectRef>
-            <a:fontRef idx="minor">
-              <a:schemeClr val="lt1"/>
-            </a:fontRef>
-          </p:style>
-          <p:txBody>
-            <a:bodyPr rtlCol="0" anchor="ctr"/>
-            <a:lstStyle/>
-            <a:p>
-              <a:pPr algn="ctr"/>
-              <a:endParaRPr lang="en-US" sz="1200" noProof="0" dirty="0"/>
-            </a:p>
-          </p:txBody>
-        </p:sp>
-        <p:cxnSp>
-          <p:nvCxnSpPr>
-            <p:cNvPr id="8" name="Gerade Verbindung mit Pfeil 7">
-              <a:extLst>
-                <a:ext uri="{FF2B5EF4-FFF2-40B4-BE49-F238E27FC236}">
-                  <a16:creationId xmlns:a16="http://schemas.microsoft.com/office/drawing/2014/main" id="{A9A2EC13-9F0B-3AAA-2F74-23A6C8821994}"/>
-                </a:ext>
-              </a:extLst>
-            </p:cNvPr>
-            <p:cNvCxnSpPr>
-              <a:cxnSpLocks/>
-            </p:cNvCxnSpPr>
-            <p:nvPr/>
-          </p:nvCxnSpPr>
-          <p:spPr>
-            <a:xfrm>
-              <a:off x="8241382" y="424960"/>
-              <a:ext cx="710814" cy="0"/>
-            </a:xfrm>
-            <a:prstGeom prst="straightConnector1">
-              <a:avLst/>
-            </a:prstGeom>
-            <a:ln w="19050">
-              <a:solidFill>
-                <a:schemeClr val="tx1"/>
-              </a:solidFill>
-              <a:tailEnd type="triangle"/>
-            </a:ln>
-          </p:spPr>
-          <p:style>
-            <a:lnRef idx="1">
-              <a:schemeClr val="accent1"/>
-            </a:lnRef>
-            <a:fillRef idx="0">
-              <a:schemeClr val="accent1"/>
-            </a:fillRef>
-            <a:effectRef idx="0">
-              <a:schemeClr val="accent1"/>
-            </a:effectRef>
-            <a:fontRef idx="minor">
-              <a:schemeClr val="tx1"/>
-            </a:fontRef>
-          </p:style>
-        </p:cxnSp>
-        <p:grpSp>
-          <p:nvGrpSpPr>
-            <p:cNvPr id="9" name="Gruppieren 8">
-              <a:extLst>
-                <a:ext uri="{FF2B5EF4-FFF2-40B4-BE49-F238E27FC236}">
-                  <a16:creationId xmlns:a16="http://schemas.microsoft.com/office/drawing/2014/main" id="{E0739D6A-AB35-C055-17A2-3C2D81578F24}"/>
-                </a:ext>
-              </a:extLst>
-            </p:cNvPr>
-            <p:cNvGrpSpPr/>
-            <p:nvPr/>
-          </p:nvGrpSpPr>
-          <p:grpSpPr>
-            <a:xfrm>
-              <a:off x="7354668" y="164444"/>
-              <a:ext cx="886714" cy="553007"/>
-              <a:chOff x="2403054" y="3026666"/>
-              <a:chExt cx="545710" cy="553007"/>
-            </a:xfrm>
-          </p:grpSpPr>
-          <p:sp>
-            <p:nvSpPr>
-              <p:cNvPr id="21" name="Rechteck 20">
-                <a:extLst>
-                  <a:ext uri="{FF2B5EF4-FFF2-40B4-BE49-F238E27FC236}">
-                    <a16:creationId xmlns:a16="http://schemas.microsoft.com/office/drawing/2014/main" id="{0B2C4B06-A796-5C7F-61B9-574DB1E11DBB}"/>
-                  </a:ext>
-                </a:extLst>
-              </p:cNvPr>
-              <p:cNvSpPr/>
-              <p:nvPr/>
-            </p:nvSpPr>
-            <p:spPr>
-              <a:xfrm>
-                <a:off x="2403054" y="3026666"/>
-                <a:ext cx="545710" cy="553007"/>
-              </a:xfrm>
-              <a:prstGeom prst="rect">
-                <a:avLst/>
-              </a:prstGeom>
-              <a:noFill/>
-              <a:ln w="25400"/>
-            </p:spPr>
-            <p:style>
-              <a:lnRef idx="2">
-                <a:schemeClr val="accent1">
-                  <a:shade val="15000"/>
-                </a:schemeClr>
-              </a:lnRef>
-              <a:fillRef idx="1">
-                <a:schemeClr val="accent1"/>
-              </a:fillRef>
-              <a:effectRef idx="0">
-                <a:schemeClr val="accent1"/>
-              </a:effectRef>
-              <a:fontRef idx="minor">
-                <a:schemeClr val="lt1"/>
-              </a:fontRef>
-            </p:style>
-            <p:txBody>
-              <a:bodyPr rtlCol="0" anchor="ctr"/>
-              <a:lstStyle/>
-              <a:p>
-                <a:pPr algn="ctr"/>
-                <a:endParaRPr lang="en-US" sz="1200" noProof="0" dirty="0"/>
-              </a:p>
-            </p:txBody>
-          </p:sp>
-          <mc:AlternateContent xmlns:mc="http://schemas.openxmlformats.org/markup-compatibility/2006" xmlns:a14="http://schemas.microsoft.com/office/drawing/2010/main">
-            <mc:Choice Requires="a14">
-              <p:sp>
-                <p:nvSpPr>
-                  <p:cNvPr id="22" name="Textfeld 21">
-                    <a:extLst>
-                      <a:ext uri="{FF2B5EF4-FFF2-40B4-BE49-F238E27FC236}">
-                        <a16:creationId xmlns:a16="http://schemas.microsoft.com/office/drawing/2014/main" id="{4083BE7F-0B5A-D65A-66F2-E2BDC9502B75}"/>
-                      </a:ext>
-                    </a:extLst>
-                  </p:cNvPr>
-                  <p:cNvSpPr txBox="1"/>
-                  <p:nvPr/>
-                </p:nvSpPr>
-                <p:spPr>
-                  <a:xfrm>
-                    <a:off x="2459135" y="3107336"/>
-                    <a:ext cx="421972" cy="369332"/>
-                  </a:xfrm>
-                  <a:prstGeom prst="rect">
-                    <a:avLst/>
-                  </a:prstGeom>
-                  <a:noFill/>
-                </p:spPr>
-                <p:txBody>
-                  <a:bodyPr wrap="square" rtlCol="0">
-                    <a:spAutoFit/>
-                  </a:bodyPr>
-                  <a:lstStyle/>
-                  <a:p>
-                    <a:pPr/>
-                    <a14:m>
-                      <m:oMathPara xmlns:m="http://schemas.openxmlformats.org/officeDocument/2006/math">
-                        <m:oMathParaPr>
-                          <m:jc m:val="centerGroup"/>
-                        </m:oMathParaPr>
-                        <m:oMath xmlns:m="http://schemas.openxmlformats.org/officeDocument/2006/math">
-                          <m:r>
-                            <a:rPr lang="en-US" sz="1800" i="1" noProof="0" smtClean="0">
-                              <a:latin typeface="Cambria Math" panose="02040503050406030204" pitchFamily="18" charset="0"/>
-                              <a:cs typeface="Segoe UI" panose="020B0502040204020203" pitchFamily="34" charset="0"/>
-                            </a:rPr>
-                            <m:t>𝑃</m:t>
-                          </m:r>
-                          <m:r>
-                            <a:rPr lang="en-US" sz="1800" b="0" i="1" noProof="0" smtClean="0">
-                              <a:latin typeface="Cambria Math" panose="02040503050406030204" pitchFamily="18" charset="0"/>
-                              <a:cs typeface="Segoe UI" panose="020B0502040204020203" pitchFamily="34" charset="0"/>
-                            </a:rPr>
-                            <m:t>(</m:t>
-                          </m:r>
-                          <m:r>
-                            <m:rPr>
-                              <m:sty m:val="p"/>
-                            </m:rPr>
-                            <a:rPr lang="en-US" sz="1800" b="0" i="1" noProof="0" smtClean="0">
-                              <a:latin typeface="Cambria Math" panose="02040503050406030204" pitchFamily="18" charset="0"/>
-                              <a:cs typeface="Segoe UI" panose="020B0502040204020203" pitchFamily="34" charset="0"/>
-                            </a:rPr>
-                            <m:t>s</m:t>
-                          </m:r>
-                          <m:r>
-                            <a:rPr lang="en-US" sz="1800" b="0" i="1" noProof="0" smtClean="0">
-                              <a:latin typeface="Cambria Math" panose="02040503050406030204" pitchFamily="18" charset="0"/>
-                              <a:cs typeface="Segoe UI" panose="020B0502040204020203" pitchFamily="34" charset="0"/>
-                            </a:rPr>
-                            <m:t>)</m:t>
-                          </m:r>
-                        </m:oMath>
-                      </m:oMathPara>
-                    </a14:m>
-                    <a:endParaRPr lang="en-US" noProof="0" dirty="0"/>
-                  </a:p>
-                </p:txBody>
-              </p:sp>
-            </mc:Choice>
-            <mc:Fallback xmlns="">
-              <p:sp>
-                <p:nvSpPr>
-                  <p:cNvPr id="22" name="Textfeld 21">
-                    <a:extLst>
-                      <a:ext uri="{FF2B5EF4-FFF2-40B4-BE49-F238E27FC236}">
-                        <a16:creationId xmlns:a16="http://schemas.microsoft.com/office/drawing/2014/main" id="{4083BE7F-0B5A-D65A-66F2-E2BDC9502B75}"/>
-                      </a:ext>
-                    </a:extLst>
-                  </p:cNvPr>
-                  <p:cNvSpPr txBox="1">
-                    <a:spLocks noRot="1" noChangeAspect="1" noMove="1" noResize="1" noEditPoints="1" noAdjustHandles="1" noChangeArrowheads="1" noChangeShapeType="1" noTextEdit="1"/>
-                  </p:cNvSpPr>
-                  <p:nvPr/>
-                </p:nvSpPr>
-                <p:spPr>
-                  <a:xfrm>
-                    <a:off x="2459135" y="3107336"/>
-                    <a:ext cx="421972" cy="369332"/>
-                  </a:xfrm>
-                  <a:prstGeom prst="rect">
-                    <a:avLst/>
-                  </a:prstGeom>
-                  <a:blipFill>
-                    <a:blip r:embed="rId2"/>
-                    <a:stretch>
-                      <a:fillRect b="-20000"/>
-                    </a:stretch>
-                  </a:blipFill>
-                </p:spPr>
-                <p:txBody>
-                  <a:bodyPr/>
-                  <a:lstStyle/>
-                  <a:p>
-                    <a:r>
-                      <a:rPr lang="de-DE">
-                        <a:noFill/>
-                      </a:rPr>
-                      <a:t> </a:t>
-                    </a:r>
-                  </a:p>
-                </p:txBody>
-              </p:sp>
-            </mc:Fallback>
-          </mc:AlternateContent>
-        </p:grpSp>
-        <p:grpSp>
-          <p:nvGrpSpPr>
-            <p:cNvPr id="10" name="Gruppieren 9">
-              <a:extLst>
-                <a:ext uri="{FF2B5EF4-FFF2-40B4-BE49-F238E27FC236}">
-                  <a16:creationId xmlns:a16="http://schemas.microsoft.com/office/drawing/2014/main" id="{B21819EB-9961-E464-8911-34025F377762}"/>
-                </a:ext>
-              </a:extLst>
-            </p:cNvPr>
-            <p:cNvGrpSpPr/>
-            <p:nvPr/>
-          </p:nvGrpSpPr>
-          <p:grpSpPr>
-            <a:xfrm>
-              <a:off x="6014915" y="164444"/>
-              <a:ext cx="943472" cy="553007"/>
-              <a:chOff x="2676164" y="3940223"/>
-              <a:chExt cx="587951" cy="553007"/>
-            </a:xfrm>
-          </p:grpSpPr>
-          <p:sp>
-            <p:nvSpPr>
-              <p:cNvPr id="19" name="Rechteck 18">
-                <a:extLst>
-                  <a:ext uri="{FF2B5EF4-FFF2-40B4-BE49-F238E27FC236}">
-                    <a16:creationId xmlns:a16="http://schemas.microsoft.com/office/drawing/2014/main" id="{E2484295-2651-91CD-86F6-EA27C46364CA}"/>
-                  </a:ext>
-                </a:extLst>
-              </p:cNvPr>
-              <p:cNvSpPr/>
-              <p:nvPr/>
-            </p:nvSpPr>
-            <p:spPr>
-              <a:xfrm>
-                <a:off x="2676164" y="3940223"/>
-                <a:ext cx="587951" cy="553007"/>
-              </a:xfrm>
-              <a:prstGeom prst="rect">
-                <a:avLst/>
-              </a:prstGeom>
-              <a:noFill/>
-              <a:ln w="25400"/>
-            </p:spPr>
-            <p:style>
-              <a:lnRef idx="2">
-                <a:schemeClr val="accent1">
-                  <a:shade val="15000"/>
-                </a:schemeClr>
-              </a:lnRef>
-              <a:fillRef idx="1">
-                <a:schemeClr val="accent1"/>
-              </a:fillRef>
-              <a:effectRef idx="0">
-                <a:schemeClr val="accent1"/>
-              </a:effectRef>
-              <a:fontRef idx="minor">
-                <a:schemeClr val="lt1"/>
-              </a:fontRef>
-            </p:style>
-            <p:txBody>
-              <a:bodyPr rtlCol="0" anchor="ctr"/>
-              <a:lstStyle/>
-              <a:p>
-                <a:pPr algn="ctr"/>
-                <a:endParaRPr lang="en-US" sz="1200" noProof="0" dirty="0"/>
-              </a:p>
-            </p:txBody>
-          </p:sp>
-          <mc:AlternateContent xmlns:mc="http://schemas.openxmlformats.org/markup-compatibility/2006" xmlns:a14="http://schemas.microsoft.com/office/drawing/2010/main">
-            <mc:Choice Requires="a14">
-              <p:sp>
-                <p:nvSpPr>
-                  <p:cNvPr id="20" name="Textfeld 19">
-                    <a:extLst>
-                      <a:ext uri="{FF2B5EF4-FFF2-40B4-BE49-F238E27FC236}">
-                        <a16:creationId xmlns:a16="http://schemas.microsoft.com/office/drawing/2014/main" id="{A40CB2DF-2CD9-4917-9B66-3CF8433A5C8D}"/>
-                      </a:ext>
-                    </a:extLst>
-                  </p:cNvPr>
-                  <p:cNvSpPr txBox="1"/>
-                  <p:nvPr/>
-                </p:nvSpPr>
-                <p:spPr>
-                  <a:xfrm>
-                    <a:off x="2869111" y="4006502"/>
-                    <a:ext cx="230160" cy="369332"/>
-                  </a:xfrm>
-                  <a:prstGeom prst="rect">
-                    <a:avLst/>
-                  </a:prstGeom>
-                  <a:noFill/>
-                </p:spPr>
-                <p:txBody>
-                  <a:bodyPr wrap="none" rtlCol="0">
-                    <a:spAutoFit/>
-                  </a:bodyPr>
-                  <a:lstStyle/>
-                  <a:p>
-                    <a:pPr/>
-                    <a14:m>
-                      <m:oMathPara xmlns:m="http://schemas.openxmlformats.org/officeDocument/2006/math">
-                        <m:oMathParaPr>
-                          <m:jc m:val="centerGroup"/>
-                        </m:oMathParaPr>
-                        <m:oMath xmlns:m="http://schemas.openxmlformats.org/officeDocument/2006/math">
-                          <m:r>
-                            <a:rPr lang="en-US" sz="1800" b="0" i="1" noProof="0" smtClean="0">
-                              <a:latin typeface="Cambria Math" panose="02040503050406030204" pitchFamily="18" charset="0"/>
-                              <a:cs typeface="Segoe UI" panose="020B0502040204020203" pitchFamily="34" charset="0"/>
-                            </a:rPr>
-                            <m:t>𝑘</m:t>
-                          </m:r>
-                        </m:oMath>
-                      </m:oMathPara>
-                    </a14:m>
-                    <a:endParaRPr lang="en-US" noProof="0" dirty="0"/>
-                  </a:p>
-                </p:txBody>
-              </p:sp>
-            </mc:Choice>
-            <mc:Fallback xmlns="">
-              <p:sp>
-                <p:nvSpPr>
-                  <p:cNvPr id="20" name="Textfeld 19">
-                    <a:extLst>
-                      <a:ext uri="{FF2B5EF4-FFF2-40B4-BE49-F238E27FC236}">
-                        <a16:creationId xmlns:a16="http://schemas.microsoft.com/office/drawing/2014/main" id="{A40CB2DF-2CD9-4917-9B66-3CF8433A5C8D}"/>
-                      </a:ext>
-                    </a:extLst>
-                  </p:cNvPr>
-                  <p:cNvSpPr txBox="1">
-                    <a:spLocks noRot="1" noChangeAspect="1" noMove="1" noResize="1" noEditPoints="1" noAdjustHandles="1" noChangeArrowheads="1" noChangeShapeType="1" noTextEdit="1"/>
-                  </p:cNvSpPr>
-                  <p:nvPr/>
-                </p:nvSpPr>
-                <p:spPr>
-                  <a:xfrm>
-                    <a:off x="2869111" y="4006502"/>
-                    <a:ext cx="230160" cy="369332"/>
-                  </a:xfrm>
-                  <a:prstGeom prst="rect">
-                    <a:avLst/>
-                  </a:prstGeom>
-                  <a:blipFill>
-                    <a:blip r:embed="rId3"/>
-                    <a:stretch>
-                      <a:fillRect/>
-                    </a:stretch>
-                  </a:blipFill>
-                </p:spPr>
-                <p:txBody>
-                  <a:bodyPr/>
-                  <a:lstStyle/>
-                  <a:p>
-                    <a:r>
-                      <a:rPr lang="de-DE">
-                        <a:noFill/>
-                      </a:rPr>
-                      <a:t> </a:t>
-                    </a:r>
-                  </a:p>
-                </p:txBody>
-              </p:sp>
-            </mc:Fallback>
-          </mc:AlternateContent>
-        </p:grpSp>
-        <p:cxnSp>
-          <p:nvCxnSpPr>
-            <p:cNvPr id="11" name="Gerade Verbindung mit Pfeil 10">
-              <a:extLst>
-                <a:ext uri="{FF2B5EF4-FFF2-40B4-BE49-F238E27FC236}">
-                  <a16:creationId xmlns:a16="http://schemas.microsoft.com/office/drawing/2014/main" id="{952931EA-DEF6-98DF-76A2-BF6F96B8DF5B}"/>
-                </a:ext>
-              </a:extLst>
-            </p:cNvPr>
-            <p:cNvCxnSpPr>
-              <a:cxnSpLocks/>
-              <a:endCxn id="19" idx="1"/>
-            </p:cNvCxnSpPr>
-            <p:nvPr/>
-          </p:nvCxnSpPr>
-          <p:spPr>
-            <a:xfrm>
-              <a:off x="5573194" y="440947"/>
-              <a:ext cx="441721" cy="1"/>
-            </a:xfrm>
-            <a:prstGeom prst="straightConnector1">
-              <a:avLst/>
-            </a:prstGeom>
-            <a:ln w="19050">
-              <a:solidFill>
-                <a:schemeClr val="tx1"/>
-              </a:solidFill>
-              <a:tailEnd type="triangle"/>
-            </a:ln>
-          </p:spPr>
-          <p:style>
-            <a:lnRef idx="1">
-              <a:schemeClr val="accent1"/>
-            </a:lnRef>
-            <a:fillRef idx="0">
-              <a:schemeClr val="accent1"/>
-            </a:fillRef>
-            <a:effectRef idx="0">
-              <a:schemeClr val="accent1"/>
-            </a:effectRef>
-            <a:fontRef idx="minor">
-              <a:schemeClr val="tx1"/>
-            </a:fontRef>
-          </p:style>
-        </p:cxnSp>
-        <p:cxnSp>
-          <p:nvCxnSpPr>
-            <p:cNvPr id="12" name="Gerade Verbindung mit Pfeil 11">
-              <a:extLst>
-                <a:ext uri="{FF2B5EF4-FFF2-40B4-BE49-F238E27FC236}">
-                  <a16:creationId xmlns:a16="http://schemas.microsoft.com/office/drawing/2014/main" id="{CDA9EAC5-A7AB-0EF5-6C52-7255C66F01A1}"/>
-                </a:ext>
-              </a:extLst>
-            </p:cNvPr>
-            <p:cNvCxnSpPr>
-              <a:cxnSpLocks/>
-            </p:cNvCxnSpPr>
-            <p:nvPr/>
-          </p:nvCxnSpPr>
-          <p:spPr>
-            <a:xfrm>
-              <a:off x="4891261" y="427669"/>
-              <a:ext cx="471157" cy="2112"/>
-            </a:xfrm>
-            <a:prstGeom prst="straightConnector1">
-              <a:avLst/>
-            </a:prstGeom>
-            <a:ln w="19050">
-              <a:solidFill>
-                <a:schemeClr val="tx1"/>
-              </a:solidFill>
-              <a:tailEnd type="triangle"/>
-            </a:ln>
-          </p:spPr>
-          <p:style>
-            <a:lnRef idx="1">
-              <a:schemeClr val="accent1"/>
-            </a:lnRef>
-            <a:fillRef idx="0">
-              <a:schemeClr val="accent1"/>
-            </a:fillRef>
-            <a:effectRef idx="0">
-              <a:schemeClr val="accent1"/>
-            </a:effectRef>
-            <a:fontRef idx="minor">
-              <a:schemeClr val="tx1"/>
-            </a:fontRef>
-          </p:style>
-        </p:cxnSp>
-        <mc:AlternateContent xmlns:mc="http://schemas.openxmlformats.org/markup-compatibility/2006" xmlns:a14="http://schemas.microsoft.com/office/drawing/2010/main">
-          <mc:Choice Requires="a14">
-            <p:sp>
-              <p:nvSpPr>
-                <p:cNvPr id="13" name="Textfeld 12">
-                  <a:extLst>
-                    <a:ext uri="{FF2B5EF4-FFF2-40B4-BE49-F238E27FC236}">
-                      <a16:creationId xmlns:a16="http://schemas.microsoft.com/office/drawing/2014/main" id="{EB8CA0EC-4BFC-7F02-F84E-D31A7CB63D2E}"/>
-                    </a:ext>
-                  </a:extLst>
-                </p:cNvPr>
-                <p:cNvSpPr txBox="1"/>
-                <p:nvPr/>
-              </p:nvSpPr>
-              <p:spPr>
-                <a:xfrm>
-                  <a:off x="5242885" y="126943"/>
-                  <a:ext cx="1041569" cy="338554"/>
-                </a:xfrm>
-                <a:prstGeom prst="rect">
-                  <a:avLst/>
-                </a:prstGeom>
-                <a:noFill/>
-              </p:spPr>
-              <p:txBody>
-                <a:bodyPr wrap="square" rtlCol="0">
-                  <a:spAutoFit/>
-                </a:bodyPr>
-                <a:lstStyle/>
-                <a:p>
-                  <a:pPr/>
-                  <a14:m>
-                    <m:oMathPara xmlns:m="http://schemas.openxmlformats.org/officeDocument/2006/math">
-                      <m:oMathParaPr>
-                        <m:jc m:val="centerGroup"/>
-                      </m:oMathParaPr>
-                      <m:oMath xmlns:m="http://schemas.openxmlformats.org/officeDocument/2006/math">
-                        <m:r>
-                          <a:rPr lang="en-US" sz="1600" i="1" noProof="0" smtClean="0">
-                            <a:latin typeface="Cambria Math" panose="02040503050406030204" pitchFamily="18" charset="0"/>
-                          </a:rPr>
-                          <m:t> </m:t>
-                        </m:r>
-                        <m:r>
-                          <a:rPr lang="en-US" sz="1600" b="0" i="1" noProof="0" smtClean="0">
-                            <a:latin typeface="Cambria Math" panose="02040503050406030204" pitchFamily="18" charset="0"/>
-                          </a:rPr>
-                          <m:t>𝑒</m:t>
-                        </m:r>
-                      </m:oMath>
-                    </m:oMathPara>
-                  </a14:m>
-                  <a:endParaRPr lang="en-US" sz="1600" noProof="0" dirty="0"/>
-                </a:p>
-              </p:txBody>
-            </p:sp>
-          </mc:Choice>
-          <mc:Fallback xmlns="">
-            <p:sp>
-              <p:nvSpPr>
-                <p:cNvPr id="13" name="Textfeld 12">
-                  <a:extLst>
-                    <a:ext uri="{FF2B5EF4-FFF2-40B4-BE49-F238E27FC236}">
-                      <a16:creationId xmlns:a16="http://schemas.microsoft.com/office/drawing/2014/main" id="{EB8CA0EC-4BFC-7F02-F84E-D31A7CB63D2E}"/>
-                    </a:ext>
-                  </a:extLst>
-                </p:cNvPr>
-                <p:cNvSpPr txBox="1">
-                  <a:spLocks noRot="1" noChangeAspect="1" noMove="1" noResize="1" noEditPoints="1" noAdjustHandles="1" noChangeArrowheads="1" noChangeShapeType="1" noTextEdit="1"/>
-                </p:cNvSpPr>
-                <p:nvPr/>
-              </p:nvSpPr>
-              <p:spPr>
-                <a:xfrm>
-                  <a:off x="5242885" y="126943"/>
-                  <a:ext cx="1041569" cy="338554"/>
-                </a:xfrm>
-                <a:prstGeom prst="rect">
-                  <a:avLst/>
-                </a:prstGeom>
-                <a:blipFill>
-                  <a:blip r:embed="rId4"/>
-                  <a:stretch>
-                    <a:fillRect b="-17857"/>
-                  </a:stretch>
-                </a:blipFill>
-              </p:spPr>
-              <p:txBody>
-                <a:bodyPr/>
-                <a:lstStyle/>
-                <a:p>
-                  <a:r>
-                    <a:rPr lang="de-DE">
-                      <a:noFill/>
-                    </a:rPr>
-                    <a:t> </a:t>
-                  </a:r>
-                </a:p>
-              </p:txBody>
-            </p:sp>
-          </mc:Fallback>
-        </mc:AlternateContent>
-        <mc:AlternateContent xmlns:mc="http://schemas.openxmlformats.org/markup-compatibility/2006" xmlns:a14="http://schemas.microsoft.com/office/drawing/2010/main">
-          <mc:Choice Requires="a14">
-            <p:sp>
-              <p:nvSpPr>
-                <p:cNvPr id="14" name="Textfeld 13">
-                  <a:extLst>
-                    <a:ext uri="{FF2B5EF4-FFF2-40B4-BE49-F238E27FC236}">
-                      <a16:creationId xmlns:a16="http://schemas.microsoft.com/office/drawing/2014/main" id="{9F3924F2-1A83-51F6-A501-4B4551DF26FF}"/>
-                    </a:ext>
-                  </a:extLst>
-                </p:cNvPr>
-                <p:cNvSpPr txBox="1"/>
-                <p:nvPr/>
-              </p:nvSpPr>
-              <p:spPr>
-                <a:xfrm>
-                  <a:off x="6640490" y="102393"/>
-                  <a:ext cx="1041569" cy="338554"/>
-                </a:xfrm>
-                <a:prstGeom prst="rect">
-                  <a:avLst/>
-                </a:prstGeom>
-                <a:noFill/>
-              </p:spPr>
-              <p:txBody>
-                <a:bodyPr wrap="square" rtlCol="0">
-                  <a:spAutoFit/>
-                </a:bodyPr>
-                <a:lstStyle/>
-                <a:p>
-                  <a:pPr/>
-                  <a14:m>
-                    <m:oMathPara xmlns:m="http://schemas.openxmlformats.org/officeDocument/2006/math">
-                      <m:oMathParaPr>
-                        <m:jc m:val="centerGroup"/>
-                      </m:oMathParaPr>
-                      <m:oMath xmlns:m="http://schemas.openxmlformats.org/officeDocument/2006/math">
-                        <m:r>
-                          <a:rPr lang="en-US" sz="1600" i="1" noProof="0" smtClean="0">
-                            <a:latin typeface="Cambria Math" panose="02040503050406030204" pitchFamily="18" charset="0"/>
-                          </a:rPr>
-                          <m:t> </m:t>
-                        </m:r>
-                        <m:r>
-                          <a:rPr lang="en-US" sz="1600" b="0" i="1" noProof="0" smtClean="0">
-                            <a:latin typeface="Cambria Math" panose="02040503050406030204" pitchFamily="18" charset="0"/>
-                          </a:rPr>
-                          <m:t>𝑢</m:t>
-                        </m:r>
-                      </m:oMath>
-                    </m:oMathPara>
-                  </a14:m>
-                  <a:endParaRPr lang="en-US" sz="1600" noProof="0" dirty="0"/>
-                </a:p>
-              </p:txBody>
-            </p:sp>
-          </mc:Choice>
-          <mc:Fallback xmlns="">
-            <p:sp>
-              <p:nvSpPr>
-                <p:cNvPr id="14" name="Textfeld 13">
-                  <a:extLst>
-                    <a:ext uri="{FF2B5EF4-FFF2-40B4-BE49-F238E27FC236}">
-                      <a16:creationId xmlns:a16="http://schemas.microsoft.com/office/drawing/2014/main" id="{9F3924F2-1A83-51F6-A501-4B4551DF26FF}"/>
-                    </a:ext>
-                  </a:extLst>
-                </p:cNvPr>
-                <p:cNvSpPr txBox="1">
-                  <a:spLocks noRot="1" noChangeAspect="1" noMove="1" noResize="1" noEditPoints="1" noAdjustHandles="1" noChangeArrowheads="1" noChangeShapeType="1" noTextEdit="1"/>
-                </p:cNvSpPr>
-                <p:nvPr/>
-              </p:nvSpPr>
-              <p:spPr>
-                <a:xfrm>
-                  <a:off x="6640490" y="102393"/>
-                  <a:ext cx="1041569" cy="338554"/>
-                </a:xfrm>
-                <a:prstGeom prst="rect">
-                  <a:avLst/>
-                </a:prstGeom>
-                <a:blipFill>
-                  <a:blip r:embed="rId5"/>
-                  <a:stretch>
-                    <a:fillRect b="-17857"/>
-                  </a:stretch>
-                </a:blipFill>
-              </p:spPr>
-              <p:txBody>
-                <a:bodyPr/>
-                <a:lstStyle/>
-                <a:p>
-                  <a:r>
-                    <a:rPr lang="de-DE">
-                      <a:noFill/>
-                    </a:rPr>
-                    <a:t> </a:t>
-                  </a:r>
-                </a:p>
-              </p:txBody>
-            </p:sp>
-          </mc:Fallback>
-        </mc:AlternateContent>
-        <p:cxnSp>
-          <p:nvCxnSpPr>
-            <p:cNvPr id="15" name="Gerade Verbindung mit Pfeil 14">
-              <a:extLst>
-                <a:ext uri="{FF2B5EF4-FFF2-40B4-BE49-F238E27FC236}">
-                  <a16:creationId xmlns:a16="http://schemas.microsoft.com/office/drawing/2014/main" id="{D6B21390-6F8F-E6E1-A06F-4BECB43FE13B}"/>
-                </a:ext>
-              </a:extLst>
-            </p:cNvPr>
-            <p:cNvCxnSpPr>
-              <a:cxnSpLocks/>
-            </p:cNvCxnSpPr>
-            <p:nvPr/>
-          </p:nvCxnSpPr>
-          <p:spPr>
-            <a:xfrm>
-              <a:off x="6968970" y="415816"/>
-              <a:ext cx="359541" cy="0"/>
-            </a:xfrm>
-            <a:prstGeom prst="straightConnector1">
-              <a:avLst/>
-            </a:prstGeom>
-            <a:ln w="19050">
-              <a:solidFill>
-                <a:schemeClr val="tx1"/>
-              </a:solidFill>
-              <a:tailEnd type="triangle"/>
-            </a:ln>
-          </p:spPr>
-          <p:style>
-            <a:lnRef idx="1">
-              <a:schemeClr val="accent1"/>
-            </a:lnRef>
-            <a:fillRef idx="0">
-              <a:schemeClr val="accent1"/>
-            </a:fillRef>
-            <a:effectRef idx="0">
-              <a:schemeClr val="accent1"/>
-            </a:effectRef>
-            <a:fontRef idx="minor">
-              <a:schemeClr val="tx1"/>
-            </a:fontRef>
-          </p:style>
-        </p:cxnSp>
-        <p:cxnSp>
-          <p:nvCxnSpPr>
-            <p:cNvPr id="16" name="Gerade Verbindung 15">
-              <a:extLst>
-                <a:ext uri="{FF2B5EF4-FFF2-40B4-BE49-F238E27FC236}">
-                  <a16:creationId xmlns:a16="http://schemas.microsoft.com/office/drawing/2014/main" id="{E05956E1-322A-D918-1539-5F82CD172E73}"/>
-                </a:ext>
-              </a:extLst>
-            </p:cNvPr>
-            <p:cNvCxnSpPr>
-              <a:cxnSpLocks/>
-            </p:cNvCxnSpPr>
-            <p:nvPr/>
-          </p:nvCxnSpPr>
-          <p:spPr>
-            <a:xfrm>
-              <a:off x="8515349" y="424960"/>
-              <a:ext cx="0" cy="706800"/>
-            </a:xfrm>
-            <a:prstGeom prst="line">
-              <a:avLst/>
-            </a:prstGeom>
-            <a:ln w="19050">
-              <a:solidFill>
-                <a:schemeClr val="tx1"/>
-              </a:solidFill>
-            </a:ln>
-          </p:spPr>
-          <p:style>
-            <a:lnRef idx="1">
-              <a:schemeClr val="accent1"/>
-            </a:lnRef>
-            <a:fillRef idx="0">
-              <a:schemeClr val="accent1"/>
-            </a:fillRef>
-            <a:effectRef idx="0">
-              <a:schemeClr val="accent1"/>
-            </a:effectRef>
-            <a:fontRef idx="minor">
-              <a:schemeClr val="tx1"/>
-            </a:fontRef>
-          </p:style>
-        </p:cxnSp>
-        <mc:AlternateContent xmlns:mc="http://schemas.openxmlformats.org/markup-compatibility/2006" xmlns:a14="http://schemas.microsoft.com/office/drawing/2010/main">
-          <mc:Choice Requires="a14">
-            <p:sp>
-              <p:nvSpPr>
-                <p:cNvPr id="17" name="Textfeld 16">
-                  <a:extLst>
-                    <a:ext uri="{FF2B5EF4-FFF2-40B4-BE49-F238E27FC236}">
-                      <a16:creationId xmlns:a16="http://schemas.microsoft.com/office/drawing/2014/main" id="{B7475B99-716C-FB61-CB71-AD1AFC7DCD69}"/>
-                    </a:ext>
-                  </a:extLst>
-                </p:cNvPr>
-                <p:cNvSpPr txBox="1"/>
-                <p:nvPr/>
-              </p:nvSpPr>
-              <p:spPr>
-                <a:xfrm>
-                  <a:off x="5105406" y="406794"/>
-                  <a:ext cx="1041569" cy="369332"/>
-                </a:xfrm>
-                <a:prstGeom prst="rect">
-                  <a:avLst/>
-                </a:prstGeom>
-                <a:noFill/>
-              </p:spPr>
-              <p:txBody>
-                <a:bodyPr wrap="square" rtlCol="0">
-                  <a:spAutoFit/>
-                </a:bodyPr>
-                <a:lstStyle/>
-                <a:p>
-                  <a:pPr/>
-                  <a14:m>
-                    <m:oMathPara xmlns:m="http://schemas.openxmlformats.org/officeDocument/2006/math">
-                      <m:oMathParaPr>
-                        <m:jc m:val="centerGroup"/>
-                      </m:oMathParaPr>
-                      <m:oMath xmlns:m="http://schemas.openxmlformats.org/officeDocument/2006/math">
-                        <m:r>
-                          <a:rPr lang="en-US" sz="1800" i="1" noProof="0" smtClean="0">
-                            <a:latin typeface="Cambria Math" panose="02040503050406030204" pitchFamily="18" charset="0"/>
-                          </a:rPr>
-                          <m:t> </m:t>
-                        </m:r>
-                        <m:r>
-                          <a:rPr lang="en-US" sz="1800" b="0" i="1" noProof="0" smtClean="0">
-                            <a:latin typeface="Cambria Math" panose="02040503050406030204" pitchFamily="18" charset="0"/>
-                          </a:rPr>
-                          <m:t>−</m:t>
-                        </m:r>
-                      </m:oMath>
-                    </m:oMathPara>
-                  </a14:m>
-                  <a:endParaRPr lang="en-US" sz="1800" noProof="0" dirty="0"/>
-                </a:p>
-              </p:txBody>
-            </p:sp>
-          </mc:Choice>
-          <mc:Fallback xmlns="">
-            <p:sp>
-              <p:nvSpPr>
-                <p:cNvPr id="17" name="Textfeld 16">
-                  <a:extLst>
-                    <a:ext uri="{FF2B5EF4-FFF2-40B4-BE49-F238E27FC236}">
-                      <a16:creationId xmlns:a16="http://schemas.microsoft.com/office/drawing/2014/main" id="{B7475B99-716C-FB61-CB71-AD1AFC7DCD69}"/>
-                    </a:ext>
-                  </a:extLst>
-                </p:cNvPr>
-                <p:cNvSpPr txBox="1">
-                  <a:spLocks noRot="1" noChangeAspect="1" noMove="1" noResize="1" noEditPoints="1" noAdjustHandles="1" noChangeArrowheads="1" noChangeShapeType="1" noTextEdit="1"/>
-                </p:cNvSpPr>
-                <p:nvPr/>
-              </p:nvSpPr>
-              <p:spPr>
-                <a:xfrm>
-                  <a:off x="5105406" y="406794"/>
-                  <a:ext cx="1041569" cy="369332"/>
-                </a:xfrm>
-                <a:prstGeom prst="rect">
-                  <a:avLst/>
-                </a:prstGeom>
-                <a:blipFill>
-                  <a:blip r:embed="rId6"/>
-                  <a:stretch>
-                    <a:fillRect b="-20000"/>
-                  </a:stretch>
-                </a:blipFill>
-              </p:spPr>
-              <p:txBody>
-                <a:bodyPr/>
-                <a:lstStyle/>
-                <a:p>
-                  <a:r>
-                    <a:rPr lang="de-DE">
-                      <a:noFill/>
-                    </a:rPr>
-                    <a:t> </a:t>
-                  </a:r>
-                </a:p>
-              </p:txBody>
-            </p:sp>
-          </mc:Fallback>
-        </mc:AlternateContent>
-        <p:cxnSp>
-          <p:nvCxnSpPr>
-            <p:cNvPr id="18" name="Gewinkelte Verbindung 17">
-              <a:extLst>
-                <a:ext uri="{FF2B5EF4-FFF2-40B4-BE49-F238E27FC236}">
-                  <a16:creationId xmlns:a16="http://schemas.microsoft.com/office/drawing/2014/main" id="{3F8FFAD3-698C-1215-F215-7DE1E015295B}"/>
-                </a:ext>
-              </a:extLst>
-            </p:cNvPr>
-            <p:cNvCxnSpPr/>
-            <p:nvPr/>
-          </p:nvCxnSpPr>
-          <p:spPr>
-            <a:xfrm rot="10800000">
-              <a:off x="5470419" y="537780"/>
-              <a:ext cx="3044931" cy="593980"/>
-            </a:xfrm>
-            <a:prstGeom prst="bentConnector3">
-              <a:avLst>
-                <a:gd name="adj1" fmla="val 100050"/>
-              </a:avLst>
-            </a:prstGeom>
-            <a:ln w="19050">
-              <a:solidFill>
-                <a:schemeClr val="tx1"/>
-              </a:solidFill>
-              <a:tailEnd type="triangle"/>
-            </a:ln>
-          </p:spPr>
-          <p:style>
-            <a:lnRef idx="1">
-              <a:schemeClr val="accent1"/>
-            </a:lnRef>
-            <a:fillRef idx="0">
-              <a:schemeClr val="accent1"/>
-            </a:fillRef>
-            <a:effectRef idx="0">
-              <a:schemeClr val="accent1"/>
-            </a:effectRef>
-            <a:fontRef idx="minor">
-              <a:schemeClr val="tx1"/>
-            </a:fontRef>
-          </p:style>
-        </p:cxnSp>
-      </p:grpSp>
-      <mc:AlternateContent xmlns:mc="http://schemas.openxmlformats.org/markup-compatibility/2006" xmlns:a14="http://schemas.microsoft.com/office/drawing/2010/main">
-        <mc:Choice Requires="a14">
-          <p:sp>
-            <p:nvSpPr>
-              <p:cNvPr id="23" name="Textfeld 22">
-                <a:extLst>
-                  <a:ext uri="{FF2B5EF4-FFF2-40B4-BE49-F238E27FC236}">
-                    <a16:creationId xmlns:a16="http://schemas.microsoft.com/office/drawing/2014/main" id="{C9DF7E14-10C1-D9D3-CDA3-1876EA0CEA68}"/>
-                  </a:ext>
-                </a:extLst>
-              </p:cNvPr>
-              <p:cNvSpPr txBox="1"/>
-              <p:nvPr/>
-            </p:nvSpPr>
-            <p:spPr>
-              <a:xfrm>
-                <a:off x="4953307" y="166413"/>
-                <a:ext cx="323294" cy="307777"/>
-              </a:xfrm>
-              <a:prstGeom prst="rect">
-                <a:avLst/>
-              </a:prstGeom>
-              <a:noFill/>
-            </p:spPr>
-            <p:txBody>
-              <a:bodyPr wrap="none" rtlCol="0">
-                <a:spAutoFit/>
-              </a:bodyPr>
-              <a:lstStyle/>
-              <a:p>
-                <a:pPr/>
-                <a14:m>
-                  <m:oMathPara xmlns:m="http://schemas.openxmlformats.org/officeDocument/2006/math">
-                    <m:oMathParaPr>
-                      <m:jc m:val="centerGroup"/>
-                    </m:oMathParaPr>
-                    <m:oMath xmlns:m="http://schemas.openxmlformats.org/officeDocument/2006/math">
-                      <m:r>
-                        <a:rPr lang="en-US" i="1" noProof="0" smtClean="0">
-                          <a:latin typeface="Cambria Math" panose="02040503050406030204" pitchFamily="18" charset="0"/>
-                        </a:rPr>
-                        <m:t>𝑟</m:t>
-                      </m:r>
-                    </m:oMath>
-                  </m:oMathPara>
-                </a14:m>
-                <a:endParaRPr lang="en-US" noProof="0" dirty="0"/>
-              </a:p>
-            </p:txBody>
-          </p:sp>
-        </mc:Choice>
-        <mc:Fallback xmlns="">
-          <p:sp>
-            <p:nvSpPr>
-              <p:cNvPr id="23" name="Textfeld 22">
-                <a:extLst>
-                  <a:ext uri="{FF2B5EF4-FFF2-40B4-BE49-F238E27FC236}">
-                    <a16:creationId xmlns:a16="http://schemas.microsoft.com/office/drawing/2014/main" id="{C9DF7E14-10C1-D9D3-CDA3-1876EA0CEA68}"/>
-                  </a:ext>
-                </a:extLst>
-              </p:cNvPr>
-              <p:cNvSpPr txBox="1">
-                <a:spLocks noRot="1" noChangeAspect="1" noMove="1" noResize="1" noEditPoints="1" noAdjustHandles="1" noChangeArrowheads="1" noChangeShapeType="1" noTextEdit="1"/>
-              </p:cNvSpPr>
-              <p:nvPr/>
-            </p:nvSpPr>
-            <p:spPr>
-              <a:xfrm>
-                <a:off x="4953307" y="166413"/>
-                <a:ext cx="323294" cy="307777"/>
-              </a:xfrm>
-              <a:prstGeom prst="rect">
-                <a:avLst/>
-              </a:prstGeom>
-              <a:blipFill>
-                <a:blip r:embed="rId7"/>
-                <a:stretch>
-                  <a:fillRect/>
-                </a:stretch>
-              </a:blipFill>
-            </p:spPr>
-            <p:txBody>
-              <a:bodyPr/>
-              <a:lstStyle/>
-              <a:p>
-                <a:r>
-                  <a:rPr lang="de-DE">
-                    <a:noFill/>
-                  </a:rPr>
-                  <a:t> </a:t>
-                </a:r>
-              </a:p>
-            </p:txBody>
-          </p:sp>
-        </mc:Fallback>
-      </mc:AlternateContent>
-      <mc:AlternateContent xmlns:mc="http://schemas.openxmlformats.org/markup-compatibility/2006" xmlns:a14="http://schemas.microsoft.com/office/drawing/2010/main">
-        <mc:Choice Requires="a14">
-          <p:sp>
-            <p:nvSpPr>
-              <p:cNvPr id="24" name="Textfeld 23">
-                <a:extLst>
-                  <a:ext uri="{FF2B5EF4-FFF2-40B4-BE49-F238E27FC236}">
-                    <a16:creationId xmlns:a16="http://schemas.microsoft.com/office/drawing/2014/main" id="{9E63B5CC-F892-E8D4-D819-97CAD68F87C9}"/>
-                  </a:ext>
-                </a:extLst>
-              </p:cNvPr>
-              <p:cNvSpPr txBox="1"/>
-              <p:nvPr/>
-            </p:nvSpPr>
-            <p:spPr>
-              <a:xfrm>
-                <a:off x="8556673" y="187431"/>
-                <a:ext cx="338426" cy="307777"/>
-              </a:xfrm>
-              <a:prstGeom prst="rect">
-                <a:avLst/>
-              </a:prstGeom>
-              <a:noFill/>
-            </p:spPr>
-            <p:txBody>
-              <a:bodyPr wrap="none" rtlCol="0">
-                <a:spAutoFit/>
-              </a:bodyPr>
-              <a:lstStyle/>
-              <a:p>
-                <a:pPr/>
-                <a14:m>
-                  <m:oMathPara xmlns:m="http://schemas.openxmlformats.org/officeDocument/2006/math">
-                    <m:oMathParaPr>
-                      <m:jc m:val="centerGroup"/>
-                    </m:oMathParaPr>
-                    <m:oMath xmlns:m="http://schemas.openxmlformats.org/officeDocument/2006/math">
-                      <m:r>
-                        <a:rPr lang="en-US" b="0" i="1" noProof="0" smtClean="0">
-                          <a:latin typeface="Cambria Math" panose="02040503050406030204" pitchFamily="18" charset="0"/>
-                        </a:rPr>
-                        <m:t>𝑦</m:t>
-                      </m:r>
-                    </m:oMath>
-                  </m:oMathPara>
-                </a14:m>
-                <a:endParaRPr lang="en-US" noProof="0" dirty="0"/>
-              </a:p>
-            </p:txBody>
-          </p:sp>
-        </mc:Choice>
-        <mc:Fallback xmlns="">
-          <p:sp>
-            <p:nvSpPr>
-              <p:cNvPr id="24" name="Textfeld 23">
-                <a:extLst>
-                  <a:ext uri="{FF2B5EF4-FFF2-40B4-BE49-F238E27FC236}">
-                    <a16:creationId xmlns:a16="http://schemas.microsoft.com/office/drawing/2014/main" id="{9E63B5CC-F892-E8D4-D819-97CAD68F87C9}"/>
-                  </a:ext>
-                </a:extLst>
-              </p:cNvPr>
-              <p:cNvSpPr txBox="1">
-                <a:spLocks noRot="1" noChangeAspect="1" noMove="1" noResize="1" noEditPoints="1" noAdjustHandles="1" noChangeArrowheads="1" noChangeShapeType="1" noTextEdit="1"/>
-              </p:cNvSpPr>
-              <p:nvPr/>
-            </p:nvSpPr>
-            <p:spPr>
-              <a:xfrm>
-                <a:off x="8556673" y="187431"/>
-                <a:ext cx="338426" cy="307777"/>
-              </a:xfrm>
-              <a:prstGeom prst="rect">
-                <a:avLst/>
-              </a:prstGeom>
-              <a:blipFill>
-                <a:blip r:embed="rId8"/>
-                <a:stretch>
-                  <a:fillRect b="-8000"/>
-                </a:stretch>
-              </a:blipFill>
-            </p:spPr>
-            <p:txBody>
-              <a:bodyPr/>
-              <a:lstStyle/>
-              <a:p>
-                <a:r>
-                  <a:rPr lang="de-DE">
-                    <a:noFill/>
-                  </a:rPr>
-                  <a:t> </a:t>
-                </a:r>
-              </a:p>
-            </p:txBody>
-          </p:sp>
-        </mc:Fallback>
-      </mc:AlternateContent>
-      <p:pic>
-        <p:nvPicPr>
-          <p:cNvPr id="28" name="Grafik 27" descr="Ein Bild, das Diagramm, Reihe, Kreis enthält.&#10;&#10;KI-generierte Inhalte können fehlerhaft sein.">
-            <a:extLst>
-              <a:ext uri="{FF2B5EF4-FFF2-40B4-BE49-F238E27FC236}">
-                <a16:creationId xmlns:a16="http://schemas.microsoft.com/office/drawing/2014/main" id="{58DF6425-FB63-3408-EAA8-28E51BE5B358}"/>
-              </a:ext>
-            </a:extLst>
-          </p:cNvPr>
-          <p:cNvPicPr>
-            <a:picLocks noChangeAspect="1"/>
-          </p:cNvPicPr>
-          <p:nvPr/>
-        </p:nvPicPr>
-        <p:blipFill>
-          <a:blip r:embed="rId9"/>
-          <a:stretch>
-            <a:fillRect/>
-          </a:stretch>
-        </p:blipFill>
-        <p:spPr>
-          <a:xfrm>
-            <a:off x="393886" y="1663870"/>
-            <a:ext cx="2624444" cy="2266911"/>
-          </a:xfrm>
-          <a:prstGeom prst="rect">
-            <a:avLst/>
-          </a:prstGeom>
-        </p:spPr>
-      </p:pic>
-      <p:pic>
-        <p:nvPicPr>
-          <p:cNvPr id="30" name="Grafik 29" descr="Ein Bild, das Text, Menschliches Gesicht, Anzug, Mann enthält.&#10;&#10;KI-generierte Inhalte können fehlerhaft sein.">
-            <a:extLst>
-              <a:ext uri="{FF2B5EF4-FFF2-40B4-BE49-F238E27FC236}">
-                <a16:creationId xmlns:a16="http://schemas.microsoft.com/office/drawing/2014/main" id="{7BCCE9C5-7DC3-CF4A-244C-074BC9D42363}"/>
-              </a:ext>
-            </a:extLst>
-          </p:cNvPr>
-          <p:cNvPicPr>
-            <a:picLocks noChangeAspect="1"/>
-          </p:cNvPicPr>
-          <p:nvPr/>
-        </p:nvPicPr>
-        <p:blipFill>
-          <a:blip r:embed="rId10"/>
-          <a:stretch>
-            <a:fillRect/>
-          </a:stretch>
-        </p:blipFill>
-        <p:spPr>
-          <a:xfrm>
-            <a:off x="3353441" y="1583831"/>
-            <a:ext cx="1815894" cy="2664628"/>
-          </a:xfrm>
-          <a:prstGeom prst="rect">
-            <a:avLst/>
-          </a:prstGeom>
-        </p:spPr>
-      </p:pic>
-      <p:sp>
-        <p:nvSpPr>
-          <p:cNvPr id="32" name="Inhaltsplatzhalter 2">
-            <a:extLst>
-              <a:ext uri="{FF2B5EF4-FFF2-40B4-BE49-F238E27FC236}">
-                <a16:creationId xmlns:a16="http://schemas.microsoft.com/office/drawing/2014/main" id="{86B0934D-E9B2-38B2-8BE3-50472315EDFC}"/>
-              </a:ext>
-            </a:extLst>
-          </p:cNvPr>
-          <p:cNvSpPr txBox="1">
-            <a:spLocks/>
-          </p:cNvSpPr>
-          <p:nvPr/>
-        </p:nvSpPr>
-        <p:spPr>
-          <a:xfrm>
-            <a:off x="5375670" y="1359659"/>
-            <a:ext cx="3797599" cy="3263504"/>
-          </a:xfrm>
-          <a:prstGeom prst="rect">
-            <a:avLst/>
-          </a:prstGeom>
-        </p:spPr>
-        <p:txBody>
-          <a:bodyPr vert="horz" lIns="91440" tIns="45720" rIns="91440" bIns="45720" rtlCol="0">
-            <a:normAutofit/>
-          </a:bodyPr>
-          <a:lstStyle>
-            <a:lvl1pPr marL="171450" indent="-171450" algn="l" defTabSz="685800" rtl="0" eaLnBrk="1" latinLnBrk="0" hangingPunct="1">
-              <a:lnSpc>
-                <a:spcPct val="90000"/>
-              </a:lnSpc>
-              <a:spcBef>
-                <a:spcPts val="750"/>
-              </a:spcBef>
-              <a:buFont typeface="Arial" panose="020B0604020202020204" pitchFamily="34" charset="0"/>
-              <a:buChar char="•"/>
-              <a:defRPr sz="1800" kern="1200">
-                <a:solidFill>
-                  <a:schemeClr val="tx1"/>
-                </a:solidFill>
-                <a:latin typeface="Segoe UI" panose="020F0502020204030204" pitchFamily="34" charset="0"/>
-                <a:ea typeface="+mn-ea"/>
-                <a:cs typeface="Segoe UI" panose="020F0502020204030204" pitchFamily="34" charset="0"/>
-              </a:defRPr>
-            </a:lvl1pPr>
-            <a:lvl2pPr marL="514350" indent="-171450" algn="l" defTabSz="685800" rtl="0" eaLnBrk="1" latinLnBrk="0" hangingPunct="1">
-              <a:lnSpc>
-                <a:spcPct val="90000"/>
-              </a:lnSpc>
-              <a:spcBef>
-                <a:spcPts val="375"/>
-              </a:spcBef>
-              <a:buFont typeface="Arial" panose="020B0604020202020204" pitchFamily="34" charset="0"/>
-              <a:buChar char="•"/>
-              <a:defRPr sz="1500" kern="1200">
-                <a:solidFill>
-                  <a:schemeClr val="tx1"/>
-                </a:solidFill>
-                <a:latin typeface="Segoe UI" panose="020F0502020204030204" pitchFamily="34" charset="0"/>
-                <a:ea typeface="+mn-ea"/>
-                <a:cs typeface="Segoe UI" panose="020F0502020204030204" pitchFamily="34" charset="0"/>
-              </a:defRPr>
-            </a:lvl2pPr>
-            <a:lvl3pPr marL="857250" indent="-171450" algn="l" defTabSz="685800" rtl="0" eaLnBrk="1" latinLnBrk="0" hangingPunct="1">
-              <a:lnSpc>
-                <a:spcPct val="90000"/>
-              </a:lnSpc>
-              <a:spcBef>
-                <a:spcPts val="375"/>
-              </a:spcBef>
-              <a:buFont typeface="Arial" panose="020B0604020202020204" pitchFamily="34" charset="0"/>
-              <a:buChar char="•"/>
-              <a:defRPr sz="1200" kern="1200">
-                <a:solidFill>
-                  <a:schemeClr val="tx1"/>
-                </a:solidFill>
-                <a:latin typeface="Segoe UI" panose="020F0502020204030204" pitchFamily="34" charset="0"/>
-                <a:ea typeface="+mn-ea"/>
-                <a:cs typeface="Segoe UI" panose="020F0502020204030204" pitchFamily="34" charset="0"/>
-              </a:defRPr>
-            </a:lvl3pPr>
-            <a:lvl4pPr marL="1200150" indent="-171450" algn="l" defTabSz="685800" rtl="0" eaLnBrk="1" latinLnBrk="0" hangingPunct="1">
-              <a:lnSpc>
-                <a:spcPct val="90000"/>
-              </a:lnSpc>
-              <a:spcBef>
-                <a:spcPts val="375"/>
-              </a:spcBef>
-              <a:buFont typeface="Arial" panose="020B0604020202020204" pitchFamily="34" charset="0"/>
-              <a:buChar char="•"/>
-              <a:defRPr sz="1050" kern="1200">
-                <a:solidFill>
-                  <a:schemeClr val="tx1"/>
-                </a:solidFill>
-                <a:latin typeface="Segoe UI" panose="020F0502020204030204" pitchFamily="34" charset="0"/>
-                <a:ea typeface="+mn-ea"/>
-                <a:cs typeface="Segoe UI" panose="020F0502020204030204" pitchFamily="34" charset="0"/>
-              </a:defRPr>
-            </a:lvl4pPr>
-            <a:lvl5pPr marL="1543050" indent="-171450" algn="l" defTabSz="685800" rtl="0" eaLnBrk="1" latinLnBrk="0" hangingPunct="1">
-              <a:lnSpc>
-                <a:spcPct val="90000"/>
-              </a:lnSpc>
-              <a:spcBef>
-                <a:spcPts val="375"/>
-              </a:spcBef>
-              <a:buFont typeface="Arial" panose="020B0604020202020204" pitchFamily="34" charset="0"/>
-              <a:buChar char="•"/>
-              <a:defRPr sz="900" kern="1200">
-                <a:solidFill>
-                  <a:schemeClr val="tx1"/>
-                </a:solidFill>
-                <a:latin typeface="Segoe UI" panose="020F0502020204030204" pitchFamily="34" charset="0"/>
-                <a:ea typeface="+mn-ea"/>
-                <a:cs typeface="Segoe UI" panose="020F0502020204030204" pitchFamily="34" charset="0"/>
-              </a:defRPr>
-            </a:lvl5pPr>
-            <a:lvl6pPr marL="1885950" indent="-171450" algn="l" defTabSz="685800" rtl="0" eaLnBrk="1" latinLnBrk="0" hangingPunct="1">
-              <a:lnSpc>
-                <a:spcPct val="90000"/>
-              </a:lnSpc>
-              <a:spcBef>
-                <a:spcPts val="375"/>
-              </a:spcBef>
-              <a:buFont typeface="Arial" panose="020B0604020202020204" pitchFamily="34" charset="0"/>
-              <a:buChar char="•"/>
-              <a:defRPr sz="1350" kern="1200">
-                <a:solidFill>
-                  <a:schemeClr val="tx1"/>
-                </a:solidFill>
-                <a:latin typeface="+mn-lt"/>
-                <a:ea typeface="+mn-ea"/>
-                <a:cs typeface="+mn-cs"/>
-              </a:defRPr>
-            </a:lvl6pPr>
-            <a:lvl7pPr marL="2228850" indent="-171450" algn="l" defTabSz="685800" rtl="0" eaLnBrk="1" latinLnBrk="0" hangingPunct="1">
-              <a:lnSpc>
-                <a:spcPct val="90000"/>
-              </a:lnSpc>
-              <a:spcBef>
-                <a:spcPts val="375"/>
-              </a:spcBef>
-              <a:buFont typeface="Arial" panose="020B0604020202020204" pitchFamily="34" charset="0"/>
-              <a:buChar char="•"/>
-              <a:defRPr sz="1350" kern="1200">
-                <a:solidFill>
-                  <a:schemeClr val="tx1"/>
-                </a:solidFill>
-                <a:latin typeface="+mn-lt"/>
-                <a:ea typeface="+mn-ea"/>
-                <a:cs typeface="+mn-cs"/>
-              </a:defRPr>
-            </a:lvl7pPr>
-            <a:lvl8pPr marL="2571750" indent="-171450" algn="l" defTabSz="685800" rtl="0" eaLnBrk="1" latinLnBrk="0" hangingPunct="1">
-              <a:lnSpc>
-                <a:spcPct val="90000"/>
-              </a:lnSpc>
-              <a:spcBef>
-                <a:spcPts val="375"/>
-              </a:spcBef>
-              <a:buFont typeface="Arial" panose="020B0604020202020204" pitchFamily="34" charset="0"/>
-              <a:buChar char="•"/>
-              <a:defRPr sz="1350" kern="1200">
-                <a:solidFill>
-                  <a:schemeClr val="tx1"/>
-                </a:solidFill>
-                <a:latin typeface="+mn-lt"/>
-                <a:ea typeface="+mn-ea"/>
-                <a:cs typeface="+mn-cs"/>
-              </a:defRPr>
-            </a:lvl8pPr>
-            <a:lvl9pPr marL="2914650" indent="-171450" algn="l" defTabSz="685800" rtl="0" eaLnBrk="1" latinLnBrk="0" hangingPunct="1">
-              <a:lnSpc>
-                <a:spcPct val="90000"/>
-              </a:lnSpc>
-              <a:spcBef>
-                <a:spcPts val="375"/>
-              </a:spcBef>
-              <a:buFont typeface="Arial" panose="020B0604020202020204" pitchFamily="34" charset="0"/>
-              <a:buChar char="•"/>
-              <a:defRPr sz="1350" kern="1200">
-                <a:solidFill>
-                  <a:schemeClr val="tx1"/>
-                </a:solidFill>
-                <a:latin typeface="+mn-lt"/>
-                <a:ea typeface="+mn-ea"/>
-                <a:cs typeface="+mn-cs"/>
-              </a:defRPr>
-            </a:lvl9pPr>
-          </a:lstStyle>
-          <a:p>
-            <a:pPr marL="0" indent="0">
-              <a:buClrTx/>
-              <a:buFont typeface="Arial" panose="020B0604020202020204" pitchFamily="34" charset="0"/>
-              <a:buNone/>
-            </a:pPr>
-            <a:r>
-              <a:rPr lang="en-US" sz="1600" noProof="0" dirty="0"/>
-              <a:t>Week 8: Closed-Loop Specifications</a:t>
-            </a:r>
-          </a:p>
-          <a:p>
-            <a:pPr marL="0" indent="0">
-              <a:buClrTx/>
-              <a:buFont typeface="Arial" panose="020B0604020202020204" pitchFamily="34" charset="0"/>
-              <a:buNone/>
-            </a:pPr>
-            <a:endParaRPr lang="en-US" sz="1600" noProof="0" dirty="0"/>
-          </a:p>
-          <a:p>
-            <a:pPr marL="0" indent="0">
-              <a:buClrTx/>
-              <a:buFont typeface="Arial" panose="020B0604020202020204" pitchFamily="34" charset="0"/>
-              <a:buNone/>
-            </a:pPr>
-            <a:endParaRPr lang="en-US" sz="1600" noProof="0" dirty="0"/>
-          </a:p>
-          <a:p>
-            <a:pPr marL="0" indent="0">
-              <a:buClrTx/>
-              <a:buFont typeface="Arial" panose="020B0604020202020204" pitchFamily="34" charset="0"/>
-              <a:buNone/>
-            </a:pPr>
-            <a:endParaRPr lang="en-US" sz="1600" noProof="0" dirty="0"/>
-          </a:p>
-          <a:p>
-            <a:pPr marL="0" indent="0">
-              <a:buClrTx/>
-              <a:buFont typeface="Arial" panose="020B0604020202020204" pitchFamily="34" charset="0"/>
-              <a:buNone/>
-            </a:pPr>
-            <a:endParaRPr lang="en-US" sz="1600" noProof="0" dirty="0"/>
-          </a:p>
-          <a:p>
-            <a:pPr marL="0" indent="0">
-              <a:buClrTx/>
-              <a:buFont typeface="Arial" panose="020B0604020202020204" pitchFamily="34" charset="0"/>
-              <a:buNone/>
-            </a:pPr>
-            <a:endParaRPr lang="en-US" sz="1600" noProof="0" dirty="0"/>
-          </a:p>
-          <a:p>
-            <a:pPr marL="0" indent="0">
-              <a:buClrTx/>
-              <a:buFont typeface="Arial" panose="020B0604020202020204" pitchFamily="34" charset="0"/>
-              <a:buNone/>
-            </a:pPr>
-            <a:endParaRPr lang="en-US" sz="1600" noProof="0" dirty="0"/>
-          </a:p>
-          <a:p>
-            <a:pPr marL="0" indent="0">
-              <a:buClrTx/>
-              <a:buFont typeface="Arial" panose="020B0604020202020204" pitchFamily="34" charset="0"/>
-              <a:buNone/>
-            </a:pPr>
-            <a:endParaRPr lang="en-US" sz="1600" noProof="0" dirty="0"/>
-          </a:p>
-          <a:p>
-            <a:pPr marL="0" indent="0">
-              <a:buClrTx/>
-              <a:buFont typeface="Arial" panose="020B0604020202020204" pitchFamily="34" charset="0"/>
-              <a:buNone/>
-            </a:pPr>
-            <a:r>
-              <a:rPr lang="en-US" sz="1600" noProof="0" dirty="0"/>
-              <a:t>We need to make sure it's quick and can handle disturbances and errors well!</a:t>
-            </a:r>
-          </a:p>
-          <a:p>
-            <a:pPr marL="0" indent="0">
-              <a:buClrTx/>
-              <a:buFont typeface="Arial" panose="020B0604020202020204" pitchFamily="34" charset="0"/>
-              <a:buNone/>
-            </a:pPr>
-            <a:endParaRPr lang="en-US" sz="1600" noProof="0" dirty="0"/>
-          </a:p>
-          <a:p>
-            <a:pPr marL="0" indent="0">
-              <a:buClrTx/>
-              <a:buFont typeface="Arial" panose="020B0604020202020204" pitchFamily="34" charset="0"/>
-              <a:buNone/>
-            </a:pPr>
-            <a:endParaRPr lang="en-US" sz="1600" noProof="0" dirty="0"/>
-          </a:p>
-        </p:txBody>
-      </p:sp>
-      <p:pic>
-        <p:nvPicPr>
-          <p:cNvPr id="45" name="Grafik 44" descr="Ein Bild, das Reihe, Schrift, Text, Diagramm enthält.&#10;&#10;KI-generierte Inhalte können fehlerhaft sein.">
-            <a:extLst>
-              <a:ext uri="{FF2B5EF4-FFF2-40B4-BE49-F238E27FC236}">
-                <a16:creationId xmlns:a16="http://schemas.microsoft.com/office/drawing/2014/main" id="{BC85E42B-3254-E7A9-44B0-4AD42D62C43D}"/>
-              </a:ext>
-            </a:extLst>
-          </p:cNvPr>
-          <p:cNvPicPr>
-            <a:picLocks noChangeAspect="1"/>
-          </p:cNvPicPr>
-          <p:nvPr/>
-        </p:nvPicPr>
-        <p:blipFill>
-          <a:blip r:embed="rId11"/>
-          <a:stretch>
-            <a:fillRect/>
-          </a:stretch>
-        </p:blipFill>
-        <p:spPr>
-          <a:xfrm>
-            <a:off x="5397426" y="1825191"/>
-            <a:ext cx="3148425" cy="1909532"/>
-          </a:xfrm>
-          <a:prstGeom prst="rect">
-            <a:avLst/>
-          </a:prstGeom>
-        </p:spPr>
-      </p:pic>
-      <p:pic>
-        <p:nvPicPr>
-          <p:cNvPr id="46" name="Inhaltsplatzhalter 6" descr="Ein Bild, das Fahrzeug, Rad, Transport, Landfahrzeug enthält.&#10;&#10;KI-generierte Inhalte können fehlerhaft sein.">
-            <a:extLst>
-              <a:ext uri="{FF2B5EF4-FFF2-40B4-BE49-F238E27FC236}">
-                <a16:creationId xmlns:a16="http://schemas.microsoft.com/office/drawing/2014/main" id="{10EEE16A-0E64-44F7-D8B0-E464EFC80BD9}"/>
-              </a:ext>
-            </a:extLst>
-          </p:cNvPr>
-          <p:cNvPicPr>
-            <a:picLocks noChangeAspect="1"/>
-          </p:cNvPicPr>
-          <p:nvPr/>
-        </p:nvPicPr>
-        <p:blipFill>
-          <a:blip r:embed="rId12"/>
-          <a:srcRect l="11220" t="33713" r="27727" b="17755"/>
-          <a:stretch>
-            <a:fillRect/>
-          </a:stretch>
-        </p:blipFill>
-        <p:spPr>
-          <a:xfrm>
-            <a:off x="7858213" y="2636459"/>
-            <a:ext cx="1250958" cy="559372"/>
-          </a:xfrm>
-          <a:prstGeom prst="rect">
-            <a:avLst/>
-          </a:prstGeom>
-          <a:noFill/>
-        </p:spPr>
-      </p:pic>
-    </p:spTree>
-    <p:extLst>
-      <p:ext uri="{BB962C8B-B14F-4D97-AF65-F5344CB8AC3E}">
-        <p14:creationId xmlns:p14="http://schemas.microsoft.com/office/powerpoint/2010/main" val="2147892534"/>
-      </p:ext>
-    </p:extLst>
-  </p:cSld>
-  <p:clrMapOvr>
-    <a:masterClrMapping/>
-  </p:clrMapOvr>
-  <p:timing>
-    <p:tnLst>
-      <p:par>
-        <p:cTn id="1" dur="indefinite" restart="never" nodeType="tmRoot">
-          <p:childTnLst>
-            <p:seq concurrent="1" nextAc="seek">
-              <p:cTn id="2" dur="indefinite" nodeType="mainSeq">
-                <p:childTnLst>
-                  <p:par>
-                    <p:cTn id="3" fill="hold">
-                      <p:stCondLst>
-                        <p:cond delay="indefinite"/>
-                      </p:stCondLst>
-                      <p:childTnLst>
-                        <p:par>
-                          <p:cTn id="4" fill="hold">
-                            <p:stCondLst>
-                              <p:cond delay="0"/>
-                            </p:stCondLst>
-                            <p:childTnLst>
-                              <p:par>
-                                <p:cTn id="5" presetID="1" presetClass="entr" presetSubtype="0" fill="hold" nodeType="clickEffect">
-                                  <p:stCondLst>
-                                    <p:cond delay="0"/>
-                                  </p:stCondLst>
-                                  <p:childTnLst>
-                                    <p:set>
-                                      <p:cBhvr>
-                                        <p:cTn id="6" dur="1" fill="hold">
-                                          <p:stCondLst>
-                                            <p:cond delay="0"/>
-                                          </p:stCondLst>
-                                        </p:cTn>
-                                        <p:tgtEl>
-                                          <p:spTgt spid="30"/>
-                                        </p:tgtEl>
-                                        <p:attrNameLst>
-                                          <p:attrName>style.visibility</p:attrName>
-                                        </p:attrNameLst>
-                                      </p:cBhvr>
-                                      <p:to>
-                                        <p:strVal val="visible"/>
-                                      </p:to>
-                                    </p:set>
-                                  </p:childTnLst>
-                                </p:cTn>
-                              </p:par>
-                            </p:childTnLst>
-                          </p:cTn>
-                        </p:par>
-                      </p:childTnLst>
-                    </p:cTn>
-                  </p:par>
-                  <p:par>
-                    <p:cTn id="7" fill="hold">
-                      <p:stCondLst>
-                        <p:cond delay="indefinite"/>
-                      </p:stCondLst>
-                      <p:childTnLst>
-                        <p:par>
-                          <p:cTn id="8" fill="hold">
-                            <p:stCondLst>
-                              <p:cond delay="0"/>
-                            </p:stCondLst>
-                            <p:childTnLst>
-                              <p:par>
-                                <p:cTn id="9" presetID="1" presetClass="entr" presetSubtype="0" fill="hold" grpId="0" nodeType="clickEffect">
-                                  <p:stCondLst>
-                                    <p:cond delay="0"/>
-                                  </p:stCondLst>
-                                  <p:childTnLst>
-                                    <p:set>
-                                      <p:cBhvr>
-                                        <p:cTn id="10" dur="1" fill="hold">
-                                          <p:stCondLst>
-                                            <p:cond delay="0"/>
-                                          </p:stCondLst>
-                                        </p:cTn>
-                                        <p:tgtEl>
-                                          <p:spTgt spid="32"/>
-                                        </p:tgtEl>
-                                        <p:attrNameLst>
-                                          <p:attrName>style.visibility</p:attrName>
-                                        </p:attrNameLst>
-                                      </p:cBhvr>
-                                      <p:to>
-                                        <p:strVal val="visible"/>
-                                      </p:to>
-                                    </p:set>
-                                  </p:childTnLst>
-                                </p:cTn>
-                              </p:par>
-                              <p:par>
-                                <p:cTn id="11" presetID="1" presetClass="entr" presetSubtype="0" fill="hold" nodeType="withEffect">
-                                  <p:stCondLst>
-                                    <p:cond delay="0"/>
-                                  </p:stCondLst>
-                                  <p:childTnLst>
-                                    <p:set>
-                                      <p:cBhvr>
-                                        <p:cTn id="12" dur="1" fill="hold">
-                                          <p:stCondLst>
-                                            <p:cond delay="0"/>
-                                          </p:stCondLst>
-                                        </p:cTn>
-                                        <p:tgtEl>
-                                          <p:spTgt spid="45"/>
-                                        </p:tgtEl>
-                                        <p:attrNameLst>
-                                          <p:attrName>style.visibility</p:attrName>
-                                        </p:attrNameLst>
-                                      </p:cBhvr>
-                                      <p:to>
-                                        <p:strVal val="visible"/>
-                                      </p:to>
-                                    </p:set>
-                                  </p:childTnLst>
-                                </p:cTn>
-                              </p:par>
-                              <p:par>
-                                <p:cTn id="13" presetID="1" presetClass="entr" presetSubtype="0" fill="hold" nodeType="withEffect">
-                                  <p:stCondLst>
-                                    <p:cond delay="0"/>
-                                  </p:stCondLst>
-                                  <p:childTnLst>
-                                    <p:set>
-                                      <p:cBhvr>
-                                        <p:cTn id="14" dur="1" fill="hold">
-                                          <p:stCondLst>
-                                            <p:cond delay="0"/>
-                                          </p:stCondLst>
-                                        </p:cTn>
-                                        <p:tgtEl>
-                                          <p:spTgt spid="46"/>
-                                        </p:tgtEl>
-                                        <p:attrNameLst>
-                                          <p:attrName>style.visibility</p:attrName>
-                                        </p:attrNameLst>
-                                      </p:cBhvr>
-                                      <p:to>
-                                        <p:strVal val="visible"/>
-                                      </p:to>
-                                    </p:set>
-                                  </p:childTnLst>
-                                </p:cTn>
-                              </p:par>
-                            </p:childTnLst>
-                          </p:cTn>
-                        </p:par>
-                      </p:childTnLst>
-                    </p:cTn>
-                  </p:par>
-                </p:childTnLst>
-              </p:cTn>
-              <p:prevCondLst>
-                <p:cond evt="onPrev" delay="0">
-                  <p:tgtEl>
-                    <p:sldTgt/>
-                  </p:tgtEl>
-                </p:cond>
-              </p:prevCondLst>
-              <p:nextCondLst>
-                <p:cond evt="onNext" delay="0">
-                  <p:tgtEl>
-                    <p:sldTgt/>
-                  </p:tgtEl>
-                </p:cond>
-              </p:nextCondLst>
-            </p:seq>
-          </p:childTnLst>
-        </p:cTn>
-      </p:par>
-    </p:tnLst>
-    <p:bldLst>
-      <p:bldP spid="32" grpId="0"/>
-    </p:bldLst>
-  </p:timing>
-</p:sld>
-</file>
-
-<file path=ppt/slides/slide12.xml><?xml version="1.0" encoding="utf-8"?>
 <p:sld xmlns:a="http://schemas.openxmlformats.org/drawingml/2006/main" xmlns:r="http://schemas.openxmlformats.org/officeDocument/2006/relationships" xmlns:p="http://schemas.openxmlformats.org/presentationml/2006/main">
   <p:cSld>
     <p:spTree>
@@ -8316,7 +6070,7 @@
               <a:pPr defTabSz="342900">
                 <a:buClrTx/>
               </a:pPr>
-              <a:t>12</a:t>
+              <a:t>10</a:t>
             </a:fld>
             <a:endParaRPr lang="en-US" kern="1200" noProof="0" dirty="0">
               <a:solidFill>
@@ -12448,7 +10202,7 @@
 </p:sld>
 </file>
 
-<file path=ppt/slides/slide13.xml><?xml version="1.0" encoding="utf-8"?>
+<file path=ppt/slides/slide11.xml><?xml version="1.0" encoding="utf-8"?>
 <p:sld xmlns:a="http://schemas.openxmlformats.org/drawingml/2006/main" xmlns:r="http://schemas.openxmlformats.org/officeDocument/2006/relationships" xmlns:p="http://schemas.openxmlformats.org/presentationml/2006/main">
   <p:cSld>
     <p:spTree>
@@ -12723,7 +10477,7 @@
               <a:pPr defTabSz="342900">
                 <a:buClrTx/>
               </a:pPr>
-              <a:t>13</a:t>
+              <a:t>11</a:t>
             </a:fld>
             <a:endParaRPr lang="en-US" kern="1200" noProof="0">
               <a:solidFill>
@@ -15562,7 +13316,7 @@
 </p:sld>
 </file>
 
-<file path=ppt/slides/slide14.xml><?xml version="1.0" encoding="utf-8"?>
+<file path=ppt/slides/slide12.xml><?xml version="1.0" encoding="utf-8"?>
 <p:sld xmlns:a="http://schemas.openxmlformats.org/drawingml/2006/main" xmlns:r="http://schemas.openxmlformats.org/officeDocument/2006/relationships" xmlns:p="http://schemas.openxmlformats.org/presentationml/2006/main">
   <p:cSld>
     <p:spTree>
@@ -15710,7 +13464,7 @@
               <a:pPr defTabSz="342900">
                 <a:buClrTx/>
               </a:pPr>
-              <a:t>14</a:t>
+              <a:t>12</a:t>
             </a:fld>
             <a:endParaRPr lang="en-US" kern="1200" noProof="0" dirty="0">
               <a:solidFill>
@@ -15883,7 +13637,7 @@
 </p:sld>
 </file>
 
-<file path=ppt/slides/slide15.xml><?xml version="1.0" encoding="utf-8"?>
+<file path=ppt/slides/slide13.xml><?xml version="1.0" encoding="utf-8"?>
 <p:sld xmlns:a="http://schemas.openxmlformats.org/drawingml/2006/main" xmlns:r="http://schemas.openxmlformats.org/officeDocument/2006/relationships" xmlns:p="http://schemas.openxmlformats.org/presentationml/2006/main">
   <p:cSld>
     <p:spTree>
@@ -16054,7 +13808,7 @@
               <a:pPr defTabSz="342900">
                 <a:buClrTx/>
               </a:pPr>
-              <a:t>15</a:t>
+              <a:t>13</a:t>
             </a:fld>
             <a:endParaRPr lang="en-US" kern="1200" noProof="0" dirty="0">
               <a:solidFill>
@@ -16082,7 +13836,7 @@
 </p:sld>
 </file>
 
-<file path=ppt/slides/slide16.xml><?xml version="1.0" encoding="utf-8"?>
+<file path=ppt/slides/slide14.xml><?xml version="1.0" encoding="utf-8"?>
 <p:sld xmlns:a="http://schemas.openxmlformats.org/drawingml/2006/main" xmlns:r="http://schemas.openxmlformats.org/officeDocument/2006/relationships" xmlns:p="http://schemas.openxmlformats.org/presentationml/2006/main">
   <p:cSld>
     <p:spTree>
@@ -16559,7 +14313,7 @@
               <a:pPr defTabSz="342900">
                 <a:buClrTx/>
               </a:pPr>
-              <a:t>16</a:t>
+              <a:t>14</a:t>
             </a:fld>
             <a:endParaRPr lang="en-US" kern="1200" noProof="0" dirty="0">
               <a:solidFill>
@@ -18352,7 +16106,7 @@
 </p:sld>
 </file>
 
-<file path=ppt/slides/slide17.xml><?xml version="1.0" encoding="utf-8"?>
+<file path=ppt/slides/slide15.xml><?xml version="1.0" encoding="utf-8"?>
 <p:sld xmlns:a="http://schemas.openxmlformats.org/drawingml/2006/main" xmlns:r="http://schemas.openxmlformats.org/officeDocument/2006/relationships" xmlns:p="http://schemas.openxmlformats.org/presentationml/2006/main">
   <p:cSld>
     <p:spTree>
@@ -18541,7 +16295,7 @@
               <a:pPr defTabSz="342900">
                 <a:buClrTx/>
               </a:pPr>
-              <a:t>17</a:t>
+              <a:t>15</a:t>
             </a:fld>
             <a:endParaRPr lang="en-US" kern="1200" noProof="0" dirty="0">
               <a:solidFill>
@@ -19470,7 +17224,7 @@
 </p:sld>
 </file>
 
-<file path=ppt/slides/slide18.xml><?xml version="1.0" encoding="utf-8"?>
+<file path=ppt/slides/slide16.xml><?xml version="1.0" encoding="utf-8"?>
 <p:sld xmlns:a="http://schemas.openxmlformats.org/drawingml/2006/main" xmlns:r="http://schemas.openxmlformats.org/officeDocument/2006/relationships" xmlns:p="http://schemas.openxmlformats.org/presentationml/2006/main">
   <p:cSld>
     <p:spTree>
@@ -19688,7 +17442,7 @@
               <a:pPr defTabSz="342900">
                 <a:buClrTx/>
               </a:pPr>
-              <a:t>18</a:t>
+              <a:t>16</a:t>
             </a:fld>
             <a:endParaRPr lang="en-US" kern="1200" noProof="0" dirty="0">
               <a:solidFill>
@@ -20945,7 +18699,7 @@
 </p:sld>
 </file>
 
-<file path=ppt/slides/slide19.xml><?xml version="1.0" encoding="utf-8"?>
+<file path=ppt/slides/slide17.xml><?xml version="1.0" encoding="utf-8"?>
 <p:sld xmlns:a="http://schemas.openxmlformats.org/drawingml/2006/main" xmlns:r="http://schemas.openxmlformats.org/officeDocument/2006/relationships" xmlns:p="http://schemas.openxmlformats.org/presentationml/2006/main">
   <p:cSld>
     <p:spTree>
@@ -21788,7 +19542,7 @@
               <a:pPr defTabSz="342900">
                 <a:buClrTx/>
               </a:pPr>
-              <a:t>19</a:t>
+              <a:t>17</a:t>
             </a:fld>
             <a:endParaRPr lang="en-US" kern="1200" noProof="0" dirty="0">
               <a:solidFill>
@@ -22808,206 +20562,7 @@
 </p:sld>
 </file>
 
-<file path=ppt/slides/slide2.xml><?xml version="1.0" encoding="utf-8"?>
-<p:sld xmlns:a="http://schemas.openxmlformats.org/drawingml/2006/main" xmlns:r="http://schemas.openxmlformats.org/officeDocument/2006/relationships" xmlns:p="http://schemas.openxmlformats.org/presentationml/2006/main">
-  <p:cSld>
-    <p:spTree>
-      <p:nvGrpSpPr>
-        <p:cNvPr id="1" name=""/>
-        <p:cNvGrpSpPr/>
-        <p:nvPr/>
-      </p:nvGrpSpPr>
-      <p:grpSpPr>
-        <a:xfrm>
-          <a:off x="0" y="0"/>
-          <a:ext cx="0" cy="0"/>
-          <a:chOff x="0" y="0"/>
-          <a:chExt cx="0" cy="0"/>
-        </a:xfrm>
-      </p:grpSpPr>
-      <p:sp>
-        <p:nvSpPr>
-          <p:cNvPr id="2" name="Titel 1">
-            <a:extLst>
-              <a:ext uri="{FF2B5EF4-FFF2-40B4-BE49-F238E27FC236}">
-                <a16:creationId xmlns:a16="http://schemas.microsoft.com/office/drawing/2014/main" id="{8531110B-6CB5-5994-04AE-824730E5FB94}"/>
-              </a:ext>
-            </a:extLst>
-          </p:cNvPr>
-          <p:cNvSpPr>
-            <a:spLocks noGrp="1"/>
-          </p:cNvSpPr>
-          <p:nvPr>
-            <p:ph type="ctrTitle"/>
-          </p:nvPr>
-        </p:nvSpPr>
-        <p:spPr/>
-        <p:txBody>
-          <a:bodyPr/>
-          <a:lstStyle/>
-          <a:p>
-            <a:r>
-              <a:rPr lang="en-US" noProof="0" dirty="0"/>
-              <a:t>Recap Last Week</a:t>
-            </a:r>
-          </a:p>
-        </p:txBody>
-      </p:sp>
-      <p:sp>
-        <p:nvSpPr>
-          <p:cNvPr id="3" name="Untertitel 2">
-            <a:extLst>
-              <a:ext uri="{FF2B5EF4-FFF2-40B4-BE49-F238E27FC236}">
-                <a16:creationId xmlns:a16="http://schemas.microsoft.com/office/drawing/2014/main" id="{83AD3CD8-E8F2-3C33-7DB9-8804A5B9ABBF}"/>
-              </a:ext>
-            </a:extLst>
-          </p:cNvPr>
-          <p:cNvSpPr>
-            <a:spLocks noGrp="1"/>
-          </p:cNvSpPr>
-          <p:nvPr>
-            <p:ph type="subTitle" idx="1"/>
-          </p:nvPr>
-        </p:nvSpPr>
-        <p:spPr/>
-        <p:txBody>
-          <a:bodyPr/>
-          <a:lstStyle/>
-          <a:p>
-            <a:endParaRPr lang="en-US" noProof="0" dirty="0"/>
-          </a:p>
-        </p:txBody>
-      </p:sp>
-      <p:sp>
-        <p:nvSpPr>
-          <p:cNvPr id="4" name="Fußzeilenplatzhalter 3">
-            <a:extLst>
-              <a:ext uri="{FF2B5EF4-FFF2-40B4-BE49-F238E27FC236}">
-                <a16:creationId xmlns:a16="http://schemas.microsoft.com/office/drawing/2014/main" id="{BB010242-2D10-B3FC-938D-3ADDCFE106B6}"/>
-              </a:ext>
-            </a:extLst>
-          </p:cNvPr>
-          <p:cNvSpPr>
-            <a:spLocks noGrp="1"/>
-          </p:cNvSpPr>
-          <p:nvPr>
-            <p:ph type="ftr" sz="quarter" idx="11"/>
-          </p:nvPr>
-        </p:nvSpPr>
-        <p:spPr/>
-        <p:txBody>
-          <a:bodyPr/>
-          <a:lstStyle/>
-          <a:p>
-            <a:pPr defTabSz="342900">
-              <a:buClrTx/>
-            </a:pPr>
-            <a:r>
-              <a:rPr lang="en-US" kern="1200" noProof="0" dirty="0">
-                <a:solidFill>
-                  <a:srgbClr val="101623">
-                    <a:tint val="75000"/>
-                  </a:srgbClr>
-                </a:solidFill>
-                <a:latin typeface="Calibri" panose="020F0502020204030204"/>
-                <a:ea typeface="+mn-ea"/>
-                <a:cs typeface="+mn-cs"/>
-              </a:rPr>
-              <a:t>Kissan Varatharajan - </a:t>
-            </a:r>
-            <a:r>
-              <a:rPr lang="en-US" kern="1200" noProof="0" dirty="0" err="1">
-                <a:solidFill>
-                  <a:srgbClr val="101623">
-                    <a:tint val="75000"/>
-                  </a:srgbClr>
-                </a:solidFill>
-                <a:latin typeface="Calibri" panose="020F0502020204030204"/>
-                <a:ea typeface="+mn-ea"/>
-                <a:cs typeface="+mn-cs"/>
-              </a:rPr>
-              <a:t>kissanv.github.io</a:t>
-            </a:r>
-            <a:endParaRPr lang="en-US" kern="1200" noProof="0" dirty="0">
-              <a:solidFill>
-                <a:srgbClr val="101623">
-                  <a:tint val="75000"/>
-                </a:srgbClr>
-              </a:solidFill>
-              <a:latin typeface="Calibri" panose="020F0502020204030204"/>
-              <a:ea typeface="+mn-ea"/>
-              <a:cs typeface="+mn-cs"/>
-            </a:endParaRPr>
-          </a:p>
-        </p:txBody>
-      </p:sp>
-      <p:sp>
-        <p:nvSpPr>
-          <p:cNvPr id="5" name="Foliennummernplatzhalter 4">
-            <a:extLst>
-              <a:ext uri="{FF2B5EF4-FFF2-40B4-BE49-F238E27FC236}">
-                <a16:creationId xmlns:a16="http://schemas.microsoft.com/office/drawing/2014/main" id="{36E08D1C-18D4-1751-941C-81AF9A2B8F9A}"/>
-              </a:ext>
-            </a:extLst>
-          </p:cNvPr>
-          <p:cNvSpPr>
-            <a:spLocks noGrp="1"/>
-          </p:cNvSpPr>
-          <p:nvPr>
-            <p:ph type="sldNum" sz="quarter" idx="12"/>
-          </p:nvPr>
-        </p:nvSpPr>
-        <p:spPr/>
-        <p:txBody>
-          <a:bodyPr/>
-          <a:lstStyle/>
-          <a:p>
-            <a:pPr defTabSz="342900">
-              <a:buClrTx/>
-            </a:pPr>
-            <a:fld id="{36EAFFE7-40E2-CA47-82C0-73D0FC591208}" type="slidenum">
-              <a:rPr lang="en-US" kern="1200" noProof="0" smtClean="0">
-                <a:solidFill>
-                  <a:srgbClr val="101623">
-                    <a:tint val="75000"/>
-                  </a:srgbClr>
-                </a:solidFill>
-                <a:latin typeface="Calibri" panose="020F0502020204030204"/>
-                <a:ea typeface="+mn-ea"/>
-                <a:cs typeface="+mn-cs"/>
-              </a:rPr>
-              <a:pPr defTabSz="342900">
-                <a:buClrTx/>
-              </a:pPr>
-              <a:t>2</a:t>
-            </a:fld>
-            <a:endParaRPr lang="en-US" kern="1200" noProof="0" dirty="0">
-              <a:solidFill>
-                <a:srgbClr val="101623">
-                  <a:tint val="75000"/>
-                </a:srgbClr>
-              </a:solidFill>
-              <a:latin typeface="Calibri" panose="020F0502020204030204"/>
-              <a:ea typeface="+mn-ea"/>
-              <a:cs typeface="+mn-cs"/>
-            </a:endParaRPr>
-          </a:p>
-        </p:txBody>
-      </p:sp>
-    </p:spTree>
-    <p:extLst>
-      <p:ext uri="{BB962C8B-B14F-4D97-AF65-F5344CB8AC3E}">
-        <p14:creationId xmlns:p14="http://schemas.microsoft.com/office/powerpoint/2010/main" val="2644219736"/>
-      </p:ext>
-    </p:extLst>
-  </p:cSld>
-  <p:clrMapOvr>
-    <a:masterClrMapping/>
-  </p:clrMapOvr>
-</p:sld>
-</file>
-
-<file path=ppt/slides/slide20.xml><?xml version="1.0" encoding="utf-8"?>
+<file path=ppt/slides/slide18.xml><?xml version="1.0" encoding="utf-8"?>
 <p:sld xmlns:a="http://schemas.openxmlformats.org/drawingml/2006/main" xmlns:r="http://schemas.openxmlformats.org/officeDocument/2006/relationships" xmlns:p="http://schemas.openxmlformats.org/presentationml/2006/main">
   <p:cSld>
     <p:spTree>
@@ -23271,7 +20826,7 @@
               <a:pPr defTabSz="342900">
                 <a:buClrTx/>
               </a:pPr>
-              <a:t>20</a:t>
+              <a:t>18</a:t>
             </a:fld>
             <a:endParaRPr lang="en-US" kern="1200" noProof="0" dirty="0">
               <a:solidFill>
@@ -25032,7 +22587,7 @@
 </p:sld>
 </file>
 
-<file path=ppt/slides/slide21.xml><?xml version="1.0" encoding="utf-8"?>
+<file path=ppt/slides/slide19.xml><?xml version="1.0" encoding="utf-8"?>
 <p:sld xmlns:a="http://schemas.openxmlformats.org/drawingml/2006/main" xmlns:r="http://schemas.openxmlformats.org/officeDocument/2006/relationships" xmlns:p="http://schemas.openxmlformats.org/presentationml/2006/main">
   <p:cSld>
     <p:spTree>
@@ -25629,7 +23184,7 @@
               <a:pPr defTabSz="342900">
                 <a:buClrTx/>
               </a:pPr>
-              <a:t>21</a:t>
+              <a:t>19</a:t>
             </a:fld>
             <a:endParaRPr lang="en-US" kern="1200" noProof="0" dirty="0">
               <a:solidFill>
@@ -26594,7 +24149,206 @@
 </p:sld>
 </file>
 
-<file path=ppt/slides/slide22.xml><?xml version="1.0" encoding="utf-8"?>
+<file path=ppt/slides/slide2.xml><?xml version="1.0" encoding="utf-8"?>
+<p:sld xmlns:a="http://schemas.openxmlformats.org/drawingml/2006/main" xmlns:r="http://schemas.openxmlformats.org/officeDocument/2006/relationships" xmlns:p="http://schemas.openxmlformats.org/presentationml/2006/main">
+  <p:cSld>
+    <p:spTree>
+      <p:nvGrpSpPr>
+        <p:cNvPr id="1" name=""/>
+        <p:cNvGrpSpPr/>
+        <p:nvPr/>
+      </p:nvGrpSpPr>
+      <p:grpSpPr>
+        <a:xfrm>
+          <a:off x="0" y="0"/>
+          <a:ext cx="0" cy="0"/>
+          <a:chOff x="0" y="0"/>
+          <a:chExt cx="0" cy="0"/>
+        </a:xfrm>
+      </p:grpSpPr>
+      <p:sp>
+        <p:nvSpPr>
+          <p:cNvPr id="2" name="Titel 1">
+            <a:extLst>
+              <a:ext uri="{FF2B5EF4-FFF2-40B4-BE49-F238E27FC236}">
+                <a16:creationId xmlns:a16="http://schemas.microsoft.com/office/drawing/2014/main" id="{8531110B-6CB5-5994-04AE-824730E5FB94}"/>
+              </a:ext>
+            </a:extLst>
+          </p:cNvPr>
+          <p:cNvSpPr>
+            <a:spLocks noGrp="1"/>
+          </p:cNvSpPr>
+          <p:nvPr>
+            <p:ph type="ctrTitle"/>
+          </p:nvPr>
+        </p:nvSpPr>
+        <p:spPr/>
+        <p:txBody>
+          <a:bodyPr/>
+          <a:lstStyle/>
+          <a:p>
+            <a:r>
+              <a:rPr lang="en-US" noProof="0" dirty="0"/>
+              <a:t>Recap Last Week</a:t>
+            </a:r>
+          </a:p>
+        </p:txBody>
+      </p:sp>
+      <p:sp>
+        <p:nvSpPr>
+          <p:cNvPr id="3" name="Untertitel 2">
+            <a:extLst>
+              <a:ext uri="{FF2B5EF4-FFF2-40B4-BE49-F238E27FC236}">
+                <a16:creationId xmlns:a16="http://schemas.microsoft.com/office/drawing/2014/main" id="{83AD3CD8-E8F2-3C33-7DB9-8804A5B9ABBF}"/>
+              </a:ext>
+            </a:extLst>
+          </p:cNvPr>
+          <p:cNvSpPr>
+            <a:spLocks noGrp="1"/>
+          </p:cNvSpPr>
+          <p:nvPr>
+            <p:ph type="subTitle" idx="1"/>
+          </p:nvPr>
+        </p:nvSpPr>
+        <p:spPr/>
+        <p:txBody>
+          <a:bodyPr/>
+          <a:lstStyle/>
+          <a:p>
+            <a:endParaRPr lang="en-US" noProof="0" dirty="0"/>
+          </a:p>
+        </p:txBody>
+      </p:sp>
+      <p:sp>
+        <p:nvSpPr>
+          <p:cNvPr id="4" name="Fußzeilenplatzhalter 3">
+            <a:extLst>
+              <a:ext uri="{FF2B5EF4-FFF2-40B4-BE49-F238E27FC236}">
+                <a16:creationId xmlns:a16="http://schemas.microsoft.com/office/drawing/2014/main" id="{BB010242-2D10-B3FC-938D-3ADDCFE106B6}"/>
+              </a:ext>
+            </a:extLst>
+          </p:cNvPr>
+          <p:cNvSpPr>
+            <a:spLocks noGrp="1"/>
+          </p:cNvSpPr>
+          <p:nvPr>
+            <p:ph type="ftr" sz="quarter" idx="11"/>
+          </p:nvPr>
+        </p:nvSpPr>
+        <p:spPr/>
+        <p:txBody>
+          <a:bodyPr/>
+          <a:lstStyle/>
+          <a:p>
+            <a:pPr defTabSz="342900">
+              <a:buClrTx/>
+            </a:pPr>
+            <a:r>
+              <a:rPr lang="en-US" kern="1200" noProof="0" dirty="0">
+                <a:solidFill>
+                  <a:srgbClr val="101623">
+                    <a:tint val="75000"/>
+                  </a:srgbClr>
+                </a:solidFill>
+                <a:latin typeface="Calibri" panose="020F0502020204030204"/>
+                <a:ea typeface="+mn-ea"/>
+                <a:cs typeface="+mn-cs"/>
+              </a:rPr>
+              <a:t>Kissan Varatharajan - </a:t>
+            </a:r>
+            <a:r>
+              <a:rPr lang="en-US" kern="1200" noProof="0" dirty="0" err="1">
+                <a:solidFill>
+                  <a:srgbClr val="101623">
+                    <a:tint val="75000"/>
+                  </a:srgbClr>
+                </a:solidFill>
+                <a:latin typeface="Calibri" panose="020F0502020204030204"/>
+                <a:ea typeface="+mn-ea"/>
+                <a:cs typeface="+mn-cs"/>
+              </a:rPr>
+              <a:t>kissanv.github.io</a:t>
+            </a:r>
+            <a:endParaRPr lang="en-US" kern="1200" noProof="0" dirty="0">
+              <a:solidFill>
+                <a:srgbClr val="101623">
+                  <a:tint val="75000"/>
+                </a:srgbClr>
+              </a:solidFill>
+              <a:latin typeface="Calibri" panose="020F0502020204030204"/>
+              <a:ea typeface="+mn-ea"/>
+              <a:cs typeface="+mn-cs"/>
+            </a:endParaRPr>
+          </a:p>
+        </p:txBody>
+      </p:sp>
+      <p:sp>
+        <p:nvSpPr>
+          <p:cNvPr id="5" name="Foliennummernplatzhalter 4">
+            <a:extLst>
+              <a:ext uri="{FF2B5EF4-FFF2-40B4-BE49-F238E27FC236}">
+                <a16:creationId xmlns:a16="http://schemas.microsoft.com/office/drawing/2014/main" id="{36E08D1C-18D4-1751-941C-81AF9A2B8F9A}"/>
+              </a:ext>
+            </a:extLst>
+          </p:cNvPr>
+          <p:cNvSpPr>
+            <a:spLocks noGrp="1"/>
+          </p:cNvSpPr>
+          <p:nvPr>
+            <p:ph type="sldNum" sz="quarter" idx="12"/>
+          </p:nvPr>
+        </p:nvSpPr>
+        <p:spPr/>
+        <p:txBody>
+          <a:bodyPr/>
+          <a:lstStyle/>
+          <a:p>
+            <a:pPr defTabSz="342900">
+              <a:buClrTx/>
+            </a:pPr>
+            <a:fld id="{36EAFFE7-40E2-CA47-82C0-73D0FC591208}" type="slidenum">
+              <a:rPr lang="en-US" kern="1200" noProof="0" smtClean="0">
+                <a:solidFill>
+                  <a:srgbClr val="101623">
+                    <a:tint val="75000"/>
+                  </a:srgbClr>
+                </a:solidFill>
+                <a:latin typeface="Calibri" panose="020F0502020204030204"/>
+                <a:ea typeface="+mn-ea"/>
+                <a:cs typeface="+mn-cs"/>
+              </a:rPr>
+              <a:pPr defTabSz="342900">
+                <a:buClrTx/>
+              </a:pPr>
+              <a:t>2</a:t>
+            </a:fld>
+            <a:endParaRPr lang="en-US" kern="1200" noProof="0" dirty="0">
+              <a:solidFill>
+                <a:srgbClr val="101623">
+                  <a:tint val="75000"/>
+                </a:srgbClr>
+              </a:solidFill>
+              <a:latin typeface="Calibri" panose="020F0502020204030204"/>
+              <a:ea typeface="+mn-ea"/>
+              <a:cs typeface="+mn-cs"/>
+            </a:endParaRPr>
+          </a:p>
+        </p:txBody>
+      </p:sp>
+    </p:spTree>
+    <p:extLst>
+      <p:ext uri="{BB962C8B-B14F-4D97-AF65-F5344CB8AC3E}">
+        <p14:creationId xmlns:p14="http://schemas.microsoft.com/office/powerpoint/2010/main" val="2644219736"/>
+      </p:ext>
+    </p:extLst>
+  </p:cSld>
+  <p:clrMapOvr>
+    <a:masterClrMapping/>
+  </p:clrMapOvr>
+</p:sld>
+</file>
+
+<file path=ppt/slides/slide20.xml><?xml version="1.0" encoding="utf-8"?>
 <p:sld xmlns:a="http://schemas.openxmlformats.org/drawingml/2006/main" xmlns:r="http://schemas.openxmlformats.org/officeDocument/2006/relationships" xmlns:p="http://schemas.openxmlformats.org/presentationml/2006/main">
   <p:cSld>
     <p:spTree>
@@ -26775,7 +24529,7 @@
               <a:pPr defTabSz="342900">
                 <a:buClrTx/>
               </a:pPr>
-              <a:t>22</a:t>
+              <a:t>20</a:t>
             </a:fld>
             <a:endParaRPr lang="en-US" kern="1200" noProof="0" dirty="0">
               <a:solidFill>
@@ -27365,7 +25119,7 @@
 </p:sld>
 </file>
 
-<file path=ppt/slides/slide23.xml><?xml version="1.0" encoding="utf-8"?>
+<file path=ppt/slides/slide21.xml><?xml version="1.0" encoding="utf-8"?>
 <p:sld xmlns:a="http://schemas.openxmlformats.org/drawingml/2006/main" xmlns:r="http://schemas.openxmlformats.org/officeDocument/2006/relationships" xmlns:p="http://schemas.openxmlformats.org/presentationml/2006/main">
   <p:cSld>
     <p:spTree>
@@ -27536,7 +25290,7 @@
               <a:pPr defTabSz="342900">
                 <a:buClrTx/>
               </a:pPr>
-              <a:t>23</a:t>
+              <a:t>21</a:t>
             </a:fld>
             <a:endParaRPr lang="en-US" kern="1200" noProof="0" dirty="0">
               <a:solidFill>
@@ -27564,7 +25318,7 @@
 </p:sld>
 </file>
 
-<file path=ppt/slides/slide24.xml><?xml version="1.0" encoding="utf-8"?>
+<file path=ppt/slides/slide22.xml><?xml version="1.0" encoding="utf-8"?>
 <p:sld xmlns:a="http://schemas.openxmlformats.org/drawingml/2006/main" xmlns:r="http://schemas.openxmlformats.org/officeDocument/2006/relationships" xmlns:p="http://schemas.openxmlformats.org/presentationml/2006/main">
   <p:cSld>
     <p:spTree>
@@ -27744,7 +25498,7 @@
               <a:pPr defTabSz="342900">
                 <a:buClrTx/>
               </a:pPr>
-              <a:t>24</a:t>
+              <a:t>22</a:t>
             </a:fld>
             <a:endParaRPr lang="en-US" kern="1200" noProof="0" dirty="0">
               <a:solidFill>
@@ -31470,7 +29224,7 @@
 </p:sld>
 </file>
 
-<file path=ppt/slides/slide25.xml><?xml version="1.0" encoding="utf-8"?>
+<file path=ppt/slides/slide23.xml><?xml version="1.0" encoding="utf-8"?>
 <p:sld xmlns:a="http://schemas.openxmlformats.org/drawingml/2006/main" xmlns:r="http://schemas.openxmlformats.org/officeDocument/2006/relationships" xmlns:p="http://schemas.openxmlformats.org/presentationml/2006/main">
   <p:cSld>
     <p:spTree>
@@ -31788,7 +29542,7 @@
               <a:pPr defTabSz="342900">
                 <a:buClrTx/>
               </a:pPr>
-              <a:t>25</a:t>
+              <a:t>23</a:t>
             </a:fld>
             <a:endParaRPr lang="en-US" kern="1200" noProof="0" dirty="0">
               <a:solidFill>
@@ -32553,7 +30307,7 @@
 </p:sld>
 </file>
 
-<file path=ppt/slides/slide26.xml><?xml version="1.0" encoding="utf-8"?>
+<file path=ppt/slides/slide24.xml><?xml version="1.0" encoding="utf-8"?>
 <p:sld xmlns:a="http://schemas.openxmlformats.org/drawingml/2006/main" xmlns:r="http://schemas.openxmlformats.org/officeDocument/2006/relationships" xmlns:p="http://schemas.openxmlformats.org/presentationml/2006/main">
   <p:cSld>
     <p:spTree>
@@ -33098,7 +30852,7 @@
               <a:pPr defTabSz="342900">
                 <a:buClrTx/>
               </a:pPr>
-              <a:t>26</a:t>
+              <a:t>24</a:t>
             </a:fld>
             <a:endParaRPr lang="en-US" kern="1200" noProof="0" dirty="0">
               <a:solidFill>
@@ -34101,7 +31855,7 @@
 </p:sld>
 </file>
 
-<file path=ppt/slides/slide27.xml><?xml version="1.0" encoding="utf-8"?>
+<file path=ppt/slides/slide25.xml><?xml version="1.0" encoding="utf-8"?>
 <p:sld xmlns:a="http://schemas.openxmlformats.org/drawingml/2006/main" xmlns:r="http://schemas.openxmlformats.org/officeDocument/2006/relationships" xmlns:p="http://schemas.openxmlformats.org/presentationml/2006/main">
   <p:cSld>
     <p:spTree>
@@ -34272,7 +32026,7 @@
               <a:pPr defTabSz="342900">
                 <a:buClrTx/>
               </a:pPr>
-              <a:t>27</a:t>
+              <a:t>25</a:t>
             </a:fld>
             <a:endParaRPr lang="en-US" kern="1200" noProof="0" dirty="0">
               <a:solidFill>
@@ -34300,7 +32054,7 @@
 </p:sld>
 </file>
 
-<file path=ppt/slides/slide28.xml><?xml version="1.0" encoding="utf-8"?>
+<file path=ppt/slides/slide26.xml><?xml version="1.0" encoding="utf-8"?>
 <p:sld xmlns:a="http://schemas.openxmlformats.org/drawingml/2006/main" xmlns:r="http://schemas.openxmlformats.org/officeDocument/2006/relationships" xmlns:p="http://schemas.openxmlformats.org/presentationml/2006/main">
   <p:cSld>
     <p:spTree>
@@ -34504,7 +32258,7 @@
               <a:pPr defTabSz="342900">
                 <a:buClrTx/>
               </a:pPr>
-              <a:t>28</a:t>
+              <a:t>26</a:t>
             </a:fld>
             <a:endParaRPr lang="en-US" kern="1200" noProof="0" dirty="0">
               <a:solidFill>
@@ -35011,1328 +32765,6 @@
   <p:cSld>
     <p:spTree>
       <p:nvGrpSpPr>
-        <p:cNvPr id="1" name="">
-          <a:extLst>
-            <a:ext uri="{FF2B5EF4-FFF2-40B4-BE49-F238E27FC236}">
-              <a16:creationId xmlns:a16="http://schemas.microsoft.com/office/drawing/2014/main" id="{CEB6489D-6A0E-5D5E-E0E0-AD39DC61D43C}"/>
-            </a:ext>
-          </a:extLst>
-        </p:cNvPr>
-        <p:cNvGrpSpPr/>
-        <p:nvPr/>
-      </p:nvGrpSpPr>
-      <p:grpSpPr>
-        <a:xfrm>
-          <a:off x="0" y="0"/>
-          <a:ext cx="0" cy="0"/>
-          <a:chOff x="0" y="0"/>
-          <a:chExt cx="0" cy="0"/>
-        </a:xfrm>
-      </p:grpSpPr>
-      <p:sp>
-        <p:nvSpPr>
-          <p:cNvPr id="2" name="Titel 1">
-            <a:extLst>
-              <a:ext uri="{FF2B5EF4-FFF2-40B4-BE49-F238E27FC236}">
-                <a16:creationId xmlns:a16="http://schemas.microsoft.com/office/drawing/2014/main" id="{2F6E2780-34DF-F51A-3675-5841E8185B62}"/>
-              </a:ext>
-            </a:extLst>
-          </p:cNvPr>
-          <p:cNvSpPr>
-            <a:spLocks noGrp="1"/>
-          </p:cNvSpPr>
-          <p:nvPr>
-            <p:ph type="title"/>
-          </p:nvPr>
-        </p:nvSpPr>
-        <p:spPr/>
-        <p:txBody>
-          <a:bodyPr/>
-          <a:lstStyle/>
-          <a:p>
-            <a:r>
-              <a:rPr lang="en-US" noProof="0" dirty="0"/>
-              <a:t>Quiz 1</a:t>
-            </a:r>
-          </a:p>
-        </p:txBody>
-      </p:sp>
-      <p:sp>
-        <p:nvSpPr>
-          <p:cNvPr id="3" name="Inhaltsplatzhalter 2">
-            <a:extLst>
-              <a:ext uri="{FF2B5EF4-FFF2-40B4-BE49-F238E27FC236}">
-                <a16:creationId xmlns:a16="http://schemas.microsoft.com/office/drawing/2014/main" id="{83DAD5C8-7938-521F-C9AB-C49E9E72CB1C}"/>
-              </a:ext>
-            </a:extLst>
-          </p:cNvPr>
-          <p:cNvSpPr>
-            <a:spLocks noGrp="1"/>
-          </p:cNvSpPr>
-          <p:nvPr>
-            <p:ph idx="1"/>
-          </p:nvPr>
-        </p:nvSpPr>
-        <p:spPr>
-          <a:xfrm>
-            <a:off x="546354" y="1369219"/>
-            <a:ext cx="8679942" cy="3263504"/>
-          </a:xfrm>
-        </p:spPr>
-        <p:txBody>
-          <a:bodyPr/>
-          <a:lstStyle/>
-          <a:p>
-            <a:pPr marL="0" indent="0">
-              <a:buNone/>
-            </a:pPr>
-            <a:r>
-              <a:rPr lang="en-US" noProof="0" dirty="0"/>
-              <a:t>The Root Locus plot is a plot that shows…</a:t>
-            </a:r>
-          </a:p>
-        </p:txBody>
-      </p:sp>
-      <p:sp>
-        <p:nvSpPr>
-          <p:cNvPr id="4" name="Fußzeilenplatzhalter 3">
-            <a:extLst>
-              <a:ext uri="{FF2B5EF4-FFF2-40B4-BE49-F238E27FC236}">
-                <a16:creationId xmlns:a16="http://schemas.microsoft.com/office/drawing/2014/main" id="{AFC60914-B4B8-C68A-A356-C1B1A5DA76C5}"/>
-              </a:ext>
-            </a:extLst>
-          </p:cNvPr>
-          <p:cNvSpPr>
-            <a:spLocks noGrp="1"/>
-          </p:cNvSpPr>
-          <p:nvPr>
-            <p:ph type="ftr" sz="quarter" idx="11"/>
-          </p:nvPr>
-        </p:nvSpPr>
-        <p:spPr/>
-        <p:txBody>
-          <a:bodyPr/>
-          <a:lstStyle/>
-          <a:p>
-            <a:pPr defTabSz="342900">
-              <a:buClrTx/>
-            </a:pPr>
-            <a:r>
-              <a:rPr lang="en-US" kern="1200" noProof="0" dirty="0">
-                <a:solidFill>
-                  <a:srgbClr val="101623">
-                    <a:tint val="75000"/>
-                  </a:srgbClr>
-                </a:solidFill>
-                <a:latin typeface="Calibri" panose="020F0502020204030204"/>
-                <a:ea typeface="+mn-ea"/>
-                <a:cs typeface="+mn-cs"/>
-              </a:rPr>
-              <a:t>Kissan Varatharajan - </a:t>
-            </a:r>
-            <a:r>
-              <a:rPr lang="en-US" kern="1200" noProof="0" dirty="0" err="1">
-                <a:solidFill>
-                  <a:srgbClr val="101623">
-                    <a:tint val="75000"/>
-                  </a:srgbClr>
-                </a:solidFill>
-                <a:latin typeface="Calibri" panose="020F0502020204030204"/>
-                <a:ea typeface="+mn-ea"/>
-                <a:cs typeface="+mn-cs"/>
-              </a:rPr>
-              <a:t>kissanv.github.io</a:t>
-            </a:r>
-            <a:endParaRPr lang="en-US" kern="1200" noProof="0" dirty="0">
-              <a:solidFill>
-                <a:srgbClr val="101623">
-                  <a:tint val="75000"/>
-                </a:srgbClr>
-              </a:solidFill>
-              <a:latin typeface="Calibri" panose="020F0502020204030204"/>
-              <a:ea typeface="+mn-ea"/>
-              <a:cs typeface="+mn-cs"/>
-            </a:endParaRPr>
-          </a:p>
-        </p:txBody>
-      </p:sp>
-      <p:sp>
-        <p:nvSpPr>
-          <p:cNvPr id="5" name="Foliennummernplatzhalter 4">
-            <a:extLst>
-              <a:ext uri="{FF2B5EF4-FFF2-40B4-BE49-F238E27FC236}">
-                <a16:creationId xmlns:a16="http://schemas.microsoft.com/office/drawing/2014/main" id="{76C2E7C4-5F38-F3BD-96DF-8220F21FDC57}"/>
-              </a:ext>
-            </a:extLst>
-          </p:cNvPr>
-          <p:cNvSpPr>
-            <a:spLocks noGrp="1"/>
-          </p:cNvSpPr>
-          <p:nvPr>
-            <p:ph type="sldNum" sz="quarter" idx="12"/>
-          </p:nvPr>
-        </p:nvSpPr>
-        <p:spPr/>
-        <p:txBody>
-          <a:bodyPr/>
-          <a:lstStyle/>
-          <a:p>
-            <a:pPr defTabSz="342900">
-              <a:buClrTx/>
-            </a:pPr>
-            <a:fld id="{36EAFFE7-40E2-CA47-82C0-73D0FC591208}" type="slidenum">
-              <a:rPr lang="en-US" kern="1200" noProof="0" smtClean="0">
-                <a:solidFill>
-                  <a:srgbClr val="101623">
-                    <a:tint val="75000"/>
-                  </a:srgbClr>
-                </a:solidFill>
-                <a:latin typeface="Calibri" panose="020F0502020204030204"/>
-                <a:ea typeface="+mn-ea"/>
-                <a:cs typeface="+mn-cs"/>
-              </a:rPr>
-              <a:pPr defTabSz="342900">
-                <a:buClrTx/>
-              </a:pPr>
-              <a:t>4</a:t>
-            </a:fld>
-            <a:endParaRPr lang="en-US" kern="1200" noProof="0" dirty="0">
-              <a:solidFill>
-                <a:srgbClr val="101623">
-                  <a:tint val="75000"/>
-                </a:srgbClr>
-              </a:solidFill>
-              <a:latin typeface="Calibri" panose="020F0502020204030204"/>
-              <a:ea typeface="+mn-ea"/>
-              <a:cs typeface="+mn-cs"/>
-            </a:endParaRPr>
-          </a:p>
-        </p:txBody>
-      </p:sp>
-      <p:sp>
-        <p:nvSpPr>
-          <p:cNvPr id="6" name="Rectangle: Rounded Corners 18">
-            <a:extLst>
-              <a:ext uri="{FF2B5EF4-FFF2-40B4-BE49-F238E27FC236}">
-                <a16:creationId xmlns:a16="http://schemas.microsoft.com/office/drawing/2014/main" id="{82EE5A76-C200-C6EE-9452-0CC4BE2171AB}"/>
-              </a:ext>
-            </a:extLst>
-          </p:cNvPr>
-          <p:cNvSpPr/>
-          <p:nvPr/>
-        </p:nvSpPr>
-        <p:spPr>
-          <a:xfrm>
-            <a:off x="628649" y="3425393"/>
-            <a:ext cx="6653599" cy="498355"/>
-          </a:xfrm>
-          <a:prstGeom prst="roundRect">
-            <a:avLst>
-              <a:gd name="adj" fmla="val 11229"/>
-            </a:avLst>
-          </a:prstGeom>
-          <a:solidFill>
-            <a:schemeClr val="accent5">
-              <a:lumMod val="40000"/>
-              <a:lumOff val="60000"/>
-            </a:schemeClr>
-          </a:solidFill>
-          <a:ln>
-            <a:noFill/>
-          </a:ln>
-        </p:spPr>
-        <p:style>
-          <a:lnRef idx="2">
-            <a:schemeClr val="dk1">
-              <a:shade val="50000"/>
-            </a:schemeClr>
-          </a:lnRef>
-          <a:fillRef idx="1">
-            <a:schemeClr val="dk1"/>
-          </a:fillRef>
-          <a:effectRef idx="0">
-            <a:schemeClr val="dk1"/>
-          </a:effectRef>
-          <a:fontRef idx="minor">
-            <a:schemeClr val="lt1"/>
-          </a:fontRef>
-        </p:style>
-        <p:txBody>
-          <a:bodyPr lIns="182880" rtlCol="0" anchor="ctr"/>
-          <a:lstStyle/>
-          <a:p>
-            <a:pPr>
-              <a:spcBef>
-                <a:spcPts val="200"/>
-              </a:spcBef>
-            </a:pPr>
-            <a:r>
-              <a:rPr lang="en-US" b="1" noProof="0" dirty="0">
-                <a:solidFill>
-                  <a:schemeClr val="tx1"/>
-                </a:solidFill>
-                <a:latin typeface="Segoe UI Black" panose="020B0A02040204020203" pitchFamily="34" charset="0"/>
-                <a:ea typeface="Segoe UI Black" panose="020B0A02040204020203" pitchFamily="34" charset="0"/>
-              </a:rPr>
-              <a:t>C.   </a:t>
-            </a:r>
-            <a:r>
-              <a:rPr lang="en-US" b="1" noProof="0" dirty="0">
-                <a:solidFill>
-                  <a:schemeClr val="tx1"/>
-                </a:solidFill>
-                <a:latin typeface="Segoe UI Semibold" panose="020B0702040204020203" pitchFamily="34" charset="0"/>
-                <a:ea typeface="Segoe UI Black" panose="020B0A02040204020203" pitchFamily="34" charset="0"/>
-                <a:cs typeface="Segoe UI Semibold" panose="020B0702040204020203" pitchFamily="34" charset="0"/>
-              </a:rPr>
-              <a:t>that shows us how a closed-loop system behaves when we close our eyes</a:t>
-            </a:r>
-            <a:endParaRPr lang="en-US" b="1" noProof="0" dirty="0">
-              <a:solidFill>
-                <a:schemeClr val="tx1"/>
-              </a:solidFill>
-              <a:latin typeface="Segoe UI Semibold" panose="020B0702040204020203" pitchFamily="34" charset="0"/>
-              <a:cs typeface="Segoe UI Semibold" panose="020B0702040204020203" pitchFamily="34" charset="0"/>
-            </a:endParaRPr>
-          </a:p>
-        </p:txBody>
-      </p:sp>
-      <p:sp>
-        <p:nvSpPr>
-          <p:cNvPr id="7" name="Rectangle: Rounded Corners 18">
-            <a:extLst>
-              <a:ext uri="{FF2B5EF4-FFF2-40B4-BE49-F238E27FC236}">
-                <a16:creationId xmlns:a16="http://schemas.microsoft.com/office/drawing/2014/main" id="{85F11967-CB17-08CA-3EE9-28CBF1E78BE8}"/>
-              </a:ext>
-            </a:extLst>
-          </p:cNvPr>
-          <p:cNvSpPr/>
-          <p:nvPr/>
-        </p:nvSpPr>
-        <p:spPr>
-          <a:xfrm>
-            <a:off x="628650" y="2751793"/>
-            <a:ext cx="6653598" cy="498355"/>
-          </a:xfrm>
-          <a:prstGeom prst="roundRect">
-            <a:avLst>
-              <a:gd name="adj" fmla="val 11229"/>
-            </a:avLst>
-          </a:prstGeom>
-          <a:solidFill>
-            <a:schemeClr val="accent3"/>
-          </a:solidFill>
-          <a:ln>
-            <a:noFill/>
-          </a:ln>
-        </p:spPr>
-        <p:style>
-          <a:lnRef idx="2">
-            <a:schemeClr val="dk1">
-              <a:shade val="50000"/>
-            </a:schemeClr>
-          </a:lnRef>
-          <a:fillRef idx="1">
-            <a:schemeClr val="dk1"/>
-          </a:fillRef>
-          <a:effectRef idx="0">
-            <a:schemeClr val="dk1"/>
-          </a:effectRef>
-          <a:fontRef idx="minor">
-            <a:schemeClr val="lt1"/>
-          </a:fontRef>
-        </p:style>
-        <p:txBody>
-          <a:bodyPr lIns="182880" rtlCol="0" anchor="ctr"/>
-          <a:lstStyle/>
-          <a:p>
-            <a:pPr>
-              <a:spcBef>
-                <a:spcPts val="200"/>
-              </a:spcBef>
-            </a:pPr>
-            <a:r>
-              <a:rPr lang="en-US" b="1" noProof="0" dirty="0">
-                <a:solidFill>
-                  <a:schemeClr val="tx1"/>
-                </a:solidFill>
-                <a:latin typeface="Segoe UI Black" panose="020B0A02040204020203" pitchFamily="34" charset="0"/>
-                <a:ea typeface="Segoe UI Black" panose="020B0A02040204020203" pitchFamily="34" charset="0"/>
-              </a:rPr>
-              <a:t>B.   </a:t>
-            </a:r>
-            <a:r>
-              <a:rPr lang="en-US" b="1" noProof="0" dirty="0">
-                <a:solidFill>
-                  <a:schemeClr val="tx1"/>
-                </a:solidFill>
-                <a:latin typeface="Segoe UI Semibold" panose="020B0702040204020203" pitchFamily="34" charset="0"/>
-                <a:ea typeface="Segoe UI Black" panose="020B0A02040204020203" pitchFamily="34" charset="0"/>
-                <a:cs typeface="Segoe UI Semibold" panose="020B0702040204020203" pitchFamily="34" charset="0"/>
-              </a:rPr>
-              <a:t>that shows us how a closed-loop system behaves for different gains</a:t>
-            </a:r>
-            <a:endParaRPr lang="en-US" b="1" noProof="0" dirty="0">
-              <a:solidFill>
-                <a:schemeClr val="tx1"/>
-              </a:solidFill>
-              <a:latin typeface="Segoe UI Semibold" panose="020B0702040204020203" pitchFamily="34" charset="0"/>
-              <a:cs typeface="Segoe UI Semibold" panose="020B0702040204020203" pitchFamily="34" charset="0"/>
-            </a:endParaRPr>
-          </a:p>
-        </p:txBody>
-      </p:sp>
-      <p:sp>
-        <p:nvSpPr>
-          <p:cNvPr id="8" name="Rectangle: Rounded Corners 18">
-            <a:extLst>
-              <a:ext uri="{FF2B5EF4-FFF2-40B4-BE49-F238E27FC236}">
-                <a16:creationId xmlns:a16="http://schemas.microsoft.com/office/drawing/2014/main" id="{2208B588-30C7-DE10-E8EE-E3D52C0C0F53}"/>
-              </a:ext>
-            </a:extLst>
-          </p:cNvPr>
-          <p:cNvSpPr/>
-          <p:nvPr/>
-        </p:nvSpPr>
-        <p:spPr>
-          <a:xfrm>
-            <a:off x="628650" y="2073395"/>
-            <a:ext cx="6653598" cy="498355"/>
-          </a:xfrm>
-          <a:prstGeom prst="roundRect">
-            <a:avLst>
-              <a:gd name="adj" fmla="val 11229"/>
-            </a:avLst>
-          </a:prstGeom>
-          <a:solidFill>
-            <a:schemeClr val="accent5">
-              <a:lumMod val="40000"/>
-              <a:lumOff val="60000"/>
-            </a:schemeClr>
-          </a:solidFill>
-          <a:ln>
-            <a:noFill/>
-          </a:ln>
-        </p:spPr>
-        <p:style>
-          <a:lnRef idx="2">
-            <a:schemeClr val="dk1">
-              <a:shade val="50000"/>
-            </a:schemeClr>
-          </a:lnRef>
-          <a:fillRef idx="1">
-            <a:schemeClr val="dk1"/>
-          </a:fillRef>
-          <a:effectRef idx="0">
-            <a:schemeClr val="dk1"/>
-          </a:effectRef>
-          <a:fontRef idx="minor">
-            <a:schemeClr val="lt1"/>
-          </a:fontRef>
-        </p:style>
-        <p:txBody>
-          <a:bodyPr lIns="182880" rtlCol="0" anchor="ctr"/>
-          <a:lstStyle/>
-          <a:p>
-            <a:pPr>
-              <a:spcBef>
-                <a:spcPts val="200"/>
-              </a:spcBef>
-            </a:pPr>
-            <a:r>
-              <a:rPr lang="en-US" b="1" noProof="0" dirty="0">
-                <a:solidFill>
-                  <a:schemeClr val="tx1"/>
-                </a:solidFill>
-                <a:latin typeface="Segoe UI Black" panose="020B0A02040204020203" pitchFamily="34" charset="0"/>
-                <a:ea typeface="Segoe UI Black" panose="020B0A02040204020203" pitchFamily="34" charset="0"/>
-              </a:rPr>
-              <a:t>A.   </a:t>
-            </a:r>
-            <a:r>
-              <a:rPr lang="en-US" b="1" noProof="0" dirty="0">
-                <a:solidFill>
-                  <a:schemeClr val="tx1"/>
-                </a:solidFill>
-                <a:latin typeface="Segoe UI Semibold" panose="020B0702040204020203" pitchFamily="34" charset="0"/>
-                <a:ea typeface="Segoe UI Black" panose="020B0A02040204020203" pitchFamily="34" charset="0"/>
-                <a:cs typeface="Segoe UI Semibold" panose="020B0702040204020203" pitchFamily="34" charset="0"/>
-              </a:rPr>
-              <a:t>that shows us how a closed-loop system behaves for different poles/zeros</a:t>
-            </a:r>
-            <a:endParaRPr lang="en-US" b="1" noProof="0" dirty="0">
-              <a:solidFill>
-                <a:schemeClr val="tx1"/>
-              </a:solidFill>
-              <a:latin typeface="Segoe UI Semibold" panose="020B0702040204020203" pitchFamily="34" charset="0"/>
-              <a:cs typeface="Segoe UI Semibold" panose="020B0702040204020203" pitchFamily="34" charset="0"/>
-            </a:endParaRPr>
-          </a:p>
-        </p:txBody>
-      </p:sp>
-      <p:grpSp>
-        <p:nvGrpSpPr>
-          <p:cNvPr id="9" name="Gruppieren 8">
-            <a:extLst>
-              <a:ext uri="{FF2B5EF4-FFF2-40B4-BE49-F238E27FC236}">
-                <a16:creationId xmlns:a16="http://schemas.microsoft.com/office/drawing/2014/main" id="{7B363529-1A6D-D925-9639-CFE98106AF67}"/>
-              </a:ext>
-            </a:extLst>
-          </p:cNvPr>
-          <p:cNvGrpSpPr/>
-          <p:nvPr/>
-        </p:nvGrpSpPr>
-        <p:grpSpPr>
-          <a:xfrm>
-            <a:off x="7210789" y="533132"/>
-            <a:ext cx="1826141" cy="1420887"/>
-            <a:chOff x="7164594" y="1853741"/>
-            <a:chExt cx="1826141" cy="1420887"/>
-          </a:xfrm>
-        </p:grpSpPr>
-        <mc:AlternateContent xmlns:mc="http://schemas.openxmlformats.org/markup-compatibility/2006" xmlns:a14="http://schemas.microsoft.com/office/drawing/2010/main">
-          <mc:Choice Requires="a14">
-            <p:sp>
-              <p:nvSpPr>
-                <p:cNvPr id="10" name="Textfeld 9">
-                  <a:extLst>
-                    <a:ext uri="{FF2B5EF4-FFF2-40B4-BE49-F238E27FC236}">
-                      <a16:creationId xmlns:a16="http://schemas.microsoft.com/office/drawing/2014/main" id="{BE145589-5416-4E55-1BF8-097A48D5F579}"/>
-                    </a:ext>
-                  </a:extLst>
-                </p:cNvPr>
-                <p:cNvSpPr txBox="1"/>
-                <p:nvPr/>
-              </p:nvSpPr>
-              <p:spPr>
-                <a:xfrm>
-                  <a:off x="8558437" y="2746805"/>
-                  <a:ext cx="432298" cy="307777"/>
-                </a:xfrm>
-                <a:prstGeom prst="rect">
-                  <a:avLst/>
-                </a:prstGeom>
-                <a:noFill/>
-              </p:spPr>
-              <p:txBody>
-                <a:bodyPr wrap="none" rtlCol="0">
-                  <a:spAutoFit/>
-                </a:bodyPr>
-                <a:lstStyle/>
-                <a:p>
-                  <a:pPr/>
-                  <a14:m>
-                    <m:oMathPara xmlns:m="http://schemas.openxmlformats.org/officeDocument/2006/math">
-                      <m:oMathParaPr>
-                        <m:jc m:val="centerGroup"/>
-                      </m:oMathParaPr>
-                      <m:oMath xmlns:m="http://schemas.openxmlformats.org/officeDocument/2006/math">
-                        <m:r>
-                          <a:rPr lang="en-US" i="1" noProof="0" smtClean="0">
-                            <a:latin typeface="Cambria Math" panose="02040503050406030204" pitchFamily="18" charset="0"/>
-                          </a:rPr>
-                          <m:t>𝑅𝑒</m:t>
-                        </m:r>
-                      </m:oMath>
-                    </m:oMathPara>
-                  </a14:m>
-                  <a:endParaRPr lang="en-US" noProof="0" dirty="0"/>
-                </a:p>
-              </p:txBody>
-            </p:sp>
-          </mc:Choice>
-          <mc:Fallback xmlns="">
-            <p:sp>
-              <p:nvSpPr>
-                <p:cNvPr id="10" name="Textfeld 9">
-                  <a:extLst>
-                    <a:ext uri="{FF2B5EF4-FFF2-40B4-BE49-F238E27FC236}">
-                      <a16:creationId xmlns:a16="http://schemas.microsoft.com/office/drawing/2014/main" id="{BE145589-5416-4E55-1BF8-097A48D5F579}"/>
-                    </a:ext>
-                  </a:extLst>
-                </p:cNvPr>
-                <p:cNvSpPr txBox="1">
-                  <a:spLocks noRot="1" noChangeAspect="1" noMove="1" noResize="1" noEditPoints="1" noAdjustHandles="1" noChangeArrowheads="1" noChangeShapeType="1" noTextEdit="1"/>
-                </p:cNvSpPr>
-                <p:nvPr/>
-              </p:nvSpPr>
-              <p:spPr>
-                <a:xfrm>
-                  <a:off x="8558437" y="2746805"/>
-                  <a:ext cx="432298" cy="307777"/>
-                </a:xfrm>
-                <a:prstGeom prst="rect">
-                  <a:avLst/>
-                </a:prstGeom>
-                <a:blipFill>
-                  <a:blip r:embed="rId2"/>
-                  <a:stretch>
-                    <a:fillRect/>
-                  </a:stretch>
-                </a:blipFill>
-              </p:spPr>
-              <p:txBody>
-                <a:bodyPr/>
-                <a:lstStyle/>
-                <a:p>
-                  <a:r>
-                    <a:rPr lang="de-DE">
-                      <a:noFill/>
-                    </a:rPr>
-                    <a:t> </a:t>
-                  </a:r>
-                </a:p>
-              </p:txBody>
-            </p:sp>
-          </mc:Fallback>
-        </mc:AlternateContent>
-        <mc:AlternateContent xmlns:mc="http://schemas.openxmlformats.org/markup-compatibility/2006" xmlns:a14="http://schemas.microsoft.com/office/drawing/2010/main">
-          <mc:Choice Requires="a14">
-            <p:sp>
-              <p:nvSpPr>
-                <p:cNvPr id="11" name="Textfeld 10">
-                  <a:extLst>
-                    <a:ext uri="{FF2B5EF4-FFF2-40B4-BE49-F238E27FC236}">
-                      <a16:creationId xmlns:a16="http://schemas.microsoft.com/office/drawing/2014/main" id="{65F438A8-6B73-457E-4DE8-15E0D657BADD}"/>
-                    </a:ext>
-                  </a:extLst>
-                </p:cNvPr>
-                <p:cNvSpPr txBox="1"/>
-                <p:nvPr/>
-              </p:nvSpPr>
-              <p:spPr>
-                <a:xfrm>
-                  <a:off x="7757177" y="1853741"/>
-                  <a:ext cx="445828" cy="307777"/>
-                </a:xfrm>
-                <a:prstGeom prst="rect">
-                  <a:avLst/>
-                </a:prstGeom>
-                <a:noFill/>
-              </p:spPr>
-              <p:txBody>
-                <a:bodyPr wrap="none" rtlCol="0">
-                  <a:spAutoFit/>
-                </a:bodyPr>
-                <a:lstStyle/>
-                <a:p>
-                  <a:pPr/>
-                  <a14:m>
-                    <m:oMathPara xmlns:m="http://schemas.openxmlformats.org/officeDocument/2006/math">
-                      <m:oMathParaPr>
-                        <m:jc m:val="centerGroup"/>
-                      </m:oMathParaPr>
-                      <m:oMath xmlns:m="http://schemas.openxmlformats.org/officeDocument/2006/math">
-                        <m:r>
-                          <a:rPr lang="en-US" i="1" noProof="0" smtClean="0">
-                            <a:latin typeface="Cambria Math" panose="02040503050406030204" pitchFamily="18" charset="0"/>
-                          </a:rPr>
-                          <m:t>𝐼𝑚</m:t>
-                        </m:r>
-                      </m:oMath>
-                    </m:oMathPara>
-                  </a14:m>
-                  <a:endParaRPr lang="en-US" noProof="0" dirty="0"/>
-                </a:p>
-              </p:txBody>
-            </p:sp>
-          </mc:Choice>
-          <mc:Fallback xmlns="">
-            <p:sp>
-              <p:nvSpPr>
-                <p:cNvPr id="11" name="Textfeld 10">
-                  <a:extLst>
-                    <a:ext uri="{FF2B5EF4-FFF2-40B4-BE49-F238E27FC236}">
-                      <a16:creationId xmlns:a16="http://schemas.microsoft.com/office/drawing/2014/main" id="{65F438A8-6B73-457E-4DE8-15E0D657BADD}"/>
-                    </a:ext>
-                  </a:extLst>
-                </p:cNvPr>
-                <p:cNvSpPr txBox="1">
-                  <a:spLocks noRot="1" noChangeAspect="1" noMove="1" noResize="1" noEditPoints="1" noAdjustHandles="1" noChangeArrowheads="1" noChangeShapeType="1" noTextEdit="1"/>
-                </p:cNvSpPr>
-                <p:nvPr/>
-              </p:nvSpPr>
-              <p:spPr>
-                <a:xfrm>
-                  <a:off x="7757177" y="1853741"/>
-                  <a:ext cx="445828" cy="307777"/>
-                </a:xfrm>
-                <a:prstGeom prst="rect">
-                  <a:avLst/>
-                </a:prstGeom>
-                <a:blipFill>
-                  <a:blip r:embed="rId3"/>
-                  <a:stretch>
-                    <a:fillRect/>
-                  </a:stretch>
-                </a:blipFill>
-              </p:spPr>
-              <p:txBody>
-                <a:bodyPr/>
-                <a:lstStyle/>
-                <a:p>
-                  <a:r>
-                    <a:rPr lang="de-DE">
-                      <a:noFill/>
-                    </a:rPr>
-                    <a:t> </a:t>
-                  </a:r>
-                </a:p>
-              </p:txBody>
-            </p:sp>
-          </mc:Fallback>
-        </mc:AlternateContent>
-        <p:grpSp>
-          <p:nvGrpSpPr>
-            <p:cNvPr id="12" name="Gruppieren 11">
-              <a:extLst>
-                <a:ext uri="{FF2B5EF4-FFF2-40B4-BE49-F238E27FC236}">
-                  <a16:creationId xmlns:a16="http://schemas.microsoft.com/office/drawing/2014/main" id="{C5E17D05-BA3C-4CC0-73F7-6F3EBB6EB7D9}"/>
-                </a:ext>
-              </a:extLst>
-            </p:cNvPr>
-            <p:cNvGrpSpPr/>
-            <p:nvPr/>
-          </p:nvGrpSpPr>
-          <p:grpSpPr>
-            <a:xfrm>
-              <a:off x="7164594" y="2090371"/>
-              <a:ext cx="1556450" cy="1184257"/>
-              <a:chOff x="6917852" y="2166770"/>
-              <a:chExt cx="1556450" cy="1184257"/>
-            </a:xfrm>
-          </p:grpSpPr>
-          <p:grpSp>
-            <p:nvGrpSpPr>
-              <p:cNvPr id="13" name="Gruppieren 12">
-                <a:extLst>
-                  <a:ext uri="{FF2B5EF4-FFF2-40B4-BE49-F238E27FC236}">
-                    <a16:creationId xmlns:a16="http://schemas.microsoft.com/office/drawing/2014/main" id="{57661856-125F-3A84-D15E-8FD45FBCBF4D}"/>
-                  </a:ext>
-                </a:extLst>
-              </p:cNvPr>
-              <p:cNvGrpSpPr/>
-              <p:nvPr/>
-            </p:nvGrpSpPr>
-            <p:grpSpPr>
-              <a:xfrm>
-                <a:off x="6917852" y="2166770"/>
-                <a:ext cx="1556450" cy="1184257"/>
-                <a:chOff x="5953736" y="2160421"/>
-                <a:chExt cx="1556450" cy="1184257"/>
-              </a:xfrm>
-            </p:grpSpPr>
-            <p:cxnSp>
-              <p:nvCxnSpPr>
-                <p:cNvPr id="15" name="Gerade Verbindung mit Pfeil 14">
-                  <a:extLst>
-                    <a:ext uri="{FF2B5EF4-FFF2-40B4-BE49-F238E27FC236}">
-                      <a16:creationId xmlns:a16="http://schemas.microsoft.com/office/drawing/2014/main" id="{E0EB43C6-D5A3-CF45-F54D-5218EB127FDD}"/>
-                    </a:ext>
-                  </a:extLst>
-                </p:cNvPr>
-                <p:cNvCxnSpPr>
-                  <a:cxnSpLocks/>
-                </p:cNvCxnSpPr>
-                <p:nvPr/>
-              </p:nvCxnSpPr>
-              <p:spPr>
-                <a:xfrm flipV="1">
-                  <a:off x="6599861" y="2160421"/>
-                  <a:ext cx="0" cy="1184257"/>
-                </a:xfrm>
-                <a:prstGeom prst="straightConnector1">
-                  <a:avLst/>
-                </a:prstGeom>
-                <a:ln w="25400">
-                  <a:solidFill>
-                    <a:schemeClr val="tx1"/>
-                  </a:solidFill>
-                  <a:tailEnd type="triangle"/>
-                </a:ln>
-              </p:spPr>
-              <p:style>
-                <a:lnRef idx="1">
-                  <a:schemeClr val="accent1"/>
-                </a:lnRef>
-                <a:fillRef idx="0">
-                  <a:schemeClr val="accent1"/>
-                </a:fillRef>
-                <a:effectRef idx="0">
-                  <a:schemeClr val="accent1"/>
-                </a:effectRef>
-                <a:fontRef idx="minor">
-                  <a:schemeClr val="tx1"/>
-                </a:fontRef>
-              </p:style>
-            </p:cxnSp>
-            <p:cxnSp>
-              <p:nvCxnSpPr>
-                <p:cNvPr id="16" name="Gerade Verbindung mit Pfeil 15">
-                  <a:extLst>
-                    <a:ext uri="{FF2B5EF4-FFF2-40B4-BE49-F238E27FC236}">
-                      <a16:creationId xmlns:a16="http://schemas.microsoft.com/office/drawing/2014/main" id="{FBC6089C-5867-45EE-7371-806DE257781E}"/>
-                    </a:ext>
-                  </a:extLst>
-                </p:cNvPr>
-                <p:cNvCxnSpPr>
-                  <a:cxnSpLocks/>
-                </p:cNvCxnSpPr>
-                <p:nvPr/>
-              </p:nvCxnSpPr>
-              <p:spPr>
-                <a:xfrm>
-                  <a:off x="5953736" y="2817020"/>
-                  <a:ext cx="1556450" cy="0"/>
-                </a:xfrm>
-                <a:prstGeom prst="straightConnector1">
-                  <a:avLst/>
-                </a:prstGeom>
-                <a:ln w="25400">
-                  <a:solidFill>
-                    <a:schemeClr val="tx1"/>
-                  </a:solidFill>
-                  <a:tailEnd type="triangle"/>
-                </a:ln>
-              </p:spPr>
-              <p:style>
-                <a:lnRef idx="1">
-                  <a:schemeClr val="accent1"/>
-                </a:lnRef>
-                <a:fillRef idx="0">
-                  <a:schemeClr val="accent1"/>
-                </a:fillRef>
-                <a:effectRef idx="0">
-                  <a:schemeClr val="accent1"/>
-                </a:effectRef>
-                <a:fontRef idx="minor">
-                  <a:schemeClr val="tx1"/>
-                </a:fontRef>
-              </p:style>
-            </p:cxnSp>
-          </p:grpSp>
-          <p:sp>
-            <p:nvSpPr>
-              <p:cNvPr id="14" name="Textfeld 13">
-                <a:extLst>
-                  <a:ext uri="{FF2B5EF4-FFF2-40B4-BE49-F238E27FC236}">
-                    <a16:creationId xmlns:a16="http://schemas.microsoft.com/office/drawing/2014/main" id="{069110EF-11B6-67C7-01B3-968B214CCF2D}"/>
-                  </a:ext>
-                </a:extLst>
-              </p:cNvPr>
-              <p:cNvSpPr txBox="1"/>
-              <p:nvPr/>
-            </p:nvSpPr>
-            <p:spPr>
-              <a:xfrm>
-                <a:off x="7758249" y="2571750"/>
-                <a:ext cx="325730" cy="430887"/>
-              </a:xfrm>
-              <a:prstGeom prst="rect">
-                <a:avLst/>
-              </a:prstGeom>
-              <a:noFill/>
-            </p:spPr>
-            <p:txBody>
-              <a:bodyPr wrap="none" rtlCol="0">
-                <a:spAutoFit/>
-              </a:bodyPr>
-              <a:lstStyle/>
-              <a:p>
-                <a:r>
-                  <a:rPr lang="en-US" sz="2200" noProof="0" dirty="0">
-                    <a:solidFill>
-                      <a:srgbClr val="FF0000"/>
-                    </a:solidFill>
-                  </a:rPr>
-                  <a:t>x</a:t>
-                </a:r>
-              </a:p>
-            </p:txBody>
-          </p:sp>
-        </p:grpSp>
-      </p:grpSp>
-      <p:sp>
-        <p:nvSpPr>
-          <p:cNvPr id="17" name="Textfeld 16">
-            <a:extLst>
-              <a:ext uri="{FF2B5EF4-FFF2-40B4-BE49-F238E27FC236}">
-                <a16:creationId xmlns:a16="http://schemas.microsoft.com/office/drawing/2014/main" id="{7645854D-B85E-93C4-F3A2-CB2FC59DED02}"/>
-              </a:ext>
-            </a:extLst>
-          </p:cNvPr>
-          <p:cNvSpPr txBox="1"/>
-          <p:nvPr/>
-        </p:nvSpPr>
-        <p:spPr>
-          <a:xfrm>
-            <a:off x="6591469" y="342102"/>
-            <a:ext cx="2393604" cy="307777"/>
-          </a:xfrm>
-          <a:prstGeom prst="rect">
-            <a:avLst/>
-          </a:prstGeom>
-          <a:noFill/>
-        </p:spPr>
-        <p:txBody>
-          <a:bodyPr wrap="none" rtlCol="0">
-            <a:spAutoFit/>
-          </a:bodyPr>
-          <a:lstStyle/>
-          <a:p>
-            <a:r>
-              <a:rPr lang="en-US" i="1" noProof="0" dirty="0"/>
-              <a:t>Pole-Zero Plot Closed-Loop</a:t>
-            </a:r>
-          </a:p>
-        </p:txBody>
-      </p:sp>
-      <p:cxnSp>
-        <p:nvCxnSpPr>
-          <p:cNvPr id="18" name="Gerade Verbindung mit Pfeil 17">
-            <a:extLst>
-              <a:ext uri="{FF2B5EF4-FFF2-40B4-BE49-F238E27FC236}">
-                <a16:creationId xmlns:a16="http://schemas.microsoft.com/office/drawing/2014/main" id="{A1AA8CB2-0BD1-09C9-7201-C1D1E4905718}"/>
-              </a:ext>
-            </a:extLst>
-          </p:cNvPr>
-          <p:cNvCxnSpPr/>
-          <p:nvPr/>
-        </p:nvCxnSpPr>
-        <p:spPr>
-          <a:xfrm flipH="1">
-            <a:off x="7282248" y="1426196"/>
-            <a:ext cx="900353" cy="0"/>
-          </a:xfrm>
-          <a:prstGeom prst="straightConnector1">
-            <a:avLst/>
-          </a:prstGeom>
-          <a:ln w="31750">
-            <a:solidFill>
-              <a:srgbClr val="FF0000"/>
-            </a:solidFill>
-            <a:tailEnd type="triangle"/>
-          </a:ln>
-        </p:spPr>
-        <p:style>
-          <a:lnRef idx="1">
-            <a:schemeClr val="accent1"/>
-          </a:lnRef>
-          <a:fillRef idx="0">
-            <a:schemeClr val="accent1"/>
-          </a:fillRef>
-          <a:effectRef idx="0">
-            <a:schemeClr val="accent1"/>
-          </a:effectRef>
-          <a:fontRef idx="minor">
-            <a:schemeClr val="tx1"/>
-          </a:fontRef>
-        </p:style>
-      </p:cxnSp>
-      <mc:AlternateContent xmlns:mc="http://schemas.openxmlformats.org/markup-compatibility/2006" xmlns:a14="http://schemas.microsoft.com/office/drawing/2010/main">
-        <mc:Choice Requires="a14">
-          <p:sp>
-            <p:nvSpPr>
-              <p:cNvPr id="21" name="Textfeld 20">
-                <a:extLst>
-                  <a:ext uri="{FF2B5EF4-FFF2-40B4-BE49-F238E27FC236}">
-                    <a16:creationId xmlns:a16="http://schemas.microsoft.com/office/drawing/2014/main" id="{0A802971-BDAD-0FA5-53D6-20D58BBED15A}"/>
-                  </a:ext>
-                </a:extLst>
-              </p:cNvPr>
-              <p:cNvSpPr txBox="1"/>
-              <p:nvPr/>
-            </p:nvSpPr>
-            <p:spPr>
-              <a:xfrm>
-                <a:off x="2669060" y="731510"/>
-                <a:ext cx="4613188" cy="307777"/>
-              </a:xfrm>
-              <a:prstGeom prst="rect">
-                <a:avLst/>
-              </a:prstGeom>
-              <a:noFill/>
-            </p:spPr>
-            <p:txBody>
-              <a:bodyPr wrap="square">
-                <a:spAutoFit/>
-              </a:bodyPr>
-              <a:lstStyle/>
-              <a:p>
-                <a:pPr/>
-                <a14:m>
-                  <m:oMathPara xmlns:m="http://schemas.openxmlformats.org/officeDocument/2006/math">
-                    <m:oMathParaPr>
-                      <m:jc m:val="centerGroup"/>
-                    </m:oMathParaPr>
-                    <m:oMath xmlns:m="http://schemas.openxmlformats.org/officeDocument/2006/math">
-                      <m:r>
-                        <a:rPr lang="en-US" i="1" noProof="0" smtClean="0">
-                          <a:latin typeface="Cambria Math" panose="02040503050406030204" pitchFamily="18" charset="0"/>
-                        </a:rPr>
-                        <m:t>𝑠</m:t>
-                      </m:r>
-                      <m:r>
-                        <a:rPr lang="en-US" i="1" noProof="0">
-                          <a:latin typeface="Cambria Math" panose="02040503050406030204" pitchFamily="18" charset="0"/>
-                        </a:rPr>
-                        <m:t>+</m:t>
-                      </m:r>
-                      <m:r>
-                        <a:rPr lang="en-US" i="1" noProof="0">
-                          <a:latin typeface="Cambria Math" panose="02040503050406030204" pitchFamily="18" charset="0"/>
-                        </a:rPr>
-                        <m:t>𝑘</m:t>
-                      </m:r>
-                      <m:r>
-                        <a:rPr lang="en-US" i="1" noProof="0">
-                          <a:latin typeface="Cambria Math" panose="02040503050406030204" pitchFamily="18" charset="0"/>
-                        </a:rPr>
-                        <m:t>−1=0⇒</m:t>
-                      </m:r>
-                      <m:r>
-                        <a:rPr lang="en-US" b="0" i="1" noProof="0" smtClean="0">
-                          <a:latin typeface="Cambria Math" panose="02040503050406030204" pitchFamily="18" charset="0"/>
-                        </a:rPr>
-                        <m:t>𝑠</m:t>
-                      </m:r>
-                      <m:r>
-                        <a:rPr lang="en-US" i="1" noProof="0">
-                          <a:latin typeface="Cambria Math" panose="02040503050406030204" pitchFamily="18" charset="0"/>
-                        </a:rPr>
-                        <m:t>=1−</m:t>
-                      </m:r>
-                      <m:r>
-                        <a:rPr lang="en-US" i="1" noProof="0">
-                          <a:latin typeface="Cambria Math" panose="02040503050406030204" pitchFamily="18" charset="0"/>
-                        </a:rPr>
-                        <m:t>𝑘</m:t>
-                      </m:r>
-                    </m:oMath>
-                  </m:oMathPara>
-                </a14:m>
-                <a:endParaRPr lang="en-US" noProof="0" dirty="0"/>
-              </a:p>
-            </p:txBody>
-          </p:sp>
-        </mc:Choice>
-        <mc:Fallback xmlns="">
-          <p:sp>
-            <p:nvSpPr>
-              <p:cNvPr id="21" name="Textfeld 20">
-                <a:extLst>
-                  <a:ext uri="{FF2B5EF4-FFF2-40B4-BE49-F238E27FC236}">
-                    <a16:creationId xmlns:a16="http://schemas.microsoft.com/office/drawing/2014/main" id="{0A802971-BDAD-0FA5-53D6-20D58BBED15A}"/>
-                  </a:ext>
-                </a:extLst>
-              </p:cNvPr>
-              <p:cNvSpPr txBox="1">
-                <a:spLocks noRot="1" noChangeAspect="1" noMove="1" noResize="1" noEditPoints="1" noAdjustHandles="1" noChangeArrowheads="1" noChangeShapeType="1" noTextEdit="1"/>
-              </p:cNvSpPr>
-              <p:nvPr/>
-            </p:nvSpPr>
-            <p:spPr>
-              <a:xfrm>
-                <a:off x="2669060" y="731510"/>
-                <a:ext cx="4613188" cy="307777"/>
-              </a:xfrm>
-              <a:prstGeom prst="rect">
-                <a:avLst/>
-              </a:prstGeom>
-              <a:blipFill>
-                <a:blip r:embed="rId4"/>
-                <a:stretch>
-                  <a:fillRect/>
-                </a:stretch>
-              </a:blipFill>
-            </p:spPr>
-            <p:txBody>
-              <a:bodyPr/>
-              <a:lstStyle/>
-              <a:p>
-                <a:r>
-                  <a:rPr lang="de-DE">
-                    <a:noFill/>
-                  </a:rPr>
-                  <a:t> </a:t>
-                </a:r>
-              </a:p>
-            </p:txBody>
-          </p:sp>
-        </mc:Fallback>
-      </mc:AlternateContent>
-      <mc:AlternateContent xmlns:mc="http://schemas.openxmlformats.org/markup-compatibility/2006" xmlns:a14="http://schemas.microsoft.com/office/drawing/2010/main">
-        <mc:Choice Requires="a14">
-          <p:sp>
-            <p:nvSpPr>
-              <p:cNvPr id="22" name="Textfeld 21">
-                <a:extLst>
-                  <a:ext uri="{FF2B5EF4-FFF2-40B4-BE49-F238E27FC236}">
-                    <a16:creationId xmlns:a16="http://schemas.microsoft.com/office/drawing/2014/main" id="{8CBCB0BF-F3DD-EB4E-09E9-1A8C1C920786}"/>
-                  </a:ext>
-                </a:extLst>
-              </p:cNvPr>
-              <p:cNvSpPr txBox="1"/>
-              <p:nvPr/>
-            </p:nvSpPr>
-            <p:spPr>
-              <a:xfrm>
-                <a:off x="7975289" y="1441584"/>
-                <a:ext cx="593689" cy="276999"/>
-              </a:xfrm>
-              <a:prstGeom prst="rect">
-                <a:avLst/>
-              </a:prstGeom>
-              <a:noFill/>
-            </p:spPr>
-            <p:txBody>
-              <a:bodyPr wrap="none" rtlCol="0">
-                <a:spAutoFit/>
-              </a:bodyPr>
-              <a:lstStyle/>
-              <a:p>
-                <a:pPr/>
-                <a14:m>
-                  <m:oMathPara xmlns:m="http://schemas.openxmlformats.org/officeDocument/2006/math">
-                    <m:oMathParaPr>
-                      <m:jc m:val="centerGroup"/>
-                    </m:oMathParaPr>
-                    <m:oMath xmlns:m="http://schemas.openxmlformats.org/officeDocument/2006/math">
-                      <m:r>
-                        <a:rPr lang="en-US" sz="1200" i="1" noProof="0" smtClean="0">
-                          <a:solidFill>
-                            <a:srgbClr val="FF0000"/>
-                          </a:solidFill>
-                          <a:latin typeface="Cambria Math" panose="02040503050406030204" pitchFamily="18" charset="0"/>
-                        </a:rPr>
-                        <m:t>𝑘</m:t>
-                      </m:r>
-                      <m:r>
-                        <a:rPr lang="en-US" sz="1200" i="1" noProof="0" smtClean="0">
-                          <a:solidFill>
-                            <a:srgbClr val="FF0000"/>
-                          </a:solidFill>
-                          <a:latin typeface="Cambria Math" panose="02040503050406030204" pitchFamily="18" charset="0"/>
-                        </a:rPr>
-                        <m:t>=0</m:t>
-                      </m:r>
-                    </m:oMath>
-                  </m:oMathPara>
-                </a14:m>
-                <a:endParaRPr/>
-              </a:p>
-            </p:txBody>
-          </p:sp>
-        </mc:Choice>
-        <mc:Fallback xmlns="">
-          <p:sp>
-            <p:nvSpPr>
-              <p:cNvPr id="22" name="Textfeld 21">
-                <a:extLst>
-                  <a:ext uri="{FF2B5EF4-FFF2-40B4-BE49-F238E27FC236}">
-                    <a16:creationId xmlns:a16="http://schemas.microsoft.com/office/drawing/2014/main" id="{8CBCB0BF-F3DD-EB4E-09E9-1A8C1C920786}"/>
-                  </a:ext>
-                </a:extLst>
-              </p:cNvPr>
-              <p:cNvSpPr txBox="1">
-                <a:spLocks noRot="1" noChangeAspect="1" noMove="1" noResize="1" noEditPoints="1" noAdjustHandles="1" noChangeArrowheads="1" noChangeShapeType="1" noTextEdit="1"/>
-              </p:cNvSpPr>
-              <p:nvPr/>
-            </p:nvSpPr>
-            <p:spPr>
-              <a:xfrm>
-                <a:off x="7975289" y="1441584"/>
-                <a:ext cx="593689" cy="276999"/>
-              </a:xfrm>
-              <a:prstGeom prst="rect">
-                <a:avLst/>
-              </a:prstGeom>
-              <a:blipFill>
-                <a:blip r:embed="rId5"/>
-                <a:stretch>
-                  <a:fillRect r="-2083" b="-13043"/>
-                </a:stretch>
-              </a:blipFill>
-            </p:spPr>
-            <p:txBody>
-              <a:bodyPr/>
-              <a:lstStyle/>
-              <a:p>
-                <a:r>
-                  <a:rPr lang="de-DE">
-                    <a:noFill/>
-                  </a:rPr>
-                  <a:t> </a:t>
-                </a:r>
-              </a:p>
-            </p:txBody>
-          </p:sp>
-        </mc:Fallback>
-      </mc:AlternateContent>
-      <mc:AlternateContent xmlns:mc="http://schemas.openxmlformats.org/markup-compatibility/2006" xmlns:a14="http://schemas.microsoft.com/office/drawing/2010/main">
-        <mc:Choice Requires="a14">
-          <p:sp>
-            <p:nvSpPr>
-              <p:cNvPr id="24" name="Textfeld 23">
-                <a:extLst>
-                  <a:ext uri="{FF2B5EF4-FFF2-40B4-BE49-F238E27FC236}">
-                    <a16:creationId xmlns:a16="http://schemas.microsoft.com/office/drawing/2014/main" id="{717A2842-18BC-8151-EE85-5339E97CB9FA}"/>
-                  </a:ext>
-                </a:extLst>
-              </p:cNvPr>
-              <p:cNvSpPr txBox="1"/>
-              <p:nvPr/>
-            </p:nvSpPr>
-            <p:spPr>
-              <a:xfrm>
-                <a:off x="7046456" y="1444308"/>
-                <a:ext cx="640175" cy="276999"/>
-              </a:xfrm>
-              <a:prstGeom prst="rect">
-                <a:avLst/>
-              </a:prstGeom>
-              <a:noFill/>
-            </p:spPr>
-            <p:txBody>
-              <a:bodyPr wrap="none" rtlCol="0">
-                <a:spAutoFit/>
-              </a:bodyPr>
-              <a:lstStyle/>
-              <a:p>
-                <a:pPr/>
-                <a14:m>
-                  <m:oMathPara xmlns:m="http://schemas.openxmlformats.org/officeDocument/2006/math">
-                    <m:oMathParaPr>
-                      <m:jc m:val="centerGroup"/>
-                    </m:oMathParaPr>
-                    <m:oMath xmlns:m="http://schemas.openxmlformats.org/officeDocument/2006/math">
-                      <m:r>
-                        <a:rPr lang="en-US" sz="1200" i="1" noProof="0" smtClean="0">
-                          <a:solidFill>
-                            <a:srgbClr val="FF0000"/>
-                          </a:solidFill>
-                          <a:latin typeface="Cambria Math" panose="02040503050406030204" pitchFamily="18" charset="0"/>
-                        </a:rPr>
-                        <m:t>𝑘</m:t>
-                      </m:r>
-                      <m:r>
-                        <a:rPr lang="en-US" sz="1200" i="1" noProof="0" smtClean="0">
-                          <a:solidFill>
-                            <a:srgbClr val="FF0000"/>
-                          </a:solidFill>
-                          <a:latin typeface="Cambria Math" panose="02040503050406030204" pitchFamily="18" charset="0"/>
-                        </a:rPr>
-                        <m:t>=∞</m:t>
-                      </m:r>
-                    </m:oMath>
-                  </m:oMathPara>
-                </a14:m>
-                <a:endParaRPr/>
-              </a:p>
-            </p:txBody>
-          </p:sp>
-        </mc:Choice>
-        <mc:Fallback xmlns="">
-          <p:sp>
-            <p:nvSpPr>
-              <p:cNvPr id="24" name="Textfeld 23">
-                <a:extLst>
-                  <a:ext uri="{FF2B5EF4-FFF2-40B4-BE49-F238E27FC236}">
-                    <a16:creationId xmlns:a16="http://schemas.microsoft.com/office/drawing/2014/main" id="{717A2842-18BC-8151-EE85-5339E97CB9FA}"/>
-                  </a:ext>
-                </a:extLst>
-              </p:cNvPr>
-              <p:cNvSpPr txBox="1">
-                <a:spLocks noRot="1" noChangeAspect="1" noMove="1" noResize="1" noEditPoints="1" noAdjustHandles="1" noChangeArrowheads="1" noChangeShapeType="1" noTextEdit="1"/>
-              </p:cNvSpPr>
-              <p:nvPr/>
-            </p:nvSpPr>
-            <p:spPr>
-              <a:xfrm>
-                <a:off x="7046456" y="1444308"/>
-                <a:ext cx="640175" cy="276999"/>
-              </a:xfrm>
-              <a:prstGeom prst="rect">
-                <a:avLst/>
-              </a:prstGeom>
-              <a:blipFill>
-                <a:blip r:embed="rId6"/>
-                <a:stretch>
-                  <a:fillRect r="-1923" b="-13043"/>
-                </a:stretch>
-              </a:blipFill>
-            </p:spPr>
-            <p:txBody>
-              <a:bodyPr/>
-              <a:lstStyle/>
-              <a:p>
-                <a:r>
-                  <a:rPr lang="de-DE">
-                    <a:noFill/>
-                  </a:rPr>
-                  <a:t> </a:t>
-                </a:r>
-              </a:p>
-            </p:txBody>
-          </p:sp>
-        </mc:Fallback>
-      </mc:AlternateContent>
-      <p:sp>
-        <p:nvSpPr>
-          <p:cNvPr id="25" name="Textfeld 24">
-            <a:extLst>
-              <a:ext uri="{FF2B5EF4-FFF2-40B4-BE49-F238E27FC236}">
-                <a16:creationId xmlns:a16="http://schemas.microsoft.com/office/drawing/2014/main" id="{6A770FF8-51F7-BB76-1BB3-09FDD43E09F2}"/>
-              </a:ext>
-            </a:extLst>
-          </p:cNvPr>
-          <p:cNvSpPr txBox="1"/>
-          <p:nvPr/>
-        </p:nvSpPr>
-        <p:spPr>
-          <a:xfrm>
-            <a:off x="3714750" y="480732"/>
-            <a:ext cx="2462534" cy="307777"/>
-          </a:xfrm>
-          <a:prstGeom prst="rect">
-            <a:avLst/>
-          </a:prstGeom>
-          <a:noFill/>
-        </p:spPr>
-        <p:txBody>
-          <a:bodyPr wrap="none" rtlCol="0">
-            <a:spAutoFit/>
-          </a:bodyPr>
-          <a:lstStyle/>
-          <a:p>
-            <a:r>
-              <a:rPr lang="en-US" noProof="0" dirty="0">
-                <a:latin typeface="Segoe UI" panose="020B0502040204020203" pitchFamily="34" charset="0"/>
-                <a:cs typeface="Segoe UI" panose="020B0502040204020203" pitchFamily="34" charset="0"/>
-              </a:rPr>
-              <a:t>calculating closed-loop pole:</a:t>
-            </a:r>
-          </a:p>
-        </p:txBody>
-      </p:sp>
-    </p:spTree>
-    <p:extLst>
-      <p:ext uri="{BB962C8B-B14F-4D97-AF65-F5344CB8AC3E}">
-        <p14:creationId xmlns:p14="http://schemas.microsoft.com/office/powerpoint/2010/main" val="1377169539"/>
-      </p:ext>
-    </p:extLst>
-  </p:cSld>
-  <p:clrMapOvr>
-    <a:masterClrMapping/>
-  </p:clrMapOvr>
-</p:sld>
-</file>
-
-<file path=ppt/slides/slide5.xml><?xml version="1.0" encoding="utf-8"?>
-<p:sld xmlns:a="http://schemas.openxmlformats.org/drawingml/2006/main" xmlns:r="http://schemas.openxmlformats.org/officeDocument/2006/relationships" xmlns:p="http://schemas.openxmlformats.org/presentationml/2006/main">
-  <p:cSld>
-    <p:spTree>
-      <p:nvGrpSpPr>
         <p:cNvPr id="1" name=""/>
         <p:cNvGrpSpPr/>
         <p:nvPr/>
@@ -36408,8 +32840,8 @@
           </a:p>
         </p:txBody>
       </p:sp>
-      <mc:AlternateContent xmlns:mc="http://schemas.openxmlformats.org/markup-compatibility/2006">
-        <mc:Choice xmlns:a14="http://schemas.microsoft.com/office/drawing/2010/main" Requires="a14">
+      <mc:AlternateContent xmlns:mc="http://schemas.openxmlformats.org/markup-compatibility/2006" xmlns:a14="http://schemas.microsoft.com/office/drawing/2010/main">
+        <mc:Choice Requires="a14">
           <p:sp>
             <p:nvSpPr>
               <p:cNvPr id="3" name="Inhaltsplatzhalter 2">
@@ -36696,7 +33128,7 @@
             </p:txBody>
           </p:sp>
         </mc:Choice>
-        <mc:Fallback>
+        <mc:Fallback xmlns="">
           <p:sp>
             <p:nvSpPr>
               <p:cNvPr id="3" name="Inhaltsplatzhalter 2">
@@ -36841,7 +33273,7 @@
               <a:pPr defTabSz="342900">
                 <a:buClrTx/>
               </a:pPr>
-              <a:t>5</a:t>
+              <a:t>4</a:t>
             </a:fld>
             <a:endParaRPr lang="en-US" kern="1200" noProof="0" dirty="0">
               <a:solidFill>
@@ -38043,8 +34475,8 @@
           </p:sp>
         </mc:Fallback>
       </mc:AlternateContent>
-      <mc:AlternateContent xmlns:mc="http://schemas.openxmlformats.org/markup-compatibility/2006">
-        <mc:Choice xmlns:a14="http://schemas.microsoft.com/office/drawing/2010/main" Requires="a14">
+      <mc:AlternateContent xmlns:mc="http://schemas.openxmlformats.org/markup-compatibility/2006" xmlns:a14="http://schemas.microsoft.com/office/drawing/2010/main">
+        <mc:Choice Requires="a14">
           <p:sp>
             <p:nvSpPr>
               <p:cNvPr id="7" name="Rectangle: Rounded Corners 17">
@@ -38301,7 +34733,7 @@
             </p:txBody>
           </p:sp>
         </mc:Choice>
-        <mc:Fallback>
+        <mc:Fallback xmlns="">
           <p:sp>
             <p:nvSpPr>
               <p:cNvPr id="7" name="Rectangle: Rounded Corners 17">
@@ -38351,8 +34783,8 @@
           </p:sp>
         </mc:Fallback>
       </mc:AlternateContent>
-      <mc:AlternateContent xmlns:mc="http://schemas.openxmlformats.org/markup-compatibility/2006">
-        <mc:Choice xmlns:a14="http://schemas.microsoft.com/office/drawing/2010/main" Requires="a14">
+      <mc:AlternateContent xmlns:mc="http://schemas.openxmlformats.org/markup-compatibility/2006" xmlns:a14="http://schemas.microsoft.com/office/drawing/2010/main">
+        <mc:Choice Requires="a14">
           <p:sp>
             <p:nvSpPr>
               <p:cNvPr id="27" name="Rectangle: Rounded Corners 17">
@@ -38516,7 +34948,7 @@
             </p:txBody>
           </p:sp>
         </mc:Choice>
-        <mc:Fallback>
+        <mc:Fallback xmlns="">
           <p:sp>
             <p:nvSpPr>
               <p:cNvPr id="27" name="Rectangle: Rounded Corners 17">
@@ -38579,7 +35011,7 @@
 </p:sld>
 </file>
 
-<file path=ppt/slides/slide6.xml><?xml version="1.0" encoding="utf-8"?>
+<file path=ppt/slides/slide5.xml><?xml version="1.0" encoding="utf-8"?>
 <p:sld xmlns:a="http://schemas.openxmlformats.org/drawingml/2006/main" xmlns:r="http://schemas.openxmlformats.org/officeDocument/2006/relationships" xmlns:p="http://schemas.openxmlformats.org/presentationml/2006/main">
   <p:cSld>
     <p:spTree>
@@ -38754,7 +35186,7 @@
               <a:pPr defTabSz="342900">
                 <a:buClrTx/>
               </a:pPr>
-              <a:t>6</a:t>
+              <a:t>5</a:t>
             </a:fld>
             <a:endParaRPr lang="en-US" kern="1200" noProof="0" dirty="0">
               <a:solidFill>
@@ -38782,380 +35214,7 @@
 </p:sld>
 </file>
 
-<file path=ppt/slides/slide7.xml><?xml version="1.0" encoding="utf-8"?>
-<p:sld xmlns:a="http://schemas.openxmlformats.org/drawingml/2006/main" xmlns:r="http://schemas.openxmlformats.org/officeDocument/2006/relationships" xmlns:p="http://schemas.openxmlformats.org/presentationml/2006/main">
-  <p:cSld>
-    <p:spTree>
-      <p:nvGrpSpPr>
-        <p:cNvPr id="1" name="">
-          <a:extLst>
-            <a:ext uri="{FF2B5EF4-FFF2-40B4-BE49-F238E27FC236}">
-              <a16:creationId xmlns:a16="http://schemas.microsoft.com/office/drawing/2014/main" id="{4DDEC553-7E41-0659-A605-7ACC19AC7ED3}"/>
-            </a:ext>
-          </a:extLst>
-        </p:cNvPr>
-        <p:cNvGrpSpPr/>
-        <p:nvPr/>
-      </p:nvGrpSpPr>
-      <p:grpSpPr>
-        <a:xfrm>
-          <a:off x="0" y="0"/>
-          <a:ext cx="0" cy="0"/>
-          <a:chOff x="0" y="0"/>
-          <a:chExt cx="0" cy="0"/>
-        </a:xfrm>
-      </p:grpSpPr>
-      <p:sp>
-        <p:nvSpPr>
-          <p:cNvPr id="2" name="Titel 1">
-            <a:extLst>
-              <a:ext uri="{FF2B5EF4-FFF2-40B4-BE49-F238E27FC236}">
-                <a16:creationId xmlns:a16="http://schemas.microsoft.com/office/drawing/2014/main" id="{E2F300D4-BE24-C89C-1DD8-4C7B15C0DB47}"/>
-              </a:ext>
-            </a:extLst>
-          </p:cNvPr>
-          <p:cNvSpPr>
-            <a:spLocks noGrp="1"/>
-          </p:cNvSpPr>
-          <p:nvPr>
-            <p:ph type="title"/>
-          </p:nvPr>
-        </p:nvSpPr>
-        <p:spPr/>
-        <p:txBody>
-          <a:bodyPr/>
-          <a:lstStyle/>
-          <a:p>
-            <a:r>
-              <a:rPr lang="en-US" noProof="0" dirty="0"/>
-              <a:t>Quiz 3</a:t>
-            </a:r>
-          </a:p>
-        </p:txBody>
-      </p:sp>
-      <p:pic>
-        <p:nvPicPr>
-          <p:cNvPr id="7" name="Inhaltsplatzhalter 6" descr="Ein Bild, das Text, Quittung, Diagramm, Reihe enthält.&#10;&#10;KI-generierte Inhalte können fehlerhaft sein.">
-            <a:extLst>
-              <a:ext uri="{FF2B5EF4-FFF2-40B4-BE49-F238E27FC236}">
-                <a16:creationId xmlns:a16="http://schemas.microsoft.com/office/drawing/2014/main" id="{0715F3F2-BD16-84C0-0C40-27C5C48E7E89}"/>
-              </a:ext>
-            </a:extLst>
-          </p:cNvPr>
-          <p:cNvPicPr>
-            <a:picLocks noGrp="1" noChangeAspect="1"/>
-          </p:cNvPicPr>
-          <p:nvPr>
-            <p:ph idx="1"/>
-          </p:nvPr>
-        </p:nvPicPr>
-        <p:blipFill>
-          <a:blip r:embed="rId2"/>
-          <a:stretch>
-            <a:fillRect/>
-          </a:stretch>
-        </p:blipFill>
-        <p:spPr>
-          <a:xfrm>
-            <a:off x="407210" y="1268016"/>
-            <a:ext cx="8329579" cy="3057096"/>
-          </a:xfrm>
-        </p:spPr>
-      </p:pic>
-      <p:sp>
-        <p:nvSpPr>
-          <p:cNvPr id="4" name="Fußzeilenplatzhalter 3">
-            <a:extLst>
-              <a:ext uri="{FF2B5EF4-FFF2-40B4-BE49-F238E27FC236}">
-                <a16:creationId xmlns:a16="http://schemas.microsoft.com/office/drawing/2014/main" id="{B06B4542-8147-A1BD-E3BB-9D2D5CDE664A}"/>
-              </a:ext>
-            </a:extLst>
-          </p:cNvPr>
-          <p:cNvSpPr>
-            <a:spLocks noGrp="1"/>
-          </p:cNvSpPr>
-          <p:nvPr>
-            <p:ph type="ftr" sz="quarter" idx="11"/>
-          </p:nvPr>
-        </p:nvSpPr>
-        <p:spPr/>
-        <p:txBody>
-          <a:bodyPr/>
-          <a:lstStyle/>
-          <a:p>
-            <a:pPr defTabSz="342900">
-              <a:buClrTx/>
-            </a:pPr>
-            <a:r>
-              <a:rPr lang="en-US" kern="1200" noProof="0" dirty="0">
-                <a:solidFill>
-                  <a:srgbClr val="101623">
-                    <a:tint val="75000"/>
-                  </a:srgbClr>
-                </a:solidFill>
-                <a:latin typeface="Calibri" panose="020F0502020204030204"/>
-                <a:ea typeface="+mn-ea"/>
-                <a:cs typeface="+mn-cs"/>
-              </a:rPr>
-              <a:t>Kissan Varatharajan - </a:t>
-            </a:r>
-            <a:r>
-              <a:rPr lang="en-US" kern="1200" noProof="0" dirty="0" err="1">
-                <a:solidFill>
-                  <a:srgbClr val="101623">
-                    <a:tint val="75000"/>
-                  </a:srgbClr>
-                </a:solidFill>
-                <a:latin typeface="Calibri" panose="020F0502020204030204"/>
-                <a:ea typeface="+mn-ea"/>
-                <a:cs typeface="+mn-cs"/>
-              </a:rPr>
-              <a:t>kissanv.github.io</a:t>
-            </a:r>
-            <a:endParaRPr lang="en-US" kern="1200" noProof="0" dirty="0">
-              <a:solidFill>
-                <a:srgbClr val="101623">
-                  <a:tint val="75000"/>
-                </a:srgbClr>
-              </a:solidFill>
-              <a:latin typeface="Calibri" panose="020F0502020204030204"/>
-              <a:ea typeface="+mn-ea"/>
-              <a:cs typeface="+mn-cs"/>
-            </a:endParaRPr>
-          </a:p>
-        </p:txBody>
-      </p:sp>
-      <p:sp>
-        <p:nvSpPr>
-          <p:cNvPr id="5" name="Foliennummernplatzhalter 4">
-            <a:extLst>
-              <a:ext uri="{FF2B5EF4-FFF2-40B4-BE49-F238E27FC236}">
-                <a16:creationId xmlns:a16="http://schemas.microsoft.com/office/drawing/2014/main" id="{F2C0A032-46E3-1923-692A-A298F019087F}"/>
-              </a:ext>
-            </a:extLst>
-          </p:cNvPr>
-          <p:cNvSpPr>
-            <a:spLocks noGrp="1"/>
-          </p:cNvSpPr>
-          <p:nvPr>
-            <p:ph type="sldNum" sz="quarter" idx="12"/>
-          </p:nvPr>
-        </p:nvSpPr>
-        <p:spPr/>
-        <p:txBody>
-          <a:bodyPr/>
-          <a:lstStyle/>
-          <a:p>
-            <a:pPr defTabSz="342900">
-              <a:buClrTx/>
-            </a:pPr>
-            <a:fld id="{36EAFFE7-40E2-CA47-82C0-73D0FC591208}" type="slidenum">
-              <a:rPr lang="en-US" kern="1200" noProof="0" smtClean="0">
-                <a:solidFill>
-                  <a:srgbClr val="101623">
-                    <a:tint val="75000"/>
-                  </a:srgbClr>
-                </a:solidFill>
-                <a:latin typeface="Calibri" panose="020F0502020204030204"/>
-                <a:ea typeface="+mn-ea"/>
-                <a:cs typeface="+mn-cs"/>
-              </a:rPr>
-              <a:pPr defTabSz="342900">
-                <a:buClrTx/>
-              </a:pPr>
-              <a:t>7</a:t>
-            </a:fld>
-            <a:endParaRPr lang="en-US" kern="1200" noProof="0" dirty="0">
-              <a:solidFill>
-                <a:srgbClr val="101623">
-                  <a:tint val="75000"/>
-                </a:srgbClr>
-              </a:solidFill>
-              <a:latin typeface="Calibri" panose="020F0502020204030204"/>
-              <a:ea typeface="+mn-ea"/>
-              <a:cs typeface="+mn-cs"/>
-            </a:endParaRPr>
-          </a:p>
-        </p:txBody>
-      </p:sp>
-      <p:sp>
-        <p:nvSpPr>
-          <p:cNvPr id="6" name="Textfeld 5">
-            <a:extLst>
-              <a:ext uri="{FF2B5EF4-FFF2-40B4-BE49-F238E27FC236}">
-                <a16:creationId xmlns:a16="http://schemas.microsoft.com/office/drawing/2014/main" id="{248CEA37-F35B-B914-3406-7C5E76CC22D5}"/>
-              </a:ext>
-            </a:extLst>
-          </p:cNvPr>
-          <p:cNvSpPr txBox="1"/>
-          <p:nvPr/>
-        </p:nvSpPr>
-        <p:spPr>
-          <a:xfrm>
-            <a:off x="7597099" y="1821942"/>
-            <a:ext cx="290464" cy="369332"/>
-          </a:xfrm>
-          <a:prstGeom prst="rect">
-            <a:avLst/>
-          </a:prstGeom>
-          <a:noFill/>
-        </p:spPr>
-        <p:txBody>
-          <a:bodyPr wrap="none" rtlCol="0">
-            <a:spAutoFit/>
-          </a:bodyPr>
-          <a:lstStyle/>
-          <a:p>
-            <a:r>
-              <a:rPr lang="en-US" sz="1800" noProof="0" dirty="0">
-                <a:solidFill>
-                  <a:srgbClr val="FF0000"/>
-                </a:solidFill>
-                <a:latin typeface="Segoe UI" panose="020B0502040204020203" pitchFamily="34" charset="0"/>
-                <a:cs typeface="Segoe UI" panose="020B0502040204020203" pitchFamily="34" charset="0"/>
-              </a:rPr>
-              <a:t>x</a:t>
-            </a:r>
-          </a:p>
-        </p:txBody>
-      </p:sp>
-      <p:sp>
-        <p:nvSpPr>
-          <p:cNvPr id="8" name="Textfeld 7">
-            <a:extLst>
-              <a:ext uri="{FF2B5EF4-FFF2-40B4-BE49-F238E27FC236}">
-                <a16:creationId xmlns:a16="http://schemas.microsoft.com/office/drawing/2014/main" id="{5252AA37-76C6-684F-CCB7-EE54330F717F}"/>
-              </a:ext>
-            </a:extLst>
-          </p:cNvPr>
-          <p:cNvSpPr txBox="1"/>
-          <p:nvPr/>
-        </p:nvSpPr>
-        <p:spPr>
-          <a:xfrm>
-            <a:off x="6801571" y="2387084"/>
-            <a:ext cx="290464" cy="369332"/>
-          </a:xfrm>
-          <a:prstGeom prst="rect">
-            <a:avLst/>
-          </a:prstGeom>
-          <a:noFill/>
-        </p:spPr>
-        <p:txBody>
-          <a:bodyPr wrap="none" rtlCol="0">
-            <a:spAutoFit/>
-          </a:bodyPr>
-          <a:lstStyle/>
-          <a:p>
-            <a:r>
-              <a:rPr lang="en-US" sz="1800" noProof="0" dirty="0">
-                <a:solidFill>
-                  <a:srgbClr val="FF0000"/>
-                </a:solidFill>
-                <a:latin typeface="Segoe UI" panose="020B0502040204020203" pitchFamily="34" charset="0"/>
-                <a:cs typeface="Segoe UI" panose="020B0502040204020203" pitchFamily="34" charset="0"/>
-              </a:rPr>
-              <a:t>x</a:t>
-            </a:r>
-          </a:p>
-        </p:txBody>
-      </p:sp>
-      <p:sp>
-        <p:nvSpPr>
-          <p:cNvPr id="9" name="Textfeld 8">
-            <a:extLst>
-              <a:ext uri="{FF2B5EF4-FFF2-40B4-BE49-F238E27FC236}">
-                <a16:creationId xmlns:a16="http://schemas.microsoft.com/office/drawing/2014/main" id="{F6B54B9C-9684-75D6-CE6B-BA3700BEBF06}"/>
-              </a:ext>
-            </a:extLst>
-          </p:cNvPr>
-          <p:cNvSpPr txBox="1"/>
-          <p:nvPr/>
-        </p:nvSpPr>
-        <p:spPr>
-          <a:xfrm>
-            <a:off x="7196186" y="2891790"/>
-            <a:ext cx="290464" cy="369332"/>
-          </a:xfrm>
-          <a:prstGeom prst="rect">
-            <a:avLst/>
-          </a:prstGeom>
-          <a:noFill/>
-        </p:spPr>
-        <p:txBody>
-          <a:bodyPr wrap="none" rtlCol="0">
-            <a:spAutoFit/>
-          </a:bodyPr>
-          <a:lstStyle/>
-          <a:p>
-            <a:r>
-              <a:rPr lang="en-US" sz="1800" noProof="0" dirty="0">
-                <a:solidFill>
-                  <a:srgbClr val="FF0000"/>
-                </a:solidFill>
-                <a:latin typeface="Segoe UI" panose="020B0502040204020203" pitchFamily="34" charset="0"/>
-                <a:cs typeface="Segoe UI" panose="020B0502040204020203" pitchFamily="34" charset="0"/>
-              </a:rPr>
-              <a:t>x</a:t>
-            </a:r>
-          </a:p>
-        </p:txBody>
-      </p:sp>
-      <p:sp>
-        <p:nvSpPr>
-          <p:cNvPr id="10" name="Textfeld 9">
-            <a:extLst>
-              <a:ext uri="{FF2B5EF4-FFF2-40B4-BE49-F238E27FC236}">
-                <a16:creationId xmlns:a16="http://schemas.microsoft.com/office/drawing/2014/main" id="{F8D838B2-B9BE-4544-E705-6709BFDBF7CE}"/>
-              </a:ext>
-            </a:extLst>
-          </p:cNvPr>
-          <p:cNvSpPr txBox="1"/>
-          <p:nvPr/>
-        </p:nvSpPr>
-        <p:spPr>
-          <a:xfrm>
-            <a:off x="6457950" y="3431286"/>
-            <a:ext cx="290464" cy="369332"/>
-          </a:xfrm>
-          <a:prstGeom prst="rect">
-            <a:avLst/>
-          </a:prstGeom>
-          <a:noFill/>
-        </p:spPr>
-        <p:txBody>
-          <a:bodyPr wrap="none" rtlCol="0">
-            <a:spAutoFit/>
-          </a:bodyPr>
-          <a:lstStyle/>
-          <a:p>
-            <a:r>
-              <a:rPr lang="en-US" sz="1800" noProof="0" dirty="0">
-                <a:solidFill>
-                  <a:srgbClr val="FF0000"/>
-                </a:solidFill>
-                <a:latin typeface="Segoe UI" panose="020B0502040204020203" pitchFamily="34" charset="0"/>
-                <a:cs typeface="Segoe UI" panose="020B0502040204020203" pitchFamily="34" charset="0"/>
-              </a:rPr>
-              <a:t>x</a:t>
-            </a:r>
-          </a:p>
-        </p:txBody>
-      </p:sp>
-    </p:spTree>
-    <p:extLst>
-      <p:ext uri="{BB962C8B-B14F-4D97-AF65-F5344CB8AC3E}">
-        <p14:creationId xmlns:p14="http://schemas.microsoft.com/office/powerpoint/2010/main" val="3196010303"/>
-      </p:ext>
-    </p:extLst>
-  </p:cSld>
-  <p:clrMapOvr>
-    <a:masterClrMapping/>
-  </p:clrMapOvr>
-</p:sld>
-</file>
-
-<file path=ppt/slides/slide8.xml><?xml version="1.0" encoding="utf-8"?>
+<file path=ppt/slides/slide6.xml><?xml version="1.0" encoding="utf-8"?>
 <p:sld xmlns:a="http://schemas.openxmlformats.org/drawingml/2006/main" xmlns:r="http://schemas.openxmlformats.org/officeDocument/2006/relationships" xmlns:p="http://schemas.openxmlformats.org/presentationml/2006/main">
   <p:cSld>
     <p:spTree>
@@ -40293,7 +36352,7 @@
               <a:pPr defTabSz="342900">
                 <a:buClrTx/>
               </a:pPr>
-              <a:t>8</a:t>
+              <a:t>6</a:t>
             </a:fld>
             <a:endParaRPr lang="en-US" kern="1200" noProof="0" dirty="0">
               <a:solidFill>
@@ -40321,7 +36380,7 @@
 </p:sld>
 </file>
 
-<file path=ppt/slides/slide9.xml><?xml version="1.0" encoding="utf-8"?>
+<file path=ppt/slides/slide7.xml><?xml version="1.0" encoding="utf-8"?>
 <p:sld xmlns:a="http://schemas.openxmlformats.org/drawingml/2006/main" xmlns:r="http://schemas.openxmlformats.org/officeDocument/2006/relationships" xmlns:p="http://schemas.openxmlformats.org/presentationml/2006/main">
   <p:cSld>
     <p:spTree>
@@ -40564,7 +36623,7 @@
             </a:pPr>
             <a:fld id="{00000000-1234-1234-1234-123412341234}" type="slidenum">
               <a:rPr lang="en-US" noProof="0" smtClean="0"/>
-              <a:t>9</a:t>
+              <a:t>7</a:t>
             </a:fld>
             <a:endParaRPr lang="en-US" noProof="0" dirty="0"/>
           </a:p>
@@ -40580,6 +36639,2246 @@
   <p:clrMapOvr>
     <a:masterClrMapping/>
   </p:clrMapOvr>
+</p:sld>
+</file>
+
+<file path=ppt/slides/slide8.xml><?xml version="1.0" encoding="utf-8"?>
+<p:sld xmlns:a="http://schemas.openxmlformats.org/drawingml/2006/main" xmlns:r="http://schemas.openxmlformats.org/officeDocument/2006/relationships" xmlns:p="http://schemas.openxmlformats.org/presentationml/2006/main">
+  <p:cSld>
+    <p:spTree>
+      <p:nvGrpSpPr>
+        <p:cNvPr id="1" name=""/>
+        <p:cNvGrpSpPr/>
+        <p:nvPr/>
+      </p:nvGrpSpPr>
+      <p:grpSpPr>
+        <a:xfrm>
+          <a:off x="0" y="0"/>
+          <a:ext cx="0" cy="0"/>
+          <a:chOff x="0" y="0"/>
+          <a:chExt cx="0" cy="0"/>
+        </a:xfrm>
+      </p:grpSpPr>
+      <p:sp>
+        <p:nvSpPr>
+          <p:cNvPr id="2" name="Titel 1">
+            <a:extLst>
+              <a:ext uri="{FF2B5EF4-FFF2-40B4-BE49-F238E27FC236}">
+                <a16:creationId xmlns:a16="http://schemas.microsoft.com/office/drawing/2014/main" id="{B7F4AE5C-3E2F-B68C-A037-64DF367CED68}"/>
+              </a:ext>
+            </a:extLst>
+          </p:cNvPr>
+          <p:cNvSpPr>
+            <a:spLocks noGrp="1"/>
+          </p:cNvSpPr>
+          <p:nvPr>
+            <p:ph type="ctrTitle"/>
+          </p:nvPr>
+        </p:nvSpPr>
+        <p:spPr>
+          <a:xfrm>
+            <a:off x="1143000" y="841772"/>
+            <a:ext cx="6959851" cy="1790700"/>
+          </a:xfrm>
+        </p:spPr>
+        <p:txBody>
+          <a:bodyPr/>
+          <a:lstStyle/>
+          <a:p>
+            <a:r>
+              <a:rPr lang="en-US" noProof="0" dirty="0"/>
+              <a:t>1. System Specifications</a:t>
+            </a:r>
+          </a:p>
+        </p:txBody>
+      </p:sp>
+      <p:sp>
+        <p:nvSpPr>
+          <p:cNvPr id="3" name="Untertitel 2">
+            <a:extLst>
+              <a:ext uri="{FF2B5EF4-FFF2-40B4-BE49-F238E27FC236}">
+                <a16:creationId xmlns:a16="http://schemas.microsoft.com/office/drawing/2014/main" id="{8FEC819A-74B0-7EC8-4337-41DC3E86B626}"/>
+              </a:ext>
+            </a:extLst>
+          </p:cNvPr>
+          <p:cNvSpPr>
+            <a:spLocks noGrp="1"/>
+          </p:cNvSpPr>
+          <p:nvPr>
+            <p:ph type="subTitle" idx="1"/>
+          </p:nvPr>
+        </p:nvSpPr>
+        <p:spPr/>
+        <p:txBody>
+          <a:bodyPr/>
+          <a:lstStyle/>
+          <a:p>
+            <a:endParaRPr lang="en-US" noProof="0" dirty="0"/>
+          </a:p>
+        </p:txBody>
+      </p:sp>
+      <p:sp>
+        <p:nvSpPr>
+          <p:cNvPr id="4" name="Fußzeilenplatzhalter 3">
+            <a:extLst>
+              <a:ext uri="{FF2B5EF4-FFF2-40B4-BE49-F238E27FC236}">
+                <a16:creationId xmlns:a16="http://schemas.microsoft.com/office/drawing/2014/main" id="{E833F9BA-5972-1172-A390-8A7AA1A2068D}"/>
+              </a:ext>
+            </a:extLst>
+          </p:cNvPr>
+          <p:cNvSpPr>
+            <a:spLocks noGrp="1"/>
+          </p:cNvSpPr>
+          <p:nvPr>
+            <p:ph type="ftr" sz="quarter" idx="11"/>
+          </p:nvPr>
+        </p:nvSpPr>
+        <p:spPr/>
+        <p:txBody>
+          <a:bodyPr/>
+          <a:lstStyle/>
+          <a:p>
+            <a:pPr defTabSz="342900">
+              <a:buClrTx/>
+            </a:pPr>
+            <a:r>
+              <a:rPr lang="en-US" kern="1200" noProof="0" dirty="0">
+                <a:solidFill>
+                  <a:srgbClr val="101623">
+                    <a:tint val="75000"/>
+                  </a:srgbClr>
+                </a:solidFill>
+                <a:latin typeface="Calibri" panose="020F0502020204030204"/>
+                <a:ea typeface="+mn-ea"/>
+                <a:cs typeface="+mn-cs"/>
+              </a:rPr>
+              <a:t>Kissan Varatharajan - </a:t>
+            </a:r>
+            <a:r>
+              <a:rPr lang="en-US" kern="1200" noProof="0" dirty="0" err="1">
+                <a:solidFill>
+                  <a:srgbClr val="101623">
+                    <a:tint val="75000"/>
+                  </a:srgbClr>
+                </a:solidFill>
+                <a:latin typeface="Calibri" panose="020F0502020204030204"/>
+                <a:ea typeface="+mn-ea"/>
+                <a:cs typeface="+mn-cs"/>
+              </a:rPr>
+              <a:t>kissanv.github.io</a:t>
+            </a:r>
+            <a:endParaRPr lang="en-US" kern="1200" noProof="0" dirty="0">
+              <a:solidFill>
+                <a:srgbClr val="101623">
+                  <a:tint val="75000"/>
+                </a:srgbClr>
+              </a:solidFill>
+              <a:latin typeface="Calibri" panose="020F0502020204030204"/>
+              <a:ea typeface="+mn-ea"/>
+              <a:cs typeface="+mn-cs"/>
+            </a:endParaRPr>
+          </a:p>
+        </p:txBody>
+      </p:sp>
+      <p:sp>
+        <p:nvSpPr>
+          <p:cNvPr id="5" name="Foliennummernplatzhalter 4">
+            <a:extLst>
+              <a:ext uri="{FF2B5EF4-FFF2-40B4-BE49-F238E27FC236}">
+                <a16:creationId xmlns:a16="http://schemas.microsoft.com/office/drawing/2014/main" id="{E32D4EBF-656E-D2D2-0159-2EA0943B95ED}"/>
+              </a:ext>
+            </a:extLst>
+          </p:cNvPr>
+          <p:cNvSpPr>
+            <a:spLocks noGrp="1"/>
+          </p:cNvSpPr>
+          <p:nvPr>
+            <p:ph type="sldNum" sz="quarter" idx="12"/>
+          </p:nvPr>
+        </p:nvSpPr>
+        <p:spPr/>
+        <p:txBody>
+          <a:bodyPr/>
+          <a:lstStyle/>
+          <a:p>
+            <a:pPr defTabSz="342900">
+              <a:buClrTx/>
+            </a:pPr>
+            <a:fld id="{36EAFFE7-40E2-CA47-82C0-73D0FC591208}" type="slidenum">
+              <a:rPr lang="en-US" kern="1200" noProof="0" smtClean="0">
+                <a:solidFill>
+                  <a:srgbClr val="101623">
+                    <a:tint val="75000"/>
+                  </a:srgbClr>
+                </a:solidFill>
+                <a:latin typeface="Calibri" panose="020F0502020204030204"/>
+                <a:ea typeface="+mn-ea"/>
+                <a:cs typeface="+mn-cs"/>
+              </a:rPr>
+              <a:pPr defTabSz="342900">
+                <a:buClrTx/>
+              </a:pPr>
+              <a:t>8</a:t>
+            </a:fld>
+            <a:endParaRPr lang="en-US" kern="1200" noProof="0" dirty="0">
+              <a:solidFill>
+                <a:srgbClr val="101623">
+                  <a:tint val="75000"/>
+                </a:srgbClr>
+              </a:solidFill>
+              <a:latin typeface="Calibri" panose="020F0502020204030204"/>
+              <a:ea typeface="+mn-ea"/>
+              <a:cs typeface="+mn-cs"/>
+            </a:endParaRPr>
+          </a:p>
+        </p:txBody>
+      </p:sp>
+    </p:spTree>
+    <p:extLst>
+      <p:ext uri="{BB962C8B-B14F-4D97-AF65-F5344CB8AC3E}">
+        <p14:creationId xmlns:p14="http://schemas.microsoft.com/office/powerpoint/2010/main" val="3330333329"/>
+      </p:ext>
+    </p:extLst>
+  </p:cSld>
+  <p:clrMapOvr>
+    <a:masterClrMapping/>
+  </p:clrMapOvr>
+</p:sld>
+</file>
+
+<file path=ppt/slides/slide9.xml><?xml version="1.0" encoding="utf-8"?>
+<p:sld xmlns:a="http://schemas.openxmlformats.org/drawingml/2006/main" xmlns:r="http://schemas.openxmlformats.org/officeDocument/2006/relationships" xmlns:p="http://schemas.openxmlformats.org/presentationml/2006/main">
+  <p:cSld>
+    <p:spTree>
+      <p:nvGrpSpPr>
+        <p:cNvPr id="1" name=""/>
+        <p:cNvGrpSpPr/>
+        <p:nvPr/>
+      </p:nvGrpSpPr>
+      <p:grpSpPr>
+        <a:xfrm>
+          <a:off x="0" y="0"/>
+          <a:ext cx="0" cy="0"/>
+          <a:chOff x="0" y="0"/>
+          <a:chExt cx="0" cy="0"/>
+        </a:xfrm>
+      </p:grpSpPr>
+      <p:sp>
+        <p:nvSpPr>
+          <p:cNvPr id="2" name="Titel 1">
+            <a:extLst>
+              <a:ext uri="{FF2B5EF4-FFF2-40B4-BE49-F238E27FC236}">
+                <a16:creationId xmlns:a16="http://schemas.microsoft.com/office/drawing/2014/main" id="{71098B99-FC75-E348-ED3D-406646E38E97}"/>
+              </a:ext>
+            </a:extLst>
+          </p:cNvPr>
+          <p:cNvSpPr>
+            <a:spLocks noGrp="1"/>
+          </p:cNvSpPr>
+          <p:nvPr>
+            <p:ph type="title"/>
+          </p:nvPr>
+        </p:nvSpPr>
+        <p:spPr/>
+        <p:txBody>
+          <a:bodyPr/>
+          <a:lstStyle/>
+          <a:p>
+            <a:r>
+              <a:rPr lang="en-US" noProof="0" dirty="0"/>
+              <a:t>Introduction</a:t>
+            </a:r>
+          </a:p>
+        </p:txBody>
+      </p:sp>
+      <p:sp>
+        <p:nvSpPr>
+          <p:cNvPr id="3" name="Inhaltsplatzhalter 2">
+            <a:extLst>
+              <a:ext uri="{FF2B5EF4-FFF2-40B4-BE49-F238E27FC236}">
+                <a16:creationId xmlns:a16="http://schemas.microsoft.com/office/drawing/2014/main" id="{3CA35D9A-128F-F5EB-83A0-50412C54953F}"/>
+              </a:ext>
+            </a:extLst>
+          </p:cNvPr>
+          <p:cNvSpPr>
+            <a:spLocks noGrp="1"/>
+          </p:cNvSpPr>
+          <p:nvPr>
+            <p:ph idx="1"/>
+          </p:nvPr>
+        </p:nvSpPr>
+        <p:spPr>
+          <a:xfrm>
+            <a:off x="345523" y="1344669"/>
+            <a:ext cx="3797599" cy="3263504"/>
+          </a:xfrm>
+        </p:spPr>
+        <p:txBody>
+          <a:bodyPr>
+            <a:normAutofit/>
+          </a:bodyPr>
+          <a:lstStyle/>
+          <a:p>
+            <a:pPr marL="0" indent="0">
+              <a:buNone/>
+            </a:pPr>
+            <a:r>
+              <a:rPr lang="en-US" sz="1600" noProof="0" dirty="0"/>
+              <a:t>Week 7: Closed-Loop Stability</a:t>
+            </a:r>
+          </a:p>
+          <a:p>
+            <a:pPr marL="0" indent="0">
+              <a:buNone/>
+            </a:pPr>
+            <a:endParaRPr lang="en-US" sz="1600" noProof="0" dirty="0"/>
+          </a:p>
+          <a:p>
+            <a:pPr marL="0" indent="0">
+              <a:buNone/>
+            </a:pPr>
+            <a:endParaRPr lang="en-US" sz="1600" noProof="0" dirty="0"/>
+          </a:p>
+          <a:p>
+            <a:pPr marL="0" indent="0">
+              <a:buNone/>
+            </a:pPr>
+            <a:endParaRPr lang="en-US" sz="1600" noProof="0" dirty="0"/>
+          </a:p>
+          <a:p>
+            <a:pPr marL="0" indent="0">
+              <a:buNone/>
+            </a:pPr>
+            <a:endParaRPr lang="en-US" sz="1600" noProof="0" dirty="0"/>
+          </a:p>
+          <a:p>
+            <a:pPr marL="0" indent="0">
+              <a:buNone/>
+            </a:pPr>
+            <a:endParaRPr lang="en-US" sz="1600" noProof="0" dirty="0"/>
+          </a:p>
+          <a:p>
+            <a:pPr marL="0" indent="0">
+              <a:buNone/>
+            </a:pPr>
+            <a:endParaRPr lang="en-US" sz="1600" noProof="0" dirty="0"/>
+          </a:p>
+          <a:p>
+            <a:pPr marL="0" indent="0">
+              <a:buNone/>
+            </a:pPr>
+            <a:endParaRPr lang="en-US" sz="1600" noProof="0" dirty="0"/>
+          </a:p>
+          <a:p>
+            <a:pPr marL="0" indent="0">
+              <a:buNone/>
+            </a:pPr>
+            <a:r>
+              <a:rPr lang="en-US" sz="1600" noProof="0" dirty="0"/>
+              <a:t>Job's finished? 🤔</a:t>
+            </a:r>
+          </a:p>
+        </p:txBody>
+      </p:sp>
+      <p:sp>
+        <p:nvSpPr>
+          <p:cNvPr id="4" name="Fußzeilenplatzhalter 3">
+            <a:extLst>
+              <a:ext uri="{FF2B5EF4-FFF2-40B4-BE49-F238E27FC236}">
+                <a16:creationId xmlns:a16="http://schemas.microsoft.com/office/drawing/2014/main" id="{ABE140ED-3C22-4FC7-8641-7DBBE219E8DD}"/>
+              </a:ext>
+            </a:extLst>
+          </p:cNvPr>
+          <p:cNvSpPr>
+            <a:spLocks noGrp="1"/>
+          </p:cNvSpPr>
+          <p:nvPr>
+            <p:ph type="ftr" sz="quarter" idx="11"/>
+          </p:nvPr>
+        </p:nvSpPr>
+        <p:spPr/>
+        <p:txBody>
+          <a:bodyPr/>
+          <a:lstStyle/>
+          <a:p>
+            <a:pPr defTabSz="342900">
+              <a:buClrTx/>
+            </a:pPr>
+            <a:r>
+              <a:rPr lang="en-US" kern="1200" noProof="0" dirty="0">
+                <a:solidFill>
+                  <a:srgbClr val="101623">
+                    <a:tint val="75000"/>
+                  </a:srgbClr>
+                </a:solidFill>
+                <a:latin typeface="Calibri" panose="020F0502020204030204"/>
+                <a:ea typeface="+mn-ea"/>
+                <a:cs typeface="+mn-cs"/>
+              </a:rPr>
+              <a:t>Kissan Varatharajan - </a:t>
+            </a:r>
+            <a:r>
+              <a:rPr lang="en-US" kern="1200" noProof="0" dirty="0" err="1">
+                <a:solidFill>
+                  <a:srgbClr val="101623">
+                    <a:tint val="75000"/>
+                  </a:srgbClr>
+                </a:solidFill>
+                <a:latin typeface="Calibri" panose="020F0502020204030204"/>
+                <a:ea typeface="+mn-ea"/>
+                <a:cs typeface="+mn-cs"/>
+              </a:rPr>
+              <a:t>kissanv.github.io</a:t>
+            </a:r>
+            <a:endParaRPr lang="en-US" kern="1200" noProof="0" dirty="0">
+              <a:solidFill>
+                <a:srgbClr val="101623">
+                  <a:tint val="75000"/>
+                </a:srgbClr>
+              </a:solidFill>
+              <a:latin typeface="Calibri" panose="020F0502020204030204"/>
+              <a:ea typeface="+mn-ea"/>
+              <a:cs typeface="+mn-cs"/>
+            </a:endParaRPr>
+          </a:p>
+        </p:txBody>
+      </p:sp>
+      <p:sp>
+        <p:nvSpPr>
+          <p:cNvPr id="5" name="Foliennummernplatzhalter 4">
+            <a:extLst>
+              <a:ext uri="{FF2B5EF4-FFF2-40B4-BE49-F238E27FC236}">
+                <a16:creationId xmlns:a16="http://schemas.microsoft.com/office/drawing/2014/main" id="{BFE55A7B-920D-0A10-4347-EB3885AAB3AE}"/>
+              </a:ext>
+            </a:extLst>
+          </p:cNvPr>
+          <p:cNvSpPr>
+            <a:spLocks noGrp="1"/>
+          </p:cNvSpPr>
+          <p:nvPr>
+            <p:ph type="sldNum" sz="quarter" idx="12"/>
+          </p:nvPr>
+        </p:nvSpPr>
+        <p:spPr/>
+        <p:txBody>
+          <a:bodyPr/>
+          <a:lstStyle/>
+          <a:p>
+            <a:pPr defTabSz="342900">
+              <a:buClrTx/>
+            </a:pPr>
+            <a:fld id="{36EAFFE7-40E2-CA47-82C0-73D0FC591208}" type="slidenum">
+              <a:rPr lang="en-US" kern="1200" noProof="0" smtClean="0">
+                <a:solidFill>
+                  <a:srgbClr val="101623">
+                    <a:tint val="75000"/>
+                  </a:srgbClr>
+                </a:solidFill>
+                <a:latin typeface="Calibri" panose="020F0502020204030204"/>
+                <a:ea typeface="+mn-ea"/>
+                <a:cs typeface="+mn-cs"/>
+              </a:rPr>
+              <a:pPr defTabSz="342900">
+                <a:buClrTx/>
+              </a:pPr>
+              <a:t>9</a:t>
+            </a:fld>
+            <a:endParaRPr lang="en-US" kern="1200" noProof="0" dirty="0">
+              <a:solidFill>
+                <a:srgbClr val="101623">
+                  <a:tint val="75000"/>
+                </a:srgbClr>
+              </a:solidFill>
+              <a:latin typeface="Calibri" panose="020F0502020204030204"/>
+              <a:ea typeface="+mn-ea"/>
+              <a:cs typeface="+mn-cs"/>
+            </a:endParaRPr>
+          </a:p>
+        </p:txBody>
+      </p:sp>
+      <p:grpSp>
+        <p:nvGrpSpPr>
+          <p:cNvPr id="6" name="Gruppieren 5">
+            <a:extLst>
+              <a:ext uri="{FF2B5EF4-FFF2-40B4-BE49-F238E27FC236}">
+                <a16:creationId xmlns:a16="http://schemas.microsoft.com/office/drawing/2014/main" id="{76EDD45F-0B8A-8FAC-B4B6-AA49E7C9385B}"/>
+              </a:ext>
+            </a:extLst>
+          </p:cNvPr>
+          <p:cNvGrpSpPr/>
+          <p:nvPr/>
+        </p:nvGrpSpPr>
+        <p:grpSpPr>
+          <a:xfrm>
+            <a:off x="4904513" y="172641"/>
+            <a:ext cx="4060935" cy="1029367"/>
+            <a:chOff x="4891261" y="102393"/>
+            <a:chExt cx="4060935" cy="1029367"/>
+          </a:xfrm>
+        </p:grpSpPr>
+        <p:sp>
+          <p:nvSpPr>
+            <p:cNvPr id="7" name="Oval 6">
+              <a:extLst>
+                <a:ext uri="{FF2B5EF4-FFF2-40B4-BE49-F238E27FC236}">
+                  <a16:creationId xmlns:a16="http://schemas.microsoft.com/office/drawing/2014/main" id="{B0DE1CFA-E755-FC56-80C3-5E99D50ADEE1}"/>
+                </a:ext>
+              </a:extLst>
+            </p:cNvPr>
+            <p:cNvSpPr/>
+            <p:nvPr/>
+          </p:nvSpPr>
+          <p:spPr>
+            <a:xfrm>
+              <a:off x="5362418" y="321780"/>
+              <a:ext cx="216000" cy="216000"/>
+            </a:xfrm>
+            <a:prstGeom prst="ellipse">
+              <a:avLst/>
+            </a:prstGeom>
+            <a:noFill/>
+            <a:ln w="19050"/>
+          </p:spPr>
+          <p:style>
+            <a:lnRef idx="2">
+              <a:schemeClr val="accent1">
+                <a:shade val="15000"/>
+              </a:schemeClr>
+            </a:lnRef>
+            <a:fillRef idx="1">
+              <a:schemeClr val="accent1"/>
+            </a:fillRef>
+            <a:effectRef idx="0">
+              <a:schemeClr val="accent1"/>
+            </a:effectRef>
+            <a:fontRef idx="minor">
+              <a:schemeClr val="lt1"/>
+            </a:fontRef>
+          </p:style>
+          <p:txBody>
+            <a:bodyPr rtlCol="0" anchor="ctr"/>
+            <a:lstStyle/>
+            <a:p>
+              <a:pPr algn="ctr"/>
+              <a:endParaRPr lang="en-US" sz="1200" noProof="0" dirty="0"/>
+            </a:p>
+          </p:txBody>
+        </p:sp>
+        <p:cxnSp>
+          <p:nvCxnSpPr>
+            <p:cNvPr id="8" name="Gerade Verbindung mit Pfeil 7">
+              <a:extLst>
+                <a:ext uri="{FF2B5EF4-FFF2-40B4-BE49-F238E27FC236}">
+                  <a16:creationId xmlns:a16="http://schemas.microsoft.com/office/drawing/2014/main" id="{A9A2EC13-9F0B-3AAA-2F74-23A6C8821994}"/>
+                </a:ext>
+              </a:extLst>
+            </p:cNvPr>
+            <p:cNvCxnSpPr>
+              <a:cxnSpLocks/>
+            </p:cNvCxnSpPr>
+            <p:nvPr/>
+          </p:nvCxnSpPr>
+          <p:spPr>
+            <a:xfrm>
+              <a:off x="8241382" y="424960"/>
+              <a:ext cx="710814" cy="0"/>
+            </a:xfrm>
+            <a:prstGeom prst="straightConnector1">
+              <a:avLst/>
+            </a:prstGeom>
+            <a:ln w="19050">
+              <a:solidFill>
+                <a:schemeClr val="tx1"/>
+              </a:solidFill>
+              <a:tailEnd type="triangle"/>
+            </a:ln>
+          </p:spPr>
+          <p:style>
+            <a:lnRef idx="1">
+              <a:schemeClr val="accent1"/>
+            </a:lnRef>
+            <a:fillRef idx="0">
+              <a:schemeClr val="accent1"/>
+            </a:fillRef>
+            <a:effectRef idx="0">
+              <a:schemeClr val="accent1"/>
+            </a:effectRef>
+            <a:fontRef idx="minor">
+              <a:schemeClr val="tx1"/>
+            </a:fontRef>
+          </p:style>
+        </p:cxnSp>
+        <p:grpSp>
+          <p:nvGrpSpPr>
+            <p:cNvPr id="9" name="Gruppieren 8">
+              <a:extLst>
+                <a:ext uri="{FF2B5EF4-FFF2-40B4-BE49-F238E27FC236}">
+                  <a16:creationId xmlns:a16="http://schemas.microsoft.com/office/drawing/2014/main" id="{E0739D6A-AB35-C055-17A2-3C2D81578F24}"/>
+                </a:ext>
+              </a:extLst>
+            </p:cNvPr>
+            <p:cNvGrpSpPr/>
+            <p:nvPr/>
+          </p:nvGrpSpPr>
+          <p:grpSpPr>
+            <a:xfrm>
+              <a:off x="7354668" y="164444"/>
+              <a:ext cx="886714" cy="553007"/>
+              <a:chOff x="2403054" y="3026666"/>
+              <a:chExt cx="545710" cy="553007"/>
+            </a:xfrm>
+          </p:grpSpPr>
+          <p:sp>
+            <p:nvSpPr>
+              <p:cNvPr id="21" name="Rechteck 20">
+                <a:extLst>
+                  <a:ext uri="{FF2B5EF4-FFF2-40B4-BE49-F238E27FC236}">
+                    <a16:creationId xmlns:a16="http://schemas.microsoft.com/office/drawing/2014/main" id="{0B2C4B06-A796-5C7F-61B9-574DB1E11DBB}"/>
+                  </a:ext>
+                </a:extLst>
+              </p:cNvPr>
+              <p:cNvSpPr/>
+              <p:nvPr/>
+            </p:nvSpPr>
+            <p:spPr>
+              <a:xfrm>
+                <a:off x="2403054" y="3026666"/>
+                <a:ext cx="545710" cy="553007"/>
+              </a:xfrm>
+              <a:prstGeom prst="rect">
+                <a:avLst/>
+              </a:prstGeom>
+              <a:noFill/>
+              <a:ln w="25400"/>
+            </p:spPr>
+            <p:style>
+              <a:lnRef idx="2">
+                <a:schemeClr val="accent1">
+                  <a:shade val="15000"/>
+                </a:schemeClr>
+              </a:lnRef>
+              <a:fillRef idx="1">
+                <a:schemeClr val="accent1"/>
+              </a:fillRef>
+              <a:effectRef idx="0">
+                <a:schemeClr val="accent1"/>
+              </a:effectRef>
+              <a:fontRef idx="minor">
+                <a:schemeClr val="lt1"/>
+              </a:fontRef>
+            </p:style>
+            <p:txBody>
+              <a:bodyPr rtlCol="0" anchor="ctr"/>
+              <a:lstStyle/>
+              <a:p>
+                <a:pPr algn="ctr"/>
+                <a:endParaRPr lang="en-US" sz="1200" noProof="0" dirty="0"/>
+              </a:p>
+            </p:txBody>
+          </p:sp>
+          <mc:AlternateContent xmlns:mc="http://schemas.openxmlformats.org/markup-compatibility/2006" xmlns:a14="http://schemas.microsoft.com/office/drawing/2010/main">
+            <mc:Choice Requires="a14">
+              <p:sp>
+                <p:nvSpPr>
+                  <p:cNvPr id="22" name="Textfeld 21">
+                    <a:extLst>
+                      <a:ext uri="{FF2B5EF4-FFF2-40B4-BE49-F238E27FC236}">
+                        <a16:creationId xmlns:a16="http://schemas.microsoft.com/office/drawing/2014/main" id="{4083BE7F-0B5A-D65A-66F2-E2BDC9502B75}"/>
+                      </a:ext>
+                    </a:extLst>
+                  </p:cNvPr>
+                  <p:cNvSpPr txBox="1"/>
+                  <p:nvPr/>
+                </p:nvSpPr>
+                <p:spPr>
+                  <a:xfrm>
+                    <a:off x="2459135" y="3107336"/>
+                    <a:ext cx="421972" cy="369332"/>
+                  </a:xfrm>
+                  <a:prstGeom prst="rect">
+                    <a:avLst/>
+                  </a:prstGeom>
+                  <a:noFill/>
+                </p:spPr>
+                <p:txBody>
+                  <a:bodyPr wrap="square" rtlCol="0">
+                    <a:spAutoFit/>
+                  </a:bodyPr>
+                  <a:lstStyle/>
+                  <a:p>
+                    <a:pPr/>
+                    <a14:m>
+                      <m:oMathPara xmlns:m="http://schemas.openxmlformats.org/officeDocument/2006/math">
+                        <m:oMathParaPr>
+                          <m:jc m:val="centerGroup"/>
+                        </m:oMathParaPr>
+                        <m:oMath xmlns:m="http://schemas.openxmlformats.org/officeDocument/2006/math">
+                          <m:r>
+                            <a:rPr lang="en-US" sz="1800" i="1" noProof="0" smtClean="0">
+                              <a:latin typeface="Cambria Math" panose="02040503050406030204" pitchFamily="18" charset="0"/>
+                              <a:cs typeface="Segoe UI" panose="020B0502040204020203" pitchFamily="34" charset="0"/>
+                            </a:rPr>
+                            <m:t>𝑃</m:t>
+                          </m:r>
+                          <m:r>
+                            <a:rPr lang="en-US" sz="1800" b="0" i="1" noProof="0" smtClean="0">
+                              <a:latin typeface="Cambria Math" panose="02040503050406030204" pitchFamily="18" charset="0"/>
+                              <a:cs typeface="Segoe UI" panose="020B0502040204020203" pitchFamily="34" charset="0"/>
+                            </a:rPr>
+                            <m:t>(</m:t>
+                          </m:r>
+                          <m:r>
+                            <m:rPr>
+                              <m:sty m:val="p"/>
+                            </m:rPr>
+                            <a:rPr lang="en-US" sz="1800" b="0" i="1" noProof="0" smtClean="0">
+                              <a:latin typeface="Cambria Math" panose="02040503050406030204" pitchFamily="18" charset="0"/>
+                              <a:cs typeface="Segoe UI" panose="020B0502040204020203" pitchFamily="34" charset="0"/>
+                            </a:rPr>
+                            <m:t>s</m:t>
+                          </m:r>
+                          <m:r>
+                            <a:rPr lang="en-US" sz="1800" b="0" i="1" noProof="0" smtClean="0">
+                              <a:latin typeface="Cambria Math" panose="02040503050406030204" pitchFamily="18" charset="0"/>
+                              <a:cs typeface="Segoe UI" panose="020B0502040204020203" pitchFamily="34" charset="0"/>
+                            </a:rPr>
+                            <m:t>)</m:t>
+                          </m:r>
+                        </m:oMath>
+                      </m:oMathPara>
+                    </a14:m>
+                    <a:endParaRPr lang="en-US" noProof="0" dirty="0"/>
+                  </a:p>
+                </p:txBody>
+              </p:sp>
+            </mc:Choice>
+            <mc:Fallback xmlns="">
+              <p:sp>
+                <p:nvSpPr>
+                  <p:cNvPr id="22" name="Textfeld 21">
+                    <a:extLst>
+                      <a:ext uri="{FF2B5EF4-FFF2-40B4-BE49-F238E27FC236}">
+                        <a16:creationId xmlns:a16="http://schemas.microsoft.com/office/drawing/2014/main" id="{4083BE7F-0B5A-D65A-66F2-E2BDC9502B75}"/>
+                      </a:ext>
+                    </a:extLst>
+                  </p:cNvPr>
+                  <p:cNvSpPr txBox="1">
+                    <a:spLocks noRot="1" noChangeAspect="1" noMove="1" noResize="1" noEditPoints="1" noAdjustHandles="1" noChangeArrowheads="1" noChangeShapeType="1" noTextEdit="1"/>
+                  </p:cNvSpPr>
+                  <p:nvPr/>
+                </p:nvSpPr>
+                <p:spPr>
+                  <a:xfrm>
+                    <a:off x="2459135" y="3107336"/>
+                    <a:ext cx="421972" cy="369332"/>
+                  </a:xfrm>
+                  <a:prstGeom prst="rect">
+                    <a:avLst/>
+                  </a:prstGeom>
+                  <a:blipFill>
+                    <a:blip r:embed="rId2"/>
+                    <a:stretch>
+                      <a:fillRect b="-20000"/>
+                    </a:stretch>
+                  </a:blipFill>
+                </p:spPr>
+                <p:txBody>
+                  <a:bodyPr/>
+                  <a:lstStyle/>
+                  <a:p>
+                    <a:r>
+                      <a:rPr lang="de-DE">
+                        <a:noFill/>
+                      </a:rPr>
+                      <a:t> </a:t>
+                    </a:r>
+                  </a:p>
+                </p:txBody>
+              </p:sp>
+            </mc:Fallback>
+          </mc:AlternateContent>
+        </p:grpSp>
+        <p:grpSp>
+          <p:nvGrpSpPr>
+            <p:cNvPr id="10" name="Gruppieren 9">
+              <a:extLst>
+                <a:ext uri="{FF2B5EF4-FFF2-40B4-BE49-F238E27FC236}">
+                  <a16:creationId xmlns:a16="http://schemas.microsoft.com/office/drawing/2014/main" id="{B21819EB-9961-E464-8911-34025F377762}"/>
+                </a:ext>
+              </a:extLst>
+            </p:cNvPr>
+            <p:cNvGrpSpPr/>
+            <p:nvPr/>
+          </p:nvGrpSpPr>
+          <p:grpSpPr>
+            <a:xfrm>
+              <a:off x="6014915" y="164444"/>
+              <a:ext cx="943472" cy="553007"/>
+              <a:chOff x="2676164" y="3940223"/>
+              <a:chExt cx="587951" cy="553007"/>
+            </a:xfrm>
+          </p:grpSpPr>
+          <p:sp>
+            <p:nvSpPr>
+              <p:cNvPr id="19" name="Rechteck 18">
+                <a:extLst>
+                  <a:ext uri="{FF2B5EF4-FFF2-40B4-BE49-F238E27FC236}">
+                    <a16:creationId xmlns:a16="http://schemas.microsoft.com/office/drawing/2014/main" id="{E2484295-2651-91CD-86F6-EA27C46364CA}"/>
+                  </a:ext>
+                </a:extLst>
+              </p:cNvPr>
+              <p:cNvSpPr/>
+              <p:nvPr/>
+            </p:nvSpPr>
+            <p:spPr>
+              <a:xfrm>
+                <a:off x="2676164" y="3940223"/>
+                <a:ext cx="587951" cy="553007"/>
+              </a:xfrm>
+              <a:prstGeom prst="rect">
+                <a:avLst/>
+              </a:prstGeom>
+              <a:noFill/>
+              <a:ln w="25400"/>
+            </p:spPr>
+            <p:style>
+              <a:lnRef idx="2">
+                <a:schemeClr val="accent1">
+                  <a:shade val="15000"/>
+                </a:schemeClr>
+              </a:lnRef>
+              <a:fillRef idx="1">
+                <a:schemeClr val="accent1"/>
+              </a:fillRef>
+              <a:effectRef idx="0">
+                <a:schemeClr val="accent1"/>
+              </a:effectRef>
+              <a:fontRef idx="minor">
+                <a:schemeClr val="lt1"/>
+              </a:fontRef>
+            </p:style>
+            <p:txBody>
+              <a:bodyPr rtlCol="0" anchor="ctr"/>
+              <a:lstStyle/>
+              <a:p>
+                <a:pPr algn="ctr"/>
+                <a:endParaRPr lang="en-US" sz="1200" noProof="0" dirty="0"/>
+              </a:p>
+            </p:txBody>
+          </p:sp>
+          <mc:AlternateContent xmlns:mc="http://schemas.openxmlformats.org/markup-compatibility/2006" xmlns:a14="http://schemas.microsoft.com/office/drawing/2010/main">
+            <mc:Choice Requires="a14">
+              <p:sp>
+                <p:nvSpPr>
+                  <p:cNvPr id="20" name="Textfeld 19">
+                    <a:extLst>
+                      <a:ext uri="{FF2B5EF4-FFF2-40B4-BE49-F238E27FC236}">
+                        <a16:creationId xmlns:a16="http://schemas.microsoft.com/office/drawing/2014/main" id="{A40CB2DF-2CD9-4917-9B66-3CF8433A5C8D}"/>
+                      </a:ext>
+                    </a:extLst>
+                  </p:cNvPr>
+                  <p:cNvSpPr txBox="1"/>
+                  <p:nvPr/>
+                </p:nvSpPr>
+                <p:spPr>
+                  <a:xfrm>
+                    <a:off x="2869111" y="4006502"/>
+                    <a:ext cx="230160" cy="369332"/>
+                  </a:xfrm>
+                  <a:prstGeom prst="rect">
+                    <a:avLst/>
+                  </a:prstGeom>
+                  <a:noFill/>
+                </p:spPr>
+                <p:txBody>
+                  <a:bodyPr wrap="none" rtlCol="0">
+                    <a:spAutoFit/>
+                  </a:bodyPr>
+                  <a:lstStyle/>
+                  <a:p>
+                    <a:pPr/>
+                    <a14:m>
+                      <m:oMathPara xmlns:m="http://schemas.openxmlformats.org/officeDocument/2006/math">
+                        <m:oMathParaPr>
+                          <m:jc m:val="centerGroup"/>
+                        </m:oMathParaPr>
+                        <m:oMath xmlns:m="http://schemas.openxmlformats.org/officeDocument/2006/math">
+                          <m:r>
+                            <a:rPr lang="en-US" sz="1800" b="0" i="1" noProof="0" smtClean="0">
+                              <a:latin typeface="Cambria Math" panose="02040503050406030204" pitchFamily="18" charset="0"/>
+                              <a:cs typeface="Segoe UI" panose="020B0502040204020203" pitchFamily="34" charset="0"/>
+                            </a:rPr>
+                            <m:t>𝑘</m:t>
+                          </m:r>
+                        </m:oMath>
+                      </m:oMathPara>
+                    </a14:m>
+                    <a:endParaRPr lang="en-US" noProof="0" dirty="0"/>
+                  </a:p>
+                </p:txBody>
+              </p:sp>
+            </mc:Choice>
+            <mc:Fallback xmlns="">
+              <p:sp>
+                <p:nvSpPr>
+                  <p:cNvPr id="20" name="Textfeld 19">
+                    <a:extLst>
+                      <a:ext uri="{FF2B5EF4-FFF2-40B4-BE49-F238E27FC236}">
+                        <a16:creationId xmlns:a16="http://schemas.microsoft.com/office/drawing/2014/main" id="{A40CB2DF-2CD9-4917-9B66-3CF8433A5C8D}"/>
+                      </a:ext>
+                    </a:extLst>
+                  </p:cNvPr>
+                  <p:cNvSpPr txBox="1">
+                    <a:spLocks noRot="1" noChangeAspect="1" noMove="1" noResize="1" noEditPoints="1" noAdjustHandles="1" noChangeArrowheads="1" noChangeShapeType="1" noTextEdit="1"/>
+                  </p:cNvSpPr>
+                  <p:nvPr/>
+                </p:nvSpPr>
+                <p:spPr>
+                  <a:xfrm>
+                    <a:off x="2869111" y="4006502"/>
+                    <a:ext cx="230160" cy="369332"/>
+                  </a:xfrm>
+                  <a:prstGeom prst="rect">
+                    <a:avLst/>
+                  </a:prstGeom>
+                  <a:blipFill>
+                    <a:blip r:embed="rId3"/>
+                    <a:stretch>
+                      <a:fillRect/>
+                    </a:stretch>
+                  </a:blipFill>
+                </p:spPr>
+                <p:txBody>
+                  <a:bodyPr/>
+                  <a:lstStyle/>
+                  <a:p>
+                    <a:r>
+                      <a:rPr lang="de-DE">
+                        <a:noFill/>
+                      </a:rPr>
+                      <a:t> </a:t>
+                    </a:r>
+                  </a:p>
+                </p:txBody>
+              </p:sp>
+            </mc:Fallback>
+          </mc:AlternateContent>
+        </p:grpSp>
+        <p:cxnSp>
+          <p:nvCxnSpPr>
+            <p:cNvPr id="11" name="Gerade Verbindung mit Pfeil 10">
+              <a:extLst>
+                <a:ext uri="{FF2B5EF4-FFF2-40B4-BE49-F238E27FC236}">
+                  <a16:creationId xmlns:a16="http://schemas.microsoft.com/office/drawing/2014/main" id="{952931EA-DEF6-98DF-76A2-BF6F96B8DF5B}"/>
+                </a:ext>
+              </a:extLst>
+            </p:cNvPr>
+            <p:cNvCxnSpPr>
+              <a:cxnSpLocks/>
+              <a:endCxn id="19" idx="1"/>
+            </p:cNvCxnSpPr>
+            <p:nvPr/>
+          </p:nvCxnSpPr>
+          <p:spPr>
+            <a:xfrm>
+              <a:off x="5573194" y="440947"/>
+              <a:ext cx="441721" cy="1"/>
+            </a:xfrm>
+            <a:prstGeom prst="straightConnector1">
+              <a:avLst/>
+            </a:prstGeom>
+            <a:ln w="19050">
+              <a:solidFill>
+                <a:schemeClr val="tx1"/>
+              </a:solidFill>
+              <a:tailEnd type="triangle"/>
+            </a:ln>
+          </p:spPr>
+          <p:style>
+            <a:lnRef idx="1">
+              <a:schemeClr val="accent1"/>
+            </a:lnRef>
+            <a:fillRef idx="0">
+              <a:schemeClr val="accent1"/>
+            </a:fillRef>
+            <a:effectRef idx="0">
+              <a:schemeClr val="accent1"/>
+            </a:effectRef>
+            <a:fontRef idx="minor">
+              <a:schemeClr val="tx1"/>
+            </a:fontRef>
+          </p:style>
+        </p:cxnSp>
+        <p:cxnSp>
+          <p:nvCxnSpPr>
+            <p:cNvPr id="12" name="Gerade Verbindung mit Pfeil 11">
+              <a:extLst>
+                <a:ext uri="{FF2B5EF4-FFF2-40B4-BE49-F238E27FC236}">
+                  <a16:creationId xmlns:a16="http://schemas.microsoft.com/office/drawing/2014/main" id="{CDA9EAC5-A7AB-0EF5-6C52-7255C66F01A1}"/>
+                </a:ext>
+              </a:extLst>
+            </p:cNvPr>
+            <p:cNvCxnSpPr>
+              <a:cxnSpLocks/>
+            </p:cNvCxnSpPr>
+            <p:nvPr/>
+          </p:nvCxnSpPr>
+          <p:spPr>
+            <a:xfrm>
+              <a:off x="4891261" y="427669"/>
+              <a:ext cx="471157" cy="2112"/>
+            </a:xfrm>
+            <a:prstGeom prst="straightConnector1">
+              <a:avLst/>
+            </a:prstGeom>
+            <a:ln w="19050">
+              <a:solidFill>
+                <a:schemeClr val="tx1"/>
+              </a:solidFill>
+              <a:tailEnd type="triangle"/>
+            </a:ln>
+          </p:spPr>
+          <p:style>
+            <a:lnRef idx="1">
+              <a:schemeClr val="accent1"/>
+            </a:lnRef>
+            <a:fillRef idx="0">
+              <a:schemeClr val="accent1"/>
+            </a:fillRef>
+            <a:effectRef idx="0">
+              <a:schemeClr val="accent1"/>
+            </a:effectRef>
+            <a:fontRef idx="minor">
+              <a:schemeClr val="tx1"/>
+            </a:fontRef>
+          </p:style>
+        </p:cxnSp>
+        <mc:AlternateContent xmlns:mc="http://schemas.openxmlformats.org/markup-compatibility/2006" xmlns:a14="http://schemas.microsoft.com/office/drawing/2010/main">
+          <mc:Choice Requires="a14">
+            <p:sp>
+              <p:nvSpPr>
+                <p:cNvPr id="13" name="Textfeld 12">
+                  <a:extLst>
+                    <a:ext uri="{FF2B5EF4-FFF2-40B4-BE49-F238E27FC236}">
+                      <a16:creationId xmlns:a16="http://schemas.microsoft.com/office/drawing/2014/main" id="{EB8CA0EC-4BFC-7F02-F84E-D31A7CB63D2E}"/>
+                    </a:ext>
+                  </a:extLst>
+                </p:cNvPr>
+                <p:cNvSpPr txBox="1"/>
+                <p:nvPr/>
+              </p:nvSpPr>
+              <p:spPr>
+                <a:xfrm>
+                  <a:off x="5242885" y="126943"/>
+                  <a:ext cx="1041569" cy="338554"/>
+                </a:xfrm>
+                <a:prstGeom prst="rect">
+                  <a:avLst/>
+                </a:prstGeom>
+                <a:noFill/>
+              </p:spPr>
+              <p:txBody>
+                <a:bodyPr wrap="square" rtlCol="0">
+                  <a:spAutoFit/>
+                </a:bodyPr>
+                <a:lstStyle/>
+                <a:p>
+                  <a:pPr/>
+                  <a14:m>
+                    <m:oMathPara xmlns:m="http://schemas.openxmlformats.org/officeDocument/2006/math">
+                      <m:oMathParaPr>
+                        <m:jc m:val="centerGroup"/>
+                      </m:oMathParaPr>
+                      <m:oMath xmlns:m="http://schemas.openxmlformats.org/officeDocument/2006/math">
+                        <m:r>
+                          <a:rPr lang="en-US" sz="1600" i="1" noProof="0" smtClean="0">
+                            <a:latin typeface="Cambria Math" panose="02040503050406030204" pitchFamily="18" charset="0"/>
+                          </a:rPr>
+                          <m:t> </m:t>
+                        </m:r>
+                        <m:r>
+                          <a:rPr lang="en-US" sz="1600" b="0" i="1" noProof="0" smtClean="0">
+                            <a:latin typeface="Cambria Math" panose="02040503050406030204" pitchFamily="18" charset="0"/>
+                          </a:rPr>
+                          <m:t>𝑒</m:t>
+                        </m:r>
+                      </m:oMath>
+                    </m:oMathPara>
+                  </a14:m>
+                  <a:endParaRPr lang="en-US" sz="1600" noProof="0" dirty="0"/>
+                </a:p>
+              </p:txBody>
+            </p:sp>
+          </mc:Choice>
+          <mc:Fallback xmlns="">
+            <p:sp>
+              <p:nvSpPr>
+                <p:cNvPr id="13" name="Textfeld 12">
+                  <a:extLst>
+                    <a:ext uri="{FF2B5EF4-FFF2-40B4-BE49-F238E27FC236}">
+                      <a16:creationId xmlns:a16="http://schemas.microsoft.com/office/drawing/2014/main" id="{EB8CA0EC-4BFC-7F02-F84E-D31A7CB63D2E}"/>
+                    </a:ext>
+                  </a:extLst>
+                </p:cNvPr>
+                <p:cNvSpPr txBox="1">
+                  <a:spLocks noRot="1" noChangeAspect="1" noMove="1" noResize="1" noEditPoints="1" noAdjustHandles="1" noChangeArrowheads="1" noChangeShapeType="1" noTextEdit="1"/>
+                </p:cNvSpPr>
+                <p:nvPr/>
+              </p:nvSpPr>
+              <p:spPr>
+                <a:xfrm>
+                  <a:off x="5242885" y="126943"/>
+                  <a:ext cx="1041569" cy="338554"/>
+                </a:xfrm>
+                <a:prstGeom prst="rect">
+                  <a:avLst/>
+                </a:prstGeom>
+                <a:blipFill>
+                  <a:blip r:embed="rId4"/>
+                  <a:stretch>
+                    <a:fillRect b="-17857"/>
+                  </a:stretch>
+                </a:blipFill>
+              </p:spPr>
+              <p:txBody>
+                <a:bodyPr/>
+                <a:lstStyle/>
+                <a:p>
+                  <a:r>
+                    <a:rPr lang="de-DE">
+                      <a:noFill/>
+                    </a:rPr>
+                    <a:t> </a:t>
+                  </a:r>
+                </a:p>
+              </p:txBody>
+            </p:sp>
+          </mc:Fallback>
+        </mc:AlternateContent>
+        <mc:AlternateContent xmlns:mc="http://schemas.openxmlformats.org/markup-compatibility/2006" xmlns:a14="http://schemas.microsoft.com/office/drawing/2010/main">
+          <mc:Choice Requires="a14">
+            <p:sp>
+              <p:nvSpPr>
+                <p:cNvPr id="14" name="Textfeld 13">
+                  <a:extLst>
+                    <a:ext uri="{FF2B5EF4-FFF2-40B4-BE49-F238E27FC236}">
+                      <a16:creationId xmlns:a16="http://schemas.microsoft.com/office/drawing/2014/main" id="{9F3924F2-1A83-51F6-A501-4B4551DF26FF}"/>
+                    </a:ext>
+                  </a:extLst>
+                </p:cNvPr>
+                <p:cNvSpPr txBox="1"/>
+                <p:nvPr/>
+              </p:nvSpPr>
+              <p:spPr>
+                <a:xfrm>
+                  <a:off x="6640490" y="102393"/>
+                  <a:ext cx="1041569" cy="338554"/>
+                </a:xfrm>
+                <a:prstGeom prst="rect">
+                  <a:avLst/>
+                </a:prstGeom>
+                <a:noFill/>
+              </p:spPr>
+              <p:txBody>
+                <a:bodyPr wrap="square" rtlCol="0">
+                  <a:spAutoFit/>
+                </a:bodyPr>
+                <a:lstStyle/>
+                <a:p>
+                  <a:pPr/>
+                  <a14:m>
+                    <m:oMathPara xmlns:m="http://schemas.openxmlformats.org/officeDocument/2006/math">
+                      <m:oMathParaPr>
+                        <m:jc m:val="centerGroup"/>
+                      </m:oMathParaPr>
+                      <m:oMath xmlns:m="http://schemas.openxmlformats.org/officeDocument/2006/math">
+                        <m:r>
+                          <a:rPr lang="en-US" sz="1600" i="1" noProof="0" smtClean="0">
+                            <a:latin typeface="Cambria Math" panose="02040503050406030204" pitchFamily="18" charset="0"/>
+                          </a:rPr>
+                          <m:t> </m:t>
+                        </m:r>
+                        <m:r>
+                          <a:rPr lang="en-US" sz="1600" b="0" i="1" noProof="0" smtClean="0">
+                            <a:latin typeface="Cambria Math" panose="02040503050406030204" pitchFamily="18" charset="0"/>
+                          </a:rPr>
+                          <m:t>𝑢</m:t>
+                        </m:r>
+                      </m:oMath>
+                    </m:oMathPara>
+                  </a14:m>
+                  <a:endParaRPr lang="en-US" sz="1600" noProof="0" dirty="0"/>
+                </a:p>
+              </p:txBody>
+            </p:sp>
+          </mc:Choice>
+          <mc:Fallback xmlns="">
+            <p:sp>
+              <p:nvSpPr>
+                <p:cNvPr id="14" name="Textfeld 13">
+                  <a:extLst>
+                    <a:ext uri="{FF2B5EF4-FFF2-40B4-BE49-F238E27FC236}">
+                      <a16:creationId xmlns:a16="http://schemas.microsoft.com/office/drawing/2014/main" id="{9F3924F2-1A83-51F6-A501-4B4551DF26FF}"/>
+                    </a:ext>
+                  </a:extLst>
+                </p:cNvPr>
+                <p:cNvSpPr txBox="1">
+                  <a:spLocks noRot="1" noChangeAspect="1" noMove="1" noResize="1" noEditPoints="1" noAdjustHandles="1" noChangeArrowheads="1" noChangeShapeType="1" noTextEdit="1"/>
+                </p:cNvSpPr>
+                <p:nvPr/>
+              </p:nvSpPr>
+              <p:spPr>
+                <a:xfrm>
+                  <a:off x="6640490" y="102393"/>
+                  <a:ext cx="1041569" cy="338554"/>
+                </a:xfrm>
+                <a:prstGeom prst="rect">
+                  <a:avLst/>
+                </a:prstGeom>
+                <a:blipFill>
+                  <a:blip r:embed="rId5"/>
+                  <a:stretch>
+                    <a:fillRect b="-17857"/>
+                  </a:stretch>
+                </a:blipFill>
+              </p:spPr>
+              <p:txBody>
+                <a:bodyPr/>
+                <a:lstStyle/>
+                <a:p>
+                  <a:r>
+                    <a:rPr lang="de-DE">
+                      <a:noFill/>
+                    </a:rPr>
+                    <a:t> </a:t>
+                  </a:r>
+                </a:p>
+              </p:txBody>
+            </p:sp>
+          </mc:Fallback>
+        </mc:AlternateContent>
+        <p:cxnSp>
+          <p:nvCxnSpPr>
+            <p:cNvPr id="15" name="Gerade Verbindung mit Pfeil 14">
+              <a:extLst>
+                <a:ext uri="{FF2B5EF4-FFF2-40B4-BE49-F238E27FC236}">
+                  <a16:creationId xmlns:a16="http://schemas.microsoft.com/office/drawing/2014/main" id="{D6B21390-6F8F-E6E1-A06F-4BECB43FE13B}"/>
+                </a:ext>
+              </a:extLst>
+            </p:cNvPr>
+            <p:cNvCxnSpPr>
+              <a:cxnSpLocks/>
+            </p:cNvCxnSpPr>
+            <p:nvPr/>
+          </p:nvCxnSpPr>
+          <p:spPr>
+            <a:xfrm>
+              <a:off x="6968970" y="415816"/>
+              <a:ext cx="359541" cy="0"/>
+            </a:xfrm>
+            <a:prstGeom prst="straightConnector1">
+              <a:avLst/>
+            </a:prstGeom>
+            <a:ln w="19050">
+              <a:solidFill>
+                <a:schemeClr val="tx1"/>
+              </a:solidFill>
+              <a:tailEnd type="triangle"/>
+            </a:ln>
+          </p:spPr>
+          <p:style>
+            <a:lnRef idx="1">
+              <a:schemeClr val="accent1"/>
+            </a:lnRef>
+            <a:fillRef idx="0">
+              <a:schemeClr val="accent1"/>
+            </a:fillRef>
+            <a:effectRef idx="0">
+              <a:schemeClr val="accent1"/>
+            </a:effectRef>
+            <a:fontRef idx="minor">
+              <a:schemeClr val="tx1"/>
+            </a:fontRef>
+          </p:style>
+        </p:cxnSp>
+        <p:cxnSp>
+          <p:nvCxnSpPr>
+            <p:cNvPr id="16" name="Gerade Verbindung 15">
+              <a:extLst>
+                <a:ext uri="{FF2B5EF4-FFF2-40B4-BE49-F238E27FC236}">
+                  <a16:creationId xmlns:a16="http://schemas.microsoft.com/office/drawing/2014/main" id="{E05956E1-322A-D918-1539-5F82CD172E73}"/>
+                </a:ext>
+              </a:extLst>
+            </p:cNvPr>
+            <p:cNvCxnSpPr>
+              <a:cxnSpLocks/>
+            </p:cNvCxnSpPr>
+            <p:nvPr/>
+          </p:nvCxnSpPr>
+          <p:spPr>
+            <a:xfrm>
+              <a:off x="8515349" y="424960"/>
+              <a:ext cx="0" cy="706800"/>
+            </a:xfrm>
+            <a:prstGeom prst="line">
+              <a:avLst/>
+            </a:prstGeom>
+            <a:ln w="19050">
+              <a:solidFill>
+                <a:schemeClr val="tx1"/>
+              </a:solidFill>
+            </a:ln>
+          </p:spPr>
+          <p:style>
+            <a:lnRef idx="1">
+              <a:schemeClr val="accent1"/>
+            </a:lnRef>
+            <a:fillRef idx="0">
+              <a:schemeClr val="accent1"/>
+            </a:fillRef>
+            <a:effectRef idx="0">
+              <a:schemeClr val="accent1"/>
+            </a:effectRef>
+            <a:fontRef idx="minor">
+              <a:schemeClr val="tx1"/>
+            </a:fontRef>
+          </p:style>
+        </p:cxnSp>
+        <mc:AlternateContent xmlns:mc="http://schemas.openxmlformats.org/markup-compatibility/2006" xmlns:a14="http://schemas.microsoft.com/office/drawing/2010/main">
+          <mc:Choice Requires="a14">
+            <p:sp>
+              <p:nvSpPr>
+                <p:cNvPr id="17" name="Textfeld 16">
+                  <a:extLst>
+                    <a:ext uri="{FF2B5EF4-FFF2-40B4-BE49-F238E27FC236}">
+                      <a16:creationId xmlns:a16="http://schemas.microsoft.com/office/drawing/2014/main" id="{B7475B99-716C-FB61-CB71-AD1AFC7DCD69}"/>
+                    </a:ext>
+                  </a:extLst>
+                </p:cNvPr>
+                <p:cNvSpPr txBox="1"/>
+                <p:nvPr/>
+              </p:nvSpPr>
+              <p:spPr>
+                <a:xfrm>
+                  <a:off x="5105406" y="406794"/>
+                  <a:ext cx="1041569" cy="369332"/>
+                </a:xfrm>
+                <a:prstGeom prst="rect">
+                  <a:avLst/>
+                </a:prstGeom>
+                <a:noFill/>
+              </p:spPr>
+              <p:txBody>
+                <a:bodyPr wrap="square" rtlCol="0">
+                  <a:spAutoFit/>
+                </a:bodyPr>
+                <a:lstStyle/>
+                <a:p>
+                  <a:pPr/>
+                  <a14:m>
+                    <m:oMathPara xmlns:m="http://schemas.openxmlformats.org/officeDocument/2006/math">
+                      <m:oMathParaPr>
+                        <m:jc m:val="centerGroup"/>
+                      </m:oMathParaPr>
+                      <m:oMath xmlns:m="http://schemas.openxmlformats.org/officeDocument/2006/math">
+                        <m:r>
+                          <a:rPr lang="en-US" sz="1800" i="1" noProof="0" smtClean="0">
+                            <a:latin typeface="Cambria Math" panose="02040503050406030204" pitchFamily="18" charset="0"/>
+                          </a:rPr>
+                          <m:t> </m:t>
+                        </m:r>
+                        <m:r>
+                          <a:rPr lang="en-US" sz="1800" b="0" i="1" noProof="0" smtClean="0">
+                            <a:latin typeface="Cambria Math" panose="02040503050406030204" pitchFamily="18" charset="0"/>
+                          </a:rPr>
+                          <m:t>−</m:t>
+                        </m:r>
+                      </m:oMath>
+                    </m:oMathPara>
+                  </a14:m>
+                  <a:endParaRPr lang="en-US" sz="1800" noProof="0" dirty="0"/>
+                </a:p>
+              </p:txBody>
+            </p:sp>
+          </mc:Choice>
+          <mc:Fallback xmlns="">
+            <p:sp>
+              <p:nvSpPr>
+                <p:cNvPr id="17" name="Textfeld 16">
+                  <a:extLst>
+                    <a:ext uri="{FF2B5EF4-FFF2-40B4-BE49-F238E27FC236}">
+                      <a16:creationId xmlns:a16="http://schemas.microsoft.com/office/drawing/2014/main" id="{B7475B99-716C-FB61-CB71-AD1AFC7DCD69}"/>
+                    </a:ext>
+                  </a:extLst>
+                </p:cNvPr>
+                <p:cNvSpPr txBox="1">
+                  <a:spLocks noRot="1" noChangeAspect="1" noMove="1" noResize="1" noEditPoints="1" noAdjustHandles="1" noChangeArrowheads="1" noChangeShapeType="1" noTextEdit="1"/>
+                </p:cNvSpPr>
+                <p:nvPr/>
+              </p:nvSpPr>
+              <p:spPr>
+                <a:xfrm>
+                  <a:off x="5105406" y="406794"/>
+                  <a:ext cx="1041569" cy="369332"/>
+                </a:xfrm>
+                <a:prstGeom prst="rect">
+                  <a:avLst/>
+                </a:prstGeom>
+                <a:blipFill>
+                  <a:blip r:embed="rId6"/>
+                  <a:stretch>
+                    <a:fillRect b="-20000"/>
+                  </a:stretch>
+                </a:blipFill>
+              </p:spPr>
+              <p:txBody>
+                <a:bodyPr/>
+                <a:lstStyle/>
+                <a:p>
+                  <a:r>
+                    <a:rPr lang="de-DE">
+                      <a:noFill/>
+                    </a:rPr>
+                    <a:t> </a:t>
+                  </a:r>
+                </a:p>
+              </p:txBody>
+            </p:sp>
+          </mc:Fallback>
+        </mc:AlternateContent>
+        <p:cxnSp>
+          <p:nvCxnSpPr>
+            <p:cNvPr id="18" name="Gewinkelte Verbindung 17">
+              <a:extLst>
+                <a:ext uri="{FF2B5EF4-FFF2-40B4-BE49-F238E27FC236}">
+                  <a16:creationId xmlns:a16="http://schemas.microsoft.com/office/drawing/2014/main" id="{3F8FFAD3-698C-1215-F215-7DE1E015295B}"/>
+                </a:ext>
+              </a:extLst>
+            </p:cNvPr>
+            <p:cNvCxnSpPr/>
+            <p:nvPr/>
+          </p:nvCxnSpPr>
+          <p:spPr>
+            <a:xfrm rot="10800000">
+              <a:off x="5470419" y="537780"/>
+              <a:ext cx="3044931" cy="593980"/>
+            </a:xfrm>
+            <a:prstGeom prst="bentConnector3">
+              <a:avLst>
+                <a:gd name="adj1" fmla="val 100050"/>
+              </a:avLst>
+            </a:prstGeom>
+            <a:ln w="19050">
+              <a:solidFill>
+                <a:schemeClr val="tx1"/>
+              </a:solidFill>
+              <a:tailEnd type="triangle"/>
+            </a:ln>
+          </p:spPr>
+          <p:style>
+            <a:lnRef idx="1">
+              <a:schemeClr val="accent1"/>
+            </a:lnRef>
+            <a:fillRef idx="0">
+              <a:schemeClr val="accent1"/>
+            </a:fillRef>
+            <a:effectRef idx="0">
+              <a:schemeClr val="accent1"/>
+            </a:effectRef>
+            <a:fontRef idx="minor">
+              <a:schemeClr val="tx1"/>
+            </a:fontRef>
+          </p:style>
+        </p:cxnSp>
+      </p:grpSp>
+      <mc:AlternateContent xmlns:mc="http://schemas.openxmlformats.org/markup-compatibility/2006" xmlns:a14="http://schemas.microsoft.com/office/drawing/2010/main">
+        <mc:Choice Requires="a14">
+          <p:sp>
+            <p:nvSpPr>
+              <p:cNvPr id="23" name="Textfeld 22">
+                <a:extLst>
+                  <a:ext uri="{FF2B5EF4-FFF2-40B4-BE49-F238E27FC236}">
+                    <a16:creationId xmlns:a16="http://schemas.microsoft.com/office/drawing/2014/main" id="{C9DF7E14-10C1-D9D3-CDA3-1876EA0CEA68}"/>
+                  </a:ext>
+                </a:extLst>
+              </p:cNvPr>
+              <p:cNvSpPr txBox="1"/>
+              <p:nvPr/>
+            </p:nvSpPr>
+            <p:spPr>
+              <a:xfrm>
+                <a:off x="4953307" y="166413"/>
+                <a:ext cx="323294" cy="307777"/>
+              </a:xfrm>
+              <a:prstGeom prst="rect">
+                <a:avLst/>
+              </a:prstGeom>
+              <a:noFill/>
+            </p:spPr>
+            <p:txBody>
+              <a:bodyPr wrap="none" rtlCol="0">
+                <a:spAutoFit/>
+              </a:bodyPr>
+              <a:lstStyle/>
+              <a:p>
+                <a:pPr/>
+                <a14:m>
+                  <m:oMathPara xmlns:m="http://schemas.openxmlformats.org/officeDocument/2006/math">
+                    <m:oMathParaPr>
+                      <m:jc m:val="centerGroup"/>
+                    </m:oMathParaPr>
+                    <m:oMath xmlns:m="http://schemas.openxmlformats.org/officeDocument/2006/math">
+                      <m:r>
+                        <a:rPr lang="en-US" i="1" noProof="0" smtClean="0">
+                          <a:latin typeface="Cambria Math" panose="02040503050406030204" pitchFamily="18" charset="0"/>
+                        </a:rPr>
+                        <m:t>𝑟</m:t>
+                      </m:r>
+                    </m:oMath>
+                  </m:oMathPara>
+                </a14:m>
+                <a:endParaRPr lang="en-US" noProof="0" dirty="0"/>
+              </a:p>
+            </p:txBody>
+          </p:sp>
+        </mc:Choice>
+        <mc:Fallback xmlns="">
+          <p:sp>
+            <p:nvSpPr>
+              <p:cNvPr id="23" name="Textfeld 22">
+                <a:extLst>
+                  <a:ext uri="{FF2B5EF4-FFF2-40B4-BE49-F238E27FC236}">
+                    <a16:creationId xmlns:a16="http://schemas.microsoft.com/office/drawing/2014/main" id="{C9DF7E14-10C1-D9D3-CDA3-1876EA0CEA68}"/>
+                  </a:ext>
+                </a:extLst>
+              </p:cNvPr>
+              <p:cNvSpPr txBox="1">
+                <a:spLocks noRot="1" noChangeAspect="1" noMove="1" noResize="1" noEditPoints="1" noAdjustHandles="1" noChangeArrowheads="1" noChangeShapeType="1" noTextEdit="1"/>
+              </p:cNvSpPr>
+              <p:nvPr/>
+            </p:nvSpPr>
+            <p:spPr>
+              <a:xfrm>
+                <a:off x="4953307" y="166413"/>
+                <a:ext cx="323294" cy="307777"/>
+              </a:xfrm>
+              <a:prstGeom prst="rect">
+                <a:avLst/>
+              </a:prstGeom>
+              <a:blipFill>
+                <a:blip r:embed="rId7"/>
+                <a:stretch>
+                  <a:fillRect/>
+                </a:stretch>
+              </a:blipFill>
+            </p:spPr>
+            <p:txBody>
+              <a:bodyPr/>
+              <a:lstStyle/>
+              <a:p>
+                <a:r>
+                  <a:rPr lang="de-DE">
+                    <a:noFill/>
+                  </a:rPr>
+                  <a:t> </a:t>
+                </a:r>
+              </a:p>
+            </p:txBody>
+          </p:sp>
+        </mc:Fallback>
+      </mc:AlternateContent>
+      <mc:AlternateContent xmlns:mc="http://schemas.openxmlformats.org/markup-compatibility/2006" xmlns:a14="http://schemas.microsoft.com/office/drawing/2010/main">
+        <mc:Choice Requires="a14">
+          <p:sp>
+            <p:nvSpPr>
+              <p:cNvPr id="24" name="Textfeld 23">
+                <a:extLst>
+                  <a:ext uri="{FF2B5EF4-FFF2-40B4-BE49-F238E27FC236}">
+                    <a16:creationId xmlns:a16="http://schemas.microsoft.com/office/drawing/2014/main" id="{9E63B5CC-F892-E8D4-D819-97CAD68F87C9}"/>
+                  </a:ext>
+                </a:extLst>
+              </p:cNvPr>
+              <p:cNvSpPr txBox="1"/>
+              <p:nvPr/>
+            </p:nvSpPr>
+            <p:spPr>
+              <a:xfrm>
+                <a:off x="8556673" y="187431"/>
+                <a:ext cx="338426" cy="307777"/>
+              </a:xfrm>
+              <a:prstGeom prst="rect">
+                <a:avLst/>
+              </a:prstGeom>
+              <a:noFill/>
+            </p:spPr>
+            <p:txBody>
+              <a:bodyPr wrap="none" rtlCol="0">
+                <a:spAutoFit/>
+              </a:bodyPr>
+              <a:lstStyle/>
+              <a:p>
+                <a:pPr/>
+                <a14:m>
+                  <m:oMathPara xmlns:m="http://schemas.openxmlformats.org/officeDocument/2006/math">
+                    <m:oMathParaPr>
+                      <m:jc m:val="centerGroup"/>
+                    </m:oMathParaPr>
+                    <m:oMath xmlns:m="http://schemas.openxmlformats.org/officeDocument/2006/math">
+                      <m:r>
+                        <a:rPr lang="en-US" b="0" i="1" noProof="0" smtClean="0">
+                          <a:latin typeface="Cambria Math" panose="02040503050406030204" pitchFamily="18" charset="0"/>
+                        </a:rPr>
+                        <m:t>𝑦</m:t>
+                      </m:r>
+                    </m:oMath>
+                  </m:oMathPara>
+                </a14:m>
+                <a:endParaRPr lang="en-US" noProof="0" dirty="0"/>
+              </a:p>
+            </p:txBody>
+          </p:sp>
+        </mc:Choice>
+        <mc:Fallback xmlns="">
+          <p:sp>
+            <p:nvSpPr>
+              <p:cNvPr id="24" name="Textfeld 23">
+                <a:extLst>
+                  <a:ext uri="{FF2B5EF4-FFF2-40B4-BE49-F238E27FC236}">
+                    <a16:creationId xmlns:a16="http://schemas.microsoft.com/office/drawing/2014/main" id="{9E63B5CC-F892-E8D4-D819-97CAD68F87C9}"/>
+                  </a:ext>
+                </a:extLst>
+              </p:cNvPr>
+              <p:cNvSpPr txBox="1">
+                <a:spLocks noRot="1" noChangeAspect="1" noMove="1" noResize="1" noEditPoints="1" noAdjustHandles="1" noChangeArrowheads="1" noChangeShapeType="1" noTextEdit="1"/>
+              </p:cNvSpPr>
+              <p:nvPr/>
+            </p:nvSpPr>
+            <p:spPr>
+              <a:xfrm>
+                <a:off x="8556673" y="187431"/>
+                <a:ext cx="338426" cy="307777"/>
+              </a:xfrm>
+              <a:prstGeom prst="rect">
+                <a:avLst/>
+              </a:prstGeom>
+              <a:blipFill>
+                <a:blip r:embed="rId8"/>
+                <a:stretch>
+                  <a:fillRect b="-8000"/>
+                </a:stretch>
+              </a:blipFill>
+            </p:spPr>
+            <p:txBody>
+              <a:bodyPr/>
+              <a:lstStyle/>
+              <a:p>
+                <a:r>
+                  <a:rPr lang="de-DE">
+                    <a:noFill/>
+                  </a:rPr>
+                  <a:t> </a:t>
+                </a:r>
+              </a:p>
+            </p:txBody>
+          </p:sp>
+        </mc:Fallback>
+      </mc:AlternateContent>
+      <p:pic>
+        <p:nvPicPr>
+          <p:cNvPr id="28" name="Grafik 27" descr="Ein Bild, das Diagramm, Reihe, Kreis enthält.&#10;&#10;KI-generierte Inhalte können fehlerhaft sein.">
+            <a:extLst>
+              <a:ext uri="{FF2B5EF4-FFF2-40B4-BE49-F238E27FC236}">
+                <a16:creationId xmlns:a16="http://schemas.microsoft.com/office/drawing/2014/main" id="{58DF6425-FB63-3408-EAA8-28E51BE5B358}"/>
+              </a:ext>
+            </a:extLst>
+          </p:cNvPr>
+          <p:cNvPicPr>
+            <a:picLocks noChangeAspect="1"/>
+          </p:cNvPicPr>
+          <p:nvPr/>
+        </p:nvPicPr>
+        <p:blipFill>
+          <a:blip r:embed="rId9"/>
+          <a:stretch>
+            <a:fillRect/>
+          </a:stretch>
+        </p:blipFill>
+        <p:spPr>
+          <a:xfrm>
+            <a:off x="393886" y="1663870"/>
+            <a:ext cx="2624444" cy="2266911"/>
+          </a:xfrm>
+          <a:prstGeom prst="rect">
+            <a:avLst/>
+          </a:prstGeom>
+        </p:spPr>
+      </p:pic>
+      <p:pic>
+        <p:nvPicPr>
+          <p:cNvPr id="30" name="Grafik 29" descr="Ein Bild, das Text, Menschliches Gesicht, Anzug, Mann enthält.&#10;&#10;KI-generierte Inhalte können fehlerhaft sein.">
+            <a:extLst>
+              <a:ext uri="{FF2B5EF4-FFF2-40B4-BE49-F238E27FC236}">
+                <a16:creationId xmlns:a16="http://schemas.microsoft.com/office/drawing/2014/main" id="{7BCCE9C5-7DC3-CF4A-244C-074BC9D42363}"/>
+              </a:ext>
+            </a:extLst>
+          </p:cNvPr>
+          <p:cNvPicPr>
+            <a:picLocks noChangeAspect="1"/>
+          </p:cNvPicPr>
+          <p:nvPr/>
+        </p:nvPicPr>
+        <p:blipFill>
+          <a:blip r:embed="rId10"/>
+          <a:stretch>
+            <a:fillRect/>
+          </a:stretch>
+        </p:blipFill>
+        <p:spPr>
+          <a:xfrm>
+            <a:off x="3353441" y="1583831"/>
+            <a:ext cx="1815894" cy="2664628"/>
+          </a:xfrm>
+          <a:prstGeom prst="rect">
+            <a:avLst/>
+          </a:prstGeom>
+        </p:spPr>
+      </p:pic>
+      <p:sp>
+        <p:nvSpPr>
+          <p:cNvPr id="32" name="Inhaltsplatzhalter 2">
+            <a:extLst>
+              <a:ext uri="{FF2B5EF4-FFF2-40B4-BE49-F238E27FC236}">
+                <a16:creationId xmlns:a16="http://schemas.microsoft.com/office/drawing/2014/main" id="{86B0934D-E9B2-38B2-8BE3-50472315EDFC}"/>
+              </a:ext>
+            </a:extLst>
+          </p:cNvPr>
+          <p:cNvSpPr txBox="1">
+            <a:spLocks/>
+          </p:cNvSpPr>
+          <p:nvPr/>
+        </p:nvSpPr>
+        <p:spPr>
+          <a:xfrm>
+            <a:off x="5375670" y="1359659"/>
+            <a:ext cx="3797599" cy="3263504"/>
+          </a:xfrm>
+          <a:prstGeom prst="rect">
+            <a:avLst/>
+          </a:prstGeom>
+        </p:spPr>
+        <p:txBody>
+          <a:bodyPr vert="horz" lIns="91440" tIns="45720" rIns="91440" bIns="45720" rtlCol="0">
+            <a:normAutofit/>
+          </a:bodyPr>
+          <a:lstStyle>
+            <a:lvl1pPr marL="171450" indent="-171450" algn="l" defTabSz="685800" rtl="0" eaLnBrk="1" latinLnBrk="0" hangingPunct="1">
+              <a:lnSpc>
+                <a:spcPct val="90000"/>
+              </a:lnSpc>
+              <a:spcBef>
+                <a:spcPts val="750"/>
+              </a:spcBef>
+              <a:buFont typeface="Arial" panose="020B0604020202020204" pitchFamily="34" charset="0"/>
+              <a:buChar char="•"/>
+              <a:defRPr sz="1800" kern="1200">
+                <a:solidFill>
+                  <a:schemeClr val="tx1"/>
+                </a:solidFill>
+                <a:latin typeface="Segoe UI" panose="020F0502020204030204" pitchFamily="34" charset="0"/>
+                <a:ea typeface="+mn-ea"/>
+                <a:cs typeface="Segoe UI" panose="020F0502020204030204" pitchFamily="34" charset="0"/>
+              </a:defRPr>
+            </a:lvl1pPr>
+            <a:lvl2pPr marL="514350" indent="-171450" algn="l" defTabSz="685800" rtl="0" eaLnBrk="1" latinLnBrk="0" hangingPunct="1">
+              <a:lnSpc>
+                <a:spcPct val="90000"/>
+              </a:lnSpc>
+              <a:spcBef>
+                <a:spcPts val="375"/>
+              </a:spcBef>
+              <a:buFont typeface="Arial" panose="020B0604020202020204" pitchFamily="34" charset="0"/>
+              <a:buChar char="•"/>
+              <a:defRPr sz="1500" kern="1200">
+                <a:solidFill>
+                  <a:schemeClr val="tx1"/>
+                </a:solidFill>
+                <a:latin typeface="Segoe UI" panose="020F0502020204030204" pitchFamily="34" charset="0"/>
+                <a:ea typeface="+mn-ea"/>
+                <a:cs typeface="Segoe UI" panose="020F0502020204030204" pitchFamily="34" charset="0"/>
+              </a:defRPr>
+            </a:lvl2pPr>
+            <a:lvl3pPr marL="857250" indent="-171450" algn="l" defTabSz="685800" rtl="0" eaLnBrk="1" latinLnBrk="0" hangingPunct="1">
+              <a:lnSpc>
+                <a:spcPct val="90000"/>
+              </a:lnSpc>
+              <a:spcBef>
+                <a:spcPts val="375"/>
+              </a:spcBef>
+              <a:buFont typeface="Arial" panose="020B0604020202020204" pitchFamily="34" charset="0"/>
+              <a:buChar char="•"/>
+              <a:defRPr sz="1200" kern="1200">
+                <a:solidFill>
+                  <a:schemeClr val="tx1"/>
+                </a:solidFill>
+                <a:latin typeface="Segoe UI" panose="020F0502020204030204" pitchFamily="34" charset="0"/>
+                <a:ea typeface="+mn-ea"/>
+                <a:cs typeface="Segoe UI" panose="020F0502020204030204" pitchFamily="34" charset="0"/>
+              </a:defRPr>
+            </a:lvl3pPr>
+            <a:lvl4pPr marL="1200150" indent="-171450" algn="l" defTabSz="685800" rtl="0" eaLnBrk="1" latinLnBrk="0" hangingPunct="1">
+              <a:lnSpc>
+                <a:spcPct val="90000"/>
+              </a:lnSpc>
+              <a:spcBef>
+                <a:spcPts val="375"/>
+              </a:spcBef>
+              <a:buFont typeface="Arial" panose="020B0604020202020204" pitchFamily="34" charset="0"/>
+              <a:buChar char="•"/>
+              <a:defRPr sz="1050" kern="1200">
+                <a:solidFill>
+                  <a:schemeClr val="tx1"/>
+                </a:solidFill>
+                <a:latin typeface="Segoe UI" panose="020F0502020204030204" pitchFamily="34" charset="0"/>
+                <a:ea typeface="+mn-ea"/>
+                <a:cs typeface="Segoe UI" panose="020F0502020204030204" pitchFamily="34" charset="0"/>
+              </a:defRPr>
+            </a:lvl4pPr>
+            <a:lvl5pPr marL="1543050" indent="-171450" algn="l" defTabSz="685800" rtl="0" eaLnBrk="1" latinLnBrk="0" hangingPunct="1">
+              <a:lnSpc>
+                <a:spcPct val="90000"/>
+              </a:lnSpc>
+              <a:spcBef>
+                <a:spcPts val="375"/>
+              </a:spcBef>
+              <a:buFont typeface="Arial" panose="020B0604020202020204" pitchFamily="34" charset="0"/>
+              <a:buChar char="•"/>
+              <a:defRPr sz="900" kern="1200">
+                <a:solidFill>
+                  <a:schemeClr val="tx1"/>
+                </a:solidFill>
+                <a:latin typeface="Segoe UI" panose="020F0502020204030204" pitchFamily="34" charset="0"/>
+                <a:ea typeface="+mn-ea"/>
+                <a:cs typeface="Segoe UI" panose="020F0502020204030204" pitchFamily="34" charset="0"/>
+              </a:defRPr>
+            </a:lvl5pPr>
+            <a:lvl6pPr marL="1885950" indent="-171450" algn="l" defTabSz="685800" rtl="0" eaLnBrk="1" latinLnBrk="0" hangingPunct="1">
+              <a:lnSpc>
+                <a:spcPct val="90000"/>
+              </a:lnSpc>
+              <a:spcBef>
+                <a:spcPts val="375"/>
+              </a:spcBef>
+              <a:buFont typeface="Arial" panose="020B0604020202020204" pitchFamily="34" charset="0"/>
+              <a:buChar char="•"/>
+              <a:defRPr sz="1350" kern="1200">
+                <a:solidFill>
+                  <a:schemeClr val="tx1"/>
+                </a:solidFill>
+                <a:latin typeface="+mn-lt"/>
+                <a:ea typeface="+mn-ea"/>
+                <a:cs typeface="+mn-cs"/>
+              </a:defRPr>
+            </a:lvl6pPr>
+            <a:lvl7pPr marL="2228850" indent="-171450" algn="l" defTabSz="685800" rtl="0" eaLnBrk="1" latinLnBrk="0" hangingPunct="1">
+              <a:lnSpc>
+                <a:spcPct val="90000"/>
+              </a:lnSpc>
+              <a:spcBef>
+                <a:spcPts val="375"/>
+              </a:spcBef>
+              <a:buFont typeface="Arial" panose="020B0604020202020204" pitchFamily="34" charset="0"/>
+              <a:buChar char="•"/>
+              <a:defRPr sz="1350" kern="1200">
+                <a:solidFill>
+                  <a:schemeClr val="tx1"/>
+                </a:solidFill>
+                <a:latin typeface="+mn-lt"/>
+                <a:ea typeface="+mn-ea"/>
+                <a:cs typeface="+mn-cs"/>
+              </a:defRPr>
+            </a:lvl7pPr>
+            <a:lvl8pPr marL="2571750" indent="-171450" algn="l" defTabSz="685800" rtl="0" eaLnBrk="1" latinLnBrk="0" hangingPunct="1">
+              <a:lnSpc>
+                <a:spcPct val="90000"/>
+              </a:lnSpc>
+              <a:spcBef>
+                <a:spcPts val="375"/>
+              </a:spcBef>
+              <a:buFont typeface="Arial" panose="020B0604020202020204" pitchFamily="34" charset="0"/>
+              <a:buChar char="•"/>
+              <a:defRPr sz="1350" kern="1200">
+                <a:solidFill>
+                  <a:schemeClr val="tx1"/>
+                </a:solidFill>
+                <a:latin typeface="+mn-lt"/>
+                <a:ea typeface="+mn-ea"/>
+                <a:cs typeface="+mn-cs"/>
+              </a:defRPr>
+            </a:lvl8pPr>
+            <a:lvl9pPr marL="2914650" indent="-171450" algn="l" defTabSz="685800" rtl="0" eaLnBrk="1" latinLnBrk="0" hangingPunct="1">
+              <a:lnSpc>
+                <a:spcPct val="90000"/>
+              </a:lnSpc>
+              <a:spcBef>
+                <a:spcPts val="375"/>
+              </a:spcBef>
+              <a:buFont typeface="Arial" panose="020B0604020202020204" pitchFamily="34" charset="0"/>
+              <a:buChar char="•"/>
+              <a:defRPr sz="1350" kern="1200">
+                <a:solidFill>
+                  <a:schemeClr val="tx1"/>
+                </a:solidFill>
+                <a:latin typeface="+mn-lt"/>
+                <a:ea typeface="+mn-ea"/>
+                <a:cs typeface="+mn-cs"/>
+              </a:defRPr>
+            </a:lvl9pPr>
+          </a:lstStyle>
+          <a:p>
+            <a:pPr marL="0" indent="0">
+              <a:buClrTx/>
+              <a:buFont typeface="Arial" panose="020B0604020202020204" pitchFamily="34" charset="0"/>
+              <a:buNone/>
+            </a:pPr>
+            <a:r>
+              <a:rPr lang="en-US" sz="1600" noProof="0" dirty="0"/>
+              <a:t>Week 8: Closed-Loop Specifications</a:t>
+            </a:r>
+          </a:p>
+          <a:p>
+            <a:pPr marL="0" indent="0">
+              <a:buClrTx/>
+              <a:buFont typeface="Arial" panose="020B0604020202020204" pitchFamily="34" charset="0"/>
+              <a:buNone/>
+            </a:pPr>
+            <a:endParaRPr lang="en-US" sz="1600" noProof="0" dirty="0"/>
+          </a:p>
+          <a:p>
+            <a:pPr marL="0" indent="0">
+              <a:buClrTx/>
+              <a:buFont typeface="Arial" panose="020B0604020202020204" pitchFamily="34" charset="0"/>
+              <a:buNone/>
+            </a:pPr>
+            <a:endParaRPr lang="en-US" sz="1600" noProof="0" dirty="0"/>
+          </a:p>
+          <a:p>
+            <a:pPr marL="0" indent="0">
+              <a:buClrTx/>
+              <a:buFont typeface="Arial" panose="020B0604020202020204" pitchFamily="34" charset="0"/>
+              <a:buNone/>
+            </a:pPr>
+            <a:endParaRPr lang="en-US" sz="1600" noProof="0" dirty="0"/>
+          </a:p>
+          <a:p>
+            <a:pPr marL="0" indent="0">
+              <a:buClrTx/>
+              <a:buFont typeface="Arial" panose="020B0604020202020204" pitchFamily="34" charset="0"/>
+              <a:buNone/>
+            </a:pPr>
+            <a:endParaRPr lang="en-US" sz="1600" noProof="0" dirty="0"/>
+          </a:p>
+          <a:p>
+            <a:pPr marL="0" indent="0">
+              <a:buClrTx/>
+              <a:buFont typeface="Arial" panose="020B0604020202020204" pitchFamily="34" charset="0"/>
+              <a:buNone/>
+            </a:pPr>
+            <a:endParaRPr lang="en-US" sz="1600" noProof="0" dirty="0"/>
+          </a:p>
+          <a:p>
+            <a:pPr marL="0" indent="0">
+              <a:buClrTx/>
+              <a:buFont typeface="Arial" panose="020B0604020202020204" pitchFamily="34" charset="0"/>
+              <a:buNone/>
+            </a:pPr>
+            <a:endParaRPr lang="en-US" sz="1600" noProof="0" dirty="0"/>
+          </a:p>
+          <a:p>
+            <a:pPr marL="0" indent="0">
+              <a:buClrTx/>
+              <a:buFont typeface="Arial" panose="020B0604020202020204" pitchFamily="34" charset="0"/>
+              <a:buNone/>
+            </a:pPr>
+            <a:endParaRPr lang="en-US" sz="1600" noProof="0" dirty="0"/>
+          </a:p>
+          <a:p>
+            <a:pPr marL="0" indent="0">
+              <a:buClrTx/>
+              <a:buFont typeface="Arial" panose="020B0604020202020204" pitchFamily="34" charset="0"/>
+              <a:buNone/>
+            </a:pPr>
+            <a:r>
+              <a:rPr lang="en-US" sz="1600" noProof="0" dirty="0"/>
+              <a:t>We need to make sure it's quick and can handle disturbances and errors well!</a:t>
+            </a:r>
+          </a:p>
+          <a:p>
+            <a:pPr marL="0" indent="0">
+              <a:buClrTx/>
+              <a:buFont typeface="Arial" panose="020B0604020202020204" pitchFamily="34" charset="0"/>
+              <a:buNone/>
+            </a:pPr>
+            <a:endParaRPr lang="en-US" sz="1600" noProof="0" dirty="0"/>
+          </a:p>
+          <a:p>
+            <a:pPr marL="0" indent="0">
+              <a:buClrTx/>
+              <a:buFont typeface="Arial" panose="020B0604020202020204" pitchFamily="34" charset="0"/>
+              <a:buNone/>
+            </a:pPr>
+            <a:endParaRPr lang="en-US" sz="1600" noProof="0" dirty="0"/>
+          </a:p>
+        </p:txBody>
+      </p:sp>
+      <p:pic>
+        <p:nvPicPr>
+          <p:cNvPr id="45" name="Grafik 44" descr="Ein Bild, das Reihe, Schrift, Text, Diagramm enthält.&#10;&#10;KI-generierte Inhalte können fehlerhaft sein.">
+            <a:extLst>
+              <a:ext uri="{FF2B5EF4-FFF2-40B4-BE49-F238E27FC236}">
+                <a16:creationId xmlns:a16="http://schemas.microsoft.com/office/drawing/2014/main" id="{BC85E42B-3254-E7A9-44B0-4AD42D62C43D}"/>
+              </a:ext>
+            </a:extLst>
+          </p:cNvPr>
+          <p:cNvPicPr>
+            <a:picLocks noChangeAspect="1"/>
+          </p:cNvPicPr>
+          <p:nvPr/>
+        </p:nvPicPr>
+        <p:blipFill>
+          <a:blip r:embed="rId11"/>
+          <a:stretch>
+            <a:fillRect/>
+          </a:stretch>
+        </p:blipFill>
+        <p:spPr>
+          <a:xfrm>
+            <a:off x="5397426" y="1825191"/>
+            <a:ext cx="3148425" cy="1909532"/>
+          </a:xfrm>
+          <a:prstGeom prst="rect">
+            <a:avLst/>
+          </a:prstGeom>
+        </p:spPr>
+      </p:pic>
+      <p:pic>
+        <p:nvPicPr>
+          <p:cNvPr id="46" name="Inhaltsplatzhalter 6" descr="Ein Bild, das Fahrzeug, Rad, Transport, Landfahrzeug enthält.&#10;&#10;KI-generierte Inhalte können fehlerhaft sein.">
+            <a:extLst>
+              <a:ext uri="{FF2B5EF4-FFF2-40B4-BE49-F238E27FC236}">
+                <a16:creationId xmlns:a16="http://schemas.microsoft.com/office/drawing/2014/main" id="{10EEE16A-0E64-44F7-D8B0-E464EFC80BD9}"/>
+              </a:ext>
+            </a:extLst>
+          </p:cNvPr>
+          <p:cNvPicPr>
+            <a:picLocks noChangeAspect="1"/>
+          </p:cNvPicPr>
+          <p:nvPr/>
+        </p:nvPicPr>
+        <p:blipFill>
+          <a:blip r:embed="rId12"/>
+          <a:srcRect l="11220" t="33713" r="27727" b="17755"/>
+          <a:stretch>
+            <a:fillRect/>
+          </a:stretch>
+        </p:blipFill>
+        <p:spPr>
+          <a:xfrm>
+            <a:off x="7858213" y="2636459"/>
+            <a:ext cx="1250958" cy="559372"/>
+          </a:xfrm>
+          <a:prstGeom prst="rect">
+            <a:avLst/>
+          </a:prstGeom>
+          <a:noFill/>
+        </p:spPr>
+      </p:pic>
+    </p:spTree>
+    <p:extLst>
+      <p:ext uri="{BB962C8B-B14F-4D97-AF65-F5344CB8AC3E}">
+        <p14:creationId xmlns:p14="http://schemas.microsoft.com/office/powerpoint/2010/main" val="2147892534"/>
+      </p:ext>
+    </p:extLst>
+  </p:cSld>
+  <p:clrMapOvr>
+    <a:masterClrMapping/>
+  </p:clrMapOvr>
+  <p:timing>
+    <p:tnLst>
+      <p:par>
+        <p:cTn id="1" dur="indefinite" restart="never" nodeType="tmRoot">
+          <p:childTnLst>
+            <p:seq concurrent="1" nextAc="seek">
+              <p:cTn id="2" dur="indefinite" nodeType="mainSeq">
+                <p:childTnLst>
+                  <p:par>
+                    <p:cTn id="3" fill="hold">
+                      <p:stCondLst>
+                        <p:cond delay="indefinite"/>
+                      </p:stCondLst>
+                      <p:childTnLst>
+                        <p:par>
+                          <p:cTn id="4" fill="hold">
+                            <p:stCondLst>
+                              <p:cond delay="0"/>
+                            </p:stCondLst>
+                            <p:childTnLst>
+                              <p:par>
+                                <p:cTn id="5" presetID="1" presetClass="entr" presetSubtype="0" fill="hold" nodeType="clickEffect">
+                                  <p:stCondLst>
+                                    <p:cond delay="0"/>
+                                  </p:stCondLst>
+                                  <p:childTnLst>
+                                    <p:set>
+                                      <p:cBhvr>
+                                        <p:cTn id="6" dur="1" fill="hold">
+                                          <p:stCondLst>
+                                            <p:cond delay="0"/>
+                                          </p:stCondLst>
+                                        </p:cTn>
+                                        <p:tgtEl>
+                                          <p:spTgt spid="30"/>
+                                        </p:tgtEl>
+                                        <p:attrNameLst>
+                                          <p:attrName>style.visibility</p:attrName>
+                                        </p:attrNameLst>
+                                      </p:cBhvr>
+                                      <p:to>
+                                        <p:strVal val="visible"/>
+                                      </p:to>
+                                    </p:set>
+                                  </p:childTnLst>
+                                </p:cTn>
+                              </p:par>
+                            </p:childTnLst>
+                          </p:cTn>
+                        </p:par>
+                      </p:childTnLst>
+                    </p:cTn>
+                  </p:par>
+                  <p:par>
+                    <p:cTn id="7" fill="hold">
+                      <p:stCondLst>
+                        <p:cond delay="indefinite"/>
+                      </p:stCondLst>
+                      <p:childTnLst>
+                        <p:par>
+                          <p:cTn id="8" fill="hold">
+                            <p:stCondLst>
+                              <p:cond delay="0"/>
+                            </p:stCondLst>
+                            <p:childTnLst>
+                              <p:par>
+                                <p:cTn id="9" presetID="1" presetClass="entr" presetSubtype="0" fill="hold" grpId="0" nodeType="clickEffect">
+                                  <p:stCondLst>
+                                    <p:cond delay="0"/>
+                                  </p:stCondLst>
+                                  <p:childTnLst>
+                                    <p:set>
+                                      <p:cBhvr>
+                                        <p:cTn id="10" dur="1" fill="hold">
+                                          <p:stCondLst>
+                                            <p:cond delay="0"/>
+                                          </p:stCondLst>
+                                        </p:cTn>
+                                        <p:tgtEl>
+                                          <p:spTgt spid="32"/>
+                                        </p:tgtEl>
+                                        <p:attrNameLst>
+                                          <p:attrName>style.visibility</p:attrName>
+                                        </p:attrNameLst>
+                                      </p:cBhvr>
+                                      <p:to>
+                                        <p:strVal val="visible"/>
+                                      </p:to>
+                                    </p:set>
+                                  </p:childTnLst>
+                                </p:cTn>
+                              </p:par>
+                              <p:par>
+                                <p:cTn id="11" presetID="1" presetClass="entr" presetSubtype="0" fill="hold" nodeType="withEffect">
+                                  <p:stCondLst>
+                                    <p:cond delay="0"/>
+                                  </p:stCondLst>
+                                  <p:childTnLst>
+                                    <p:set>
+                                      <p:cBhvr>
+                                        <p:cTn id="12" dur="1" fill="hold">
+                                          <p:stCondLst>
+                                            <p:cond delay="0"/>
+                                          </p:stCondLst>
+                                        </p:cTn>
+                                        <p:tgtEl>
+                                          <p:spTgt spid="45"/>
+                                        </p:tgtEl>
+                                        <p:attrNameLst>
+                                          <p:attrName>style.visibility</p:attrName>
+                                        </p:attrNameLst>
+                                      </p:cBhvr>
+                                      <p:to>
+                                        <p:strVal val="visible"/>
+                                      </p:to>
+                                    </p:set>
+                                  </p:childTnLst>
+                                </p:cTn>
+                              </p:par>
+                              <p:par>
+                                <p:cTn id="13" presetID="1" presetClass="entr" presetSubtype="0" fill="hold" nodeType="withEffect">
+                                  <p:stCondLst>
+                                    <p:cond delay="0"/>
+                                  </p:stCondLst>
+                                  <p:childTnLst>
+                                    <p:set>
+                                      <p:cBhvr>
+                                        <p:cTn id="14" dur="1" fill="hold">
+                                          <p:stCondLst>
+                                            <p:cond delay="0"/>
+                                          </p:stCondLst>
+                                        </p:cTn>
+                                        <p:tgtEl>
+                                          <p:spTgt spid="46"/>
+                                        </p:tgtEl>
+                                        <p:attrNameLst>
+                                          <p:attrName>style.visibility</p:attrName>
+                                        </p:attrNameLst>
+                                      </p:cBhvr>
+                                      <p:to>
+                                        <p:strVal val="visible"/>
+                                      </p:to>
+                                    </p:set>
+                                  </p:childTnLst>
+                                </p:cTn>
+                              </p:par>
+                            </p:childTnLst>
+                          </p:cTn>
+                        </p:par>
+                      </p:childTnLst>
+                    </p:cTn>
+                  </p:par>
+                </p:childTnLst>
+              </p:cTn>
+              <p:prevCondLst>
+                <p:cond evt="onPrev" delay="0">
+                  <p:tgtEl>
+                    <p:sldTgt/>
+                  </p:tgtEl>
+                </p:cond>
+              </p:prevCondLst>
+              <p:nextCondLst>
+                <p:cond evt="onNext" delay="0">
+                  <p:tgtEl>
+                    <p:sldTgt/>
+                  </p:tgtEl>
+                </p:cond>
+              </p:nextCondLst>
+            </p:seq>
+          </p:childTnLst>
+        </p:cTn>
+      </p:par>
+    </p:tnLst>
+    <p:bldLst>
+      <p:bldP spid="32" grpId="0"/>
+    </p:bldLst>
+  </p:timing>
 </p:sld>
 </file>
 

--- a/pdfs/CS1/CS1_Week8_empty.pptx
+++ b/pdfs/CS1/CS1_Week8_empty.pptx
@@ -5758,8 +5758,8 @@
           </a:p>
         </p:txBody>
       </p:sp>
-      <mc:AlternateContent xmlns:mc="http://schemas.openxmlformats.org/markup-compatibility/2006" xmlns:a14="http://schemas.microsoft.com/office/drawing/2010/main">
-        <mc:Choice Requires="a14">
+      <mc:AlternateContent xmlns:mc="http://schemas.openxmlformats.org/markup-compatibility/2006">
+        <mc:Choice xmlns:a14="http://schemas.microsoft.com/office/drawing/2010/main" Requires="a14">
           <p:sp>
             <p:nvSpPr>
               <p:cNvPr id="3" name="Inhaltsplatzhalter 2">
@@ -5925,7 +5925,7 @@
             </p:txBody>
           </p:sp>
         </mc:Choice>
-        <mc:Fallback xmlns="">
+        <mc:Fallback>
           <p:sp>
             <p:nvSpPr>
               <p:cNvPr id="3" name="Inhaltsplatzhalter 2">
@@ -6265,8 +6265,8 @@
               </a:p>
             </p:txBody>
           </p:sp>
-          <mc:AlternateContent xmlns:mc="http://schemas.openxmlformats.org/markup-compatibility/2006" xmlns:a14="http://schemas.microsoft.com/office/drawing/2010/main">
-            <mc:Choice Requires="a14">
+          <mc:AlternateContent xmlns:mc="http://schemas.openxmlformats.org/markup-compatibility/2006">
+            <mc:Choice xmlns:a14="http://schemas.microsoft.com/office/drawing/2010/main" Requires="a14">
               <p:sp>
                 <p:nvSpPr>
                   <p:cNvPr id="39" name="Textfeld 38">
@@ -6341,7 +6341,7 @@
                 </p:txBody>
               </p:sp>
             </mc:Choice>
-            <mc:Fallback xmlns="">
+            <mc:Fallback>
               <p:sp>
                 <p:nvSpPr>
                   <p:cNvPr id="39" name="Textfeld 38">
@@ -6455,8 +6455,8 @@
               </a:p>
             </p:txBody>
           </p:sp>
-          <mc:AlternateContent xmlns:mc="http://schemas.openxmlformats.org/markup-compatibility/2006" xmlns:a14="http://schemas.microsoft.com/office/drawing/2010/main">
-            <mc:Choice Requires="a14">
+          <mc:AlternateContent xmlns:mc="http://schemas.openxmlformats.org/markup-compatibility/2006">
+            <mc:Choice xmlns:a14="http://schemas.microsoft.com/office/drawing/2010/main" Requires="a14">
               <p:sp>
                 <p:nvSpPr>
                   <p:cNvPr id="37" name="Textfeld 36">
@@ -6521,12 +6521,12 @@
                         </m:oMath>
                       </m:oMathPara>
                     </a14:m>
-                    <a:endParaRPr/>
+                    <a:endParaRPr lang="en-US" noProof="0" dirty="0"/>
                   </a:p>
                 </p:txBody>
               </p:sp>
             </mc:Choice>
-            <mc:Fallback xmlns="">
+            <mc:Fallback>
               <p:sp>
                 <p:nvSpPr>
                   <p:cNvPr id="37" name="Textfeld 36">
@@ -6552,7 +6552,7 @@
                   <a:blipFill>
                     <a:blip r:embed="rId4"/>
                     <a:stretch>
-                      <a:fillRect t="-6667" r="-10909" b="-26667"/>
+                      <a:fillRect/>
                     </a:stretch>
                   </a:blipFill>
                 </p:spPr>
@@ -6661,8 +6661,8 @@
             </a:fontRef>
           </p:style>
         </p:cxnSp>
-        <mc:AlternateContent xmlns:mc="http://schemas.openxmlformats.org/markup-compatibility/2006" xmlns:a14="http://schemas.microsoft.com/office/drawing/2010/main">
-          <mc:Choice Requires="a14">
+        <mc:AlternateContent xmlns:mc="http://schemas.openxmlformats.org/markup-compatibility/2006">
+          <mc:Choice xmlns:a14="http://schemas.microsoft.com/office/drawing/2010/main" Requires="a14">
             <p:sp>
               <p:nvSpPr>
                 <p:cNvPr id="30" name="Textfeld 29">
@@ -6718,7 +6718,7 @@
               </p:txBody>
             </p:sp>
           </mc:Choice>
-          <mc:Fallback xmlns="">
+          <mc:Fallback>
             <p:sp>
               <p:nvSpPr>
                 <p:cNvPr id="30" name="Textfeld 29">
@@ -6763,8 +6763,8 @@
             </p:sp>
           </mc:Fallback>
         </mc:AlternateContent>
-        <mc:AlternateContent xmlns:mc="http://schemas.openxmlformats.org/markup-compatibility/2006" xmlns:a14="http://schemas.microsoft.com/office/drawing/2010/main">
-          <mc:Choice Requires="a14">
+        <mc:AlternateContent xmlns:mc="http://schemas.openxmlformats.org/markup-compatibility/2006">
+          <mc:Choice xmlns:a14="http://schemas.microsoft.com/office/drawing/2010/main" Requires="a14">
             <p:sp>
               <p:nvSpPr>
                 <p:cNvPr id="31" name="Textfeld 30">
@@ -6820,7 +6820,7 @@
               </p:txBody>
             </p:sp>
           </mc:Choice>
-          <mc:Fallback xmlns="">
+          <mc:Fallback>
             <p:sp>
               <p:nvSpPr>
                 <p:cNvPr id="31" name="Textfeld 30">
@@ -6952,8 +6952,8 @@
             </a:fontRef>
           </p:style>
         </p:cxnSp>
-        <mc:AlternateContent xmlns:mc="http://schemas.openxmlformats.org/markup-compatibility/2006" xmlns:a14="http://schemas.microsoft.com/office/drawing/2010/main">
-          <mc:Choice Requires="a14">
+        <mc:AlternateContent xmlns:mc="http://schemas.openxmlformats.org/markup-compatibility/2006">
+          <mc:Choice xmlns:a14="http://schemas.microsoft.com/office/drawing/2010/main" Requires="a14">
             <p:sp>
               <p:nvSpPr>
                 <p:cNvPr id="34" name="Textfeld 33">
@@ -7009,7 +7009,7 @@
               </p:txBody>
             </p:sp>
           </mc:Choice>
-          <mc:Fallback xmlns="">
+          <mc:Fallback>
             <p:sp>
               <p:nvSpPr>
                 <p:cNvPr id="34" name="Textfeld 33">
@@ -7099,8 +7099,8 @@
           </p:style>
         </p:cxnSp>
       </p:grpSp>
-      <mc:AlternateContent xmlns:mc="http://schemas.openxmlformats.org/markup-compatibility/2006" xmlns:a14="http://schemas.microsoft.com/office/drawing/2010/main">
-        <mc:Choice Requires="a14">
+      <mc:AlternateContent xmlns:mc="http://schemas.openxmlformats.org/markup-compatibility/2006">
+        <mc:Choice xmlns:a14="http://schemas.microsoft.com/office/drawing/2010/main" Requires="a14">
           <p:sp>
             <p:nvSpPr>
               <p:cNvPr id="40" name="Textfeld 39">
@@ -7150,7 +7150,7 @@
             </p:txBody>
           </p:sp>
         </mc:Choice>
-        <mc:Fallback xmlns="">
+        <mc:Fallback>
           <p:sp>
             <p:nvSpPr>
               <p:cNvPr id="40" name="Textfeld 39">
@@ -7195,8 +7195,8 @@
           </p:sp>
         </mc:Fallback>
       </mc:AlternateContent>
-      <mc:AlternateContent xmlns:mc="http://schemas.openxmlformats.org/markup-compatibility/2006" xmlns:a14="http://schemas.microsoft.com/office/drawing/2010/main">
-        <mc:Choice Requires="a14">
+      <mc:AlternateContent xmlns:mc="http://schemas.openxmlformats.org/markup-compatibility/2006">
+        <mc:Choice xmlns:a14="http://schemas.microsoft.com/office/drawing/2010/main" Requires="a14">
           <p:sp>
             <p:nvSpPr>
               <p:cNvPr id="41" name="Textfeld 40">
@@ -7246,7 +7246,7 @@
             </p:txBody>
           </p:sp>
         </mc:Choice>
-        <mc:Fallback xmlns="">
+        <mc:Fallback>
           <p:sp>
             <p:nvSpPr>
               <p:cNvPr id="41" name="Textfeld 40">
@@ -7291,8 +7291,8 @@
           </p:sp>
         </mc:Fallback>
       </mc:AlternateContent>
-      <mc:AlternateContent xmlns:mc="http://schemas.openxmlformats.org/markup-compatibility/2006" xmlns:a14="http://schemas.microsoft.com/office/drawing/2010/main">
-        <mc:Choice Requires="a14">
+      <mc:AlternateContent xmlns:mc="http://schemas.openxmlformats.org/markup-compatibility/2006">
+        <mc:Choice xmlns:a14="http://schemas.microsoft.com/office/drawing/2010/main" Requires="a14">
           <p:sp>
             <p:nvSpPr>
               <p:cNvPr id="42" name="Textfeld 41">
@@ -7619,15 +7619,15 @@
                     </m:oMath>
                   </m:oMathPara>
                 </a14:m>
-                <a:endParaRPr/>
+                <a:endParaRPr lang="en-US" noProof="0" dirty="0"/>
               </a:p>
               <a:p>
-                <a:endParaRPr/>
+                <a:endParaRPr lang="en-US" noProof="0" dirty="0"/>
               </a:p>
             </p:txBody>
           </p:sp>
         </mc:Choice>
-        <mc:Fallback xmlns="">
+        <mc:Fallback>
           <p:sp>
             <p:nvSpPr>
               <p:cNvPr id="42" name="Textfeld 41">
@@ -7653,7 +7653,7 @@
               <a:blipFill>
                 <a:blip r:embed="rId10"/>
                 <a:stretch>
-                  <a:fillRect l="-608" t="-1887" r="-912" b="-9434"/>
+                  <a:fillRect/>
                 </a:stretch>
               </a:blipFill>
             </p:spPr>
@@ -7672,8 +7672,8 @@
           </p:sp>
         </mc:Fallback>
       </mc:AlternateContent>
-      <mc:AlternateContent xmlns:mc="http://schemas.openxmlformats.org/markup-compatibility/2006" xmlns:a14="http://schemas.microsoft.com/office/drawing/2010/main">
-        <mc:Choice Requires="a14">
+      <mc:AlternateContent xmlns:mc="http://schemas.openxmlformats.org/markup-compatibility/2006">
+        <mc:Choice xmlns:a14="http://schemas.microsoft.com/office/drawing/2010/main" Requires="a14">
           <p:sp>
             <p:nvSpPr>
               <p:cNvPr id="43" name="Textfeld 42">
@@ -7772,7 +7772,7 @@
             </p:txBody>
           </p:sp>
         </mc:Choice>
-        <mc:Fallback xmlns="">
+        <mc:Fallback>
           <p:sp>
             <p:nvSpPr>
               <p:cNvPr id="43" name="Textfeld 42">
@@ -7817,8 +7817,8 @@
           </p:sp>
         </mc:Fallback>
       </mc:AlternateContent>
-      <mc:AlternateContent xmlns:mc="http://schemas.openxmlformats.org/markup-compatibility/2006" xmlns:a14="http://schemas.microsoft.com/office/drawing/2010/main">
-        <mc:Choice Requires="a14">
+      <mc:AlternateContent xmlns:mc="http://schemas.openxmlformats.org/markup-compatibility/2006">
+        <mc:Choice xmlns:a14="http://schemas.microsoft.com/office/drawing/2010/main" Requires="a14">
           <p:sp>
             <p:nvSpPr>
               <p:cNvPr id="44" name="Textfeld 43">
@@ -8126,12 +8126,12 @@
                     </m:oMath>
                   </m:oMathPara>
                 </a14:m>
-                <a:endParaRPr/>
+                <a:endParaRPr lang="en-US" noProof="0" dirty="0"/>
               </a:p>
             </p:txBody>
           </p:sp>
         </mc:Choice>
-        <mc:Fallback xmlns="">
+        <mc:Fallback>
           <p:sp>
             <p:nvSpPr>
               <p:cNvPr id="44" name="Textfeld 43">
@@ -8157,7 +8157,7 @@
               <a:blipFill>
                 <a:blip r:embed="rId12"/>
                 <a:stretch>
-                  <a:fillRect r="-1216"/>
+                  <a:fillRect/>
                 </a:stretch>
               </a:blipFill>
             </p:spPr>
@@ -8176,8 +8176,8 @@
           </p:sp>
         </mc:Fallback>
       </mc:AlternateContent>
-      <mc:AlternateContent xmlns:mc="http://schemas.openxmlformats.org/markup-compatibility/2006" xmlns:a14="http://schemas.microsoft.com/office/drawing/2010/main">
-        <mc:Choice Requires="a14">
+      <mc:AlternateContent xmlns:mc="http://schemas.openxmlformats.org/markup-compatibility/2006">
+        <mc:Choice xmlns:a14="http://schemas.microsoft.com/office/drawing/2010/main" Requires="a14">
           <p:sp>
             <p:nvSpPr>
               <p:cNvPr id="45" name="Textfeld 44">
@@ -8246,7 +8246,7 @@
                 <a14:m>
                   <m:oMath xmlns:m="http://schemas.openxmlformats.org/officeDocument/2006/math">
                     <m:r>
-                      <a:rPr lang="en-US" sz="1600" i="1" noProof="0" dirty="0" smtClean="0">
+                      <a:rPr lang="en-US" sz="1600" i="1" noProof="0" smtClean="0">
                         <a:latin typeface="Cambria Math" panose="02040503050406030204" pitchFamily="18" charset="0"/>
                       </a:rPr>
                       <m:t>⟶</m:t>
@@ -8339,7 +8339,7 @@
             </p:txBody>
           </p:sp>
         </mc:Choice>
-        <mc:Fallback xmlns="">
+        <mc:Fallback>
           <p:sp>
             <p:nvSpPr>
               <p:cNvPr id="45" name="Textfeld 44">
@@ -8384,8 +8384,8 @@
           </p:sp>
         </mc:Fallback>
       </mc:AlternateContent>
-      <mc:AlternateContent xmlns:mc="http://schemas.openxmlformats.org/markup-compatibility/2006" xmlns:a14="http://schemas.microsoft.com/office/drawing/2010/main">
-        <mc:Choice Requires="a14">
+      <mc:AlternateContent xmlns:mc="http://schemas.openxmlformats.org/markup-compatibility/2006">
+        <mc:Choice xmlns:a14="http://schemas.microsoft.com/office/drawing/2010/main" Requires="a14">
           <p:sp>
             <p:nvSpPr>
               <p:cNvPr id="46" name="Textfeld 45">
@@ -8415,107 +8415,37 @@
               <a:lstStyle/>
               <a:p>
                 <a:r>
-                  <a:rPr lang="de-CH" sz="1600" dirty="0">
+                  <a:rPr lang="en-US" sz="1600" noProof="0" dirty="0">
                     <a:latin typeface="Segoe UI" panose="020B0502040204020203" pitchFamily="34" charset="0"/>
                     <a:cs typeface="Segoe UI" panose="020B0502040204020203" pitchFamily="34" charset="0"/>
                   </a:rPr>
-                  <a:t>⟶ </a:t>
-                </a:r>
-                <a:r>
-                  <a:rPr lang="de-CH" sz="1600" dirty="0" err="1">
-                    <a:latin typeface="Segoe UI" panose="020B0502040204020203" pitchFamily="34" charset="0"/>
-                    <a:cs typeface="Segoe UI" panose="020B0502040204020203" pitchFamily="34" charset="0"/>
-                  </a:rPr>
-                  <a:t>What</a:t>
-                </a:r>
-                <a:r>
-                  <a:rPr lang="de-CH" sz="1600" dirty="0">
-                    <a:latin typeface="Segoe UI" panose="020B0502040204020203" pitchFamily="34" charset="0"/>
-                    <a:cs typeface="Segoe UI" panose="020B0502040204020203" pitchFamily="34" charset="0"/>
-                  </a:rPr>
-                  <a:t> </a:t>
-                </a:r>
-                <a:r>
-                  <a:rPr lang="de-CH" sz="1600" dirty="0" err="1">
-                    <a:latin typeface="Segoe UI" panose="020B0502040204020203" pitchFamily="34" charset="0"/>
-                    <a:cs typeface="Segoe UI" panose="020B0502040204020203" pitchFamily="34" charset="0"/>
-                  </a:rPr>
-                  <a:t>property</a:t>
-                </a:r>
-                <a:r>
-                  <a:rPr lang="de-CH" sz="1600" dirty="0">
-                    <a:latin typeface="Segoe UI" panose="020B0502040204020203" pitchFamily="34" charset="0"/>
-                    <a:cs typeface="Segoe UI" panose="020B0502040204020203" pitchFamily="34" charset="0"/>
-                  </a:rPr>
-                  <a:t> </a:t>
-                </a:r>
-                <a:r>
-                  <a:rPr lang="de-CH" sz="1600" dirty="0" err="1">
-                    <a:latin typeface="Segoe UI" panose="020B0502040204020203" pitchFamily="34" charset="0"/>
-                    <a:cs typeface="Segoe UI" panose="020B0502040204020203" pitchFamily="34" charset="0"/>
-                  </a:rPr>
-                  <a:t>must</a:t>
-                </a:r>
-                <a:r>
-                  <a:rPr lang="de-CH" sz="1600" dirty="0">
-                    <a:latin typeface="Segoe UI" panose="020B0502040204020203" pitchFamily="34" charset="0"/>
-                    <a:cs typeface="Segoe UI" panose="020B0502040204020203" pitchFamily="34" charset="0"/>
-                  </a:rPr>
-                  <a:t> </a:t>
-                </a:r>
-                <a:r>
-                  <a:rPr lang="de-CH" sz="1600" dirty="0" err="1">
-                    <a:latin typeface="Segoe UI" panose="020B0502040204020203" pitchFamily="34" charset="0"/>
-                    <a:cs typeface="Segoe UI" panose="020B0502040204020203" pitchFamily="34" charset="0"/>
-                  </a:rPr>
-                  <a:t>the</a:t>
-                </a:r>
-                <a:r>
-                  <a:rPr lang="de-CH" sz="1600" dirty="0">
-                    <a:latin typeface="Segoe UI" panose="020B0502040204020203" pitchFamily="34" charset="0"/>
-                    <a:cs typeface="Segoe UI" panose="020B0502040204020203" pitchFamily="34" charset="0"/>
-                  </a:rPr>
-                  <a:t> </a:t>
-                </a:r>
-                <a:r>
-                  <a:rPr lang="de-CH" sz="1600" dirty="0" err="1">
-                    <a:latin typeface="Segoe UI" panose="020B0502040204020203" pitchFamily="34" charset="0"/>
-                    <a:cs typeface="Segoe UI" panose="020B0502040204020203" pitchFamily="34" charset="0"/>
-                  </a:rPr>
-                  <a:t>general</a:t>
-                </a:r>
-                <a:r>
-                  <a:rPr lang="de-CH" sz="1600" dirty="0">
-                    <a:latin typeface="Segoe UI" panose="020B0502040204020203" pitchFamily="34" charset="0"/>
-                    <a:cs typeface="Segoe UI" panose="020B0502040204020203" pitchFamily="34" charset="0"/>
-                  </a:rPr>
-                  <a:t> </a:t>
+                  <a:t>⟶ What property must the general </a:t>
                 </a:r>
                 <a14:m>
                   <m:oMath xmlns:m="http://schemas.openxmlformats.org/officeDocument/2006/math">
                     <m:r>
-                      <a:rPr lang="de-CH" sz="1600" i="1" dirty="0" smtClean="0">
+                      <a:rPr lang="en-US" sz="1600" i="1" noProof="0" smtClean="0">
                         <a:latin typeface="Cambria Math" panose="02040503050406030204" pitchFamily="18" charset="0"/>
                         <a:cs typeface="Segoe UI" panose="020B0502040204020203" pitchFamily="34" charset="0"/>
                       </a:rPr>
                       <m:t>𝐿</m:t>
                     </m:r>
                     <m:r>
-                      <a:rPr lang="de-CH" sz="1600" i="1" dirty="0" smtClean="0">
+                      <a:rPr lang="en-US" sz="1600" i="1" noProof="0" smtClean="0">
                         <a:latin typeface="Cambria Math" panose="02040503050406030204" pitchFamily="18" charset="0"/>
                         <a:cs typeface="Segoe UI" panose="020B0502040204020203" pitchFamily="34" charset="0"/>
                       </a:rPr>
                       <m:t>(</m:t>
                     </m:r>
                     <m:r>
-                      <a:rPr lang="de-CH" sz="1600" i="1" dirty="0" smtClean="0">
+                      <a:rPr lang="en-US" sz="1600" i="1" noProof="0" smtClean="0">
                         <a:latin typeface="Cambria Math" panose="02040503050406030204" pitchFamily="18" charset="0"/>
                         <a:cs typeface="Segoe UI" panose="020B0502040204020203" pitchFamily="34" charset="0"/>
                       </a:rPr>
                       <m:t>𝑠</m:t>
                     </m:r>
                     <m:r>
-                      <a:rPr lang="de-CH" sz="1600" i="1" dirty="0" smtClean="0">
+                      <a:rPr lang="en-US" sz="1600" i="1" noProof="0" smtClean="0">
                         <a:latin typeface="Cambria Math" panose="02040503050406030204" pitchFamily="18" charset="0"/>
                         <a:cs typeface="Segoe UI" panose="020B0502040204020203" pitchFamily="34" charset="0"/>
                       </a:rPr>
@@ -8524,87 +8454,17 @@
                   </m:oMath>
                 </a14:m>
                 <a:r>
-                  <a:rPr lang="de-CH" sz="1600" dirty="0">
+                  <a:rPr lang="en-US" sz="1600" noProof="0" dirty="0">
                     <a:latin typeface="Segoe UI" panose="020B0502040204020203" pitchFamily="34" charset="0"/>
                     <a:cs typeface="Segoe UI" panose="020B0502040204020203" pitchFamily="34" charset="0"/>
                   </a:rPr>
-                  <a:t> </a:t>
-                </a:r>
-                <a:r>
-                  <a:rPr lang="de-CH" sz="1600" dirty="0" err="1">
-                    <a:latin typeface="Segoe UI" panose="020B0502040204020203" pitchFamily="34" charset="0"/>
-                    <a:cs typeface="Segoe UI" panose="020B0502040204020203" pitchFamily="34" charset="0"/>
-                  </a:rPr>
-                  <a:t>possess</a:t>
-                </a:r>
-                <a:r>
-                  <a:rPr lang="de-CH" sz="1600" dirty="0">
-                    <a:latin typeface="Segoe UI" panose="020B0502040204020203" pitchFamily="34" charset="0"/>
-                    <a:cs typeface="Segoe UI" panose="020B0502040204020203" pitchFamily="34" charset="0"/>
-                  </a:rPr>
-                  <a:t> </a:t>
-                </a:r>
-                <a:r>
-                  <a:rPr lang="de-CH" sz="1600" dirty="0" err="1">
-                    <a:latin typeface="Segoe UI" panose="020B0502040204020203" pitchFamily="34" charset="0"/>
-                    <a:cs typeface="Segoe UI" panose="020B0502040204020203" pitchFamily="34" charset="0"/>
-                  </a:rPr>
-                  <a:t>for</a:t>
-                </a:r>
-                <a:r>
-                  <a:rPr lang="de-CH" sz="1600" dirty="0">
-                    <a:latin typeface="Segoe UI" panose="020B0502040204020203" pitchFamily="34" charset="0"/>
-                    <a:cs typeface="Segoe UI" panose="020B0502040204020203" pitchFamily="34" charset="0"/>
-                  </a:rPr>
-                  <a:t> </a:t>
-                </a:r>
-                <a:r>
-                  <a:rPr lang="de-CH" sz="1600" dirty="0" err="1">
-                    <a:latin typeface="Segoe UI" panose="020B0502040204020203" pitchFamily="34" charset="0"/>
-                    <a:cs typeface="Segoe UI" panose="020B0502040204020203" pitchFamily="34" charset="0"/>
-                  </a:rPr>
-                  <a:t>this</a:t>
-                </a:r>
-                <a:r>
-                  <a:rPr lang="de-CH" sz="1600" dirty="0">
-                    <a:latin typeface="Segoe UI" panose="020B0502040204020203" pitchFamily="34" charset="0"/>
-                    <a:cs typeface="Segoe UI" panose="020B0502040204020203" pitchFamily="34" charset="0"/>
-                  </a:rPr>
-                  <a:t> </a:t>
-                </a:r>
-                <a:r>
-                  <a:rPr lang="de-CH" sz="1600" dirty="0" err="1">
-                    <a:latin typeface="Segoe UI" panose="020B0502040204020203" pitchFamily="34" charset="0"/>
-                    <a:cs typeface="Segoe UI" panose="020B0502040204020203" pitchFamily="34" charset="0"/>
-                  </a:rPr>
-                  <a:t>to</a:t>
-                </a:r>
-                <a:r>
-                  <a:rPr lang="de-CH" sz="1600" dirty="0">
-                    <a:latin typeface="Segoe UI" panose="020B0502040204020203" pitchFamily="34" charset="0"/>
-                    <a:cs typeface="Segoe UI" panose="020B0502040204020203" pitchFamily="34" charset="0"/>
-                  </a:rPr>
-                  <a:t> hold </a:t>
-                </a:r>
-                <a:r>
-                  <a:rPr lang="de-CH" sz="1600" dirty="0" err="1">
-                    <a:latin typeface="Segoe UI" panose="020B0502040204020203" pitchFamily="34" charset="0"/>
-                    <a:cs typeface="Segoe UI" panose="020B0502040204020203" pitchFamily="34" charset="0"/>
-                  </a:rPr>
-                  <a:t>true</a:t>
-                </a:r>
-                <a:r>
-                  <a:rPr lang="de-CH" sz="1600" dirty="0">
-                    <a:latin typeface="Segoe UI" panose="020B0502040204020203" pitchFamily="34" charset="0"/>
-                    <a:cs typeface="Segoe UI" panose="020B0502040204020203" pitchFamily="34" charset="0"/>
-                  </a:rPr>
-                  <a:t>?</a:t>
+                  <a:t> possess for this to hold true?</a:t>
                 </a:r>
               </a:p>
             </p:txBody>
           </p:sp>
         </mc:Choice>
-        <mc:Fallback xmlns="">
+        <mc:Fallback>
           <p:sp>
             <p:nvSpPr>
               <p:cNvPr id="46" name="Textfeld 45">
@@ -8649,8 +8509,8 @@
           </p:sp>
         </mc:Fallback>
       </mc:AlternateContent>
-      <mc:AlternateContent xmlns:mc="http://schemas.openxmlformats.org/markup-compatibility/2006" xmlns:a14="http://schemas.microsoft.com/office/drawing/2010/main">
-        <mc:Choice Requires="a14">
+      <mc:AlternateContent xmlns:mc="http://schemas.openxmlformats.org/markup-compatibility/2006">
+        <mc:Choice xmlns:a14="http://schemas.microsoft.com/office/drawing/2010/main" Requires="a14">
           <p:sp>
             <p:nvSpPr>
               <p:cNvPr id="48" name="Textfeld 47">
@@ -8707,7 +8567,7 @@
             </p:txBody>
           </p:sp>
         </mc:Choice>
-        <mc:Fallback xmlns="">
+        <mc:Fallback>
           <p:sp>
             <p:nvSpPr>
               <p:cNvPr id="48" name="Textfeld 47">
@@ -9183,8 +9043,8 @@
                   <a:chExt cx="2282664" cy="1650020"/>
                 </a:xfrm>
               </p:grpSpPr>
-              <mc:AlternateContent xmlns:mc="http://schemas.openxmlformats.org/markup-compatibility/2006" xmlns:a14="http://schemas.microsoft.com/office/drawing/2010/main">
-                <mc:Choice Requires="a14">
+              <mc:AlternateContent xmlns:mc="http://schemas.openxmlformats.org/markup-compatibility/2006">
+                <mc:Choice xmlns:a14="http://schemas.microsoft.com/office/drawing/2010/main" Requires="a14">
                   <p:sp>
                     <p:nvSpPr>
                       <p:cNvPr id="9" name="Textfeld 8">
@@ -9255,12 +9115,12 @@
                             </m:oMath>
                           </m:oMathPara>
                         </a14:m>
-                        <a:endParaRPr/>
+                        <a:endParaRPr lang="en-US" noProof="0" dirty="0"/>
                       </a:p>
                     </p:txBody>
                   </p:sp>
                 </mc:Choice>
-                <mc:Fallback xmlns="">
+                <mc:Fallback>
                   <p:sp>
                     <p:nvSpPr>
                       <p:cNvPr id="9" name="Textfeld 8">
@@ -9286,7 +9146,7 @@
                       <a:blipFill>
                         <a:blip r:embed="rId16"/>
                         <a:stretch>
-                          <a:fillRect t="-4000" r="-6818" b="-20000"/>
+                          <a:fillRect b="-8000"/>
                         </a:stretch>
                       </a:blipFill>
                     </p:spPr>
@@ -9305,8 +9165,8 @@
                   </p:sp>
                 </mc:Fallback>
               </mc:AlternateContent>
-              <mc:AlternateContent xmlns:mc="http://schemas.openxmlformats.org/markup-compatibility/2006" xmlns:a14="http://schemas.microsoft.com/office/drawing/2010/main">
-                <mc:Choice Requires="a14">
+              <mc:AlternateContent xmlns:mc="http://schemas.openxmlformats.org/markup-compatibility/2006">
+                <mc:Choice xmlns:a14="http://schemas.microsoft.com/office/drawing/2010/main" Requires="a14">
                   <p:sp>
                     <p:nvSpPr>
                       <p:cNvPr id="10" name="Textfeld 9">
@@ -9359,7 +9219,7 @@
                     </p:txBody>
                   </p:sp>
                 </mc:Choice>
-                <mc:Fallback xmlns="">
+                <mc:Fallback>
                   <p:sp>
                     <p:nvSpPr>
                       <p:cNvPr id="10" name="Textfeld 9">
@@ -9529,8 +9389,8 @@
               </a:fontRef>
             </p:style>
           </p:cxnSp>
-          <mc:AlternateContent xmlns:mc="http://schemas.openxmlformats.org/markup-compatibility/2006" xmlns:a14="http://schemas.microsoft.com/office/drawing/2010/main">
-            <mc:Choice Requires="a14">
+          <mc:AlternateContent xmlns:mc="http://schemas.openxmlformats.org/markup-compatibility/2006">
+            <mc:Choice xmlns:a14="http://schemas.microsoft.com/office/drawing/2010/main" Requires="a14">
               <p:sp>
                 <p:nvSpPr>
                   <p:cNvPr id="21" name="Textfeld 20">
@@ -9601,12 +9461,12 @@
                         </m:oMath>
                       </m:oMathPara>
                     </a14:m>
-                    <a:endParaRPr/>
+                    <a:endParaRPr lang="en-US" noProof="0" dirty="0"/>
                   </a:p>
                 </p:txBody>
               </p:sp>
             </mc:Choice>
-            <mc:Fallback xmlns="">
+            <mc:Fallback>
               <p:sp>
                 <p:nvSpPr>
                   <p:cNvPr id="21" name="Textfeld 20">
@@ -9632,7 +9492,7 @@
                   <a:blipFill>
                     <a:blip r:embed="rId18"/>
                     <a:stretch>
-                      <a:fillRect t="-4000" r="-6977" b="-24000"/>
+                      <a:fillRect/>
                     </a:stretch>
                   </a:blipFill>
                 </p:spPr>
@@ -9652,8 +9512,8 @@
             </mc:Fallback>
           </mc:AlternateContent>
         </p:grpSp>
-        <mc:AlternateContent xmlns:mc="http://schemas.openxmlformats.org/markup-compatibility/2006" xmlns:a14="http://schemas.microsoft.com/office/drawing/2010/main">
-          <mc:Choice Requires="a14">
+        <mc:AlternateContent xmlns:mc="http://schemas.openxmlformats.org/markup-compatibility/2006">
+          <mc:Choice xmlns:a14="http://schemas.microsoft.com/office/drawing/2010/main" Requires="a14">
             <p:sp>
               <p:nvSpPr>
                 <p:cNvPr id="78" name="Textfeld 77">
@@ -9735,7 +9595,7 @@
               </p:txBody>
             </p:sp>
           </mc:Choice>
-          <mc:Fallback xmlns="">
+          <mc:Fallback>
             <p:sp>
               <p:nvSpPr>
                 <p:cNvPr id="78" name="Textfeld 77">
@@ -10247,8 +10107,8 @@
           </a:p>
         </p:txBody>
       </p:sp>
-      <mc:AlternateContent xmlns:mc="http://schemas.openxmlformats.org/markup-compatibility/2006" xmlns:a14="http://schemas.microsoft.com/office/drawing/2010/main">
-        <mc:Choice Requires="a14">
+      <mc:AlternateContent xmlns:mc="http://schemas.openxmlformats.org/markup-compatibility/2006">
+        <mc:Choice xmlns:a14="http://schemas.microsoft.com/office/drawing/2010/main" Requires="a14">
           <p:sp>
             <p:nvSpPr>
               <p:cNvPr id="3" name="Inhaltsplatzhalter 2">
@@ -10277,7 +10137,7 @@
                 <a14:m>
                   <m:oMath xmlns:m="http://schemas.openxmlformats.org/officeDocument/2006/math">
                     <m:r>
-                      <a:rPr lang="en-US" sz="1600" i="1" noProof="0" dirty="0" smtClean="0">
+                      <a:rPr lang="en-US" sz="1600" i="1" noProof="0" smtClean="0">
                         <a:latin typeface="Cambria Math" panose="02040503050406030204" pitchFamily="18" charset="0"/>
                       </a:rPr>
                       <m:t>𝑒</m:t>
@@ -10336,7 +10196,7 @@
             </p:txBody>
           </p:sp>
         </mc:Choice>
-        <mc:Fallback xmlns="">
+        <mc:Fallback>
           <p:sp>
             <p:nvSpPr>
               <p:cNvPr id="3" name="Inhaltsplatzhalter 2">
@@ -10401,7 +10261,7 @@
               <a:buClrTx/>
             </a:pPr>
             <a:r>
-              <a:rPr lang="en-US" kern="1200" noProof="0">
+              <a:rPr lang="en-US" kern="1200" noProof="0" dirty="0">
                 <a:solidFill>
                   <a:srgbClr val="101623">
                     <a:tint val="75000"/>
@@ -10414,7 +10274,7 @@
               <a:t>Kissan Varatharajan - </a:t>
             </a:r>
             <a:r>
-              <a:rPr lang="en-US" kern="1200" noProof="0" err="1">
+              <a:rPr lang="en-US" kern="1200" noProof="0" dirty="0" err="1">
                 <a:solidFill>
                   <a:srgbClr val="101623">
                     <a:tint val="75000"/>
@@ -10426,7 +10286,7 @@
               </a:rPr>
               <a:t>kissanv.github.io</a:t>
             </a:r>
-            <a:endParaRPr lang="en-US" kern="1200" noProof="0">
+            <a:endParaRPr lang="en-US" kern="1200" noProof="0" dirty="0">
               <a:solidFill>
                 <a:srgbClr val="101623">
                   <a:tint val="75000"/>
@@ -10479,7 +10339,7 @@
               </a:pPr>
               <a:t>11</a:t>
             </a:fld>
-            <a:endParaRPr lang="en-US" kern="1200" noProof="0">
+            <a:endParaRPr lang="en-US" kern="1200" noProof="0" dirty="0">
               <a:solidFill>
                 <a:srgbClr val="101623">
                   <a:tint val="75000"/>
@@ -10599,8 +10459,8 @@
                 <a:chExt cx="2282664" cy="1650020"/>
               </a:xfrm>
             </p:grpSpPr>
-            <mc:AlternateContent xmlns:mc="http://schemas.openxmlformats.org/markup-compatibility/2006" xmlns:a14="http://schemas.microsoft.com/office/drawing/2010/main">
-              <mc:Choice Requires="a14">
+            <mc:AlternateContent xmlns:mc="http://schemas.openxmlformats.org/markup-compatibility/2006">
+              <mc:Choice xmlns:a14="http://schemas.microsoft.com/office/drawing/2010/main" Requires="a14">
                 <p:sp>
                   <p:nvSpPr>
                     <p:cNvPr id="21" name="Textfeld 20">
@@ -10671,12 +10531,12 @@
                           </m:oMath>
                         </m:oMathPara>
                       </a14:m>
-                      <a:endParaRPr/>
+                      <a:endParaRPr lang="en-US" noProof="0" dirty="0"/>
                     </a:p>
                   </p:txBody>
                 </p:sp>
               </mc:Choice>
-              <mc:Fallback xmlns="">
+              <mc:Fallback>
                 <p:sp>
                   <p:nvSpPr>
                     <p:cNvPr id="21" name="Textfeld 20">
@@ -10721,8 +10581,8 @@
                 </p:sp>
               </mc:Fallback>
             </mc:AlternateContent>
-            <mc:AlternateContent xmlns:mc="http://schemas.openxmlformats.org/markup-compatibility/2006" xmlns:a14="http://schemas.microsoft.com/office/drawing/2010/main">
-              <mc:Choice Requires="a14">
+            <mc:AlternateContent xmlns:mc="http://schemas.openxmlformats.org/markup-compatibility/2006">
+              <mc:Choice xmlns:a14="http://schemas.microsoft.com/office/drawing/2010/main" Requires="a14">
                 <p:sp>
                   <p:nvSpPr>
                     <p:cNvPr id="22" name="Textfeld 21">
@@ -10770,12 +10630,12 @@
                           </m:oMath>
                         </m:oMathPara>
                       </a14:m>
-                      <a:endParaRPr lang="en-US" noProof="0"/>
+                      <a:endParaRPr lang="en-US" noProof="0" dirty="0"/>
                     </a:p>
                   </p:txBody>
                 </p:sp>
               </mc:Choice>
-              <mc:Fallback xmlns="">
+              <mc:Fallback>
                 <p:sp>
                   <p:nvSpPr>
                     <p:cNvPr id="22" name="Textfeld 21">
@@ -10896,7 +10756,7 @@
                 <a:lstStyle/>
                 <a:p>
                   <a:pPr algn="ctr"/>
-                  <a:endParaRPr lang="en-US" noProof="0"/>
+                  <a:endParaRPr lang="en-US" noProof="0" dirty="0"/>
                 </a:p>
               </p:txBody>
             </p:sp>
@@ -10945,8 +10805,8 @@
             </a:fontRef>
           </p:style>
         </p:cxnSp>
-        <mc:AlternateContent xmlns:mc="http://schemas.openxmlformats.org/markup-compatibility/2006" xmlns:a14="http://schemas.microsoft.com/office/drawing/2010/main">
-          <mc:Choice Requires="a14">
+        <mc:AlternateContent xmlns:mc="http://schemas.openxmlformats.org/markup-compatibility/2006">
+          <mc:Choice xmlns:a14="http://schemas.microsoft.com/office/drawing/2010/main" Requires="a14">
             <p:sp>
               <p:nvSpPr>
                 <p:cNvPr id="18" name="Textfeld 17">
@@ -11017,12 +10877,12 @@
                       </m:oMath>
                     </m:oMathPara>
                   </a14:m>
-                  <a:endParaRPr/>
+                  <a:endParaRPr lang="en-US" noProof="0" dirty="0"/>
                 </a:p>
               </p:txBody>
             </p:sp>
           </mc:Choice>
-          <mc:Fallback xmlns="">
+          <mc:Fallback>
             <p:sp>
               <p:nvSpPr>
                 <p:cNvPr id="18" name="Textfeld 17">
@@ -11068,8 +10928,8 @@
           </mc:Fallback>
         </mc:AlternateContent>
       </p:grpSp>
-      <mc:AlternateContent xmlns:mc="http://schemas.openxmlformats.org/markup-compatibility/2006" xmlns:a14="http://schemas.microsoft.com/office/drawing/2010/main">
-        <mc:Choice Requires="a14">
+      <mc:AlternateContent xmlns:mc="http://schemas.openxmlformats.org/markup-compatibility/2006">
+        <mc:Choice xmlns:a14="http://schemas.microsoft.com/office/drawing/2010/main" Requires="a14">
           <p:sp>
             <p:nvSpPr>
               <p:cNvPr id="25" name="Textfeld 24">
@@ -11151,7 +11011,7 @@
             </p:txBody>
           </p:sp>
         </mc:Choice>
-        <mc:Fallback xmlns="">
+        <mc:Fallback>
           <p:sp>
             <p:nvSpPr>
               <p:cNvPr id="25" name="Textfeld 24">
@@ -11292,8 +11152,8 @@
           </p:pic>
         </mc:Fallback>
       </mc:AlternateContent>
-      <mc:AlternateContent xmlns:mc="http://schemas.openxmlformats.org/markup-compatibility/2006" xmlns:a14="http://schemas.microsoft.com/office/drawing/2010/main">
-        <mc:Choice Requires="a14">
+      <mc:AlternateContent xmlns:mc="http://schemas.openxmlformats.org/markup-compatibility/2006">
+        <mc:Choice xmlns:a14="http://schemas.microsoft.com/office/drawing/2010/main" Requires="a14">
           <p:sp>
             <p:nvSpPr>
               <p:cNvPr id="6" name="Textfeld 5">
@@ -11323,37 +11183,16 @@
               <a:lstStyle/>
               <a:p>
                 <a:r>
-                  <a:rPr lang="de-DE" sz="1600" dirty="0" err="1">
+                  <a:rPr lang="en-US" sz="1600" noProof="0" dirty="0">
                     <a:latin typeface="Segoe UI" panose="020B0502040204020203" pitchFamily="34" charset="0"/>
                     <a:cs typeface="Segoe UI" panose="020B0502040204020203" pitchFamily="34" charset="0"/>
                   </a:rPr>
-                  <a:t>Example</a:t>
-                </a:r>
-                <a:r>
-                  <a:rPr lang="de-DE" sz="1600" dirty="0">
-                    <a:latin typeface="Segoe UI" panose="020B0502040204020203" pitchFamily="34" charset="0"/>
-                    <a:cs typeface="Segoe UI" panose="020B0502040204020203" pitchFamily="34" charset="0"/>
-                  </a:rPr>
-                  <a:t>: Given an open loop </a:t>
-                </a:r>
-                <a:r>
-                  <a:rPr lang="de-DE" sz="1600" dirty="0" err="1">
-                    <a:latin typeface="Segoe UI" panose="020B0502040204020203" pitchFamily="34" charset="0"/>
-                    <a:cs typeface="Segoe UI" panose="020B0502040204020203" pitchFamily="34" charset="0"/>
-                  </a:rPr>
-                  <a:t>system</a:t>
-                </a:r>
-                <a:r>
-                  <a:rPr lang="de-DE" sz="1600" dirty="0">
-                    <a:latin typeface="Segoe UI" panose="020B0502040204020203" pitchFamily="34" charset="0"/>
-                    <a:cs typeface="Segoe UI" panose="020B0502040204020203" pitchFamily="34" charset="0"/>
-                  </a:rPr>
-                  <a:t>: </a:t>
+                  <a:t>Example: Given an open loop system: </a:t>
                 </a:r>
                 <a14:m>
                   <m:oMath xmlns:m="http://schemas.openxmlformats.org/officeDocument/2006/math">
                     <m:r>
-                      <a:rPr lang="de-DE" sz="1600" i="1" dirty="0" smtClean="0">
+                      <a:rPr lang="en-US" sz="1600" i="1" noProof="0" smtClean="0">
                         <a:latin typeface="Cambria Math" panose="02040503050406030204" pitchFamily="18" charset="0"/>
                       </a:rPr>
                       <m:t>𝐿</m:t>
@@ -11361,14 +11200,14 @@
                     <m:d>
                       <m:dPr>
                         <m:ctrlPr>
-                          <a:rPr lang="de-DE" sz="1600" i="1" dirty="0" smtClean="0">
+                          <a:rPr lang="en-US" sz="1600" i="1" noProof="0" smtClean="0">
                             <a:latin typeface="Cambria Math" panose="02040503050406030204" pitchFamily="18" charset="0"/>
                           </a:rPr>
                         </m:ctrlPr>
                       </m:dPr>
                       <m:e>
                         <m:r>
-                          <a:rPr lang="de-DE" sz="1600" i="1" dirty="0" smtClean="0">
+                          <a:rPr lang="en-US" sz="1600" i="1" noProof="0" smtClean="0">
                             <a:latin typeface="Cambria Math" panose="02040503050406030204" pitchFamily="18" charset="0"/>
                           </a:rPr>
                           <m:t>𝑠</m:t>
@@ -11376,7 +11215,7 @@
                       </m:e>
                     </m:d>
                     <m:r>
-                      <a:rPr lang="de-DE" sz="1600" i="1" dirty="0" smtClean="0">
+                      <a:rPr lang="en-US" sz="1600" i="1" noProof="0" smtClean="0">
                         <a:latin typeface="Cambria Math" panose="02040503050406030204" pitchFamily="18" charset="0"/>
                       </a:rPr>
                       <m:t>=</m:t>
@@ -11384,14 +11223,14 @@
                     <m:f>
                       <m:fPr>
                         <m:ctrlPr>
-                          <a:rPr lang="de-DE" sz="1600" i="1" dirty="0" smtClean="0">
+                          <a:rPr lang="en-US" sz="1600" i="1" noProof="0" smtClean="0">
                             <a:latin typeface="Cambria Math" panose="02040503050406030204" pitchFamily="18" charset="0"/>
                           </a:rPr>
                         </m:ctrlPr>
                       </m:fPr>
                       <m:num>
                         <m:r>
-                          <a:rPr lang="de-DE" sz="1600" i="1" dirty="0" smtClean="0">
+                          <a:rPr lang="en-US" sz="1600" i="1" noProof="0" smtClean="0">
                             <a:latin typeface="Cambria Math" panose="02040503050406030204" pitchFamily="18" charset="0"/>
                           </a:rPr>
                           <m:t>1</m:t>
@@ -11399,13 +11238,13 @@
                       </m:num>
                       <m:den>
                         <m:r>
-                          <a:rPr lang="de-DE" sz="1600" i="1" dirty="0" smtClean="0">
+                          <a:rPr lang="en-US" sz="1600" i="1" noProof="0" smtClean="0">
                             <a:latin typeface="Cambria Math" panose="02040503050406030204" pitchFamily="18" charset="0"/>
                           </a:rPr>
                           <m:t>𝑠</m:t>
                         </m:r>
                         <m:r>
-                          <a:rPr lang="de-DE" sz="1600" i="1" dirty="0" smtClean="0">
+                          <a:rPr lang="en-US" sz="1600" i="1" noProof="0" smtClean="0">
                             <a:latin typeface="Cambria Math" panose="02040503050406030204" pitchFamily="18" charset="0"/>
                           </a:rPr>
                           <m:t>+2</m:t>
@@ -11415,32 +11254,18 @@
                   </m:oMath>
                 </a14:m>
                 <a:r>
-                  <a:rPr lang="de-DE" sz="1600" dirty="0"/>
+                  <a:rPr lang="en-US" sz="1600" noProof="0" dirty="0"/>
                   <a:t> </a:t>
                 </a:r>
                 <a:r>
-                  <a:rPr lang="de-DE" sz="1600" dirty="0" err="1">
+                  <a:rPr lang="en-US" sz="1600" noProof="0" dirty="0">
                     <a:latin typeface="Segoe UI" panose="020B0502040204020203" pitchFamily="34" charset="0"/>
                     <a:cs typeface="Segoe UI" panose="020B0502040204020203" pitchFamily="34" charset="0"/>
                   </a:rPr>
-                  <a:t>what</a:t>
+                  <a:t>what is</a:t>
                 </a:r>
                 <a:r>
-                  <a:rPr lang="de-DE" sz="1600" dirty="0">
-                    <a:latin typeface="Segoe UI" panose="020B0502040204020203" pitchFamily="34" charset="0"/>
-                    <a:cs typeface="Segoe UI" panose="020B0502040204020203" pitchFamily="34" charset="0"/>
-                  </a:rPr>
-                  <a:t> </a:t>
-                </a:r>
-                <a:r>
-                  <a:rPr lang="de-DE" sz="1600" dirty="0" err="1">
-                    <a:latin typeface="Segoe UI" panose="020B0502040204020203" pitchFamily="34" charset="0"/>
-                    <a:cs typeface="Segoe UI" panose="020B0502040204020203" pitchFamily="34" charset="0"/>
-                  </a:rPr>
-                  <a:t>is</a:t>
-                </a:r>
-                <a:r>
-                  <a:rPr lang="de-DE" sz="1600" dirty="0"/>
+                  <a:rPr lang="en-US" sz="1600" noProof="0" dirty="0"/>
                   <a:t> </a:t>
                 </a:r>
                 <a14:m>
@@ -11448,14 +11273,14 @@
                     <m:sSub>
                       <m:sSubPr>
                         <m:ctrlPr>
-                          <a:rPr lang="de-DE" sz="1600" i="1" dirty="0" smtClean="0">
+                          <a:rPr lang="en-US" sz="1600" i="1" noProof="0" smtClean="0">
                             <a:latin typeface="Cambria Math" panose="02040503050406030204" pitchFamily="18" charset="0"/>
                           </a:rPr>
                         </m:ctrlPr>
                       </m:sSubPr>
                       <m:e>
                         <m:r>
-                          <a:rPr lang="de-DE" sz="1600" i="1" dirty="0" smtClean="0">
+                          <a:rPr lang="en-US" sz="1600" i="1" noProof="0" smtClean="0">
                             <a:latin typeface="Cambria Math" panose="02040503050406030204" pitchFamily="18" charset="0"/>
                           </a:rPr>
                           <m:t>𝑒</m:t>
@@ -11463,7 +11288,7 @@
                       </m:e>
                       <m:sub>
                         <m:r>
-                          <a:rPr lang="de-DE" sz="1600" i="1" dirty="0" err="1" smtClean="0">
+                          <a:rPr lang="en-US" sz="1600" i="1" noProof="0" smtClean="0">
                             <a:latin typeface="Cambria Math" panose="02040503050406030204" pitchFamily="18" charset="0"/>
                           </a:rPr>
                           <m:t>𝑠𝑠</m:t>
@@ -11473,54 +11298,19 @@
                   </m:oMath>
                 </a14:m>
                 <a:r>
-                  <a:rPr lang="de-DE" sz="1600" dirty="0"/>
+                  <a:rPr lang="en-US" sz="1600" noProof="0" dirty="0"/>
                   <a:t> </a:t>
                 </a:r>
                 <a:r>
-                  <a:rPr lang="de-DE" sz="1600" dirty="0" err="1">
+                  <a:rPr lang="en-US" sz="1600" noProof="0" dirty="0">
                     <a:latin typeface="Segoe UI" panose="020B0502040204020203" pitchFamily="34" charset="0"/>
                     <a:cs typeface="Segoe UI" panose="020B0502040204020203" pitchFamily="34" charset="0"/>
                   </a:rPr>
-                  <a:t>for</a:t>
-                </a:r>
-                <a:r>
-                  <a:rPr lang="de-DE" sz="1600" dirty="0">
-                    <a:latin typeface="Segoe UI" panose="020B0502040204020203" pitchFamily="34" charset="0"/>
-                    <a:cs typeface="Segoe UI" panose="020B0502040204020203" pitchFamily="34" charset="0"/>
-                  </a:rPr>
-                  <a:t> an </a:t>
-                </a:r>
-                <a:r>
-                  <a:rPr lang="de-DE" sz="1600" dirty="0" err="1">
-                    <a:latin typeface="Segoe UI" panose="020B0502040204020203" pitchFamily="34" charset="0"/>
-                    <a:cs typeface="Segoe UI" panose="020B0502040204020203" pitchFamily="34" charset="0"/>
-                  </a:rPr>
-                  <a:t>step</a:t>
-                </a:r>
-                <a:r>
-                  <a:rPr lang="de-DE" sz="1600" dirty="0">
-                    <a:latin typeface="Segoe UI" panose="020B0502040204020203" pitchFamily="34" charset="0"/>
-                    <a:cs typeface="Segoe UI" panose="020B0502040204020203" pitchFamily="34" charset="0"/>
-                  </a:rPr>
-                  <a:t> </a:t>
-                </a:r>
-                <a:r>
-                  <a:rPr lang="de-DE" sz="1600" dirty="0" err="1">
-                    <a:latin typeface="Segoe UI" panose="020B0502040204020203" pitchFamily="34" charset="0"/>
-                    <a:cs typeface="Segoe UI" panose="020B0502040204020203" pitchFamily="34" charset="0"/>
-                  </a:rPr>
-                  <a:t>input</a:t>
-                </a:r>
-                <a:r>
-                  <a:rPr lang="de-DE" sz="1600" dirty="0">
-                    <a:latin typeface="Segoe UI" panose="020B0502040204020203" pitchFamily="34" charset="0"/>
-                    <a:cs typeface="Segoe UI" panose="020B0502040204020203" pitchFamily="34" charset="0"/>
-                  </a:rPr>
-                  <a:t>?</a:t>
+                  <a:t>for an step input?</a:t>
                 </a:r>
               </a:p>
               <a:p>
-                <a:endParaRPr lang="de-DE" sz="1600" dirty="0">
+                <a:endParaRPr lang="en-US" sz="1600" noProof="0" dirty="0">
                   <a:latin typeface="Segoe UI" panose="020B0502040204020203" pitchFamily="34" charset="0"/>
                   <a:cs typeface="Segoe UI" panose="020B0502040204020203" pitchFamily="34" charset="0"/>
                 </a:endParaRPr>
@@ -11528,7 +11318,7 @@
             </p:txBody>
           </p:sp>
         </mc:Choice>
-        <mc:Fallback xmlns="">
+        <mc:Fallback>
           <p:sp>
             <p:nvSpPr>
               <p:cNvPr id="6" name="Textfeld 5">
@@ -11554,7 +11344,7 @@
               <a:blipFill>
                 <a:blip r:embed="rId9"/>
                 <a:stretch>
-                  <a:fillRect l="-531" b="-8929"/>
+                  <a:fillRect l="-531"/>
                 </a:stretch>
               </a:blipFill>
             </p:spPr>
@@ -11573,8 +11363,8 @@
           </p:sp>
         </mc:Fallback>
       </mc:AlternateContent>
-      <mc:AlternateContent xmlns:mc="http://schemas.openxmlformats.org/markup-compatibility/2006" xmlns:a14="http://schemas.microsoft.com/office/drawing/2010/main">
-        <mc:Choice Requires="a14">
+      <mc:AlternateContent xmlns:mc="http://schemas.openxmlformats.org/markup-compatibility/2006">
+        <mc:Choice xmlns:a14="http://schemas.microsoft.com/office/drawing/2010/main" Requires="a14">
           <p:sp>
             <p:nvSpPr>
               <p:cNvPr id="31" name="Textfeld 30">
@@ -11613,7 +11403,7 @@
                       <m:sSub>
                         <m:sSubPr>
                           <m:ctrlPr>
-                            <a:rPr lang="de-DE" sz="1600" i="1" dirty="0">
+                            <a:rPr lang="en-US" sz="1600" i="1" noProof="0" smtClean="0">
                               <a:latin typeface="Cambria Math" panose="02040503050406030204" pitchFamily="18" charset="0"/>
                               <a:cs typeface="Segoe UI" panose="020B0502040204020203" pitchFamily="34" charset="0"/>
                             </a:rPr>
@@ -11621,7 +11411,7 @@
                         </m:sSubPr>
                         <m:e>
                           <m:r>
-                            <a:rPr lang="de-DE" sz="1600" i="1" dirty="0">
+                            <a:rPr lang="en-US" sz="1600" i="1" noProof="0" smtClean="0">
                               <a:latin typeface="Cambria Math" panose="02040503050406030204" pitchFamily="18" charset="0"/>
                               <a:cs typeface="Segoe UI" panose="020B0502040204020203" pitchFamily="34" charset="0"/>
                             </a:rPr>
@@ -11630,7 +11420,7 @@
                         </m:e>
                         <m:sub>
                           <m:r>
-                            <a:rPr lang="de-DE" sz="1600" i="1" dirty="0" err="1">
+                            <a:rPr lang="en-US" sz="1600" i="1" noProof="0" smtClean="0">
                               <a:latin typeface="Cambria Math" panose="02040503050406030204" pitchFamily="18" charset="0"/>
                               <a:cs typeface="Segoe UI" panose="020B0502040204020203" pitchFamily="34" charset="0"/>
                             </a:rPr>
@@ -11639,14 +11429,14 @@
                         </m:sub>
                       </m:sSub>
                       <m:r>
-                        <a:rPr lang="de-DE" sz="1600" i="1" dirty="0">
+                        <a:rPr lang="en-US" sz="1600" i="1" noProof="0" smtClean="0">
                           <a:latin typeface="Cambria Math" panose="02040503050406030204" pitchFamily="18" charset="0"/>
                           <a:cs typeface="Segoe UI" panose="020B0502040204020203" pitchFamily="34" charset="0"/>
                         </a:rPr>
                         <m:t>=</m:t>
                       </m:r>
                       <m:r>
-                        <a:rPr lang="de-DE" sz="1600" i="1" dirty="0">
+                        <a:rPr lang="en-US" sz="1600" i="1" noProof="0" smtClean="0">
                           <a:latin typeface="Cambria Math" panose="02040503050406030204" pitchFamily="18" charset="0"/>
                           <a:cs typeface="Segoe UI" panose="020B0502040204020203" pitchFamily="34" charset="0"/>
                         </a:rPr>
@@ -11655,7 +11445,7 @@
                       <m:d>
                         <m:dPr>
                           <m:ctrlPr>
-                            <a:rPr lang="de-DE" sz="1600" i="1" dirty="0">
+                            <a:rPr lang="en-US" sz="1600" i="1" noProof="0" smtClean="0">
                               <a:latin typeface="Cambria Math" panose="02040503050406030204" pitchFamily="18" charset="0"/>
                               <a:cs typeface="Segoe UI" panose="020B0502040204020203" pitchFamily="34" charset="0"/>
                             </a:rPr>
@@ -11663,7 +11453,7 @@
                         </m:dPr>
                         <m:e>
                           <m:r>
-                            <a:rPr lang="de-DE" sz="1600" i="1" dirty="0">
+                            <a:rPr lang="en-US" sz="1600" i="1" noProof="0" smtClean="0">
                               <a:latin typeface="Cambria Math" panose="02040503050406030204" pitchFamily="18" charset="0"/>
                               <a:cs typeface="Segoe UI" panose="020B0502040204020203" pitchFamily="34" charset="0"/>
                             </a:rPr>
@@ -11672,7 +11462,7 @@
                         </m:e>
                       </m:d>
                       <m:r>
-                        <a:rPr lang="de-DE" sz="1600" i="1" dirty="0">
+                        <a:rPr lang="en-US" sz="1600" i="1" noProof="0" smtClean="0">
                           <a:latin typeface="Cambria Math" panose="02040503050406030204" pitchFamily="18" charset="0"/>
                           <a:cs typeface="Segoe UI" panose="020B0502040204020203" pitchFamily="34" charset="0"/>
                         </a:rPr>
@@ -11681,7 +11471,7 @@
                       <m:f>
                         <m:fPr>
                           <m:ctrlPr>
-                            <a:rPr lang="de-DE" sz="1600" i="1" dirty="0">
+                            <a:rPr lang="en-US" sz="1600" i="1" noProof="0" smtClean="0">
                               <a:latin typeface="Cambria Math" panose="02040503050406030204" pitchFamily="18" charset="0"/>
                               <a:cs typeface="Segoe UI" panose="020B0502040204020203" pitchFamily="34" charset="0"/>
                             </a:rPr>
@@ -11689,7 +11479,7 @@
                         </m:fPr>
                         <m:num>
                           <m:r>
-                            <a:rPr lang="de-DE" sz="1600" i="1" dirty="0">
+                            <a:rPr lang="en-US" sz="1600" i="1" noProof="0" smtClean="0">
                               <a:latin typeface="Cambria Math" panose="02040503050406030204" pitchFamily="18" charset="0"/>
                               <a:cs typeface="Segoe UI" panose="020B0502040204020203" pitchFamily="34" charset="0"/>
                             </a:rPr>
@@ -11698,14 +11488,14 @@
                         </m:num>
                         <m:den>
                           <m:r>
-                            <a:rPr lang="de-DE" sz="1600" i="1" dirty="0">
+                            <a:rPr lang="en-US" sz="1600" i="1" noProof="0" smtClean="0">
                               <a:latin typeface="Cambria Math" panose="02040503050406030204" pitchFamily="18" charset="0"/>
                               <a:cs typeface="Segoe UI" panose="020B0502040204020203" pitchFamily="34" charset="0"/>
                             </a:rPr>
                             <m:t>1+</m:t>
                           </m:r>
                           <m:r>
-                            <a:rPr lang="de-DE" sz="1600" i="1" dirty="0">
+                            <a:rPr lang="en-US" sz="1600" i="1" noProof="0" smtClean="0">
                               <a:latin typeface="Cambria Math" panose="02040503050406030204" pitchFamily="18" charset="0"/>
                               <a:cs typeface="Segoe UI" panose="020B0502040204020203" pitchFamily="34" charset="0"/>
                             </a:rPr>
@@ -11714,7 +11504,7 @@
                           <m:d>
                             <m:dPr>
                               <m:ctrlPr>
-                                <a:rPr lang="de-DE" sz="1600" i="1" dirty="0">
+                                <a:rPr lang="en-US" sz="1600" i="1" noProof="0" smtClean="0">
                                   <a:latin typeface="Cambria Math" panose="02040503050406030204" pitchFamily="18" charset="0"/>
                                   <a:cs typeface="Segoe UI" panose="020B0502040204020203" pitchFamily="34" charset="0"/>
                                 </a:rPr>
@@ -11722,7 +11512,7 @@
                             </m:dPr>
                             <m:e>
                               <m:r>
-                                <a:rPr lang="de-DE" sz="1600" i="1" dirty="0">
+                                <a:rPr lang="en-US" sz="1600" i="1" noProof="0" smtClean="0">
                                   <a:latin typeface="Cambria Math" panose="02040503050406030204" pitchFamily="18" charset="0"/>
                                   <a:cs typeface="Segoe UI" panose="020B0502040204020203" pitchFamily="34" charset="0"/>
                                 </a:rPr>
@@ -11733,7 +11523,7 @@
                         </m:den>
                       </m:f>
                       <m:r>
-                        <a:rPr lang="de-DE" sz="1600" i="1" dirty="0">
+                        <a:rPr lang="en-US" sz="1600" i="1" noProof="0" smtClean="0">
                           <a:latin typeface="Cambria Math" panose="02040503050406030204" pitchFamily="18" charset="0"/>
                           <a:cs typeface="Segoe UI" panose="020B0502040204020203" pitchFamily="34" charset="0"/>
                         </a:rPr>
@@ -11742,7 +11532,7 @@
                       <m:f>
                         <m:fPr>
                           <m:ctrlPr>
-                            <a:rPr lang="de-DE" sz="1600" i="1" dirty="0">
+                            <a:rPr lang="en-US" sz="1600" i="1" noProof="0" smtClean="0">
                               <a:latin typeface="Cambria Math" panose="02040503050406030204" pitchFamily="18" charset="0"/>
                               <a:cs typeface="Segoe UI" panose="020B0502040204020203" pitchFamily="34" charset="0"/>
                             </a:rPr>
@@ -11750,7 +11540,7 @@
                         </m:fPr>
                         <m:num>
                           <m:r>
-                            <a:rPr lang="de-DE" sz="1600" i="1" dirty="0">
+                            <a:rPr lang="en-US" sz="1600" i="1" noProof="0" smtClean="0">
                               <a:latin typeface="Cambria Math" panose="02040503050406030204" pitchFamily="18" charset="0"/>
                               <a:cs typeface="Segoe UI" panose="020B0502040204020203" pitchFamily="34" charset="0"/>
                             </a:rPr>
@@ -11759,7 +11549,7 @@
                         </m:num>
                         <m:den>
                           <m:r>
-                            <a:rPr lang="de-DE" sz="1600" i="1" dirty="0">
+                            <a:rPr lang="en-US" sz="1600" i="1" noProof="0" smtClean="0">
                               <a:latin typeface="Cambria Math" panose="02040503050406030204" pitchFamily="18" charset="0"/>
                               <a:cs typeface="Segoe UI" panose="020B0502040204020203" pitchFamily="34" charset="0"/>
                             </a:rPr>
@@ -11769,14 +11559,14 @@
                             <m:rPr>
                               <m:lit/>
                             </m:rPr>
-                            <a:rPr lang="de-DE" sz="1600" i="1" dirty="0">
+                            <a:rPr lang="en-US" sz="1600" i="1" noProof="0" smtClean="0">
                               <a:latin typeface="Cambria Math" panose="02040503050406030204" pitchFamily="18" charset="0"/>
                               <a:cs typeface="Segoe UI" panose="020B0502040204020203" pitchFamily="34" charset="0"/>
                             </a:rPr>
                             <m:t>/</m:t>
                           </m:r>
                           <m:r>
-                            <a:rPr lang="de-DE" sz="1600" i="1" dirty="0">
+                            <a:rPr lang="en-US" sz="1600" i="1" noProof="0" smtClean="0">
                               <a:latin typeface="Cambria Math" panose="02040503050406030204" pitchFamily="18" charset="0"/>
                               <a:cs typeface="Segoe UI" panose="020B0502040204020203" pitchFamily="34" charset="0"/>
                             </a:rPr>
@@ -11785,7 +11575,7 @@
                         </m:den>
                       </m:f>
                       <m:r>
-                        <a:rPr lang="de-DE" sz="1600" i="1" dirty="0">
+                        <a:rPr lang="en-US" sz="1600" i="1" noProof="0" smtClean="0">
                           <a:latin typeface="Cambria Math" panose="02040503050406030204" pitchFamily="18" charset="0"/>
                           <a:cs typeface="Segoe UI" panose="020B0502040204020203" pitchFamily="34" charset="0"/>
                         </a:rPr>
@@ -11794,7 +11584,7 @@
                       <m:f>
                         <m:fPr>
                           <m:ctrlPr>
-                            <a:rPr lang="de-DE" sz="1600" i="1" dirty="0">
+                            <a:rPr lang="en-US" sz="1600" i="1" noProof="0" smtClean="0">
                               <a:latin typeface="Cambria Math" panose="02040503050406030204" pitchFamily="18" charset="0"/>
                               <a:cs typeface="Segoe UI" panose="020B0502040204020203" pitchFamily="34" charset="0"/>
                             </a:rPr>
@@ -11802,7 +11592,7 @@
                         </m:fPr>
                         <m:num>
                           <m:r>
-                            <a:rPr lang="de-DE" sz="1600" i="1" dirty="0">
+                            <a:rPr lang="en-US" sz="1600" i="1" noProof="0" smtClean="0">
                               <a:latin typeface="Cambria Math" panose="02040503050406030204" pitchFamily="18" charset="0"/>
                               <a:cs typeface="Segoe UI" panose="020B0502040204020203" pitchFamily="34" charset="0"/>
                             </a:rPr>
@@ -11811,7 +11601,7 @@
                         </m:num>
                         <m:den>
                           <m:r>
-                            <a:rPr lang="de-DE" sz="1600" i="1" dirty="0">
+                            <a:rPr lang="en-US" sz="1600" i="1" noProof="0" smtClean="0">
                               <a:latin typeface="Cambria Math" panose="02040503050406030204" pitchFamily="18" charset="0"/>
                               <a:cs typeface="Segoe UI" panose="020B0502040204020203" pitchFamily="34" charset="0"/>
                             </a:rPr>
@@ -11822,12 +11612,12 @@
                     </m:oMath>
                   </m:oMathPara>
                 </a14:m>
-                <a:endParaRPr lang="de-DE" sz="1600" dirty="0"/>
+                <a:endParaRPr lang="en-US" sz="1600" noProof="0" dirty="0"/>
               </a:p>
             </p:txBody>
           </p:sp>
         </mc:Choice>
-        <mc:Fallback xmlns="">
+        <mc:Fallback>
           <p:sp>
             <p:nvSpPr>
               <p:cNvPr id="31" name="Textfeld 30">
@@ -11872,8 +11662,8 @@
           </p:sp>
         </mc:Fallback>
       </mc:AlternateContent>
-      <mc:AlternateContent xmlns:mc="http://schemas.openxmlformats.org/markup-compatibility/2006" xmlns:a14="http://schemas.microsoft.com/office/drawing/2010/main">
-        <mc:Choice Requires="a14">
+      <mc:AlternateContent xmlns:mc="http://schemas.openxmlformats.org/markup-compatibility/2006">
+        <mc:Choice xmlns:a14="http://schemas.microsoft.com/office/drawing/2010/main" Requires="a14">
           <p:sp>
             <p:nvSpPr>
               <p:cNvPr id="32" name="Textfeld 31">
@@ -11903,44 +11693,16 @@
               <a:lstStyle/>
               <a:p>
                 <a:r>
-                  <a:rPr lang="de-DE" sz="1600" dirty="0">
+                  <a:rPr lang="en-US" sz="1600" noProof="0" dirty="0">
                     <a:latin typeface="Segoe UI" panose="020B0502040204020203" pitchFamily="34" charset="0"/>
                     <a:cs typeface="Segoe UI" panose="020B0502040204020203" pitchFamily="34" charset="0"/>
                   </a:rPr>
-                  <a:t>Let's </a:t>
-                </a:r>
-                <a:r>
-                  <a:rPr lang="de-DE" sz="1600" dirty="0" err="1">
-                    <a:latin typeface="Segoe UI" panose="020B0502040204020203" pitchFamily="34" charset="0"/>
-                    <a:cs typeface="Segoe UI" panose="020B0502040204020203" pitchFamily="34" charset="0"/>
-                  </a:rPr>
-                  <a:t>add</a:t>
-                </a:r>
-                <a:r>
-                  <a:rPr lang="de-DE" sz="1600" dirty="0">
-                    <a:latin typeface="Segoe UI" panose="020B0502040204020203" pitchFamily="34" charset="0"/>
-                    <a:cs typeface="Segoe UI" panose="020B0502040204020203" pitchFamily="34" charset="0"/>
-                  </a:rPr>
-                  <a:t> an </a:t>
-                </a:r>
-                <a:r>
-                  <a:rPr lang="de-DE" sz="1600" dirty="0" err="1">
-                    <a:latin typeface="Segoe UI" panose="020B0502040204020203" pitchFamily="34" charset="0"/>
-                    <a:cs typeface="Segoe UI" panose="020B0502040204020203" pitchFamily="34" charset="0"/>
-                  </a:rPr>
-                  <a:t>integrator</a:t>
-                </a:r>
-                <a:r>
-                  <a:rPr lang="de-DE" sz="1600" dirty="0">
-                    <a:latin typeface="Segoe UI" panose="020B0502040204020203" pitchFamily="34" charset="0"/>
-                    <a:cs typeface="Segoe UI" panose="020B0502040204020203" pitchFamily="34" charset="0"/>
-                  </a:rPr>
-                  <a:t>: </a:t>
+                  <a:t>Let's add an integrator: </a:t>
                 </a:r>
                 <a14:m>
                   <m:oMath xmlns:m="http://schemas.openxmlformats.org/officeDocument/2006/math">
                     <m:r>
-                      <a:rPr lang="de-DE" sz="1600" i="1" dirty="0" smtClean="0">
+                      <a:rPr lang="en-US" sz="1600" i="1" noProof="0" smtClean="0">
                         <a:latin typeface="Cambria Math" panose="02040503050406030204" pitchFamily="18" charset="0"/>
                         <a:cs typeface="Segoe UI" panose="020B0502040204020203" pitchFamily="34" charset="0"/>
                       </a:rPr>
@@ -11949,7 +11711,7 @@
                     <m:d>
                       <m:dPr>
                         <m:ctrlPr>
-                          <a:rPr lang="de-DE" sz="1600" i="1" dirty="0" smtClean="0">
+                          <a:rPr lang="en-US" sz="1600" i="1" noProof="0" smtClean="0">
                             <a:latin typeface="Cambria Math" panose="02040503050406030204" pitchFamily="18" charset="0"/>
                             <a:cs typeface="Segoe UI" panose="020B0502040204020203" pitchFamily="34" charset="0"/>
                           </a:rPr>
@@ -11957,7 +11719,7 @@
                       </m:dPr>
                       <m:e>
                         <m:r>
-                          <a:rPr lang="de-DE" sz="1600" i="1" dirty="0" smtClean="0">
+                          <a:rPr lang="en-US" sz="1600" i="1" noProof="0" smtClean="0">
                             <a:latin typeface="Cambria Math" panose="02040503050406030204" pitchFamily="18" charset="0"/>
                             <a:cs typeface="Segoe UI" panose="020B0502040204020203" pitchFamily="34" charset="0"/>
                           </a:rPr>
@@ -11966,7 +11728,7 @@
                       </m:e>
                     </m:d>
                     <m:r>
-                      <a:rPr lang="de-DE" sz="1600" i="1" dirty="0" smtClean="0">
+                      <a:rPr lang="en-US" sz="1600" i="1" noProof="0" smtClean="0">
                         <a:latin typeface="Cambria Math" panose="02040503050406030204" pitchFamily="18" charset="0"/>
                         <a:cs typeface="Segoe UI" panose="020B0502040204020203" pitchFamily="34" charset="0"/>
                       </a:rPr>
@@ -11975,7 +11737,7 @@
                     <m:f>
                       <m:fPr>
                         <m:ctrlPr>
-                          <a:rPr lang="de-DE" sz="1600" i="1" dirty="0" smtClean="0">
+                          <a:rPr lang="en-US" sz="1600" i="1" noProof="0" smtClean="0">
                             <a:latin typeface="Cambria Math" panose="02040503050406030204" pitchFamily="18" charset="0"/>
                             <a:cs typeface="Segoe UI" panose="020B0502040204020203" pitchFamily="34" charset="0"/>
                           </a:rPr>
@@ -11983,7 +11745,7 @@
                       </m:fPr>
                       <m:num>
                         <m:r>
-                          <a:rPr lang="de-DE" sz="1600" i="1" dirty="0" smtClean="0">
+                          <a:rPr lang="en-US" sz="1600" i="1" noProof="0" smtClean="0">
                             <a:latin typeface="Cambria Math" panose="02040503050406030204" pitchFamily="18" charset="0"/>
                             <a:cs typeface="Segoe UI" panose="020B0502040204020203" pitchFamily="34" charset="0"/>
                           </a:rPr>
@@ -11992,7 +11754,7 @@
                       </m:num>
                       <m:den>
                         <m:r>
-                          <a:rPr lang="de-DE" sz="1600" i="1" dirty="0" smtClean="0">
+                          <a:rPr lang="en-US" sz="1600" i="1" noProof="0" smtClean="0">
                             <a:latin typeface="Cambria Math" panose="02040503050406030204" pitchFamily="18" charset="0"/>
                             <a:cs typeface="Segoe UI" panose="020B0502040204020203" pitchFamily="34" charset="0"/>
                           </a:rPr>
@@ -12001,7 +11763,7 @@
                       </m:den>
                     </m:f>
                     <m:r>
-                      <a:rPr lang="de-DE" sz="1600" i="1" dirty="0" smtClean="0">
+                      <a:rPr lang="en-US" sz="1600" i="1" noProof="0" smtClean="0">
                         <a:latin typeface="Cambria Math" panose="02040503050406030204" pitchFamily="18" charset="0"/>
                         <a:cs typeface="Segoe UI" panose="020B0502040204020203" pitchFamily="34" charset="0"/>
                       </a:rPr>
@@ -12010,7 +11772,7 @@
                     <m:f>
                       <m:fPr>
                         <m:ctrlPr>
-                          <a:rPr lang="de-DE" sz="1600" i="1" dirty="0" smtClean="0">
+                          <a:rPr lang="en-US" sz="1600" i="1" noProof="0" smtClean="0">
                             <a:latin typeface="Cambria Math" panose="02040503050406030204" pitchFamily="18" charset="0"/>
                             <a:cs typeface="Segoe UI" panose="020B0502040204020203" pitchFamily="34" charset="0"/>
                           </a:rPr>
@@ -12018,7 +11780,7 @@
                       </m:fPr>
                       <m:num>
                         <m:r>
-                          <a:rPr lang="de-DE" sz="1600" i="1" dirty="0" smtClean="0">
+                          <a:rPr lang="en-US" sz="1600" i="1" noProof="0" smtClean="0">
                             <a:latin typeface="Cambria Math" panose="02040503050406030204" pitchFamily="18" charset="0"/>
                             <a:cs typeface="Segoe UI" panose="020B0502040204020203" pitchFamily="34" charset="0"/>
                           </a:rPr>
@@ -12027,14 +11789,14 @@
                       </m:num>
                       <m:den>
                         <m:r>
-                          <a:rPr lang="de-DE" sz="1600" i="1" dirty="0" smtClean="0">
+                          <a:rPr lang="en-US" sz="1600" i="1" noProof="0" smtClean="0">
                             <a:latin typeface="Cambria Math" panose="02040503050406030204" pitchFamily="18" charset="0"/>
                             <a:cs typeface="Segoe UI" panose="020B0502040204020203" pitchFamily="34" charset="0"/>
                           </a:rPr>
                           <m:t>𝑠</m:t>
                         </m:r>
                         <m:r>
-                          <a:rPr lang="de-DE" sz="1600" i="1" dirty="0" smtClean="0">
+                          <a:rPr lang="en-US" sz="1600" i="1" noProof="0" smtClean="0">
                             <a:latin typeface="Cambria Math" panose="02040503050406030204" pitchFamily="18" charset="0"/>
                             <a:cs typeface="Segoe UI" panose="020B0502040204020203" pitchFamily="34" charset="0"/>
                           </a:rPr>
@@ -12043,7 +11805,7 @@
                       </m:den>
                     </m:f>
                     <m:r>
-                      <a:rPr lang="de-DE" sz="1600" i="1" dirty="0" smtClean="0">
+                      <a:rPr lang="en-US" sz="1600" i="1" noProof="0" smtClean="0">
                         <a:latin typeface="Cambria Math" panose="02040503050406030204" pitchFamily="18" charset="0"/>
                         <a:cs typeface="Segoe UI" panose="020B0502040204020203" pitchFamily="34" charset="0"/>
                       </a:rPr>
@@ -12052,7 +11814,7 @@
                     <m:f>
                       <m:fPr>
                         <m:ctrlPr>
-                          <a:rPr lang="de-DE" sz="1600" i="1" dirty="0">
+                          <a:rPr lang="en-US" sz="1600" i="1" noProof="0" smtClean="0">
                             <a:latin typeface="Cambria Math" panose="02040503050406030204" pitchFamily="18" charset="0"/>
                             <a:cs typeface="Segoe UI" panose="020B0502040204020203" pitchFamily="34" charset="0"/>
                           </a:rPr>
@@ -12060,7 +11822,7 @@
                       </m:fPr>
                       <m:num>
                         <m:r>
-                          <a:rPr lang="de-DE" sz="1600" i="1" dirty="0">
+                          <a:rPr lang="en-US" sz="1600" i="1" noProof="0" smtClean="0">
                             <a:latin typeface="Cambria Math" panose="02040503050406030204" pitchFamily="18" charset="0"/>
                             <a:cs typeface="Segoe UI" panose="020B0502040204020203" pitchFamily="34" charset="0"/>
                           </a:rPr>
@@ -12071,7 +11833,7 @@
                         <m:sSup>
                           <m:sSupPr>
                             <m:ctrlPr>
-                              <a:rPr lang="de-DE" sz="1600" i="1" dirty="0">
+                              <a:rPr lang="en-US" sz="1600" i="1" noProof="0" smtClean="0">
                                 <a:latin typeface="Cambria Math" panose="02040503050406030204" pitchFamily="18" charset="0"/>
                                 <a:cs typeface="Segoe UI" panose="020B0502040204020203" pitchFamily="34" charset="0"/>
                               </a:rPr>
@@ -12079,7 +11841,7 @@
                           </m:sSupPr>
                           <m:e>
                             <m:r>
-                              <a:rPr lang="de-DE" sz="1600" i="1" dirty="0">
+                              <a:rPr lang="en-US" sz="1600" i="1" noProof="0" smtClean="0">
                                 <a:latin typeface="Cambria Math" panose="02040503050406030204" pitchFamily="18" charset="0"/>
                                 <a:cs typeface="Segoe UI" panose="020B0502040204020203" pitchFamily="34" charset="0"/>
                               </a:rPr>
@@ -12088,7 +11850,7 @@
                           </m:e>
                           <m:sup>
                             <m:r>
-                              <a:rPr lang="de-DE" sz="1600" i="1" dirty="0">
+                              <a:rPr lang="en-US" sz="1600" i="1" noProof="0" smtClean="0">
                                 <a:latin typeface="Cambria Math" panose="02040503050406030204" pitchFamily="18" charset="0"/>
                                 <a:cs typeface="Segoe UI" panose="020B0502040204020203" pitchFamily="34" charset="0"/>
                               </a:rPr>
@@ -12097,14 +11859,14 @@
                           </m:sup>
                         </m:sSup>
                         <m:r>
-                          <a:rPr lang="de-DE" sz="1600" i="1" dirty="0">
+                          <a:rPr lang="en-US" sz="1600" i="1" noProof="0" smtClean="0">
                             <a:latin typeface="Cambria Math" panose="02040503050406030204" pitchFamily="18" charset="0"/>
                             <a:cs typeface="Segoe UI" panose="020B0502040204020203" pitchFamily="34" charset="0"/>
                           </a:rPr>
                           <m:t>+2</m:t>
                         </m:r>
                         <m:r>
-                          <a:rPr lang="de-DE" sz="1600" i="1" dirty="0">
+                          <a:rPr lang="en-US" sz="1600" i="1" noProof="0" smtClean="0">
                             <a:latin typeface="Cambria Math" panose="02040503050406030204" pitchFamily="18" charset="0"/>
                             <a:cs typeface="Segoe UI" panose="020B0502040204020203" pitchFamily="34" charset="0"/>
                           </a:rPr>
@@ -12114,7 +11876,7 @@
                     </m:f>
                   </m:oMath>
                 </a14:m>
-                <a:endParaRPr lang="de-DE" sz="1600" dirty="0">
+                <a:endParaRPr lang="en-US" sz="1600" noProof="0" dirty="0">
                   <a:latin typeface="Segoe UI" panose="020B0502040204020203" pitchFamily="34" charset="0"/>
                   <a:cs typeface="Segoe UI" panose="020B0502040204020203" pitchFamily="34" charset="0"/>
                 </a:endParaRPr>
@@ -12122,7 +11884,7 @@
             </p:txBody>
           </p:sp>
         </mc:Choice>
-        <mc:Fallback xmlns="">
+        <mc:Fallback>
           <p:sp>
             <p:nvSpPr>
               <p:cNvPr id="32" name="Textfeld 31">
@@ -12148,7 +11910,7 @@
               <a:blipFill>
                 <a:blip r:embed="rId11"/>
                 <a:stretch>
-                  <a:fillRect l="-909" r="-909" b="-5556"/>
+                  <a:fillRect l="-909" b="-5556"/>
                 </a:stretch>
               </a:blipFill>
             </p:spPr>
@@ -12167,8 +11929,8 @@
           </p:sp>
         </mc:Fallback>
       </mc:AlternateContent>
-      <mc:AlternateContent xmlns:mc="http://schemas.openxmlformats.org/markup-compatibility/2006" xmlns:a14="http://schemas.microsoft.com/office/drawing/2010/main">
-        <mc:Choice Requires="a14">
+      <mc:AlternateContent xmlns:mc="http://schemas.openxmlformats.org/markup-compatibility/2006">
+        <mc:Choice xmlns:a14="http://schemas.microsoft.com/office/drawing/2010/main" Requires="a14">
           <p:sp>
             <p:nvSpPr>
               <p:cNvPr id="34" name="Textfeld 33">
@@ -12207,7 +11969,7 @@
                       <m:sSub>
                         <m:sSubPr>
                           <m:ctrlPr>
-                            <a:rPr lang="de-DE" sz="1600" i="1" dirty="0">
+                            <a:rPr lang="en-US" sz="1600" i="1" noProof="0" smtClean="0">
                               <a:latin typeface="Cambria Math" panose="02040503050406030204" pitchFamily="18" charset="0"/>
                               <a:cs typeface="Segoe UI" panose="020B0502040204020203" pitchFamily="34" charset="0"/>
                             </a:rPr>
@@ -12215,7 +11977,7 @@
                         </m:sSubPr>
                         <m:e>
                           <m:r>
-                            <a:rPr lang="de-DE" sz="1600" i="1" dirty="0">
+                            <a:rPr lang="en-US" sz="1600" i="1" noProof="0" smtClean="0">
                               <a:latin typeface="Cambria Math" panose="02040503050406030204" pitchFamily="18" charset="0"/>
                               <a:cs typeface="Segoe UI" panose="020B0502040204020203" pitchFamily="34" charset="0"/>
                             </a:rPr>
@@ -12224,7 +11986,7 @@
                         </m:e>
                         <m:sub>
                           <m:r>
-                            <a:rPr lang="de-DE" sz="1600" i="1" dirty="0" err="1">
+                            <a:rPr lang="en-US" sz="1600" i="1" noProof="0" smtClean="0">
                               <a:latin typeface="Cambria Math" panose="02040503050406030204" pitchFamily="18" charset="0"/>
                               <a:cs typeface="Segoe UI" panose="020B0502040204020203" pitchFamily="34" charset="0"/>
                             </a:rPr>
@@ -12233,14 +11995,14 @@
                         </m:sub>
                       </m:sSub>
                       <m:r>
-                        <a:rPr lang="de-DE" sz="1600" i="1" dirty="0">
+                        <a:rPr lang="en-US" sz="1600" i="1" noProof="0" smtClean="0">
                           <a:latin typeface="Cambria Math" panose="02040503050406030204" pitchFamily="18" charset="0"/>
                           <a:cs typeface="Segoe UI" panose="020B0502040204020203" pitchFamily="34" charset="0"/>
                         </a:rPr>
                         <m:t>=</m:t>
                       </m:r>
                       <m:r>
-                        <a:rPr lang="de-DE" sz="1600" i="1" dirty="0">
+                        <a:rPr lang="en-US" sz="1600" i="1" noProof="0" smtClean="0">
                           <a:latin typeface="Cambria Math" panose="02040503050406030204" pitchFamily="18" charset="0"/>
                           <a:cs typeface="Segoe UI" panose="020B0502040204020203" pitchFamily="34" charset="0"/>
                         </a:rPr>
@@ -12249,7 +12011,7 @@
                       <m:d>
                         <m:dPr>
                           <m:ctrlPr>
-                            <a:rPr lang="de-DE" sz="1600" i="1" dirty="0">
+                            <a:rPr lang="en-US" sz="1600" i="1" noProof="0" smtClean="0">
                               <a:latin typeface="Cambria Math" panose="02040503050406030204" pitchFamily="18" charset="0"/>
                               <a:cs typeface="Segoe UI" panose="020B0502040204020203" pitchFamily="34" charset="0"/>
                             </a:rPr>
@@ -12257,7 +12019,7 @@
                         </m:dPr>
                         <m:e>
                           <m:r>
-                            <a:rPr lang="de-DE" sz="1600" i="1" dirty="0">
+                            <a:rPr lang="en-US" sz="1600" i="1" noProof="0" smtClean="0">
                               <a:latin typeface="Cambria Math" panose="02040503050406030204" pitchFamily="18" charset="0"/>
                               <a:cs typeface="Segoe UI" panose="020B0502040204020203" pitchFamily="34" charset="0"/>
                             </a:rPr>
@@ -12266,7 +12028,7 @@
                         </m:e>
                       </m:d>
                       <m:r>
-                        <a:rPr lang="de-DE" sz="1600" i="1" dirty="0">
+                        <a:rPr lang="en-US" sz="1600" i="1" noProof="0" smtClean="0">
                           <a:latin typeface="Cambria Math" panose="02040503050406030204" pitchFamily="18" charset="0"/>
                           <a:cs typeface="Segoe UI" panose="020B0502040204020203" pitchFamily="34" charset="0"/>
                         </a:rPr>
@@ -12275,7 +12037,7 @@
                       <m:f>
                         <m:fPr>
                           <m:ctrlPr>
-                            <a:rPr lang="de-DE" sz="1600" i="1" dirty="0">
+                            <a:rPr lang="en-US" sz="1600" i="1" noProof="0" smtClean="0">
                               <a:latin typeface="Cambria Math" panose="02040503050406030204" pitchFamily="18" charset="0"/>
                               <a:cs typeface="Segoe UI" panose="020B0502040204020203" pitchFamily="34" charset="0"/>
                             </a:rPr>
@@ -12283,7 +12045,7 @@
                         </m:fPr>
                         <m:num>
                           <m:r>
-                            <a:rPr lang="de-DE" sz="1600" i="1" dirty="0">
+                            <a:rPr lang="en-US" sz="1600" i="1" noProof="0" smtClean="0">
                               <a:latin typeface="Cambria Math" panose="02040503050406030204" pitchFamily="18" charset="0"/>
                               <a:cs typeface="Segoe UI" panose="020B0502040204020203" pitchFamily="34" charset="0"/>
                             </a:rPr>
@@ -12292,14 +12054,14 @@
                         </m:num>
                         <m:den>
                           <m:r>
-                            <a:rPr lang="de-DE" sz="1600" i="1" dirty="0">
+                            <a:rPr lang="en-US" sz="1600" i="1" noProof="0" smtClean="0">
                               <a:latin typeface="Cambria Math" panose="02040503050406030204" pitchFamily="18" charset="0"/>
                               <a:cs typeface="Segoe UI" panose="020B0502040204020203" pitchFamily="34" charset="0"/>
                             </a:rPr>
                             <m:t>1+</m:t>
                           </m:r>
                           <m:r>
-                            <a:rPr lang="de-DE" sz="1600" i="1" dirty="0">
+                            <a:rPr lang="en-US" sz="1600" i="1" noProof="0" smtClean="0">
                               <a:latin typeface="Cambria Math" panose="02040503050406030204" pitchFamily="18" charset="0"/>
                               <a:cs typeface="Segoe UI" panose="020B0502040204020203" pitchFamily="34" charset="0"/>
                             </a:rPr>
@@ -12308,7 +12070,7 @@
                           <m:d>
                             <m:dPr>
                               <m:ctrlPr>
-                                <a:rPr lang="de-DE" sz="1600" i="1" dirty="0">
+                                <a:rPr lang="en-US" sz="1600" i="1" noProof="0" smtClean="0">
                                   <a:latin typeface="Cambria Math" panose="02040503050406030204" pitchFamily="18" charset="0"/>
                                   <a:cs typeface="Segoe UI" panose="020B0502040204020203" pitchFamily="34" charset="0"/>
                                 </a:rPr>
@@ -12316,7 +12078,7 @@
                             </m:dPr>
                             <m:e>
                               <m:r>
-                                <a:rPr lang="de-DE" sz="1600" i="1" dirty="0">
+                                <a:rPr lang="en-US" sz="1600" i="1" noProof="0" smtClean="0">
                                   <a:latin typeface="Cambria Math" panose="02040503050406030204" pitchFamily="18" charset="0"/>
                                   <a:cs typeface="Segoe UI" panose="020B0502040204020203" pitchFamily="34" charset="0"/>
                                 </a:rPr>
@@ -12327,7 +12089,7 @@
                         </m:den>
                       </m:f>
                       <m:r>
-                        <a:rPr lang="de-DE" sz="1600" i="1" dirty="0">
+                        <a:rPr lang="en-US" sz="1600" i="1" noProof="0" smtClean="0">
                           <a:latin typeface="Cambria Math" panose="02040503050406030204" pitchFamily="18" charset="0"/>
                           <a:cs typeface="Segoe UI" panose="020B0502040204020203" pitchFamily="34" charset="0"/>
                         </a:rPr>
@@ -12336,7 +12098,7 @@
                       <m:f>
                         <m:fPr>
                           <m:ctrlPr>
-                            <a:rPr lang="de-DE" sz="1600" i="1" dirty="0">
+                            <a:rPr lang="en-US" sz="1600" i="1" noProof="0" smtClean="0">
                               <a:latin typeface="Cambria Math" panose="02040503050406030204" pitchFamily="18" charset="0"/>
                               <a:cs typeface="Segoe UI" panose="020B0502040204020203" pitchFamily="34" charset="0"/>
                             </a:rPr>
@@ -12344,7 +12106,7 @@
                         </m:fPr>
                         <m:num>
                           <m:r>
-                            <a:rPr lang="de-DE" sz="1600" i="1" dirty="0">
+                            <a:rPr lang="en-US" sz="1600" i="1" noProof="0" smtClean="0">
                               <a:latin typeface="Cambria Math" panose="02040503050406030204" pitchFamily="18" charset="0"/>
                               <a:cs typeface="Segoe UI" panose="020B0502040204020203" pitchFamily="34" charset="0"/>
                             </a:rPr>
@@ -12353,7 +12115,7 @@
                         </m:num>
                         <m:den>
                           <m:r>
-                            <a:rPr lang="de-DE" sz="1600" i="1" dirty="0">
+                            <a:rPr lang="en-US" sz="1600" i="1" noProof="0" smtClean="0">
                               <a:latin typeface="Cambria Math" panose="02040503050406030204" pitchFamily="18" charset="0"/>
                               <a:cs typeface="Segoe UI" panose="020B0502040204020203" pitchFamily="34" charset="0"/>
                             </a:rPr>
@@ -12363,7 +12125,7 @@
                             <m:rPr>
                               <m:lit/>
                             </m:rPr>
-                            <a:rPr lang="de-DE" sz="1600" i="1" dirty="0">
+                            <a:rPr lang="en-US" sz="1600" i="1" noProof="0" smtClean="0">
                               <a:latin typeface="Cambria Math" panose="02040503050406030204" pitchFamily="18" charset="0"/>
                               <a:cs typeface="Segoe UI" panose="020B0502040204020203" pitchFamily="34" charset="0"/>
                             </a:rPr>
@@ -12373,7 +12135,7 @@
                             <m:rPr>
                               <m:lit/>
                             </m:rPr>
-                            <a:rPr lang="de-CH" sz="1600" b="0" i="1" dirty="0" smtClean="0">
+                            <a:rPr lang="en-US" sz="1600" b="0" i="1" noProof="0" smtClean="0">
                               <a:latin typeface="Cambria Math" panose="02040503050406030204" pitchFamily="18" charset="0"/>
                               <a:cs typeface="Segoe UI" panose="020B0502040204020203" pitchFamily="34" charset="0"/>
                             </a:rPr>
@@ -12382,14 +12144,14 @@
                         </m:den>
                       </m:f>
                       <m:r>
-                        <a:rPr lang="de-DE" sz="1600" i="1" dirty="0">
+                        <a:rPr lang="en-US" sz="1600" i="1" noProof="0" smtClean="0">
                           <a:latin typeface="Cambria Math" panose="02040503050406030204" pitchFamily="18" charset="0"/>
                           <a:cs typeface="Segoe UI" panose="020B0502040204020203" pitchFamily="34" charset="0"/>
                         </a:rPr>
                         <m:t>=</m:t>
                       </m:r>
                       <m:r>
-                        <a:rPr lang="de-CH" sz="1600" b="0" i="1" dirty="0" smtClean="0">
+                        <a:rPr lang="en-US" sz="1600" b="0" i="1" noProof="0" smtClean="0">
                           <a:latin typeface="Cambria Math" panose="02040503050406030204" pitchFamily="18" charset="0"/>
                           <a:cs typeface="Segoe UI" panose="020B0502040204020203" pitchFamily="34" charset="0"/>
                         </a:rPr>
@@ -12398,12 +12160,12 @@
                     </m:oMath>
                   </m:oMathPara>
                 </a14:m>
-                <a:endParaRPr lang="de-DE" sz="1600" dirty="0"/>
+                <a:endParaRPr lang="en-US" sz="1600" noProof="0" dirty="0"/>
               </a:p>
             </p:txBody>
           </p:sp>
         </mc:Choice>
-        <mc:Fallback xmlns="">
+        <mc:Fallback>
           <p:sp>
             <p:nvSpPr>
               <p:cNvPr id="34" name="Textfeld 33">
@@ -12477,314 +12239,14 @@
           <a:lstStyle/>
           <a:p>
             <a:r>
-              <a:rPr lang="de-DE" sz="1600" dirty="0">
+              <a:rPr lang="en-US" sz="1600" noProof="0" dirty="0">
                 <a:solidFill>
                   <a:schemeClr val="accent5"/>
                 </a:solidFill>
                 <a:latin typeface="Segoe UI" panose="020B0502040204020203" pitchFamily="34" charset="0"/>
                 <a:cs typeface="Segoe UI" panose="020B0502040204020203" pitchFamily="34" charset="0"/>
               </a:rPr>
-              <a:t>Great, </a:t>
-            </a:r>
-            <a:r>
-              <a:rPr lang="de-DE" sz="1600" dirty="0" err="1">
-                <a:solidFill>
-                  <a:schemeClr val="accent5"/>
-                </a:solidFill>
-                <a:latin typeface="Segoe UI" panose="020B0502040204020203" pitchFamily="34" charset="0"/>
-                <a:cs typeface="Segoe UI" panose="020B0502040204020203" pitchFamily="34" charset="0"/>
-              </a:rPr>
-              <a:t>now</a:t>
-            </a:r>
-            <a:r>
-              <a:rPr lang="de-DE" sz="1600" dirty="0">
-                <a:solidFill>
-                  <a:schemeClr val="accent5"/>
-                </a:solidFill>
-                <a:latin typeface="Segoe UI" panose="020B0502040204020203" pitchFamily="34" charset="0"/>
-                <a:cs typeface="Segoe UI" panose="020B0502040204020203" pitchFamily="34" charset="0"/>
-              </a:rPr>
-              <a:t> </a:t>
-            </a:r>
-            <a:r>
-              <a:rPr lang="de-DE" sz="1600" dirty="0" err="1">
-                <a:solidFill>
-                  <a:schemeClr val="accent5"/>
-                </a:solidFill>
-                <a:latin typeface="Segoe UI" panose="020B0502040204020203" pitchFamily="34" charset="0"/>
-                <a:cs typeface="Segoe UI" panose="020B0502040204020203" pitchFamily="34" charset="0"/>
-              </a:rPr>
-              <a:t>we</a:t>
-            </a:r>
-            <a:r>
-              <a:rPr lang="de-DE" sz="1600" dirty="0">
-                <a:solidFill>
-                  <a:schemeClr val="accent5"/>
-                </a:solidFill>
-                <a:latin typeface="Segoe UI" panose="020B0502040204020203" pitchFamily="34" charset="0"/>
-                <a:cs typeface="Segoe UI" panose="020B0502040204020203" pitchFamily="34" charset="0"/>
-              </a:rPr>
-              <a:t> </a:t>
-            </a:r>
-            <a:r>
-              <a:rPr lang="de-DE" sz="1600" dirty="0" err="1">
-                <a:solidFill>
-                  <a:schemeClr val="accent5"/>
-                </a:solidFill>
-                <a:latin typeface="Segoe UI" panose="020B0502040204020203" pitchFamily="34" charset="0"/>
-                <a:cs typeface="Segoe UI" panose="020B0502040204020203" pitchFamily="34" charset="0"/>
-              </a:rPr>
-              <a:t>know</a:t>
-            </a:r>
-            <a:r>
-              <a:rPr lang="de-DE" sz="1600" dirty="0">
-                <a:solidFill>
-                  <a:schemeClr val="accent5"/>
-                </a:solidFill>
-                <a:latin typeface="Segoe UI" panose="020B0502040204020203" pitchFamily="34" charset="0"/>
-                <a:cs typeface="Segoe UI" panose="020B0502040204020203" pitchFamily="34" charset="0"/>
-              </a:rPr>
-              <a:t> </a:t>
-            </a:r>
-            <a:r>
-              <a:rPr lang="de-DE" sz="1600" dirty="0" err="1">
-                <a:solidFill>
-                  <a:schemeClr val="accent5"/>
-                </a:solidFill>
-                <a:latin typeface="Segoe UI" panose="020B0502040204020203" pitchFamily="34" charset="0"/>
-                <a:cs typeface="Segoe UI" panose="020B0502040204020203" pitchFamily="34" charset="0"/>
-              </a:rPr>
-              <a:t>to</a:t>
-            </a:r>
-            <a:r>
-              <a:rPr lang="de-DE" sz="1600" dirty="0">
-                <a:solidFill>
-                  <a:schemeClr val="accent5"/>
-                </a:solidFill>
-                <a:latin typeface="Segoe UI" panose="020B0502040204020203" pitchFamily="34" charset="0"/>
-                <a:cs typeface="Segoe UI" panose="020B0502040204020203" pitchFamily="34" charset="0"/>
-              </a:rPr>
-              <a:t> </a:t>
-            </a:r>
-            <a:r>
-              <a:rPr lang="de-DE" sz="1600" dirty="0" err="1">
-                <a:solidFill>
-                  <a:schemeClr val="accent5"/>
-                </a:solidFill>
-                <a:latin typeface="Segoe UI" panose="020B0502040204020203" pitchFamily="34" charset="0"/>
-                <a:cs typeface="Segoe UI" panose="020B0502040204020203" pitchFamily="34" charset="0"/>
-              </a:rPr>
-              <a:t>make</a:t>
-            </a:r>
-            <a:r>
-              <a:rPr lang="de-DE" sz="1600" dirty="0">
-                <a:solidFill>
-                  <a:schemeClr val="accent5"/>
-                </a:solidFill>
-                <a:latin typeface="Segoe UI" panose="020B0502040204020203" pitchFamily="34" charset="0"/>
-                <a:cs typeface="Segoe UI" panose="020B0502040204020203" pitchFamily="34" charset="0"/>
-              </a:rPr>
-              <a:t> </a:t>
-            </a:r>
-            <a:r>
-              <a:rPr lang="de-DE" sz="1600" dirty="0" err="1">
-                <a:solidFill>
-                  <a:schemeClr val="accent5"/>
-                </a:solidFill>
-                <a:latin typeface="Segoe UI" panose="020B0502040204020203" pitchFamily="34" charset="0"/>
-                <a:cs typeface="Segoe UI" panose="020B0502040204020203" pitchFamily="34" charset="0"/>
-              </a:rPr>
-              <a:t>the</a:t>
-            </a:r>
-            <a:r>
-              <a:rPr lang="de-DE" sz="1600" dirty="0">
-                <a:solidFill>
-                  <a:schemeClr val="accent5"/>
-                </a:solidFill>
-                <a:latin typeface="Segoe UI" panose="020B0502040204020203" pitchFamily="34" charset="0"/>
-                <a:cs typeface="Segoe UI" panose="020B0502040204020203" pitchFamily="34" charset="0"/>
-              </a:rPr>
-              <a:t> </a:t>
-            </a:r>
-            <a:r>
-              <a:rPr lang="de-DE" sz="1600" dirty="0" err="1">
-                <a:solidFill>
-                  <a:schemeClr val="accent5"/>
-                </a:solidFill>
-                <a:latin typeface="Segoe UI" panose="020B0502040204020203" pitchFamily="34" charset="0"/>
-                <a:cs typeface="Segoe UI" panose="020B0502040204020203" pitchFamily="34" charset="0"/>
-              </a:rPr>
-              <a:t>output</a:t>
-            </a:r>
-            <a:r>
-              <a:rPr lang="de-DE" sz="1600" dirty="0">
-                <a:solidFill>
-                  <a:schemeClr val="accent5"/>
-                </a:solidFill>
-                <a:latin typeface="Segoe UI" panose="020B0502040204020203" pitchFamily="34" charset="0"/>
-                <a:cs typeface="Segoe UI" panose="020B0502040204020203" pitchFamily="34" charset="0"/>
-              </a:rPr>
-              <a:t> </a:t>
-            </a:r>
-            <a:r>
-              <a:rPr lang="de-DE" sz="1600" dirty="0" err="1">
-                <a:solidFill>
-                  <a:schemeClr val="accent5"/>
-                </a:solidFill>
-                <a:latin typeface="Segoe UI" panose="020B0502040204020203" pitchFamily="34" charset="0"/>
-                <a:cs typeface="Segoe UI" panose="020B0502040204020203" pitchFamily="34" charset="0"/>
-              </a:rPr>
-              <a:t>actually</a:t>
-            </a:r>
-            <a:r>
-              <a:rPr lang="de-DE" sz="1600" dirty="0">
-                <a:solidFill>
-                  <a:schemeClr val="accent5"/>
-                </a:solidFill>
-                <a:latin typeface="Segoe UI" panose="020B0502040204020203" pitchFamily="34" charset="0"/>
-                <a:cs typeface="Segoe UI" panose="020B0502040204020203" pitchFamily="34" charset="0"/>
-              </a:rPr>
-              <a:t> </a:t>
-            </a:r>
-            <a:r>
-              <a:rPr lang="de-DE" sz="1600" dirty="0" err="1">
-                <a:solidFill>
-                  <a:schemeClr val="accent5"/>
-                </a:solidFill>
-                <a:latin typeface="Segoe UI" panose="020B0502040204020203" pitchFamily="34" charset="0"/>
-                <a:cs typeface="Segoe UI" panose="020B0502040204020203" pitchFamily="34" charset="0"/>
-              </a:rPr>
-              <a:t>go</a:t>
-            </a:r>
-            <a:r>
-              <a:rPr lang="de-DE" sz="1600" dirty="0">
-                <a:solidFill>
-                  <a:schemeClr val="accent5"/>
-                </a:solidFill>
-                <a:latin typeface="Segoe UI" panose="020B0502040204020203" pitchFamily="34" charset="0"/>
-                <a:cs typeface="Segoe UI" panose="020B0502040204020203" pitchFamily="34" charset="0"/>
-              </a:rPr>
-              <a:t> </a:t>
-            </a:r>
-            <a:r>
-              <a:rPr lang="de-DE" sz="1600" dirty="0" err="1">
-                <a:solidFill>
-                  <a:schemeClr val="accent5"/>
-                </a:solidFill>
-                <a:latin typeface="Segoe UI" panose="020B0502040204020203" pitchFamily="34" charset="0"/>
-                <a:cs typeface="Segoe UI" panose="020B0502040204020203" pitchFamily="34" charset="0"/>
-              </a:rPr>
-              <a:t>where</a:t>
-            </a:r>
-            <a:r>
-              <a:rPr lang="de-DE" sz="1600" dirty="0">
-                <a:solidFill>
-                  <a:schemeClr val="accent5"/>
-                </a:solidFill>
-                <a:latin typeface="Segoe UI" panose="020B0502040204020203" pitchFamily="34" charset="0"/>
-                <a:cs typeface="Segoe UI" panose="020B0502040204020203" pitchFamily="34" charset="0"/>
-              </a:rPr>
-              <a:t> </a:t>
-            </a:r>
-            <a:r>
-              <a:rPr lang="de-DE" sz="1600" dirty="0" err="1">
-                <a:solidFill>
-                  <a:schemeClr val="accent5"/>
-                </a:solidFill>
-                <a:latin typeface="Segoe UI" panose="020B0502040204020203" pitchFamily="34" charset="0"/>
-                <a:cs typeface="Segoe UI" panose="020B0502040204020203" pitchFamily="34" charset="0"/>
-              </a:rPr>
-              <a:t>we</a:t>
-            </a:r>
-            <a:r>
-              <a:rPr lang="de-DE" sz="1600" dirty="0">
-                <a:solidFill>
-                  <a:schemeClr val="accent5"/>
-                </a:solidFill>
-                <a:latin typeface="Segoe UI" panose="020B0502040204020203" pitchFamily="34" charset="0"/>
-                <a:cs typeface="Segoe UI" panose="020B0502040204020203" pitchFamily="34" charset="0"/>
-              </a:rPr>
-              <a:t> </a:t>
-            </a:r>
-            <a:r>
-              <a:rPr lang="de-DE" sz="1600" dirty="0" err="1">
-                <a:solidFill>
-                  <a:schemeClr val="accent5"/>
-                </a:solidFill>
-                <a:latin typeface="Segoe UI" panose="020B0502040204020203" pitchFamily="34" charset="0"/>
-                <a:cs typeface="Segoe UI" panose="020B0502040204020203" pitchFamily="34" charset="0"/>
-              </a:rPr>
-              <a:t>want</a:t>
-            </a:r>
-            <a:r>
-              <a:rPr lang="de-DE" sz="1600" dirty="0">
-                <a:solidFill>
-                  <a:schemeClr val="accent5"/>
-                </a:solidFill>
-                <a:latin typeface="Segoe UI" panose="020B0502040204020203" pitchFamily="34" charset="0"/>
-                <a:cs typeface="Segoe UI" panose="020B0502040204020203" pitchFamily="34" charset="0"/>
-              </a:rPr>
-              <a:t> </a:t>
-            </a:r>
-            <a:r>
-              <a:rPr lang="de-DE" sz="1600" dirty="0" err="1">
-                <a:solidFill>
-                  <a:schemeClr val="accent5"/>
-                </a:solidFill>
-                <a:latin typeface="Segoe UI" panose="020B0502040204020203" pitchFamily="34" charset="0"/>
-                <a:cs typeface="Segoe UI" panose="020B0502040204020203" pitchFamily="34" charset="0"/>
-              </a:rPr>
-              <a:t>it</a:t>
-            </a:r>
-            <a:r>
-              <a:rPr lang="de-DE" sz="1600" dirty="0">
-                <a:solidFill>
-                  <a:schemeClr val="accent5"/>
-                </a:solidFill>
-                <a:latin typeface="Segoe UI" panose="020B0502040204020203" pitchFamily="34" charset="0"/>
-                <a:cs typeface="Segoe UI" panose="020B0502040204020203" pitchFamily="34" charset="0"/>
-              </a:rPr>
-              <a:t> </a:t>
-            </a:r>
-            <a:r>
-              <a:rPr lang="de-DE" sz="1600" dirty="0" err="1">
-                <a:solidFill>
-                  <a:schemeClr val="accent5"/>
-                </a:solidFill>
-                <a:latin typeface="Segoe UI" panose="020B0502040204020203" pitchFamily="34" charset="0"/>
-                <a:cs typeface="Segoe UI" panose="020B0502040204020203" pitchFamily="34" charset="0"/>
-              </a:rPr>
-              <a:t>to</a:t>
-            </a:r>
-            <a:r>
-              <a:rPr lang="de-DE" sz="1600" dirty="0">
-                <a:solidFill>
-                  <a:schemeClr val="accent5"/>
-                </a:solidFill>
-                <a:latin typeface="Segoe UI" panose="020B0502040204020203" pitchFamily="34" charset="0"/>
-                <a:cs typeface="Segoe UI" panose="020B0502040204020203" pitchFamily="34" charset="0"/>
-              </a:rPr>
-              <a:t> </a:t>
-            </a:r>
-            <a:r>
-              <a:rPr lang="de-DE" sz="1600" dirty="0" err="1">
-                <a:solidFill>
-                  <a:schemeClr val="accent5"/>
-                </a:solidFill>
-                <a:latin typeface="Segoe UI" panose="020B0502040204020203" pitchFamily="34" charset="0"/>
-                <a:cs typeface="Segoe UI" panose="020B0502040204020203" pitchFamily="34" charset="0"/>
-              </a:rPr>
-              <a:t>go</a:t>
-            </a:r>
-            <a:r>
-              <a:rPr lang="de-DE" sz="1600" dirty="0">
-                <a:solidFill>
-                  <a:schemeClr val="accent5"/>
-                </a:solidFill>
-                <a:latin typeface="Segoe UI" panose="020B0502040204020203" pitchFamily="34" charset="0"/>
-                <a:cs typeface="Segoe UI" panose="020B0502040204020203" pitchFamily="34" charset="0"/>
-              </a:rPr>
-              <a:t>!</a:t>
+              <a:t>Great, now we know to make the output actually go where we want it to go!</a:t>
             </a:r>
           </a:p>
         </p:txBody>
@@ -12809,8 +12271,8 @@
             <a:chExt cx="1667129" cy="606543"/>
           </a:xfrm>
         </p:grpSpPr>
-        <mc:AlternateContent xmlns:mc="http://schemas.openxmlformats.org/markup-compatibility/2006" xmlns:a14="http://schemas.microsoft.com/office/drawing/2010/main">
-          <mc:Choice Requires="a14">
+        <mc:AlternateContent xmlns:mc="http://schemas.openxmlformats.org/markup-compatibility/2006">
+          <mc:Choice xmlns:a14="http://schemas.microsoft.com/office/drawing/2010/main" Requires="a14">
             <p:sp>
               <p:nvSpPr>
                 <p:cNvPr id="36" name="Textfeld 35">
@@ -12844,14 +12306,14 @@
                       <m:sSub>
                         <m:sSubPr>
                           <m:ctrlPr>
-                            <a:rPr lang="en-US" sz="1800" i="1">
+                            <a:rPr lang="en-US" sz="1800" i="1" noProof="0">
                               <a:latin typeface="Cambria Math" panose="02040503050406030204" pitchFamily="18" charset="0"/>
                             </a:rPr>
                           </m:ctrlPr>
                         </m:sSubPr>
                         <m:e>
                           <m:r>
-                            <a:rPr lang="en-US" sz="1800" i="1">
+                            <a:rPr lang="en-US" sz="1800" i="1" noProof="0">
                               <a:latin typeface="Cambria Math" panose="02040503050406030204" pitchFamily="18" charset="0"/>
                             </a:rPr>
                             <m:t>𝑒</m:t>
@@ -12859,7 +12321,7 @@
                         </m:e>
                         <m:sub>
                           <m:r>
-                            <a:rPr lang="en-US" sz="1800" i="1">
+                            <a:rPr lang="en-US" sz="1800" i="1" noProof="0">
                               <a:latin typeface="Cambria Math" panose="02040503050406030204" pitchFamily="18" charset="0"/>
                             </a:rPr>
                             <m:t>𝑠𝑠</m:t>
@@ -12867,7 +12329,7 @@
                         </m:sub>
                       </m:sSub>
                       <m:r>
-                        <a:rPr lang="en-US" sz="1800" i="1">
+                        <a:rPr lang="en-US" sz="1800" i="1" noProof="0">
                           <a:latin typeface="Cambria Math" panose="02040503050406030204" pitchFamily="18" charset="0"/>
                         </a:rPr>
                         <m:t>=</m:t>
@@ -12875,7 +12337,7 @@
                     </m:oMath>
                   </a14:m>
                   <a:r>
-                    <a:rPr lang="en-US" sz="1800" dirty="0"/>
+                    <a:rPr lang="en-US" sz="1800" noProof="0" dirty="0"/>
                     <a:t> </a:t>
                   </a:r>
                   <a14:m>
@@ -12883,14 +12345,14 @@
                       <m:f>
                         <m:fPr>
                           <m:ctrlPr>
-                            <a:rPr lang="en-US" sz="1800" i="1">
+                            <a:rPr lang="en-US" sz="1800" i="1" noProof="0">
                               <a:latin typeface="Cambria Math" panose="02040503050406030204" pitchFamily="18" charset="0"/>
                             </a:rPr>
                           </m:ctrlPr>
                         </m:fPr>
                         <m:num>
                           <m:r>
-                            <a:rPr lang="en-US" sz="1800" i="1">
+                            <a:rPr lang="en-US" sz="1800" i="1" noProof="0">
                               <a:latin typeface="Cambria Math" panose="02040503050406030204" pitchFamily="18" charset="0"/>
                             </a:rPr>
                             <m:t>1</m:t>
@@ -12898,13 +12360,13 @@
                         </m:num>
                         <m:den>
                           <m:r>
-                            <a:rPr lang="en-US" sz="1800" i="1" smtClean="0">
+                            <a:rPr lang="en-US" sz="1800" i="1" noProof="0" smtClean="0">
                               <a:latin typeface="Cambria Math" panose="02040503050406030204" pitchFamily="18" charset="0"/>
                             </a:rPr>
                             <m:t>1+</m:t>
                           </m:r>
                           <m:r>
-                            <a:rPr lang="de-CH" sz="1800" b="0" i="1" smtClean="0">
+                            <a:rPr lang="en-US" sz="1800" b="0" i="1" noProof="0" smtClean="0">
                               <a:latin typeface="Cambria Math" panose="02040503050406030204" pitchFamily="18" charset="0"/>
                             </a:rPr>
                             <m:t>𝐿</m:t>
@@ -12912,14 +12374,14 @@
                           <m:d>
                             <m:dPr>
                               <m:ctrlPr>
-                                <a:rPr lang="en-US" sz="1800" i="1">
+                                <a:rPr lang="en-US" sz="1800" i="1" noProof="0">
                                   <a:latin typeface="Cambria Math" panose="02040503050406030204" pitchFamily="18" charset="0"/>
                                 </a:rPr>
                               </m:ctrlPr>
                             </m:dPr>
                             <m:e>
                               <m:r>
-                                <a:rPr lang="en-US" sz="1800" i="1">
+                                <a:rPr lang="en-US" sz="1800" i="1" noProof="0">
                                   <a:latin typeface="Cambria Math" panose="02040503050406030204" pitchFamily="18" charset="0"/>
                                 </a:rPr>
                                 <m:t>0</m:t>
@@ -12930,12 +12392,12 @@
                       </m:f>
                     </m:oMath>
                   </a14:m>
-                  <a:endParaRPr lang="de-DE" sz="1800" dirty="0"/>
+                  <a:endParaRPr lang="en-US" sz="1800" noProof="0" dirty="0"/>
                 </a:p>
               </p:txBody>
             </p:sp>
           </mc:Choice>
-          <mc:Fallback xmlns="">
+          <mc:Fallback>
             <p:sp>
               <p:nvSpPr>
                 <p:cNvPr id="36" name="Textfeld 35">
@@ -13037,7 +12499,7 @@
                   <a:spcPts val="200"/>
                 </a:spcBef>
               </a:pPr>
-              <a:endParaRPr lang="en-US" noProof="0">
+              <a:endParaRPr lang="en-US" noProof="0" dirty="0">
                 <a:solidFill>
                   <a:schemeClr val="bg2">
                     <a:lumMod val="10000"/>
@@ -13479,8 +12941,8 @@
           </a:p>
         </p:txBody>
       </p:sp>
-      <mc:AlternateContent xmlns:mc="http://schemas.openxmlformats.org/markup-compatibility/2006" xmlns:a14="http://schemas.microsoft.com/office/drawing/2010/main">
-        <mc:Choice Requires="a14">
+      <mc:AlternateContent xmlns:mc="http://schemas.openxmlformats.org/markup-compatibility/2006">
+        <mc:Choice xmlns:a14="http://schemas.microsoft.com/office/drawing/2010/main" Requires="a14">
           <p:sp>
             <p:nvSpPr>
               <p:cNvPr id="8" name="Rectangle: Rounded Corners 17">
@@ -13542,7 +13004,7 @@
                 <a14:m>
                   <m:oMath xmlns:m="http://schemas.openxmlformats.org/officeDocument/2006/math">
                     <m:r>
-                      <a:rPr lang="en-US" i="1" noProof="0" dirty="0" smtClean="0">
+                      <a:rPr lang="en-US" i="1" noProof="0" smtClean="0">
                         <a:latin typeface="Cambria Math" panose="02040503050406030204" pitchFamily="18" charset="0"/>
                         <a:cs typeface="Segoe UI" panose="020B0502040204020203" pitchFamily="34" charset="0"/>
                       </a:rPr>
@@ -13560,21 +13022,17 @@
               </a:p>
               <a:p>
                 <a:r>
-                  <a:rPr lang="en-US" dirty="0">
+                  <a:rPr lang="en-US" noProof="0" dirty="0">
                     <a:latin typeface="Segoe UI" panose="020B0502040204020203" pitchFamily="34" charset="0"/>
                     <a:cs typeface="Segoe UI" panose="020B0502040204020203" pitchFamily="34" charset="0"/>
                   </a:rPr>
                   <a:t>Type:	number of integrators</a:t>
                 </a:r>
-                <a:endParaRPr lang="en-US" noProof="0" dirty="0">
-                  <a:latin typeface="Segoe UI" panose="020B0502040204020203" pitchFamily="34" charset="0"/>
-                  <a:cs typeface="Segoe UI" panose="020B0502040204020203" pitchFamily="34" charset="0"/>
-                </a:endParaRPr>
               </a:p>
             </p:txBody>
           </p:sp>
         </mc:Choice>
-        <mc:Fallback xmlns="">
+        <mc:Fallback>
           <p:sp>
             <p:nvSpPr>
               <p:cNvPr id="8" name="Rectangle: Rounded Corners 17">
@@ -13881,8 +13339,8 @@
           </a:p>
         </p:txBody>
       </p:sp>
-      <mc:AlternateContent xmlns:mc="http://schemas.openxmlformats.org/markup-compatibility/2006" xmlns:a14="http://schemas.microsoft.com/office/drawing/2010/main">
-        <mc:Choice Requires="a14">
+      <mc:AlternateContent xmlns:mc="http://schemas.openxmlformats.org/markup-compatibility/2006">
+        <mc:Choice xmlns:a14="http://schemas.microsoft.com/office/drawing/2010/main" Requires="a14">
           <p:sp>
             <p:nvSpPr>
               <p:cNvPr id="3" name="Inhaltsplatzhalter 2">
@@ -14168,7 +13626,7 @@
             </p:txBody>
           </p:sp>
         </mc:Choice>
-        <mc:Fallback xmlns="">
+        <mc:Fallback>
           <p:sp>
             <p:nvSpPr>
               <p:cNvPr id="3" name="Inhaltsplatzhalter 2">
@@ -14375,8 +13833,8 @@
           </a:fontRef>
         </p:style>
       </p:cxnSp>
-      <mc:AlternateContent xmlns:mc="http://schemas.openxmlformats.org/markup-compatibility/2006" xmlns:a14="http://schemas.microsoft.com/office/drawing/2010/main">
-        <mc:Choice Requires="a14">
+      <mc:AlternateContent xmlns:mc="http://schemas.openxmlformats.org/markup-compatibility/2006">
+        <mc:Choice xmlns:a14="http://schemas.microsoft.com/office/drawing/2010/main" Requires="a14">
           <p:sp>
             <p:nvSpPr>
               <p:cNvPr id="15" name="Textfeld 14">
@@ -14438,12 +13896,12 @@
                     </m:oMath>
                   </m:oMathPara>
                 </a14:m>
-                <a:endParaRPr/>
+                <a:endParaRPr lang="en-US" noProof="0" dirty="0"/>
               </a:p>
             </p:txBody>
           </p:sp>
         </mc:Choice>
-        <mc:Fallback xmlns="">
+        <mc:Fallback>
           <p:sp>
             <p:nvSpPr>
               <p:cNvPr id="15" name="Textfeld 14">
@@ -14469,7 +13927,7 @@
               <a:blipFill>
                 <a:blip r:embed="rId3"/>
                 <a:stretch>
-                  <a:fillRect t="-3571" r="-10417" b="-21429"/>
+                  <a:fillRect b="-7143"/>
                 </a:stretch>
               </a:blipFill>
             </p:spPr>
@@ -14488,8 +13946,8 @@
           </p:sp>
         </mc:Fallback>
       </mc:AlternateContent>
-      <mc:AlternateContent xmlns:mc="http://schemas.openxmlformats.org/markup-compatibility/2006" xmlns:a14="http://schemas.microsoft.com/office/drawing/2010/main">
-        <mc:Choice Requires="a14">
+      <mc:AlternateContent xmlns:mc="http://schemas.openxmlformats.org/markup-compatibility/2006">
+        <mc:Choice xmlns:a14="http://schemas.microsoft.com/office/drawing/2010/main" Requires="a14">
           <p:sp>
             <p:nvSpPr>
               <p:cNvPr id="16" name="Textfeld 15">
@@ -14539,7 +13997,7 @@
             </p:txBody>
           </p:sp>
         </mc:Choice>
-        <mc:Fallback xmlns="">
+        <mc:Fallback>
           <p:sp>
             <p:nvSpPr>
               <p:cNvPr id="16" name="Textfeld 15">
@@ -14693,8 +14151,8 @@
           </p:style>
         </p:cxnSp>
       </p:grpSp>
-      <mc:AlternateContent xmlns:mc="http://schemas.openxmlformats.org/markup-compatibility/2006" xmlns:a14="http://schemas.microsoft.com/office/drawing/2010/main">
-        <mc:Choice Requires="a14">
+      <mc:AlternateContent xmlns:mc="http://schemas.openxmlformats.org/markup-compatibility/2006">
+        <mc:Choice xmlns:a14="http://schemas.microsoft.com/office/drawing/2010/main" Requires="a14">
           <p:sp>
             <p:nvSpPr>
               <p:cNvPr id="30" name="Textfeld 29">
@@ -14751,7 +14209,7 @@
             </p:txBody>
           </p:sp>
         </mc:Choice>
-        <mc:Fallback xmlns="">
+        <mc:Fallback>
           <p:sp>
             <p:nvSpPr>
               <p:cNvPr id="30" name="Textfeld 29">
@@ -14796,8 +14254,8 @@
           </p:sp>
         </mc:Fallback>
       </mc:AlternateContent>
-      <mc:AlternateContent xmlns:mc="http://schemas.openxmlformats.org/markup-compatibility/2006" xmlns:a14="http://schemas.microsoft.com/office/drawing/2010/main">
-        <mc:Choice Requires="a14">
+      <mc:AlternateContent xmlns:mc="http://schemas.openxmlformats.org/markup-compatibility/2006">
+        <mc:Choice xmlns:a14="http://schemas.microsoft.com/office/drawing/2010/main" Requires="a14">
           <p:sp>
             <p:nvSpPr>
               <p:cNvPr id="31" name="Textfeld 30">
@@ -14845,12 +14303,12 @@
                     </m:oMath>
                   </m:oMathPara>
                 </a14:m>
-                <a:endParaRPr/>
+                <a:endParaRPr lang="en-US" noProof="0" dirty="0"/>
               </a:p>
             </p:txBody>
           </p:sp>
         </mc:Choice>
-        <mc:Fallback xmlns="">
+        <mc:Fallback>
           <p:sp>
             <p:nvSpPr>
               <p:cNvPr id="31" name="Textfeld 30">
@@ -14876,7 +14334,7 @@
               <a:blipFill>
                 <a:blip r:embed="rId6"/>
                 <a:stretch>
-                  <a:fillRect t="-3571" r="-8696" b="-21429"/>
+                  <a:fillRect/>
                 </a:stretch>
               </a:blipFill>
             </p:spPr>
@@ -15069,8 +14527,8 @@
           </a:fontRef>
         </p:style>
       </p:cxnSp>
-      <mc:AlternateContent xmlns:mc="http://schemas.openxmlformats.org/markup-compatibility/2006" xmlns:a14="http://schemas.microsoft.com/office/drawing/2010/main">
-        <mc:Choice Requires="a14">
+      <mc:AlternateContent xmlns:mc="http://schemas.openxmlformats.org/markup-compatibility/2006">
+        <mc:Choice xmlns:a14="http://schemas.microsoft.com/office/drawing/2010/main" Requires="a14">
           <p:sp>
             <p:nvSpPr>
               <p:cNvPr id="39" name="Textfeld 38">
@@ -15143,12 +14601,12 @@
                     </m:oMath>
                   </m:oMathPara>
                 </a14:m>
-                <a:endParaRPr/>
+                <a:endParaRPr lang="en-US" noProof="0" dirty="0"/>
               </a:p>
             </p:txBody>
           </p:sp>
         </mc:Choice>
-        <mc:Fallback xmlns="">
+        <mc:Fallback>
           <p:sp>
             <p:nvSpPr>
               <p:cNvPr id="39" name="Textfeld 38">
@@ -15174,7 +14632,7 @@
               <a:blipFill>
                 <a:blip r:embed="rId7"/>
                 <a:stretch>
-                  <a:fillRect t="-4000" r="-5660" b="-20000"/>
+                  <a:fillRect b="-4000"/>
                 </a:stretch>
               </a:blipFill>
             </p:spPr>
@@ -15237,8 +14695,8 @@
           </a:fontRef>
         </p:style>
       </p:cxnSp>
-      <mc:AlternateContent xmlns:mc="http://schemas.openxmlformats.org/markup-compatibility/2006" xmlns:a14="http://schemas.microsoft.com/office/drawing/2010/main">
-        <mc:Choice Requires="a14">
+      <mc:AlternateContent xmlns:mc="http://schemas.openxmlformats.org/markup-compatibility/2006">
+        <mc:Choice xmlns:a14="http://schemas.microsoft.com/office/drawing/2010/main" Requires="a14">
           <p:sp>
             <p:nvSpPr>
               <p:cNvPr id="44" name="Textfeld 43">
@@ -15311,12 +14769,12 @@
                     </m:oMath>
                   </m:oMathPara>
                 </a14:m>
-                <a:endParaRPr/>
+                <a:endParaRPr lang="en-US" noProof="0" dirty="0"/>
               </a:p>
             </p:txBody>
           </p:sp>
         </mc:Choice>
-        <mc:Fallback xmlns="">
+        <mc:Fallback>
           <p:sp>
             <p:nvSpPr>
               <p:cNvPr id="44" name="Textfeld 43">
@@ -15342,7 +14800,7 @@
               <a:blipFill>
                 <a:blip r:embed="rId8"/>
                 <a:stretch>
-                  <a:fillRect t="-3846" r="-9375" b="-15385"/>
+                  <a:fillRect/>
                 </a:stretch>
               </a:blipFill>
             </p:spPr>
@@ -15406,8 +14864,8 @@
           </a:fontRef>
         </p:style>
       </p:cxnSp>
-      <mc:AlternateContent xmlns:mc="http://schemas.openxmlformats.org/markup-compatibility/2006" xmlns:a14="http://schemas.microsoft.com/office/drawing/2010/main">
-        <mc:Choice Requires="a14">
+      <mc:AlternateContent xmlns:mc="http://schemas.openxmlformats.org/markup-compatibility/2006">
+        <mc:Choice xmlns:a14="http://schemas.microsoft.com/office/drawing/2010/main" Requires="a14">
           <p:sp>
             <p:nvSpPr>
               <p:cNvPr id="50" name="Textfeld 49">
@@ -15480,12 +14938,12 @@
                     </m:oMath>
                   </m:oMathPara>
                 </a14:m>
-                <a:endParaRPr/>
+                <a:endParaRPr lang="en-US" noProof="0" dirty="0"/>
               </a:p>
             </p:txBody>
           </p:sp>
         </mc:Choice>
-        <mc:Fallback xmlns="">
+        <mc:Fallback>
           <p:sp>
             <p:nvSpPr>
               <p:cNvPr id="50" name="Textfeld 49">
@@ -15511,7 +14969,7 @@
               <a:blipFill>
                 <a:blip r:embed="rId9"/>
                 <a:stretch>
-                  <a:fillRect t="-3846" r="-8108" b="-15385"/>
+                  <a:fillRect/>
                 </a:stretch>
               </a:blipFill>
             </p:spPr>
@@ -15618,8 +15076,8 @@
           </a:fontRef>
         </p:style>
       </p:cxnSp>
-      <mc:AlternateContent xmlns:mc="http://schemas.openxmlformats.org/markup-compatibility/2006" xmlns:a14="http://schemas.microsoft.com/office/drawing/2010/main">
-        <mc:Choice Requires="a14">
+      <mc:AlternateContent xmlns:mc="http://schemas.openxmlformats.org/markup-compatibility/2006">
+        <mc:Choice xmlns:a14="http://schemas.microsoft.com/office/drawing/2010/main" Requires="a14">
           <p:sp>
             <p:nvSpPr>
               <p:cNvPr id="59" name="Textfeld 58">
@@ -15692,12 +15150,12 @@
                     </m:oMath>
                   </m:oMathPara>
                 </a14:m>
-                <a:endParaRPr/>
+                <a:endParaRPr lang="en-US" noProof="0" dirty="0"/>
               </a:p>
             </p:txBody>
           </p:sp>
         </mc:Choice>
-        <mc:Fallback xmlns="">
+        <mc:Fallback>
           <p:sp>
             <p:nvSpPr>
               <p:cNvPr id="59" name="Textfeld 58">
@@ -15723,7 +15181,7 @@
               <a:blipFill>
                 <a:blip r:embed="rId10"/>
                 <a:stretch>
-                  <a:fillRect t="-4000" r="-9091" b="-24000"/>
+                  <a:fillRect/>
                 </a:stretch>
               </a:blipFill>
             </p:spPr>
@@ -16492,8 +15950,8 @@
             </a:prstGeom>
           </p:spPr>
         </p:pic>
-        <mc:AlternateContent xmlns:mc="http://schemas.openxmlformats.org/markup-compatibility/2006" xmlns:a14="http://schemas.microsoft.com/office/drawing/2010/main">
-          <mc:Choice Requires="a14">
+        <mc:AlternateContent xmlns:mc="http://schemas.openxmlformats.org/markup-compatibility/2006">
+          <mc:Choice xmlns:a14="http://schemas.microsoft.com/office/drawing/2010/main" Requires="a14">
             <p:sp>
               <p:nvSpPr>
                 <p:cNvPr id="16" name="Textfeld 15">
@@ -16543,7 +16001,7 @@
               </p:txBody>
             </p:sp>
           </mc:Choice>
-          <mc:Fallback xmlns="">
+          <mc:Fallback>
             <p:sp>
               <p:nvSpPr>
                 <p:cNvPr id="16" name="Textfeld 15">
@@ -16683,8 +16141,8 @@
             </a:p>
           </p:txBody>
         </p:sp>
-        <mc:AlternateContent xmlns:mc="http://schemas.openxmlformats.org/markup-compatibility/2006" xmlns:a14="http://schemas.microsoft.com/office/drawing/2010/main">
-          <mc:Choice Requires="a14">
+        <mc:AlternateContent xmlns:mc="http://schemas.openxmlformats.org/markup-compatibility/2006">
+          <mc:Choice xmlns:a14="http://schemas.microsoft.com/office/drawing/2010/main" Requires="a14">
             <p:sp>
               <p:nvSpPr>
                 <p:cNvPr id="19" name="Textfeld 18">
@@ -16766,12 +16224,12 @@
                       </m:oMath>
                     </m:oMathPara>
                   </a14:m>
-                  <a:endParaRPr/>
+                  <a:endParaRPr lang="en-US" noProof="0" dirty="0"/>
                 </a:p>
               </p:txBody>
             </p:sp>
           </mc:Choice>
-          <mc:Fallback xmlns="">
+          <mc:Fallback>
             <p:sp>
               <p:nvSpPr>
                 <p:cNvPr id="19" name="Textfeld 18">
@@ -16797,7 +16255,7 @@
                 <a:blipFill>
                   <a:blip r:embed="rId12"/>
                   <a:stretch>
-                    <a:fillRect r="-7692"/>
+                    <a:fillRect/>
                   </a:stretch>
                 </a:blipFill>
               </p:spPr>
@@ -16817,8 +16275,8 @@
           </mc:Fallback>
         </mc:AlternateContent>
       </p:grpSp>
-      <mc:AlternateContent xmlns:mc="http://schemas.openxmlformats.org/markup-compatibility/2006" xmlns:a14="http://schemas.microsoft.com/office/drawing/2010/main">
-        <mc:Choice Requires="a14">
+      <mc:AlternateContent xmlns:mc="http://schemas.openxmlformats.org/markup-compatibility/2006">
+        <mc:Choice xmlns:a14="http://schemas.microsoft.com/office/drawing/2010/main" Requires="a14">
           <p:sp>
             <p:nvSpPr>
               <p:cNvPr id="15" name="Textfeld 14">
@@ -16895,7 +16353,7 @@
             </p:txBody>
           </p:sp>
         </mc:Choice>
-        <mc:Fallback xmlns="">
+        <mc:Fallback>
           <p:sp>
             <p:nvSpPr>
               <p:cNvPr id="15" name="Textfeld 14">
@@ -16921,7 +16379,7 @@
               <a:blipFill>
                 <a:blip r:embed="rId13"/>
                 <a:stretch>
-                  <a:fillRect l="-411" t="-2632" b="-6579"/>
+                  <a:fillRect l="-411" t="-2632"/>
                 </a:stretch>
               </a:blipFill>
             </p:spPr>
@@ -17517,8 +16975,8 @@
           </a:prstGeom>
         </p:spPr>
       </p:pic>
-      <mc:AlternateContent xmlns:mc="http://schemas.openxmlformats.org/markup-compatibility/2006" xmlns:a14="http://schemas.microsoft.com/office/drawing/2010/main">
-        <mc:Choice Requires="a14">
+      <mc:AlternateContent xmlns:mc="http://schemas.openxmlformats.org/markup-compatibility/2006">
+        <mc:Choice xmlns:a14="http://schemas.microsoft.com/office/drawing/2010/main" Requires="a14">
           <p:sp>
             <p:nvSpPr>
               <p:cNvPr id="14" name="Textfeld 13">
@@ -17595,7 +17053,7 @@
             </p:txBody>
           </p:sp>
         </mc:Choice>
-        <mc:Fallback xmlns="">
+        <mc:Fallback>
           <p:sp>
             <p:nvSpPr>
               <p:cNvPr id="14" name="Textfeld 13">
@@ -17640,8 +17098,8 @@
           </p:sp>
         </mc:Fallback>
       </mc:AlternateContent>
-      <mc:AlternateContent xmlns:mc="http://schemas.openxmlformats.org/markup-compatibility/2006" xmlns:a14="http://schemas.microsoft.com/office/drawing/2010/main">
-        <mc:Choice Requires="a14">
+      <mc:AlternateContent xmlns:mc="http://schemas.openxmlformats.org/markup-compatibility/2006">
+        <mc:Choice xmlns:a14="http://schemas.microsoft.com/office/drawing/2010/main" Requires="a14">
           <p:sp>
             <p:nvSpPr>
               <p:cNvPr id="15" name="Textfeld 14">
@@ -18391,7 +17849,7 @@
             </p:txBody>
           </p:sp>
         </mc:Choice>
-        <mc:Fallback xmlns="">
+        <mc:Fallback>
           <p:sp>
             <p:nvSpPr>
               <p:cNvPr id="15" name="Textfeld 14">
@@ -18781,8 +18239,8 @@
           </a:p>
         </p:txBody>
       </p:sp>
-      <mc:AlternateContent xmlns:mc="http://schemas.openxmlformats.org/markup-compatibility/2006" xmlns:a14="http://schemas.microsoft.com/office/drawing/2010/main">
-        <mc:Choice Requires="a14">
+      <mc:AlternateContent xmlns:mc="http://schemas.openxmlformats.org/markup-compatibility/2006">
+        <mc:Choice xmlns:a14="http://schemas.microsoft.com/office/drawing/2010/main" Requires="a14">
           <p:sp>
             <p:nvSpPr>
               <p:cNvPr id="3" name="Inhaltsplatzhalter 2">
@@ -19397,7 +18855,7 @@
             </p:txBody>
           </p:sp>
         </mc:Choice>
-        <mc:Fallback xmlns="">
+        <mc:Fallback>
           <p:sp>
             <p:nvSpPr>
               <p:cNvPr id="3" name="Inhaltsplatzhalter 2">
@@ -20607,124 +20065,81 @@
           </a:p>
         </p:txBody>
       </p:sp>
-      <mc:AlternateContent xmlns:mc="http://schemas.openxmlformats.org/markup-compatibility/2006" xmlns:a14="http://schemas.microsoft.com/office/drawing/2010/main">
-        <mc:Choice Requires="a14">
-          <p:sp>
-            <p:nvSpPr>
-              <p:cNvPr id="3" name="Inhaltsplatzhalter 2">
-                <a:extLst>
-                  <a:ext uri="{FF2B5EF4-FFF2-40B4-BE49-F238E27FC236}">
-                    <a16:creationId xmlns:a16="http://schemas.microsoft.com/office/drawing/2014/main" id="{CB8C2013-0074-5771-E3F0-2711C02ACAAF}"/>
-                  </a:ext>
-                </a:extLst>
-              </p:cNvPr>
-              <p:cNvSpPr>
-                <a:spLocks noGrp="1"/>
-              </p:cNvSpPr>
-              <p:nvPr>
-                <p:ph idx="1"/>
-              </p:nvPr>
-            </p:nvSpPr>
-            <p:spPr/>
-            <p:txBody>
-              <a:bodyPr>
-                <a:normAutofit/>
-              </a:bodyPr>
-              <a:lstStyle/>
-              <a:p>
-                <a:pPr marL="0" indent="0">
-                  <a:buNone/>
-                </a:pPr>
-                <a:r>
-                  <a:rPr lang="en-US" noProof="0" dirty="0"/>
-                  <a:t>Thought experiment:</a:t>
-                </a:r>
-              </a:p>
-              <a:p>
-                <a:pPr marL="0" indent="0">
-                  <a:buNone/>
-                </a:pPr>
-                <a:endParaRPr lang="en-US" noProof="0" dirty="0"/>
-              </a:p>
-              <a:p>
-                <a:pPr marL="0" indent="0">
-                  <a:buNone/>
-                </a:pPr>
-                <a:endParaRPr lang="en-US" noProof="0" dirty="0"/>
-              </a:p>
-              <a:p>
-                <a:pPr marL="0" indent="0">
-                  <a:buNone/>
-                </a:pPr>
-                <a:endParaRPr lang="en-US" noProof="0" dirty="0"/>
-              </a:p>
-              <a:p>
-                <a:pPr marL="0" indent="0">
-                  <a:buNone/>
-                </a:pPr>
-                <a:endParaRPr lang="en-US" noProof="0" dirty="0"/>
-              </a:p>
-              <a:p>
-                <a:pPr marL="0" indent="0">
-                  <a:buNone/>
-                </a:pPr>
-                <a:endParaRPr lang="en-US" noProof="0" dirty="0"/>
-              </a:p>
-              <a:p>
-                <a:pPr marL="0" indent="0">
-                  <a:buNone/>
-                </a:pPr>
-                <a:endParaRPr lang="en-US" noProof="0" dirty="0"/>
-              </a:p>
-              <a:p>
-                <a:pPr marL="0" indent="0">
-                  <a:buNone/>
-                </a:pPr>
-                <a:endParaRPr lang="en-US" noProof="0" dirty="0"/>
-              </a:p>
-            </p:txBody>
-          </p:sp>
-        </mc:Choice>
-        <mc:Fallback xmlns="">
-          <p:sp>
-            <p:nvSpPr>
-              <p:cNvPr id="3" name="Inhaltsplatzhalter 2">
-                <a:extLst>
-                  <a:ext uri="{FF2B5EF4-FFF2-40B4-BE49-F238E27FC236}">
-                    <a16:creationId xmlns:a16="http://schemas.microsoft.com/office/drawing/2014/main" id="{CB8C2013-0074-5771-E3F0-2711C02ACAAF}"/>
-                  </a:ext>
-                </a:extLst>
-              </p:cNvPr>
-              <p:cNvSpPr>
-                <a:spLocks noGrp="1" noRot="1" noChangeAspect="1" noMove="1" noResize="1" noEditPoints="1" noAdjustHandles="1" noChangeArrowheads="1" noChangeShapeType="1" noTextEdit="1"/>
-              </p:cNvSpPr>
-              <p:nvPr>
-                <p:ph idx="1"/>
-              </p:nvPr>
-            </p:nvSpPr>
-            <p:spPr>
-              <a:blipFill>
-                <a:blip r:embed="rId2"/>
-                <a:stretch>
-                  <a:fillRect l="-643" t="-2335"/>
-                </a:stretch>
-              </a:blipFill>
-            </p:spPr>
-            <p:txBody>
-              <a:bodyPr/>
-              <a:lstStyle/>
-              <a:p>
-                <a:r>
-                  <a:rPr lang="de-DE">
-                    <a:noFill/>
-                  </a:rPr>
-                  <a:t> </a:t>
-                </a:r>
-              </a:p>
-            </p:txBody>
-          </p:sp>
-        </mc:Fallback>
-      </mc:AlternateContent>
+      <p:sp>
+        <p:nvSpPr>
+          <p:cNvPr id="3" name="Inhaltsplatzhalter 2">
+            <a:extLst>
+              <a:ext uri="{FF2B5EF4-FFF2-40B4-BE49-F238E27FC236}">
+                <a16:creationId xmlns:a16="http://schemas.microsoft.com/office/drawing/2014/main" id="{CB8C2013-0074-5771-E3F0-2711C02ACAAF}"/>
+              </a:ext>
+            </a:extLst>
+          </p:cNvPr>
+          <p:cNvSpPr>
+            <a:spLocks noGrp="1"/>
+          </p:cNvSpPr>
+          <p:nvPr>
+            <p:ph idx="1"/>
+          </p:nvPr>
+        </p:nvSpPr>
+        <p:spPr/>
+        <p:txBody>
+          <a:bodyPr>
+            <a:normAutofit/>
+          </a:bodyPr>
+          <a:lstStyle/>
+          <a:p>
+            <a:pPr marL="0" indent="0">
+              <a:buNone/>
+            </a:pPr>
+            <a:r>
+              <a:rPr lang="en-US" noProof="0" dirty="0"/>
+              <a:t>Thought experiment:</a:t>
+            </a:r>
+          </a:p>
+          <a:p>
+            <a:pPr marL="0" indent="0">
+              <a:buNone/>
+            </a:pPr>
+            <a:endParaRPr lang="en-US" noProof="0" dirty="0"/>
+          </a:p>
+          <a:p>
+            <a:pPr marL="0" indent="0">
+              <a:buNone/>
+            </a:pPr>
+            <a:endParaRPr lang="en-US" noProof="0" dirty="0"/>
+          </a:p>
+          <a:p>
+            <a:pPr marL="0" indent="0">
+              <a:buNone/>
+            </a:pPr>
+            <a:endParaRPr lang="en-US" noProof="0" dirty="0"/>
+          </a:p>
+          <a:p>
+            <a:pPr marL="0" indent="0">
+              <a:buNone/>
+            </a:pPr>
+            <a:endParaRPr lang="en-US" noProof="0" dirty="0"/>
+          </a:p>
+          <a:p>
+            <a:pPr marL="0" indent="0">
+              <a:buNone/>
+            </a:pPr>
+            <a:endParaRPr lang="en-US" noProof="0" dirty="0"/>
+          </a:p>
+          <a:p>
+            <a:pPr marL="0" indent="0">
+              <a:buNone/>
+            </a:pPr>
+            <a:endParaRPr lang="en-US" noProof="0" dirty="0"/>
+          </a:p>
+          <a:p>
+            <a:pPr marL="0" indent="0">
+              <a:buNone/>
+            </a:pPr>
+            <a:endParaRPr lang="en-US" noProof="0" dirty="0"/>
+          </a:p>
+        </p:txBody>
+      </p:sp>
       <p:sp>
         <p:nvSpPr>
           <p:cNvPr id="4" name="Fußzeilenplatzhalter 3">
@@ -20841,8 +20256,8 @@
           </a:p>
         </p:txBody>
       </p:sp>
-      <mc:AlternateContent xmlns:mc="http://schemas.openxmlformats.org/markup-compatibility/2006" xmlns:a14="http://schemas.microsoft.com/office/drawing/2010/main">
-        <mc:Choice Requires="a14">
+      <mc:AlternateContent xmlns:mc="http://schemas.openxmlformats.org/markup-compatibility/2006">
+        <mc:Choice xmlns:a14="http://schemas.microsoft.com/office/drawing/2010/main" Requires="a14">
           <p:sp>
             <p:nvSpPr>
               <p:cNvPr id="6" name="Textfeld 5">
@@ -21085,7 +20500,7 @@
             </p:txBody>
           </p:sp>
         </mc:Choice>
-        <mc:Fallback xmlns="">
+        <mc:Fallback>
           <p:sp>
             <p:nvSpPr>
               <p:cNvPr id="6" name="Textfeld 5">
@@ -21109,9 +20524,9 @@
                 <a:avLst/>
               </a:prstGeom>
               <a:blipFill>
-                <a:blip r:embed="rId3"/>
+                <a:blip r:embed="rId2"/>
                 <a:stretch>
-                  <a:fillRect r="-2273" b="-2500"/>
+                  <a:fillRect b="-2500"/>
                 </a:stretch>
               </a:blipFill>
             </p:spPr>
@@ -21130,8 +20545,8 @@
           </p:sp>
         </mc:Fallback>
       </mc:AlternateContent>
-      <mc:AlternateContent xmlns:mc="http://schemas.openxmlformats.org/markup-compatibility/2006" xmlns:a14="http://schemas.microsoft.com/office/drawing/2010/main">
-        <mc:Choice Requires="a14">
+      <mc:AlternateContent xmlns:mc="http://schemas.openxmlformats.org/markup-compatibility/2006">
+        <mc:Choice xmlns:a14="http://schemas.microsoft.com/office/drawing/2010/main" Requires="a14">
           <p:sp>
             <p:nvSpPr>
               <p:cNvPr id="7" name="Textfeld 6">
@@ -21393,7 +20808,7 @@
             </p:txBody>
           </p:sp>
         </mc:Choice>
-        <mc:Fallback xmlns="">
+        <mc:Fallback>
           <p:sp>
             <p:nvSpPr>
               <p:cNvPr id="7" name="Textfeld 6">
@@ -21417,7 +20832,7 @@
                 <a:avLst/>
               </a:prstGeom>
               <a:blipFill>
-                <a:blip r:embed="rId4"/>
+                <a:blip r:embed="rId3"/>
                 <a:stretch>
                   <a:fillRect l="-962" t="-2703"/>
                 </a:stretch>
@@ -22632,8 +22047,8 @@
           </a:p>
         </p:txBody>
       </p:sp>
-      <mc:AlternateContent xmlns:mc="http://schemas.openxmlformats.org/markup-compatibility/2006" xmlns:a14="http://schemas.microsoft.com/office/drawing/2010/main">
-        <mc:Choice Requires="a14">
+      <mc:AlternateContent xmlns:mc="http://schemas.openxmlformats.org/markup-compatibility/2006">
+        <mc:Choice xmlns:a14="http://schemas.microsoft.com/office/drawing/2010/main" Requires="a14">
           <p:sp>
             <p:nvSpPr>
               <p:cNvPr id="3" name="Inhaltsplatzhalter 2">
@@ -23039,7 +22454,7 @@
             </p:txBody>
           </p:sp>
         </mc:Choice>
-        <mc:Fallback xmlns="">
+        <mc:Fallback>
           <p:sp>
             <p:nvSpPr>
               <p:cNvPr id="3" name="Inhaltsplatzhalter 2">
@@ -24719,8 +24134,8 @@
             <a:chExt cx="1713527" cy="606543"/>
           </a:xfrm>
         </p:grpSpPr>
-        <mc:AlternateContent xmlns:mc="http://schemas.openxmlformats.org/markup-compatibility/2006" xmlns:a14="http://schemas.microsoft.com/office/drawing/2010/main">
-          <mc:Choice Requires="a14">
+        <mc:AlternateContent xmlns:mc="http://schemas.openxmlformats.org/markup-compatibility/2006">
+          <mc:Choice xmlns:a14="http://schemas.microsoft.com/office/drawing/2010/main" Requires="a14">
             <p:sp>
               <p:nvSpPr>
                 <p:cNvPr id="19" name="Textfeld 18">
@@ -24759,7 +24174,7 @@
                         <m:sSub>
                           <m:sSubPr>
                             <m:ctrlPr>
-                              <a:rPr lang="en-US" sz="1800" i="1">
+                              <a:rPr lang="en-US" sz="1800" i="1" noProof="0">
                                 <a:solidFill>
                                   <a:schemeClr val="tx1"/>
                                 </a:solidFill>
@@ -24770,7 +24185,7 @@
                           </m:sSubPr>
                           <m:e>
                             <m:r>
-                              <a:rPr lang="en-US" sz="1800" i="1">
+                              <a:rPr lang="en-US" sz="1800" i="1" noProof="0">
                                 <a:solidFill>
                                   <a:schemeClr val="tx1"/>
                                 </a:solidFill>
@@ -24782,7 +24197,7 @@
                           </m:e>
                           <m:sub>
                             <m:r>
-                              <a:rPr lang="en-US" sz="1800" i="1">
+                              <a:rPr lang="en-US" sz="1800" i="1" noProof="0">
                                 <a:solidFill>
                                   <a:schemeClr val="tx1"/>
                                 </a:solidFill>
@@ -24796,7 +24211,7 @@
                         <m:d>
                           <m:dPr>
                             <m:ctrlPr>
-                              <a:rPr lang="en-US" sz="1800" i="1">
+                              <a:rPr lang="en-US" sz="1800" i="1" noProof="0">
                                 <a:solidFill>
                                   <a:schemeClr val="tx1"/>
                                 </a:solidFill>
@@ -24807,7 +24222,7 @@
                           </m:dPr>
                           <m:e>
                             <m:r>
-                              <a:rPr lang="en-US" sz="1800" i="1">
+                              <a:rPr lang="en-US" sz="1800" i="1" noProof="0">
                                 <a:solidFill>
                                   <a:schemeClr val="tx1"/>
                                 </a:solidFill>
@@ -24819,7 +24234,7 @@
                           </m:e>
                         </m:d>
                         <m:r>
-                          <a:rPr lang="en-US" sz="1800" i="1">
+                          <a:rPr lang="en-US" sz="1800" i="1" noProof="0">
                             <a:solidFill>
                               <a:schemeClr val="tx1"/>
                             </a:solidFill>
@@ -24829,7 +24244,7 @@
                           <m:t>=</m:t>
                         </m:r>
                         <m:r>
-                          <a:rPr lang="en-US" sz="1800" i="1">
+                          <a:rPr lang="en-US" sz="1800" i="1" noProof="0">
                             <a:solidFill>
                               <a:schemeClr val="tx1"/>
                             </a:solidFill>
@@ -24841,7 +24256,7 @@
                         <m:d>
                           <m:dPr>
                             <m:ctrlPr>
-                              <a:rPr lang="en-US" sz="1800" i="1">
+                              <a:rPr lang="en-US" sz="1800" i="1" noProof="0">
                                 <a:solidFill>
                                   <a:schemeClr val="tx1"/>
                                 </a:solidFill>
@@ -24852,7 +24267,7 @@
                           </m:dPr>
                           <m:e>
                             <m:r>
-                              <a:rPr lang="en-US" sz="1800" i="1">
+                              <a:rPr lang="en-US" sz="1800" i="1" noProof="0">
                                 <a:solidFill>
                                   <a:schemeClr val="tx1"/>
                                 </a:solidFill>
@@ -24866,12 +24281,12 @@
                       </m:oMath>
                     </m:oMathPara>
                   </a14:m>
-                  <a:endParaRPr lang="de-DE" sz="1800" dirty="0"/>
+                  <a:endParaRPr lang="en-US" sz="1800" noProof="0" dirty="0"/>
                 </a:p>
               </p:txBody>
             </p:sp>
           </mc:Choice>
-          <mc:Fallback xmlns="">
+          <mc:Fallback>
             <p:sp>
               <p:nvSpPr>
                 <p:cNvPr id="19" name="Textfeld 18">
@@ -24973,7 +24388,7 @@
                   <a:spcPts val="200"/>
                 </a:spcBef>
               </a:pPr>
-              <a:endParaRPr lang="en-US" noProof="0">
+              <a:endParaRPr lang="en-US" noProof="0" dirty="0">
                 <a:solidFill>
                   <a:schemeClr val="bg2">
                     <a:lumMod val="10000"/>
@@ -25713,8 +25128,8 @@
                 </a:p>
               </p:txBody>
             </p:sp>
-            <mc:AlternateContent xmlns:mc="http://schemas.openxmlformats.org/markup-compatibility/2006" xmlns:a14="http://schemas.microsoft.com/office/drawing/2010/main">
-              <mc:Choice Requires="a14">
+            <mc:AlternateContent xmlns:mc="http://schemas.openxmlformats.org/markup-compatibility/2006">
+              <mc:Choice xmlns:a14="http://schemas.microsoft.com/office/drawing/2010/main" Requires="a14">
                 <p:sp>
                   <p:nvSpPr>
                     <p:cNvPr id="27" name="Textfeld 26">
@@ -25789,7 +25204,7 @@
                   </p:txBody>
                 </p:sp>
               </mc:Choice>
-              <mc:Fallback xmlns="">
+              <mc:Fallback>
                 <p:sp>
                   <p:nvSpPr>
                     <p:cNvPr id="27" name="Textfeld 26">
@@ -25903,8 +25318,8 @@
                 </a:p>
               </p:txBody>
             </p:sp>
-            <mc:AlternateContent xmlns:mc="http://schemas.openxmlformats.org/markup-compatibility/2006" xmlns:a14="http://schemas.microsoft.com/office/drawing/2010/main">
-              <mc:Choice Requires="a14">
+            <mc:AlternateContent xmlns:mc="http://schemas.openxmlformats.org/markup-compatibility/2006">
+              <mc:Choice xmlns:a14="http://schemas.microsoft.com/office/drawing/2010/main" Requires="a14">
                 <p:sp>
                   <p:nvSpPr>
                     <p:cNvPr id="25" name="Textfeld 24">
@@ -25990,12 +25405,12 @@
                           </m:oMath>
                         </m:oMathPara>
                       </a14:m>
-                      <a:endParaRPr/>
+                      <a:endParaRPr lang="en-US" noProof="0" dirty="0"/>
                     </a:p>
                   </p:txBody>
                 </p:sp>
               </mc:Choice>
-              <mc:Fallback xmlns="">
+              <mc:Fallback>
                 <p:sp>
                   <p:nvSpPr>
                     <p:cNvPr id="25" name="Textfeld 24">
@@ -26021,7 +25436,7 @@
                     <a:blipFill>
                       <a:blip r:embed="rId5"/>
                       <a:stretch>
-                        <a:fillRect t="-6452" r="-7792" b="-22581"/>
+                        <a:fillRect/>
                       </a:stretch>
                     </a:blipFill>
                   </p:spPr>
@@ -26130,8 +25545,8 @@
               </a:fontRef>
             </p:style>
           </p:cxnSp>
-          <mc:AlternateContent xmlns:mc="http://schemas.openxmlformats.org/markup-compatibility/2006" xmlns:a14="http://schemas.microsoft.com/office/drawing/2010/main">
-            <mc:Choice Requires="a14">
+          <mc:AlternateContent xmlns:mc="http://schemas.openxmlformats.org/markup-compatibility/2006">
+            <mc:Choice xmlns:a14="http://schemas.microsoft.com/office/drawing/2010/main" Requires="a14">
               <p:sp>
                 <p:nvSpPr>
                   <p:cNvPr id="18" name="Textfeld 17">
@@ -26187,7 +25602,7 @@
                 </p:txBody>
               </p:sp>
             </mc:Choice>
-            <mc:Fallback xmlns="">
+            <mc:Fallback>
               <p:sp>
                 <p:nvSpPr>
                   <p:cNvPr id="18" name="Textfeld 17">
@@ -26232,8 +25647,8 @@
               </p:sp>
             </mc:Fallback>
           </mc:AlternateContent>
-          <mc:AlternateContent xmlns:mc="http://schemas.openxmlformats.org/markup-compatibility/2006" xmlns:a14="http://schemas.microsoft.com/office/drawing/2010/main">
-            <mc:Choice Requires="a14">
+          <mc:AlternateContent xmlns:mc="http://schemas.openxmlformats.org/markup-compatibility/2006">
+            <mc:Choice xmlns:a14="http://schemas.microsoft.com/office/drawing/2010/main" Requires="a14">
               <p:sp>
                 <p:nvSpPr>
                   <p:cNvPr id="19" name="Textfeld 18">
@@ -26289,7 +25704,7 @@
                 </p:txBody>
               </p:sp>
             </mc:Choice>
-            <mc:Fallback xmlns="">
+            <mc:Fallback>
               <p:sp>
                 <p:nvSpPr>
                   <p:cNvPr id="19" name="Textfeld 18">
@@ -26421,8 +25836,8 @@
               </a:fontRef>
             </p:style>
           </p:cxnSp>
-          <mc:AlternateContent xmlns:mc="http://schemas.openxmlformats.org/markup-compatibility/2006" xmlns:a14="http://schemas.microsoft.com/office/drawing/2010/main">
-            <mc:Choice Requires="a14">
+          <mc:AlternateContent xmlns:mc="http://schemas.openxmlformats.org/markup-compatibility/2006">
+            <mc:Choice xmlns:a14="http://schemas.microsoft.com/office/drawing/2010/main" Requires="a14">
               <p:sp>
                 <p:nvSpPr>
                   <p:cNvPr id="22" name="Textfeld 21">
@@ -26478,7 +25893,7 @@
                 </p:txBody>
               </p:sp>
             </mc:Choice>
-            <mc:Fallback xmlns="">
+            <mc:Fallback>
               <p:sp>
                 <p:nvSpPr>
                   <p:cNvPr id="22" name="Textfeld 21">
@@ -26568,8 +25983,8 @@
             </p:style>
           </p:cxnSp>
         </p:grpSp>
-        <mc:AlternateContent xmlns:mc="http://schemas.openxmlformats.org/markup-compatibility/2006" xmlns:a14="http://schemas.microsoft.com/office/drawing/2010/main">
-          <mc:Choice Requires="a14">
+        <mc:AlternateContent xmlns:mc="http://schemas.openxmlformats.org/markup-compatibility/2006">
+          <mc:Choice xmlns:a14="http://schemas.microsoft.com/office/drawing/2010/main" Requires="a14">
             <p:sp>
               <p:nvSpPr>
                 <p:cNvPr id="10" name="Textfeld 9">
@@ -26625,7 +26040,7 @@
               </p:txBody>
             </p:sp>
           </mc:Choice>
-          <mc:Fallback xmlns="">
+          <mc:Fallback>
             <p:sp>
               <p:nvSpPr>
                 <p:cNvPr id="10" name="Textfeld 9">
@@ -26670,8 +26085,8 @@
             </p:sp>
           </mc:Fallback>
         </mc:AlternateContent>
-        <mc:AlternateContent xmlns:mc="http://schemas.openxmlformats.org/markup-compatibility/2006" xmlns:a14="http://schemas.microsoft.com/office/drawing/2010/main">
-          <mc:Choice Requires="a14">
+        <mc:AlternateContent xmlns:mc="http://schemas.openxmlformats.org/markup-compatibility/2006">
+          <mc:Choice xmlns:a14="http://schemas.microsoft.com/office/drawing/2010/main" Requires="a14">
             <p:sp>
               <p:nvSpPr>
                 <p:cNvPr id="11" name="Textfeld 10">
@@ -26727,7 +26142,7 @@
               </p:txBody>
             </p:sp>
           </mc:Choice>
-          <mc:Fallback xmlns="">
+          <mc:Fallback>
             <p:sp>
               <p:nvSpPr>
                 <p:cNvPr id="11" name="Textfeld 10">
@@ -27079,8 +26494,8 @@
                   </a:p>
                 </p:txBody>
               </p:sp>
-              <mc:AlternateContent xmlns:mc="http://schemas.openxmlformats.org/markup-compatibility/2006" xmlns:a14="http://schemas.microsoft.com/office/drawing/2010/main">
-                <mc:Choice Requires="a14">
+              <mc:AlternateContent xmlns:mc="http://schemas.openxmlformats.org/markup-compatibility/2006">
+                <mc:Choice xmlns:a14="http://schemas.microsoft.com/office/drawing/2010/main" Requires="a14">
                   <p:sp>
                     <p:nvSpPr>
                       <p:cNvPr id="52" name="Textfeld 51">
@@ -27155,7 +26570,7 @@
                     </p:txBody>
                   </p:sp>
                 </mc:Choice>
-                <mc:Fallback xmlns="">
+                <mc:Fallback>
                   <p:sp>
                     <p:nvSpPr>
                       <p:cNvPr id="52" name="Textfeld 51">
@@ -27201,86 +26616,38 @@
                 </mc:Fallback>
               </mc:AlternateContent>
             </p:grpSp>
-            <mc:AlternateContent xmlns:mc="http://schemas.openxmlformats.org/markup-compatibility/2006" xmlns:a14="http://schemas.microsoft.com/office/drawing/2010/main">
-              <mc:Choice Requires="a14">
-                <p:sp>
-                  <p:nvSpPr>
-                    <p:cNvPr id="50" name="Textfeld 49">
-                      <a:extLst>
-                        <a:ext uri="{FF2B5EF4-FFF2-40B4-BE49-F238E27FC236}">
-                          <a16:creationId xmlns:a16="http://schemas.microsoft.com/office/drawing/2014/main" id="{5CE22E65-4295-A8C3-DC4A-87B023DF1B97}"/>
-                        </a:ext>
-                      </a:extLst>
-                    </p:cNvPr>
-                    <p:cNvSpPr txBox="1"/>
-                    <p:nvPr/>
-                  </p:nvSpPr>
-                  <p:spPr>
-                    <a:xfrm>
-                      <a:off x="3264760" y="2368987"/>
-                      <a:ext cx="184731" cy="165649"/>
-                    </a:xfrm>
-                    <a:prstGeom prst="rect">
-                      <a:avLst/>
-                    </a:prstGeom>
-                    <a:noFill/>
-                  </p:spPr>
-                  <p:txBody>
-                    <a:bodyPr wrap="none" rtlCol="0">
-                      <a:spAutoFit/>
-                    </a:bodyPr>
-                    <a:lstStyle/>
-                    <a:p>
-                      <a:endParaRPr/>
-                    </a:p>
-                  </p:txBody>
-                </p:sp>
-              </mc:Choice>
-              <mc:Fallback xmlns="">
-                <p:sp>
-                  <p:nvSpPr>
-                    <p:cNvPr id="50" name="Textfeld 49">
-                      <a:extLst>
-                        <a:ext uri="{FF2B5EF4-FFF2-40B4-BE49-F238E27FC236}">
-                          <a16:creationId xmlns:a16="http://schemas.microsoft.com/office/drawing/2014/main" id="{5CE22E65-4295-A8C3-DC4A-87B023DF1B97}"/>
-                        </a:ext>
-                      </a:extLst>
-                    </p:cNvPr>
-                    <p:cNvSpPr txBox="1">
-                      <a:spLocks noRot="1" noChangeAspect="1" noMove="1" noResize="1" noEditPoints="1" noAdjustHandles="1" noChangeArrowheads="1" noChangeShapeType="1" noTextEdit="1"/>
-                    </p:cNvSpPr>
-                    <p:nvPr/>
-                  </p:nvSpPr>
-                  <p:spPr>
-                    <a:xfrm>
-                      <a:off x="3264760" y="2368987"/>
-                      <a:ext cx="184731" cy="165649"/>
-                    </a:xfrm>
-                    <a:prstGeom prst="rect">
-                      <a:avLst/>
-                    </a:prstGeom>
-                    <a:blipFill>
-                      <a:blip r:embed="rId12"/>
-                      <a:stretch>
-                        <a:fillRect/>
-                      </a:stretch>
-                    </a:blipFill>
-                  </p:spPr>
-                  <p:txBody>
-                    <a:bodyPr/>
-                    <a:lstStyle/>
-                    <a:p>
-                      <a:r>
-                        <a:rPr lang="de-DE">
-                          <a:noFill/>
-                        </a:rPr>
-                        <a:t> </a:t>
-                      </a:r>
-                    </a:p>
-                  </p:txBody>
-                </p:sp>
-              </mc:Fallback>
-            </mc:AlternateContent>
+            <p:sp>
+              <p:nvSpPr>
+                <p:cNvPr id="50" name="Textfeld 49">
+                  <a:extLst>
+                    <a:ext uri="{FF2B5EF4-FFF2-40B4-BE49-F238E27FC236}">
+                      <a16:creationId xmlns:a16="http://schemas.microsoft.com/office/drawing/2014/main" id="{5CE22E65-4295-A8C3-DC4A-87B023DF1B97}"/>
+                    </a:ext>
+                  </a:extLst>
+                </p:cNvPr>
+                <p:cNvSpPr txBox="1"/>
+                <p:nvPr/>
+              </p:nvSpPr>
+              <p:spPr>
+                <a:xfrm>
+                  <a:off x="3264760" y="2368987"/>
+                  <a:ext cx="184731" cy="165649"/>
+                </a:xfrm>
+                <a:prstGeom prst="rect">
+                  <a:avLst/>
+                </a:prstGeom>
+                <a:noFill/>
+              </p:spPr>
+              <p:txBody>
+                <a:bodyPr wrap="none" rtlCol="0">
+                  <a:spAutoFit/>
+                </a:bodyPr>
+                <a:lstStyle/>
+                <a:p>
+                  <a:endParaRPr lang="en-US" noProof="0" dirty="0"/>
+                </a:p>
+              </p:txBody>
+            </p:sp>
             <p:cxnSp>
               <p:nvCxnSpPr>
                 <p:cNvPr id="41" name="Gerade Verbindung mit Pfeil 40">
@@ -27370,8 +26737,8 @@
                 </a:fontRef>
               </p:style>
             </p:cxnSp>
-            <mc:AlternateContent xmlns:mc="http://schemas.openxmlformats.org/markup-compatibility/2006" xmlns:a14="http://schemas.microsoft.com/office/drawing/2010/main">
-              <mc:Choice Requires="a14">
+            <mc:AlternateContent xmlns:mc="http://schemas.openxmlformats.org/markup-compatibility/2006">
+              <mc:Choice xmlns:a14="http://schemas.microsoft.com/office/drawing/2010/main" Requires="a14">
                 <p:sp>
                   <p:nvSpPr>
                     <p:cNvPr id="43" name="Textfeld 42">
@@ -27427,7 +26794,7 @@
                   </p:txBody>
                 </p:sp>
               </mc:Choice>
-              <mc:Fallback xmlns="">
+              <mc:Fallback>
                 <p:sp>
                   <p:nvSpPr>
                     <p:cNvPr id="43" name="Textfeld 42">
@@ -27451,7 +26818,7 @@
                       <a:avLst/>
                     </a:prstGeom>
                     <a:blipFill>
-                      <a:blip r:embed="rId13"/>
+                      <a:blip r:embed="rId12"/>
                       <a:stretch>
                         <a:fillRect b="-18519"/>
                       </a:stretch>
@@ -27472,8 +26839,8 @@
                 </p:sp>
               </mc:Fallback>
             </mc:AlternateContent>
-            <mc:AlternateContent xmlns:mc="http://schemas.openxmlformats.org/markup-compatibility/2006" xmlns:a14="http://schemas.microsoft.com/office/drawing/2010/main">
-              <mc:Choice Requires="a14">
+            <mc:AlternateContent xmlns:mc="http://schemas.openxmlformats.org/markup-compatibility/2006">
+              <mc:Choice xmlns:a14="http://schemas.microsoft.com/office/drawing/2010/main" Requires="a14">
                 <p:sp>
                   <p:nvSpPr>
                     <p:cNvPr id="44" name="Textfeld 43">
@@ -27529,7 +26896,7 @@
                   </p:txBody>
                 </p:sp>
               </mc:Choice>
-              <mc:Fallback xmlns="">
+              <mc:Fallback>
                 <p:sp>
                   <p:nvSpPr>
                     <p:cNvPr id="44" name="Textfeld 43">
@@ -27553,7 +26920,7 @@
                       <a:avLst/>
                     </a:prstGeom>
                     <a:blipFill>
-                      <a:blip r:embed="rId14"/>
+                      <a:blip r:embed="rId13"/>
                       <a:stretch>
                         <a:fillRect b="-17857"/>
                       </a:stretch>
@@ -27661,8 +27028,8 @@
                 </a:fontRef>
               </p:style>
             </p:cxnSp>
-            <mc:AlternateContent xmlns:mc="http://schemas.openxmlformats.org/markup-compatibility/2006" xmlns:a14="http://schemas.microsoft.com/office/drawing/2010/main">
-              <mc:Choice Requires="a14">
+            <mc:AlternateContent xmlns:mc="http://schemas.openxmlformats.org/markup-compatibility/2006">
+              <mc:Choice xmlns:a14="http://schemas.microsoft.com/office/drawing/2010/main" Requires="a14">
                 <p:sp>
                   <p:nvSpPr>
                     <p:cNvPr id="47" name="Textfeld 46">
@@ -27718,7 +27085,7 @@
                   </p:txBody>
                 </p:sp>
               </mc:Choice>
-              <mc:Fallback xmlns="">
+              <mc:Fallback>
                 <p:sp>
                   <p:nvSpPr>
                     <p:cNvPr id="47" name="Textfeld 46">
@@ -27742,7 +27109,7 @@
                       <a:avLst/>
                     </a:prstGeom>
                     <a:blipFill>
-                      <a:blip r:embed="rId15"/>
+                      <a:blip r:embed="rId14"/>
                       <a:stretch>
                         <a:fillRect b="-20000"/>
                       </a:stretch>
@@ -27809,8 +27176,8 @@
               </p:style>
             </p:cxnSp>
           </p:grpSp>
-          <mc:AlternateContent xmlns:mc="http://schemas.openxmlformats.org/markup-compatibility/2006" xmlns:a14="http://schemas.microsoft.com/office/drawing/2010/main">
-            <mc:Choice Requires="a14">
+          <mc:AlternateContent xmlns:mc="http://schemas.openxmlformats.org/markup-compatibility/2006">
+            <mc:Choice xmlns:a14="http://schemas.microsoft.com/office/drawing/2010/main" Requires="a14">
               <p:sp>
                 <p:nvSpPr>
                   <p:cNvPr id="35" name="Textfeld 34">
@@ -27866,7 +27233,7 @@
                 </p:txBody>
               </p:sp>
             </mc:Choice>
-            <mc:Fallback xmlns="">
+            <mc:Fallback>
               <p:sp>
                 <p:nvSpPr>
                   <p:cNvPr id="35" name="Textfeld 34">
@@ -27890,7 +27257,7 @@
                     <a:avLst/>
                   </a:prstGeom>
                   <a:blipFill>
-                    <a:blip r:embed="rId16"/>
+                    <a:blip r:embed="rId15"/>
                     <a:stretch>
                       <a:fillRect/>
                     </a:stretch>
@@ -27911,8 +27278,8 @@
               </p:sp>
             </mc:Fallback>
           </mc:AlternateContent>
-          <mc:AlternateContent xmlns:mc="http://schemas.openxmlformats.org/markup-compatibility/2006" xmlns:a14="http://schemas.microsoft.com/office/drawing/2010/main">
-            <mc:Choice Requires="a14">
+          <mc:AlternateContent xmlns:mc="http://schemas.openxmlformats.org/markup-compatibility/2006">
+            <mc:Choice xmlns:a14="http://schemas.microsoft.com/office/drawing/2010/main" Requires="a14">
               <p:sp>
                 <p:nvSpPr>
                   <p:cNvPr id="36" name="Textfeld 35">
@@ -27968,7 +27335,7 @@
                 </p:txBody>
               </p:sp>
             </mc:Choice>
-            <mc:Fallback xmlns="">
+            <mc:Fallback>
               <p:sp>
                 <p:nvSpPr>
                   <p:cNvPr id="36" name="Textfeld 35">
@@ -27992,7 +27359,7 @@
                     <a:avLst/>
                   </a:prstGeom>
                   <a:blipFill>
-                    <a:blip r:embed="rId17"/>
+                    <a:blip r:embed="rId16"/>
                     <a:stretch>
                       <a:fillRect b="-14286"/>
                     </a:stretch>
@@ -28062,8 +27429,8 @@
             </a:p>
           </p:txBody>
         </p:sp>
-        <mc:AlternateContent xmlns:mc="http://schemas.openxmlformats.org/markup-compatibility/2006" xmlns:a14="http://schemas.microsoft.com/office/drawing/2010/main">
-          <mc:Choice Requires="a14">
+        <mc:AlternateContent xmlns:mc="http://schemas.openxmlformats.org/markup-compatibility/2006">
+          <mc:Choice xmlns:a14="http://schemas.microsoft.com/office/drawing/2010/main" Requires="a14">
             <p:sp>
               <p:nvSpPr>
                 <p:cNvPr id="59" name="Textfeld 58">
@@ -28152,12 +27519,12 @@
                       </m:oMath>
                     </m:oMathPara>
                   </a14:m>
-                  <a:endParaRPr/>
+                  <a:endParaRPr lang="en-US" noProof="0" dirty="0"/>
                 </a:p>
               </p:txBody>
             </p:sp>
           </mc:Choice>
-          <mc:Fallback xmlns="">
+          <mc:Fallback>
             <p:sp>
               <p:nvSpPr>
                 <p:cNvPr id="59" name="Textfeld 58">
@@ -28181,9 +27548,9 @@
                   <a:avLst/>
                 </a:prstGeom>
                 <a:blipFill>
-                  <a:blip r:embed="rId18"/>
+                  <a:blip r:embed="rId17"/>
                   <a:stretch>
-                    <a:fillRect r="-7143"/>
+                    <a:fillRect/>
                   </a:stretch>
                 </a:blipFill>
               </p:spPr>
@@ -28250,8 +27617,8 @@
             </a:p>
           </p:txBody>
         </p:sp>
-        <mc:AlternateContent xmlns:mc="http://schemas.openxmlformats.org/markup-compatibility/2006" xmlns:a14="http://schemas.microsoft.com/office/drawing/2010/main">
-          <mc:Choice Requires="a14">
+        <mc:AlternateContent xmlns:mc="http://schemas.openxmlformats.org/markup-compatibility/2006">
+          <mc:Choice xmlns:a14="http://schemas.microsoft.com/office/drawing/2010/main" Requires="a14">
             <p:sp>
               <p:nvSpPr>
                 <p:cNvPr id="61" name="Textfeld 60">
@@ -28318,12 +27685,12 @@
                       </m:oMath>
                     </m:oMathPara>
                   </a14:m>
-                  <a:endParaRPr/>
+                  <a:endParaRPr lang="en-US" noProof="0" dirty="0"/>
                 </a:p>
               </p:txBody>
             </p:sp>
           </mc:Choice>
-          <mc:Fallback xmlns="">
+          <mc:Fallback>
             <p:sp>
               <p:nvSpPr>
                 <p:cNvPr id="61" name="Textfeld 60">
@@ -28347,9 +27714,9 @@
                   <a:avLst/>
                 </a:prstGeom>
                 <a:blipFill>
-                  <a:blip r:embed="rId19"/>
+                  <a:blip r:embed="rId18"/>
                   <a:stretch>
-                    <a:fillRect t="-4000" r="-9091" b="-20000"/>
+                    <a:fillRect/>
                   </a:stretch>
                 </a:blipFill>
               </p:spPr>
@@ -28460,8 +27827,8 @@
             </a:p>
           </p:txBody>
         </p:sp>
-        <mc:AlternateContent xmlns:mc="http://schemas.openxmlformats.org/markup-compatibility/2006" xmlns:a14="http://schemas.microsoft.com/office/drawing/2010/main">
-          <mc:Choice Requires="a14">
+        <mc:AlternateContent xmlns:mc="http://schemas.openxmlformats.org/markup-compatibility/2006">
+          <mc:Choice xmlns:a14="http://schemas.microsoft.com/office/drawing/2010/main" Requires="a14">
             <p:sp>
               <p:nvSpPr>
                 <p:cNvPr id="65" name="Textfeld 64">
@@ -28534,12 +27901,12 @@
                       </m:oMath>
                     </m:oMathPara>
                   </a14:m>
-                  <a:endParaRPr/>
+                  <a:endParaRPr lang="en-US" noProof="0" dirty="0"/>
                 </a:p>
               </p:txBody>
             </p:sp>
           </mc:Choice>
-          <mc:Fallback xmlns="">
+          <mc:Fallback>
             <p:sp>
               <p:nvSpPr>
                 <p:cNvPr id="65" name="Textfeld 64">
@@ -28563,9 +27930,9 @@
                   <a:avLst/>
                 </a:prstGeom>
                 <a:blipFill>
-                  <a:blip r:embed="rId20"/>
+                  <a:blip r:embed="rId19"/>
                   <a:stretch>
-                    <a:fillRect t="-4000" r="-4762" b="-20000"/>
+                    <a:fillRect/>
                   </a:stretch>
                 </a:blipFill>
               </p:spPr>
@@ -28830,7 +28197,7 @@
           <p:nvPr/>
         </p:nvPicPr>
         <p:blipFill>
-          <a:blip r:embed="rId21"/>
+          <a:blip r:embed="rId20"/>
           <a:stretch>
             <a:fillRect/>
           </a:stretch>
@@ -28860,7 +28227,7 @@
           <p:nvPr/>
         </p:nvPicPr>
         <p:blipFill>
-          <a:blip r:embed="rId22"/>
+          <a:blip r:embed="rId21"/>
           <a:stretch>
             <a:fillRect/>
           </a:stretch>
@@ -28890,7 +28257,7 @@
           <p:nvPr/>
         </p:nvPicPr>
         <p:blipFill>
-          <a:blip r:embed="rId23"/>
+          <a:blip r:embed="rId22"/>
           <a:stretch>
             <a:fillRect/>
           </a:stretch>
@@ -28934,20 +28301,8 @@
           <a:lstStyle/>
           <a:p>
             <a:r>
-              <a:rPr lang="de-DE" sz="600" dirty="0" err="1"/>
-              <a:t>graphs</a:t>
-            </a:r>
-            <a:r>
-              <a:rPr lang="de-DE" sz="600" dirty="0"/>
-              <a:t> </a:t>
-            </a:r>
-            <a:r>
-              <a:rPr lang="de-DE" sz="600" dirty="0" err="1"/>
-              <a:t>from</a:t>
-            </a:r>
-            <a:r>
-              <a:rPr lang="de-DE" sz="600" dirty="0"/>
-              <a:t> Joel Tan</a:t>
+              <a:rPr lang="en-US" sz="600" noProof="0" dirty="0"/>
+              <a:t>graphs from Joel Tan</a:t>
             </a:r>
           </a:p>
         </p:txBody>
@@ -29269,8 +28624,8 @@
           </a:p>
         </p:txBody>
       </p:sp>
-      <mc:AlternateContent xmlns:mc="http://schemas.openxmlformats.org/markup-compatibility/2006" xmlns:a14="http://schemas.microsoft.com/office/drawing/2010/main">
-        <mc:Choice Requires="a14">
+      <mc:AlternateContent xmlns:mc="http://schemas.openxmlformats.org/markup-compatibility/2006">
+        <mc:Choice xmlns:a14="http://schemas.microsoft.com/office/drawing/2010/main" Requires="a14">
           <p:sp>
             <p:nvSpPr>
               <p:cNvPr id="3" name="Inhaltsplatzhalter 2">
@@ -29397,7 +28752,7 @@
             </p:txBody>
           </p:sp>
         </mc:Choice>
-        <mc:Fallback xmlns="">
+        <mc:Fallback>
           <p:sp>
             <p:nvSpPr>
               <p:cNvPr id="3" name="Inhaltsplatzhalter 2">
@@ -29557,8 +28912,8 @@
           </a:p>
         </p:txBody>
       </p:sp>
-      <mc:AlternateContent xmlns:mc="http://schemas.openxmlformats.org/markup-compatibility/2006" xmlns:a14="http://schemas.microsoft.com/office/drawing/2010/main">
-        <mc:Choice Requires="a14">
+      <mc:AlternateContent xmlns:mc="http://schemas.openxmlformats.org/markup-compatibility/2006">
+        <mc:Choice xmlns:a14="http://schemas.microsoft.com/office/drawing/2010/main" Requires="a14">
           <p:sp>
             <p:nvSpPr>
               <p:cNvPr id="6" name="Inhaltsplatzhalter 2">
@@ -29899,7 +29254,7 @@
             </p:txBody>
           </p:sp>
         </mc:Choice>
-        <mc:Fallback xmlns="">
+        <mc:Fallback>
           <p:sp>
             <p:nvSpPr>
               <p:cNvPr id="6" name="Inhaltsplatzhalter 2">
@@ -29944,8 +29299,8 @@
           </p:sp>
         </mc:Fallback>
       </mc:AlternateContent>
-      <mc:AlternateContent xmlns:mc="http://schemas.openxmlformats.org/markup-compatibility/2006" xmlns:a14="http://schemas.microsoft.com/office/drawing/2010/main">
-        <mc:Choice Requires="a14">
+      <mc:AlternateContent xmlns:mc="http://schemas.openxmlformats.org/markup-compatibility/2006">
+        <mc:Choice xmlns:a14="http://schemas.microsoft.com/office/drawing/2010/main" Requires="a14">
           <p:sp>
             <p:nvSpPr>
               <p:cNvPr id="7" name="Inhaltsplatzhalter 2">
@@ -30249,7 +29604,7 @@
             </p:txBody>
           </p:sp>
         </mc:Choice>
-        <mc:Fallback xmlns="">
+        <mc:Fallback>
           <p:sp>
             <p:nvSpPr>
               <p:cNvPr id="7" name="Inhaltsplatzhalter 2">
@@ -30294,6 +29649,88 @@
           </p:sp>
         </mc:Fallback>
       </mc:AlternateContent>
+      <p:sp>
+        <p:nvSpPr>
+          <p:cNvPr id="8" name="Textfeld 7">
+            <a:extLst>
+              <a:ext uri="{FF2B5EF4-FFF2-40B4-BE49-F238E27FC236}">
+                <a16:creationId xmlns:a16="http://schemas.microsoft.com/office/drawing/2014/main" id="{1DDDC76F-6DC5-CACA-07E8-7F39BB6792E1}"/>
+              </a:ext>
+            </a:extLst>
+          </p:cNvPr>
+          <p:cNvSpPr txBox="1"/>
+          <p:nvPr/>
+        </p:nvSpPr>
+        <p:spPr>
+          <a:xfrm>
+            <a:off x="466780" y="4260238"/>
+            <a:ext cx="7019870" cy="338554"/>
+          </a:xfrm>
+          <a:prstGeom prst="rect">
+            <a:avLst/>
+          </a:prstGeom>
+          <a:noFill/>
+        </p:spPr>
+        <p:txBody>
+          <a:bodyPr wrap="none" rtlCol="0">
+            <a:spAutoFit/>
+          </a:bodyPr>
+          <a:lstStyle/>
+          <a:p>
+            <a:r>
+              <a:rPr lang="en-US" sz="1600" noProof="0" dirty="0">
+                <a:latin typeface="Segoe UI" panose="020B0502040204020203" pitchFamily="34" charset="0"/>
+                <a:cs typeface="Segoe UI" panose="020B0502040204020203" pitchFamily="34" charset="0"/>
+              </a:rPr>
+              <a:t>Video recommendation: </a:t>
+            </a:r>
+            <a:r>
+              <a:rPr lang="en-US" sz="1600" noProof="0" dirty="0">
+                <a:latin typeface="Segoe UI" panose="020B0502040204020203" pitchFamily="34" charset="0"/>
+                <a:cs typeface="Segoe UI" panose="020B0502040204020203" pitchFamily="34" charset="0"/>
+                <a:hlinkClick r:id="rId5"/>
+              </a:rPr>
+              <a:t>https://</a:t>
+            </a:r>
+            <a:r>
+              <a:rPr lang="en-US" sz="1600" noProof="0" dirty="0" err="1">
+                <a:latin typeface="Segoe UI" panose="020B0502040204020203" pitchFamily="34" charset="0"/>
+                <a:cs typeface="Segoe UI" panose="020B0502040204020203" pitchFamily="34" charset="0"/>
+                <a:hlinkClick r:id="rId5"/>
+              </a:rPr>
+              <a:t>www.youtube.com</a:t>
+            </a:r>
+            <a:r>
+              <a:rPr lang="en-US" sz="1600" noProof="0" dirty="0">
+                <a:latin typeface="Segoe UI" panose="020B0502040204020203" pitchFamily="34" charset="0"/>
+                <a:cs typeface="Segoe UI" panose="020B0502040204020203" pitchFamily="34" charset="0"/>
+                <a:hlinkClick r:id="rId5"/>
+              </a:rPr>
+              <a:t>/</a:t>
+            </a:r>
+            <a:r>
+              <a:rPr lang="en-US" sz="1600" noProof="0" dirty="0" err="1">
+                <a:latin typeface="Segoe UI" panose="020B0502040204020203" pitchFamily="34" charset="0"/>
+                <a:cs typeface="Segoe UI" panose="020B0502040204020203" pitchFamily="34" charset="0"/>
+                <a:hlinkClick r:id="rId5"/>
+              </a:rPr>
+              <a:t>watch?v</a:t>
+            </a:r>
+            <a:r>
+              <a:rPr lang="en-US" sz="1600" noProof="0" dirty="0">
+                <a:latin typeface="Segoe UI" panose="020B0502040204020203" pitchFamily="34" charset="0"/>
+                <a:cs typeface="Segoe UI" panose="020B0502040204020203" pitchFamily="34" charset="0"/>
+                <a:hlinkClick r:id="rId5"/>
+              </a:rPr>
+              <a:t>=UR0hOmjaHp0</a:t>
+            </a:r>
+            <a:endParaRPr lang="en-US" sz="1600" noProof="0" dirty="0">
+              <a:latin typeface="Segoe UI" panose="020B0502040204020203" pitchFamily="34" charset="0"/>
+              <a:cs typeface="Segoe UI" panose="020B0502040204020203" pitchFamily="34" charset="0"/>
+            </a:endParaRPr>
+          </a:p>
+        </p:txBody>
+      </p:sp>
     </p:spTree>
     <p:extLst>
       <p:ext uri="{BB962C8B-B14F-4D97-AF65-F5344CB8AC3E}">
@@ -30388,8 +29825,8 @@
           </a:p>
         </p:txBody>
       </p:sp>
-      <mc:AlternateContent xmlns:mc="http://schemas.openxmlformats.org/markup-compatibility/2006" xmlns:a14="http://schemas.microsoft.com/office/drawing/2010/main">
-        <mc:Choice Requires="a14">
+      <mc:AlternateContent xmlns:mc="http://schemas.openxmlformats.org/markup-compatibility/2006">
+        <mc:Choice xmlns:a14="http://schemas.microsoft.com/office/drawing/2010/main" Requires="a14">
           <p:graphicFrame>
             <p:nvGraphicFramePr>
               <p:cNvPr id="6" name="Inhaltsplatzhalter 5">
@@ -30406,7 +29843,7 @@
                 <p:ph idx="1"/>
                 <p:extLst>
                   <p:ext uri="{D42A27DB-BD31-4B8C-83A1-F6EECF244321}">
-                    <p14:modId xmlns:p14="http://schemas.microsoft.com/office/powerpoint/2010/main" val="3227000160"/>
+                    <p14:modId xmlns:p14="http://schemas.microsoft.com/office/powerpoint/2010/main" val="1157258253"/>
                   </p:ext>
                 </p:extLst>
               </p:nvPr>
@@ -30586,7 +30023,7 @@
             </a:graphic>
           </p:graphicFrame>
         </mc:Choice>
-        <mc:Fallback xmlns="">
+        <mc:Fallback>
           <p:graphicFrame>
             <p:nvGraphicFramePr>
               <p:cNvPr id="6" name="Inhaltsplatzhalter 5">
@@ -30603,7 +30040,7 @@
                 <p:ph idx="1"/>
                 <p:extLst>
                   <p:ext uri="{D42A27DB-BD31-4B8C-83A1-F6EECF244321}">
-                    <p14:modId xmlns:p14="http://schemas.microsoft.com/office/powerpoint/2010/main" val="3227000160"/>
+                    <p14:modId xmlns:p14="http://schemas.microsoft.com/office/powerpoint/2010/main" val="1157258253"/>
                   </p:ext>
                 </p:extLst>
               </p:nvPr>
@@ -30867,8 +30304,8 @@
           </a:p>
         </p:txBody>
       </p:sp>
-      <mc:AlternateContent xmlns:mc="http://schemas.openxmlformats.org/markup-compatibility/2006" xmlns:a14="http://schemas.microsoft.com/office/drawing/2010/main">
-        <mc:Choice Requires="a14">
+      <mc:AlternateContent xmlns:mc="http://schemas.openxmlformats.org/markup-compatibility/2006">
+        <mc:Choice xmlns:a14="http://schemas.microsoft.com/office/drawing/2010/main" Requires="a14">
           <p:sp>
             <p:nvSpPr>
               <p:cNvPr id="7" name="Textfeld 6">
@@ -31081,7 +30518,7 @@
             </p:txBody>
           </p:sp>
         </mc:Choice>
-        <mc:Fallback xmlns="">
+        <mc:Fallback>
           <p:sp>
             <p:nvSpPr>
               <p:cNvPr id="7" name="Textfeld 6">
@@ -31307,8 +30744,8 @@
           </a:p>
         </p:txBody>
       </p:sp>
-      <mc:AlternateContent xmlns:mc="http://schemas.openxmlformats.org/markup-compatibility/2006" xmlns:a14="http://schemas.microsoft.com/office/drawing/2010/main">
-        <mc:Choice Requires="a14">
+      <mc:AlternateContent xmlns:mc="http://schemas.openxmlformats.org/markup-compatibility/2006">
+        <mc:Choice xmlns:a14="http://schemas.microsoft.com/office/drawing/2010/main" Requires="a14">
           <p:sp>
             <p:nvSpPr>
               <p:cNvPr id="10" name="Textfeld 9">
@@ -31583,7 +31020,7 @@
             </p:txBody>
           </p:sp>
         </mc:Choice>
-        <mc:Fallback xmlns="">
+        <mc:Fallback>
           <p:sp>
             <p:nvSpPr>
               <p:cNvPr id="10" name="Textfeld 9">
@@ -32840,8 +32277,8 @@
           </a:p>
         </p:txBody>
       </p:sp>
-      <mc:AlternateContent xmlns:mc="http://schemas.openxmlformats.org/markup-compatibility/2006" xmlns:a14="http://schemas.microsoft.com/office/drawing/2010/main">
-        <mc:Choice Requires="a14">
+      <mc:AlternateContent xmlns:mc="http://schemas.openxmlformats.org/markup-compatibility/2006">
+        <mc:Choice xmlns:a14="http://schemas.microsoft.com/office/drawing/2010/main" Requires="a14">
           <p:sp>
             <p:nvSpPr>
               <p:cNvPr id="3" name="Inhaltsplatzhalter 2">
@@ -32880,7 +32317,7 @@
                 <a14:m>
                   <m:oMath xmlns:m="http://schemas.openxmlformats.org/officeDocument/2006/math">
                     <m:r>
-                      <a:rPr lang="de-CH" i="1" dirty="0" smtClean="0">
+                      <a:rPr lang="en-US" i="1" noProof="0" smtClean="0">
                         <a:latin typeface="Cambria Math" panose="02040503050406030204" pitchFamily="18" charset="0"/>
                       </a:rPr>
                       <m:t>𝐺</m:t>
@@ -32888,14 +32325,14 @@
                     <m:d>
                       <m:dPr>
                         <m:ctrlPr>
-                          <a:rPr lang="de-CH" i="1" dirty="0">
+                          <a:rPr lang="en-US" i="1" noProof="0" smtClean="0">
                             <a:latin typeface="Cambria Math" panose="02040503050406030204" pitchFamily="18" charset="0"/>
                           </a:rPr>
                         </m:ctrlPr>
                       </m:dPr>
                       <m:e>
                         <m:r>
-                          <a:rPr lang="de-CH" i="1" dirty="0">
+                          <a:rPr lang="en-US" i="1" noProof="0" smtClean="0">
                             <a:latin typeface="Cambria Math" panose="02040503050406030204" pitchFamily="18" charset="0"/>
                           </a:rPr>
                           <m:t>𝑠</m:t>
@@ -32903,7 +32340,7 @@
                       </m:e>
                     </m:d>
                     <m:r>
-                      <a:rPr lang="de-CH" i="1" dirty="0">
+                      <a:rPr lang="en-US" i="1" noProof="0" smtClean="0">
                         <a:latin typeface="Cambria Math" panose="02040503050406030204" pitchFamily="18" charset="0"/>
                       </a:rPr>
                       <m:t>=</m:t>
@@ -32911,20 +32348,20 @@
                     <m:f>
                       <m:fPr>
                         <m:ctrlPr>
-                          <a:rPr lang="de-CH" i="1" dirty="0">
+                          <a:rPr lang="en-US" i="1" noProof="0" smtClean="0">
                             <a:latin typeface="Cambria Math" panose="02040503050406030204" pitchFamily="18" charset="0"/>
                           </a:rPr>
                         </m:ctrlPr>
                       </m:fPr>
                       <m:num>
                         <m:r>
-                          <a:rPr lang="de-CH" i="1" dirty="0">
+                          <a:rPr lang="en-US" i="1" noProof="0" smtClean="0">
                             <a:latin typeface="Cambria Math" panose="02040503050406030204" pitchFamily="18" charset="0"/>
                           </a:rPr>
                           <m:t>𝑠</m:t>
                         </m:r>
                         <m:r>
-                          <a:rPr lang="de-CH" i="1" dirty="0">
+                          <a:rPr lang="en-US" i="1" noProof="0" smtClean="0">
                             <a:latin typeface="Cambria Math" panose="02040503050406030204" pitchFamily="18" charset="0"/>
                           </a:rPr>
                           <m:t>+2</m:t>
@@ -32934,20 +32371,20 @@
                         <m:d>
                           <m:dPr>
                             <m:ctrlPr>
-                              <a:rPr lang="de-CH" i="1" dirty="0">
+                              <a:rPr lang="en-US" i="1" noProof="0" smtClean="0">
                                 <a:latin typeface="Cambria Math" panose="02040503050406030204" pitchFamily="18" charset="0"/>
                               </a:rPr>
                             </m:ctrlPr>
                           </m:dPr>
                           <m:e>
                             <m:r>
-                              <a:rPr lang="de-CH" i="1" dirty="0">
+                              <a:rPr lang="en-US" i="1" noProof="0" smtClean="0">
                                 <a:latin typeface="Cambria Math" panose="02040503050406030204" pitchFamily="18" charset="0"/>
                               </a:rPr>
                               <m:t>𝑠</m:t>
                             </m:r>
                             <m:r>
-                              <a:rPr lang="de-CH" i="1" dirty="0">
+                              <a:rPr lang="en-US" i="1" noProof="0" smtClean="0">
                                 <a:latin typeface="Cambria Math" panose="02040503050406030204" pitchFamily="18" charset="0"/>
                               </a:rPr>
                               <m:t>+3</m:t>
@@ -32957,20 +32394,20 @@
                         <m:d>
                           <m:dPr>
                             <m:ctrlPr>
-                              <a:rPr lang="de-CH" i="1" dirty="0">
+                              <a:rPr lang="en-US" i="1" noProof="0" smtClean="0">
                                 <a:latin typeface="Cambria Math" panose="02040503050406030204" pitchFamily="18" charset="0"/>
                               </a:rPr>
                             </m:ctrlPr>
                           </m:dPr>
                           <m:e>
                             <m:r>
-                              <a:rPr lang="de-CH" i="1" dirty="0">
+                              <a:rPr lang="en-US" i="1" noProof="0" smtClean="0">
                                 <a:latin typeface="Cambria Math" panose="02040503050406030204" pitchFamily="18" charset="0"/>
                               </a:rPr>
                               <m:t>𝑠</m:t>
                             </m:r>
                             <m:r>
-                              <a:rPr lang="de-CH" i="1" dirty="0">
+                              <a:rPr lang="en-US" i="1" noProof="0" smtClean="0">
                                 <a:latin typeface="Cambria Math" panose="02040503050406030204" pitchFamily="18" charset="0"/>
                               </a:rPr>
                               <m:t>+4</m:t>
@@ -32980,20 +32417,20 @@
                         <m:d>
                           <m:dPr>
                             <m:ctrlPr>
-                              <a:rPr lang="de-CH" i="1" dirty="0">
+                              <a:rPr lang="en-US" i="1" noProof="0" smtClean="0">
                                 <a:latin typeface="Cambria Math" panose="02040503050406030204" pitchFamily="18" charset="0"/>
                               </a:rPr>
                             </m:ctrlPr>
                           </m:dPr>
                           <m:e>
                             <m:r>
-                              <a:rPr lang="de-CH" i="1" dirty="0">
+                              <a:rPr lang="en-US" i="1" noProof="0" smtClean="0">
                                 <a:latin typeface="Cambria Math" panose="02040503050406030204" pitchFamily="18" charset="0"/>
                               </a:rPr>
                               <m:t>𝑠</m:t>
                             </m:r>
                             <m:r>
-                              <a:rPr lang="de-CH" i="1" dirty="0">
+                              <a:rPr lang="en-US" i="1" noProof="0" smtClean="0">
                                 <a:latin typeface="Cambria Math" panose="02040503050406030204" pitchFamily="18" charset="0"/>
                               </a:rPr>
                               <m:t>+5</m:t>
@@ -33003,20 +32440,20 @@
                         <m:d>
                           <m:dPr>
                             <m:ctrlPr>
-                              <a:rPr lang="de-CH" i="1" dirty="0">
+                              <a:rPr lang="en-US" i="1" noProof="0" smtClean="0">
                                 <a:latin typeface="Cambria Math" panose="02040503050406030204" pitchFamily="18" charset="0"/>
                               </a:rPr>
                             </m:ctrlPr>
                           </m:dPr>
                           <m:e>
                             <m:r>
-                              <a:rPr lang="de-CH" i="1" dirty="0">
+                              <a:rPr lang="en-US" i="1" noProof="0" smtClean="0">
                                 <a:latin typeface="Cambria Math" panose="02040503050406030204" pitchFamily="18" charset="0"/>
                               </a:rPr>
                               <m:t>𝑠</m:t>
                             </m:r>
                             <m:r>
-                              <a:rPr lang="de-CH" i="1" dirty="0">
+                              <a:rPr lang="en-US" i="1" noProof="0" smtClean="0">
                                 <a:latin typeface="Cambria Math" panose="02040503050406030204" pitchFamily="18" charset="0"/>
                               </a:rPr>
                               <m:t>+6</m:t>
@@ -33035,7 +32472,7 @@
                   <a:buAutoNum type="arabicPeriod"/>
                 </a:pPr>
                 <a:r>
-                  <a:rPr lang="en-US" dirty="0"/>
+                  <a:rPr lang="en-US" noProof="0" dirty="0"/>
                   <a:t>Calculate poles &amp; zeros of the open-loop</a:t>
                 </a:r>
               </a:p>
@@ -33052,7 +32489,7 @@
                   <a:buAutoNum type="arabicPeriod"/>
                 </a:pPr>
                 <a:r>
-                  <a:rPr lang="en-US" dirty="0"/>
+                  <a:rPr lang="en-US" noProof="0" dirty="0"/>
                   <a:t>Analyze the real axis (which segments are on RL?)</a:t>
                 </a:r>
               </a:p>
@@ -33062,7 +32499,7 @@
                   <a:buAutoNum type="arabicPeriod"/>
                 </a:pPr>
                 <a:r>
-                  <a:rPr lang="en-US" dirty="0"/>
+                  <a:rPr lang="en-US" noProof="0" dirty="0"/>
                   <a:t>Calculate the asymptotes for the excess poles:</a:t>
                 </a:r>
               </a:p>
@@ -33071,21 +32508,21 @@
                   <a:buFont typeface="+mj-lt"/>
                   <a:buAutoNum type="arabicPeriod"/>
                 </a:pPr>
-                <a:endParaRPr lang="en-US" dirty="0"/>
+                <a:endParaRPr lang="en-US" noProof="0" dirty="0"/>
               </a:p>
               <a:p>
                 <a:pPr marL="342900" indent="-342900">
                   <a:buFont typeface="+mj-lt"/>
                   <a:buAutoNum type="arabicPeriod"/>
                 </a:pPr>
-                <a:endParaRPr lang="en-US" dirty="0"/>
+                <a:endParaRPr lang="en-US" noProof="0" dirty="0"/>
               </a:p>
               <a:p>
                 <a:pPr marL="342900" indent="-342900">
                   <a:buFont typeface="+mj-lt"/>
                   <a:buAutoNum type="arabicPeriod"/>
                 </a:pPr>
-                <a:endParaRPr lang="en-US" dirty="0"/>
+                <a:endParaRPr lang="en-US" noProof="0" dirty="0"/>
               </a:p>
               <a:p>
                 <a:pPr marL="342900" indent="-342900">
@@ -33093,7 +32530,7 @@
                   <a:buAutoNum type="arabicPeriod"/>
                 </a:pPr>
                 <a:r>
-                  <a:rPr lang="en-US" dirty="0"/>
+                  <a:rPr lang="en-US" noProof="0" dirty="0"/>
                   <a:t>Draw Root Locus</a:t>
                 </a:r>
               </a:p>
@@ -33109,7 +32546,7 @@
                   <a:buFont typeface="+mj-lt"/>
                   <a:buAutoNum type="arabicPeriod"/>
                 </a:pPr>
-                <a:endParaRPr lang="en-US" dirty="0"/>
+                <a:endParaRPr lang="en-US" noProof="0" dirty="0"/>
               </a:p>
               <a:p>
                 <a:pPr marL="342900" indent="-342900">
@@ -33128,7 +32565,7 @@
             </p:txBody>
           </p:sp>
         </mc:Choice>
-        <mc:Fallback xmlns="">
+        <mc:Fallback>
           <p:sp>
             <p:nvSpPr>
               <p:cNvPr id="3" name="Inhaltsplatzhalter 2">
@@ -33468,8 +32905,8 @@
               </a:p>
             </p:txBody>
           </p:sp>
-          <mc:AlternateContent xmlns:mc="http://schemas.openxmlformats.org/markup-compatibility/2006" xmlns:a14="http://schemas.microsoft.com/office/drawing/2010/main">
-            <mc:Choice Requires="a14">
+          <mc:AlternateContent xmlns:mc="http://schemas.openxmlformats.org/markup-compatibility/2006">
+            <mc:Choice xmlns:a14="http://schemas.microsoft.com/office/drawing/2010/main" Requires="a14">
               <p:sp>
                 <p:nvSpPr>
                   <p:cNvPr id="24" name="Textfeld 23">
@@ -33544,7 +32981,7 @@
                 </p:txBody>
               </p:sp>
             </mc:Choice>
-            <mc:Fallback xmlns="">
+            <mc:Fallback>
               <p:sp>
                 <p:nvSpPr>
                   <p:cNvPr id="24" name="Textfeld 23">
@@ -33658,8 +33095,8 @@
               </a:p>
             </p:txBody>
           </p:sp>
-          <mc:AlternateContent xmlns:mc="http://schemas.openxmlformats.org/markup-compatibility/2006" xmlns:a14="http://schemas.microsoft.com/office/drawing/2010/main">
-            <mc:Choice Requires="a14">
+          <mc:AlternateContent xmlns:mc="http://schemas.openxmlformats.org/markup-compatibility/2006">
+            <mc:Choice xmlns:a14="http://schemas.microsoft.com/office/drawing/2010/main" Requires="a14">
               <p:sp>
                 <p:nvSpPr>
                   <p:cNvPr id="22" name="Textfeld 21">
@@ -33710,7 +33147,7 @@
                 </p:txBody>
               </p:sp>
             </mc:Choice>
-            <mc:Fallback xmlns="">
+            <mc:Fallback>
               <p:sp>
                 <p:nvSpPr>
                   <p:cNvPr id="22" name="Textfeld 21">
@@ -33845,8 +33282,8 @@
             </a:fontRef>
           </p:style>
         </p:cxnSp>
-        <mc:AlternateContent xmlns:mc="http://schemas.openxmlformats.org/markup-compatibility/2006" xmlns:a14="http://schemas.microsoft.com/office/drawing/2010/main">
-          <mc:Choice Requires="a14">
+        <mc:AlternateContent xmlns:mc="http://schemas.openxmlformats.org/markup-compatibility/2006">
+          <mc:Choice xmlns:a14="http://schemas.microsoft.com/office/drawing/2010/main" Requires="a14">
             <p:sp>
               <p:nvSpPr>
                 <p:cNvPr id="15" name="Textfeld 14">
@@ -33902,7 +33339,7 @@
               </p:txBody>
             </p:sp>
           </mc:Choice>
-          <mc:Fallback xmlns="">
+          <mc:Fallback>
             <p:sp>
               <p:nvSpPr>
                 <p:cNvPr id="15" name="Textfeld 14">
@@ -33947,8 +33384,8 @@
             </p:sp>
           </mc:Fallback>
         </mc:AlternateContent>
-        <mc:AlternateContent xmlns:mc="http://schemas.openxmlformats.org/markup-compatibility/2006" xmlns:a14="http://schemas.microsoft.com/office/drawing/2010/main">
-          <mc:Choice Requires="a14">
+        <mc:AlternateContent xmlns:mc="http://schemas.openxmlformats.org/markup-compatibility/2006">
+          <mc:Choice xmlns:a14="http://schemas.microsoft.com/office/drawing/2010/main" Requires="a14">
             <p:sp>
               <p:nvSpPr>
                 <p:cNvPr id="16" name="Textfeld 15">
@@ -34004,7 +33441,7 @@
               </p:txBody>
             </p:sp>
           </mc:Choice>
-          <mc:Fallback xmlns="">
+          <mc:Fallback>
             <p:sp>
               <p:nvSpPr>
                 <p:cNvPr id="16" name="Textfeld 15">
@@ -34136,8 +33573,8 @@
             </a:fontRef>
           </p:style>
         </p:cxnSp>
-        <mc:AlternateContent xmlns:mc="http://schemas.openxmlformats.org/markup-compatibility/2006" xmlns:a14="http://schemas.microsoft.com/office/drawing/2010/main">
-          <mc:Choice Requires="a14">
+        <mc:AlternateContent xmlns:mc="http://schemas.openxmlformats.org/markup-compatibility/2006">
+          <mc:Choice xmlns:a14="http://schemas.microsoft.com/office/drawing/2010/main" Requires="a14">
             <p:sp>
               <p:nvSpPr>
                 <p:cNvPr id="19" name="Textfeld 18">
@@ -34193,7 +33630,7 @@
               </p:txBody>
             </p:sp>
           </mc:Choice>
-          <mc:Fallback xmlns="">
+          <mc:Fallback>
             <p:sp>
               <p:nvSpPr>
                 <p:cNvPr id="19" name="Textfeld 18">
@@ -34283,8 +33720,8 @@
           </p:style>
         </p:cxnSp>
       </p:grpSp>
-      <mc:AlternateContent xmlns:mc="http://schemas.openxmlformats.org/markup-compatibility/2006" xmlns:a14="http://schemas.microsoft.com/office/drawing/2010/main">
-        <mc:Choice Requires="a14">
+      <mc:AlternateContent xmlns:mc="http://schemas.openxmlformats.org/markup-compatibility/2006">
+        <mc:Choice xmlns:a14="http://schemas.microsoft.com/office/drawing/2010/main" Requires="a14">
           <p:sp>
             <p:nvSpPr>
               <p:cNvPr id="25" name="Textfeld 24">
@@ -34334,7 +33771,7 @@
             </p:txBody>
           </p:sp>
         </mc:Choice>
-        <mc:Fallback xmlns="">
+        <mc:Fallback>
           <p:sp>
             <p:nvSpPr>
               <p:cNvPr id="25" name="Textfeld 24">
@@ -34379,8 +33816,8 @@
           </p:sp>
         </mc:Fallback>
       </mc:AlternateContent>
-      <mc:AlternateContent xmlns:mc="http://schemas.openxmlformats.org/markup-compatibility/2006" xmlns:a14="http://schemas.microsoft.com/office/drawing/2010/main">
-        <mc:Choice Requires="a14">
+      <mc:AlternateContent xmlns:mc="http://schemas.openxmlformats.org/markup-compatibility/2006">
+        <mc:Choice xmlns:a14="http://schemas.microsoft.com/office/drawing/2010/main" Requires="a14">
           <p:sp>
             <p:nvSpPr>
               <p:cNvPr id="26" name="Textfeld 25">
@@ -34430,7 +33867,7 @@
             </p:txBody>
           </p:sp>
         </mc:Choice>
-        <mc:Fallback xmlns="">
+        <mc:Fallback>
           <p:sp>
             <p:nvSpPr>
               <p:cNvPr id="26" name="Textfeld 25">
@@ -34475,8 +33912,8 @@
           </p:sp>
         </mc:Fallback>
       </mc:AlternateContent>
-      <mc:AlternateContent xmlns:mc="http://schemas.openxmlformats.org/markup-compatibility/2006" xmlns:a14="http://schemas.microsoft.com/office/drawing/2010/main">
-        <mc:Choice Requires="a14">
+      <mc:AlternateContent xmlns:mc="http://schemas.openxmlformats.org/markup-compatibility/2006">
+        <mc:Choice xmlns:a14="http://schemas.microsoft.com/office/drawing/2010/main" Requires="a14">
           <p:sp>
             <p:nvSpPr>
               <p:cNvPr id="7" name="Rectangle: Rounded Corners 17">
@@ -34706,19 +34143,19 @@
                         </m:num>
                         <m:den>
                           <m:r>
-                            <a:rPr lang="de-CH" b="0" i="1" noProof="0" smtClean="0">
+                            <a:rPr lang="en-US" b="0" i="1" noProof="0" smtClean="0">
                               <a:latin typeface="Cambria Math" panose="02040503050406030204" pitchFamily="18" charset="0"/>
                             </a:rPr>
                             <m:t>𝑛</m:t>
                           </m:r>
                           <m:r>
-                            <a:rPr lang="de-CH" b="0" i="1" noProof="0" smtClean="0">
+                            <a:rPr lang="en-US" b="0" i="1" noProof="0" smtClean="0">
                               <a:latin typeface="Cambria Math" panose="02040503050406030204" pitchFamily="18" charset="0"/>
                             </a:rPr>
                             <m:t>−</m:t>
                           </m:r>
                           <m:r>
-                            <a:rPr lang="de-CH" b="0" i="1" noProof="0" smtClean="0">
+                            <a:rPr lang="en-US" b="0" i="1" noProof="0" smtClean="0">
                               <a:latin typeface="Cambria Math" panose="02040503050406030204" pitchFamily="18" charset="0"/>
                             </a:rPr>
                             <m:t>𝑚</m:t>
@@ -34733,7 +34170,7 @@
             </p:txBody>
           </p:sp>
         </mc:Choice>
-        <mc:Fallback xmlns="">
+        <mc:Fallback>
           <p:sp>
             <p:nvSpPr>
               <p:cNvPr id="7" name="Rectangle: Rounded Corners 17">
@@ -34783,8 +34220,8 @@
           </p:sp>
         </mc:Fallback>
       </mc:AlternateContent>
-      <mc:AlternateContent xmlns:mc="http://schemas.openxmlformats.org/markup-compatibility/2006" xmlns:a14="http://schemas.microsoft.com/office/drawing/2010/main">
-        <mc:Choice Requires="a14">
+      <mc:AlternateContent xmlns:mc="http://schemas.openxmlformats.org/markup-compatibility/2006">
+        <mc:Choice xmlns:a14="http://schemas.microsoft.com/office/drawing/2010/main" Requires="a14">
           <p:sp>
             <p:nvSpPr>
               <p:cNvPr id="27" name="Rectangle: Rounded Corners 17">
@@ -34845,19 +34282,19 @@
                     </m:oMathParaPr>
                     <m:oMath xmlns:m="http://schemas.openxmlformats.org/officeDocument/2006/math">
                       <m:r>
-                        <a:rPr lang="ar-AE" sz="1200" i="1">
+                        <a:rPr lang="en-US" sz="1200" i="1" noProof="0" smtClean="0">
                           <a:latin typeface="Cambria Math" panose="02040503050406030204" pitchFamily="18" charset="0"/>
                         </a:rPr>
                         <m:t>∠</m:t>
                       </m:r>
                       <m:r>
-                        <a:rPr lang="ar-AE" sz="1200" i="1">
+                        <a:rPr lang="en-US" sz="1200" i="1" noProof="0" smtClean="0">
                           <a:latin typeface="Cambria Math" panose="02040503050406030204" pitchFamily="18" charset="0"/>
                         </a:rPr>
                         <m:t>𝑠</m:t>
                       </m:r>
                       <m:r>
-                        <a:rPr lang="ar-AE" sz="1200" i="1">
+                        <a:rPr lang="en-US" sz="1200" i="1" noProof="0" smtClean="0">
                           <a:latin typeface="Cambria Math" panose="02040503050406030204" pitchFamily="18" charset="0"/>
                         </a:rPr>
                         <m:t>=</m:t>
@@ -34865,14 +34302,14 @@
                       <m:f>
                         <m:fPr>
                           <m:ctrlPr>
-                            <a:rPr lang="ar-AE" sz="1200" i="1">
+                            <a:rPr lang="en-US" sz="1200" i="1" noProof="0" smtClean="0">
                               <a:latin typeface="Cambria Math" panose="02040503050406030204" pitchFamily="18" charset="0"/>
                             </a:rPr>
                           </m:ctrlPr>
                         </m:fPr>
                         <m:num>
                           <m:r>
-                            <a:rPr lang="ar-AE" sz="1200" i="1">
+                            <a:rPr lang="en-US" sz="1200" i="1" noProof="0" smtClean="0">
                               <a:latin typeface="Cambria Math" panose="02040503050406030204" pitchFamily="18" charset="0"/>
                             </a:rPr>
                             <m:t>∠</m:t>
@@ -34880,20 +34317,20 @@
                           <m:d>
                             <m:dPr>
                               <m:ctrlPr>
-                                <a:rPr lang="ar-AE" sz="1200" i="1">
+                                <a:rPr lang="en-US" sz="1200" i="1" noProof="0" smtClean="0">
                                   <a:latin typeface="Cambria Math" panose="02040503050406030204" pitchFamily="18" charset="0"/>
                                 </a:rPr>
                               </m:ctrlPr>
                             </m:dPr>
                             <m:e>
                               <m:r>
-                                <a:rPr lang="ar-AE" sz="1200" i="1">
+                                <a:rPr lang="en-US" sz="1200" i="1" noProof="0" smtClean="0">
                                   <a:latin typeface="Cambria Math" panose="02040503050406030204" pitchFamily="18" charset="0"/>
                                 </a:rPr>
                                 <m:t>−</m:t>
                               </m:r>
                               <m:r>
-                                <a:rPr lang="ar-AE" sz="1200" i="1">
+                                <a:rPr lang="en-US" sz="1200" i="1" noProof="0" smtClean="0">
                                   <a:latin typeface="Cambria Math" panose="02040503050406030204" pitchFamily="18" charset="0"/>
                                 </a:rPr>
                                 <m:t>𝑘</m:t>
@@ -34901,19 +34338,19 @@
                             </m:e>
                           </m:d>
                           <m:r>
-                            <a:rPr lang="ar-AE" sz="1200" i="1">
+                            <a:rPr lang="en-US" sz="1200" i="1" noProof="0" smtClean="0">
                               <a:latin typeface="Cambria Math" panose="02040503050406030204" pitchFamily="18" charset="0"/>
                             </a:rPr>
                             <m:t>±</m:t>
                           </m:r>
                           <m:r>
-                            <a:rPr lang="ar-AE" sz="1200" i="1">
+                            <a:rPr lang="en-US" sz="1200" i="1" noProof="0" smtClean="0">
                               <a:latin typeface="Cambria Math" panose="02040503050406030204" pitchFamily="18" charset="0"/>
                             </a:rPr>
                             <m:t>𝑞</m:t>
                           </m:r>
                           <m:r>
-                            <a:rPr lang="ar-AE" sz="1200" i="1">
+                            <a:rPr lang="en-US" sz="1200" i="1" noProof="0" smtClean="0">
                               <a:latin typeface="Cambria Math" panose="02040503050406030204" pitchFamily="18" charset="0"/>
                             </a:rPr>
                             <m:t>⋅360°</m:t>
@@ -34921,19 +34358,19 @@
                         </m:num>
                         <m:den>
                           <m:r>
-                            <a:rPr lang="de-CH" sz="1200" b="0" i="1" smtClean="0">
+                            <a:rPr lang="en-US" sz="1200" b="0" i="1" noProof="0" smtClean="0">
                               <a:latin typeface="Cambria Math" panose="02040503050406030204" pitchFamily="18" charset="0"/>
                             </a:rPr>
                             <m:t>𝑛</m:t>
                           </m:r>
                           <m:r>
-                            <a:rPr lang="de-CH" sz="1200" b="0" i="1" smtClean="0">
+                            <a:rPr lang="en-US" sz="1200" b="0" i="1" noProof="0" smtClean="0">
                               <a:latin typeface="Cambria Math" panose="02040503050406030204" pitchFamily="18" charset="0"/>
                             </a:rPr>
                             <m:t>−</m:t>
                           </m:r>
                           <m:r>
-                            <a:rPr lang="de-CH" sz="1200" b="0" i="1" smtClean="0">
+                            <a:rPr lang="en-US" sz="1200" b="0" i="1" noProof="0" smtClean="0">
                               <a:latin typeface="Cambria Math" panose="02040503050406030204" pitchFamily="18" charset="0"/>
                             </a:rPr>
                             <m:t>𝑚</m:t>
@@ -34943,12 +34380,12 @@
                     </m:oMath>
                   </m:oMathPara>
                 </a14:m>
-                <a:endParaRPr lang="ar-AE" sz="1200" dirty="0"/>
+                <a:endParaRPr lang="en-US" sz="1200" noProof="0" dirty="0"/>
               </a:p>
             </p:txBody>
           </p:sp>
         </mc:Choice>
-        <mc:Fallback xmlns="">
+        <mc:Fallback>
           <p:sp>
             <p:nvSpPr>
               <p:cNvPr id="27" name="Rectangle: Rounded Corners 17">
@@ -35288,7 +34725,7 @@
             <p:ph idx="1"/>
             <p:extLst>
               <p:ext uri="{D42A27DB-BD31-4B8C-83A1-F6EECF244321}">
-                <p14:modId xmlns:p14="http://schemas.microsoft.com/office/powerpoint/2010/main" val="1022638709"/>
+                <p14:modId xmlns:p14="http://schemas.microsoft.com/office/powerpoint/2010/main" val="677499770"/>
               </p:ext>
             </p:extLst>
           </p:nvPr>
@@ -36523,6 +35960,23 @@
             </a:r>
           </a:p>
           <a:p>
+            <a:pPr marL="342900" lvl="0" indent="-342900">
+              <a:spcBef>
+                <a:spcPts val="0"/>
+              </a:spcBef>
+              <a:buClr>
+                <a:schemeClr val="dk1"/>
+              </a:buClr>
+              <a:buSzPts val="1800"/>
+              <a:buFont typeface="+mj-lt"/>
+              <a:buAutoNum type="arabicPeriod"/>
+            </a:pPr>
+            <a:r>
+              <a:rPr lang="en-US" u="sng" noProof="0" dirty="0"/>
+              <a:t>PID Control</a:t>
+            </a:r>
+          </a:p>
+          <a:p>
             <a:pPr marL="0" lvl="0" indent="0">
               <a:spcBef>
                 <a:spcPts val="0"/>
@@ -37276,8 +36730,8 @@
               </a:p>
             </p:txBody>
           </p:sp>
-          <mc:AlternateContent xmlns:mc="http://schemas.openxmlformats.org/markup-compatibility/2006" xmlns:a14="http://schemas.microsoft.com/office/drawing/2010/main">
-            <mc:Choice Requires="a14">
+          <mc:AlternateContent xmlns:mc="http://schemas.openxmlformats.org/markup-compatibility/2006">
+            <mc:Choice xmlns:a14="http://schemas.microsoft.com/office/drawing/2010/main" Requires="a14">
               <p:sp>
                 <p:nvSpPr>
                   <p:cNvPr id="22" name="Textfeld 21">
@@ -37352,7 +36806,7 @@
                 </p:txBody>
               </p:sp>
             </mc:Choice>
-            <mc:Fallback xmlns="">
+            <mc:Fallback>
               <p:sp>
                 <p:nvSpPr>
                   <p:cNvPr id="22" name="Textfeld 21">
@@ -37466,8 +36920,8 @@
               </a:p>
             </p:txBody>
           </p:sp>
-          <mc:AlternateContent xmlns:mc="http://schemas.openxmlformats.org/markup-compatibility/2006" xmlns:a14="http://schemas.microsoft.com/office/drawing/2010/main">
-            <mc:Choice Requires="a14">
+          <mc:AlternateContent xmlns:mc="http://schemas.openxmlformats.org/markup-compatibility/2006">
+            <mc:Choice xmlns:a14="http://schemas.microsoft.com/office/drawing/2010/main" Requires="a14">
               <p:sp>
                 <p:nvSpPr>
                   <p:cNvPr id="20" name="Textfeld 19">
@@ -37518,7 +36972,7 @@
                 </p:txBody>
               </p:sp>
             </mc:Choice>
-            <mc:Fallback xmlns="">
+            <mc:Fallback>
               <p:sp>
                 <p:nvSpPr>
                   <p:cNvPr id="20" name="Textfeld 19">
@@ -37653,8 +37107,8 @@
             </a:fontRef>
           </p:style>
         </p:cxnSp>
-        <mc:AlternateContent xmlns:mc="http://schemas.openxmlformats.org/markup-compatibility/2006" xmlns:a14="http://schemas.microsoft.com/office/drawing/2010/main">
-          <mc:Choice Requires="a14">
+        <mc:AlternateContent xmlns:mc="http://schemas.openxmlformats.org/markup-compatibility/2006">
+          <mc:Choice xmlns:a14="http://schemas.microsoft.com/office/drawing/2010/main" Requires="a14">
             <p:sp>
               <p:nvSpPr>
                 <p:cNvPr id="13" name="Textfeld 12">
@@ -37710,7 +37164,7 @@
               </p:txBody>
             </p:sp>
           </mc:Choice>
-          <mc:Fallback xmlns="">
+          <mc:Fallback>
             <p:sp>
               <p:nvSpPr>
                 <p:cNvPr id="13" name="Textfeld 12">
@@ -37755,8 +37209,8 @@
             </p:sp>
           </mc:Fallback>
         </mc:AlternateContent>
-        <mc:AlternateContent xmlns:mc="http://schemas.openxmlformats.org/markup-compatibility/2006" xmlns:a14="http://schemas.microsoft.com/office/drawing/2010/main">
-          <mc:Choice Requires="a14">
+        <mc:AlternateContent xmlns:mc="http://schemas.openxmlformats.org/markup-compatibility/2006">
+          <mc:Choice xmlns:a14="http://schemas.microsoft.com/office/drawing/2010/main" Requires="a14">
             <p:sp>
               <p:nvSpPr>
                 <p:cNvPr id="14" name="Textfeld 13">
@@ -37812,7 +37266,7 @@
               </p:txBody>
             </p:sp>
           </mc:Choice>
-          <mc:Fallback xmlns="">
+          <mc:Fallback>
             <p:sp>
               <p:nvSpPr>
                 <p:cNvPr id="14" name="Textfeld 13">
@@ -37944,8 +37398,8 @@
             </a:fontRef>
           </p:style>
         </p:cxnSp>
-        <mc:AlternateContent xmlns:mc="http://schemas.openxmlformats.org/markup-compatibility/2006" xmlns:a14="http://schemas.microsoft.com/office/drawing/2010/main">
-          <mc:Choice Requires="a14">
+        <mc:AlternateContent xmlns:mc="http://schemas.openxmlformats.org/markup-compatibility/2006">
+          <mc:Choice xmlns:a14="http://schemas.microsoft.com/office/drawing/2010/main" Requires="a14">
             <p:sp>
               <p:nvSpPr>
                 <p:cNvPr id="17" name="Textfeld 16">
@@ -38001,7 +37455,7 @@
               </p:txBody>
             </p:sp>
           </mc:Choice>
-          <mc:Fallback xmlns="">
+          <mc:Fallback>
             <p:sp>
               <p:nvSpPr>
                 <p:cNvPr id="17" name="Textfeld 16">
@@ -38091,8 +37545,8 @@
           </p:style>
         </p:cxnSp>
       </p:grpSp>
-      <mc:AlternateContent xmlns:mc="http://schemas.openxmlformats.org/markup-compatibility/2006" xmlns:a14="http://schemas.microsoft.com/office/drawing/2010/main">
-        <mc:Choice Requires="a14">
+      <mc:AlternateContent xmlns:mc="http://schemas.openxmlformats.org/markup-compatibility/2006">
+        <mc:Choice xmlns:a14="http://schemas.microsoft.com/office/drawing/2010/main" Requires="a14">
           <p:sp>
             <p:nvSpPr>
               <p:cNvPr id="23" name="Textfeld 22">
@@ -38142,7 +37596,7 @@
             </p:txBody>
           </p:sp>
         </mc:Choice>
-        <mc:Fallback xmlns="">
+        <mc:Fallback>
           <p:sp>
             <p:nvSpPr>
               <p:cNvPr id="23" name="Textfeld 22">
@@ -38187,8 +37641,8 @@
           </p:sp>
         </mc:Fallback>
       </mc:AlternateContent>
-      <mc:AlternateContent xmlns:mc="http://schemas.openxmlformats.org/markup-compatibility/2006" xmlns:a14="http://schemas.microsoft.com/office/drawing/2010/main">
-        <mc:Choice Requires="a14">
+      <mc:AlternateContent xmlns:mc="http://schemas.openxmlformats.org/markup-compatibility/2006">
+        <mc:Choice xmlns:a14="http://schemas.microsoft.com/office/drawing/2010/main" Requires="a14">
           <p:sp>
             <p:nvSpPr>
               <p:cNvPr id="24" name="Textfeld 23">
@@ -38238,7 +37692,7 @@
             </p:txBody>
           </p:sp>
         </mc:Choice>
-        <mc:Fallback xmlns="">
+        <mc:Fallback>
           <p:sp>
             <p:nvSpPr>
               <p:cNvPr id="24" name="Textfeld 23">
